--- a/output/doc/1软件应用与开发_1Web应用与开发_Sak-AI答题助手/01作品与答辩材料/Sak-AI答题助手-答辩演示PPT.pptx
+++ b/output/doc/1软件应用与开发_1Web应用与开发_Sak-AI答题助手/01作品与答辩材料/Sak-AI答题助手-答辩演示PPT.pptx
@@ -16,6 +16,10 @@
     <p:sldId id="264" r:id="rId15"/>
     <p:sldId id="265" r:id="rId16"/>
     <p:sldId id="266" r:id="rId17"/>
+    <p:sldId id="267" r:id="rId18"/>
+    <p:sldId id="268" r:id="rId19"/>
+    <p:sldId id="269" r:id="rId20"/>
+    <p:sldId id="270" r:id="rId21"/>
   </p:sldIdLst>
   <p:sldSz cx="12191695" cy="6858000" type="screen4x3"/>
   <p:notesSz cx="6858000" cy="9144000"/>
@@ -4827,7 +4831,7 @@
       <p:grpSpPr/>
       <p:pic>
         <p:nvPicPr>
-          <p:cNvPr id="2" name="Picture 1" descr="bg_light_2.png"/>
+          <p:cNvPr id="2" name="Picture 1" descr="bg_light.png"/>
           <p:cNvPicPr>
             <a:picLocks noChangeAspect="1"/>
           </p:cNvPicPr>
@@ -4883,7 +4887,7 @@
                 </a:solidFill>
                 <a:latin typeface="Aptos"/>
               </a:rPr>
-              <a:t>VALIDATION</a:t>
+              <a:t>IMPORT</a:t>
             </a:r>
           </a:p>
         </p:txBody>
@@ -4965,7 +4969,7 @@
                 </a:solidFill>
                 <a:latin typeface="Microsoft YaHei"/>
               </a:rPr>
-              <a:t>工程验证与答辩可演示性</a:t>
+              <a:t>个人题目导入：题目管理 + Word 工作区</a:t>
             </a:r>
           </a:p>
         </p:txBody>
@@ -5004,7 +5008,7 @@
                 </a:solidFill>
                 <a:latin typeface="Microsoft YaHei"/>
               </a:rPr>
-              <a:t>答辩现场不仅要讲清功能，还要展示项目具备稳定运行与工程交付能力。</a:t>
+              <a:t>个人题库不只是存储入口，还提供完整的题目导入与维护流程。</a:t>
             </a:r>
           </a:p>
         </p:txBody>
@@ -5017,12 +5021,12 @@
         </p:nvSpPr>
         <p:spPr>
           <a:xfrm>
-            <a:off x="658368" y="1920240"/>
-            <a:ext cx="2194560" cy="1225296"/>
+            <a:off x="658368" y="1828800"/>
+            <a:ext cx="5468112" cy="4315968"/>
           </a:xfrm>
           <a:prstGeom prst="roundRect">
             <a:avLst>
-              <a:gd name="adj" fmla="val 22000"/>
+              <a:gd name="adj" fmla="val 18000"/>
             </a:avLst>
           </a:prstGeom>
           <a:solidFill>
@@ -5058,14 +5062,188 @@
       </p:sp>
       <p:sp>
         <p:nvSpPr>
-          <p:cNvPr id="8" name="TextBox 7"/>
+          <p:cNvPr id="8" name="Rounded Rectangle 7"/>
+          <p:cNvSpPr/>
+          <p:nvPr/>
+        </p:nvSpPr>
+        <p:spPr>
+          <a:xfrm>
+            <a:off x="731520" y="1901952"/>
+            <a:ext cx="5321808" cy="237744"/>
+          </a:xfrm>
+          <a:prstGeom prst="roundRect">
+            <a:avLst>
+              <a:gd name="adj" fmla="val 30000"/>
+            </a:avLst>
+          </a:prstGeom>
+          <a:solidFill>
+            <a:srgbClr val="EEF3FB"/>
+          </a:solidFill>
+          <a:ln>
+            <a:noFill/>
+          </a:ln>
+        </p:spPr>
+        <p:style>
+          <a:lnRef idx="1">
+            <a:schemeClr val="accent1"/>
+          </a:lnRef>
+          <a:fillRef idx="3">
+            <a:schemeClr val="accent1"/>
+          </a:fillRef>
+          <a:effectRef idx="2">
+            <a:schemeClr val="accent1"/>
+          </a:effectRef>
+          <a:fontRef idx="minor">
+            <a:schemeClr val="lt1"/>
+          </a:fontRef>
+        </p:style>
+        <p:txBody>
+          <a:bodyPr rtlCol="0" anchor="ctr"/>
+          <a:lstStyle/>
+          <a:p>
+            <a:pPr algn="ctr"/>
+          </a:p>
+        </p:txBody>
+      </p:sp>
+      <p:sp>
+        <p:nvSpPr>
+          <p:cNvPr id="9" name="Oval 8"/>
+          <p:cNvSpPr/>
+          <p:nvPr/>
+        </p:nvSpPr>
+        <p:spPr>
+          <a:xfrm>
+            <a:off x="813816" y="1961388"/>
+            <a:ext cx="54864" cy="54864"/>
+          </a:xfrm>
+          <a:prstGeom prst="ellipse">
+            <a:avLst/>
+          </a:prstGeom>
+          <a:solidFill>
+            <a:srgbClr val="FF6B6B"/>
+          </a:solidFill>
+          <a:ln>
+            <a:noFill/>
+          </a:ln>
+        </p:spPr>
+        <p:style>
+          <a:lnRef idx="1">
+            <a:schemeClr val="accent1"/>
+          </a:lnRef>
+          <a:fillRef idx="3">
+            <a:schemeClr val="accent1"/>
+          </a:fillRef>
+          <a:effectRef idx="2">
+            <a:schemeClr val="accent1"/>
+          </a:effectRef>
+          <a:fontRef idx="minor">
+            <a:schemeClr val="lt1"/>
+          </a:fontRef>
+        </p:style>
+        <p:txBody>
+          <a:bodyPr rtlCol="0" anchor="ctr"/>
+          <a:lstStyle/>
+          <a:p>
+            <a:pPr algn="ctr"/>
+          </a:p>
+        </p:txBody>
+      </p:sp>
+      <p:sp>
+        <p:nvSpPr>
+          <p:cNvPr id="10" name="Oval 9"/>
+          <p:cNvSpPr/>
+          <p:nvPr/>
+        </p:nvSpPr>
+        <p:spPr>
+          <a:xfrm>
+            <a:off x="923544" y="1961388"/>
+            <a:ext cx="54864" cy="54864"/>
+          </a:xfrm>
+          <a:prstGeom prst="ellipse">
+            <a:avLst/>
+          </a:prstGeom>
+          <a:solidFill>
+            <a:srgbClr val="F7B955"/>
+          </a:solidFill>
+          <a:ln>
+            <a:noFill/>
+          </a:ln>
+        </p:spPr>
+        <p:style>
+          <a:lnRef idx="1">
+            <a:schemeClr val="accent1"/>
+          </a:lnRef>
+          <a:fillRef idx="3">
+            <a:schemeClr val="accent1"/>
+          </a:fillRef>
+          <a:effectRef idx="2">
+            <a:schemeClr val="accent1"/>
+          </a:effectRef>
+          <a:fontRef idx="minor">
+            <a:schemeClr val="lt1"/>
+          </a:fontRef>
+        </p:style>
+        <p:txBody>
+          <a:bodyPr rtlCol="0" anchor="ctr"/>
+          <a:lstStyle/>
+          <a:p>
+            <a:pPr algn="ctr"/>
+          </a:p>
+        </p:txBody>
+      </p:sp>
+      <p:sp>
+        <p:nvSpPr>
+          <p:cNvPr id="11" name="Oval 10"/>
+          <p:cNvSpPr/>
+          <p:nvPr/>
+        </p:nvSpPr>
+        <p:spPr>
+          <a:xfrm>
+            <a:off x="1033272" y="1961388"/>
+            <a:ext cx="54864" cy="54864"/>
+          </a:xfrm>
+          <a:prstGeom prst="ellipse">
+            <a:avLst/>
+          </a:prstGeom>
+          <a:solidFill>
+            <a:srgbClr val="34C759"/>
+          </a:solidFill>
+          <a:ln>
+            <a:noFill/>
+          </a:ln>
+        </p:spPr>
+        <p:style>
+          <a:lnRef idx="1">
+            <a:schemeClr val="accent1"/>
+          </a:lnRef>
+          <a:fillRef idx="3">
+            <a:schemeClr val="accent1"/>
+          </a:fillRef>
+          <a:effectRef idx="2">
+            <a:schemeClr val="accent1"/>
+          </a:effectRef>
+          <a:fontRef idx="minor">
+            <a:schemeClr val="lt1"/>
+          </a:fontRef>
+        </p:style>
+        <p:txBody>
+          <a:bodyPr rtlCol="0" anchor="ctr"/>
+          <a:lstStyle/>
+          <a:p>
+            <a:pPr algn="ctr"/>
+          </a:p>
+        </p:txBody>
+      </p:sp>
+      <p:sp>
+        <p:nvSpPr>
+          <p:cNvPr id="12" name="TextBox 11"/>
           <p:cNvSpPr txBox="1"/>
           <p:nvPr/>
         </p:nvSpPr>
         <p:spPr>
           <a:xfrm>
-            <a:off x="886968" y="2057400"/>
-            <a:ext cx="1737360" cy="438912"/>
+            <a:off x="1188720" y="1920240"/>
+            <a:ext cx="4718304" cy="164592"/>
           </a:xfrm>
           <a:prstGeom prst="rect">
             <a:avLst/>
@@ -5084,109 +5262,55 @@
               </a:lnSpc>
             </a:pPr>
             <a:r>
-              <a:rPr sz="2400" b="1" i="0">
-                <a:solidFill>
-                  <a:srgbClr val="4F6EF7"/>
-                </a:solidFill>
-                <a:latin typeface="Aptos"/>
-              </a:rPr>
-              <a:t>8000</a:t>
-            </a:r>
-          </a:p>
-        </p:txBody>
-      </p:sp>
-      <p:sp>
-        <p:nvSpPr>
-          <p:cNvPr id="9" name="TextBox 8"/>
-          <p:cNvSpPr txBox="1"/>
-          <p:nvPr/>
-        </p:nvSpPr>
-        <p:spPr>
-          <a:xfrm>
-            <a:off x="886968" y="2487168"/>
-            <a:ext cx="1737360" cy="310896"/>
-          </a:xfrm>
-          <a:prstGeom prst="rect">
-            <a:avLst/>
-          </a:prstGeom>
-          <a:noFill/>
-        </p:spPr>
-        <p:txBody>
-          <a:bodyPr wrap="square" lIns="0" rIns="0" tIns="0" bIns="0" anchor="t">
-            <a:spAutoFit/>
-          </a:bodyPr>
-          <a:lstStyle/>
-          <a:p>
-            <a:pPr algn="l">
-              <a:lnSpc>
-                <a:spcPct val="115000"/>
-              </a:lnSpc>
-            </a:pPr>
-            <a:r>
-              <a:rPr sz="1250" b="1" i="0">
-                <a:solidFill>
-                  <a:srgbClr val="17324D"/>
+              <a:rPr sz="1000" b="1" i="0">
+                <a:solidFill>
+                  <a:srgbClr val="62748A"/>
                 </a:solidFill>
                 <a:latin typeface="Microsoft YaHei"/>
               </a:rPr>
-              <a:t>Web 暴露端口</a:t>
-            </a:r>
-          </a:p>
-        </p:txBody>
-      </p:sp>
-      <p:sp>
-        <p:nvSpPr>
-          <p:cNvPr id="10" name="TextBox 9"/>
-          <p:cNvSpPr txBox="1"/>
-          <p:nvPr/>
-        </p:nvSpPr>
-        <p:spPr>
-          <a:xfrm>
-            <a:off x="886968" y="2788920"/>
-            <a:ext cx="1737360" cy="256032"/>
-          </a:xfrm>
-          <a:prstGeom prst="rect">
-            <a:avLst/>
-          </a:prstGeom>
-          <a:noFill/>
-        </p:spPr>
-        <p:txBody>
-          <a:bodyPr wrap="square" lIns="0" rIns="0" tIns="0" bIns="0" anchor="t">
-            <a:spAutoFit/>
-          </a:bodyPr>
-          <a:lstStyle/>
-          <a:p>
-            <a:pPr algn="l">
-              <a:lnSpc>
-                <a:spcPct val="115000"/>
-              </a:lnSpc>
-            </a:pPr>
-            <a:r>
-              <a:rPr sz="1050" b="0" i="0">
-                <a:solidFill>
-                  <a:srgbClr val="62748A"/>
-                </a:solidFill>
-                <a:latin typeface="Microsoft YaHei"/>
-              </a:rPr>
-              <a:t>compose.dev.yml：flask run --reload</a:t>
-            </a:r>
-          </a:p>
-        </p:txBody>
-      </p:sp>
-      <p:sp>
-        <p:nvSpPr>
-          <p:cNvPr id="11" name="Rounded Rectangle 10"/>
+              <a:t>个人题目管理</a:t>
+            </a:r>
+          </a:p>
+        </p:txBody>
+      </p:sp>
+      <p:pic>
+        <p:nvPicPr>
+          <p:cNvPr id="13" name="Picture 12" descr="个人题目管理-870x621.png"/>
+          <p:cNvPicPr>
+            <a:picLocks noChangeAspect="1"/>
+          </p:cNvPicPr>
+          <p:nvPr/>
+        </p:nvPicPr>
+        <p:blipFill>
+          <a:blip r:embed="rId3"/>
+          <a:stretch>
+            <a:fillRect/>
+          </a:stretch>
+        </p:blipFill>
+        <p:spPr>
+          <a:xfrm>
+            <a:off x="740664" y="2194560"/>
+            <a:ext cx="5303520" cy="3858768"/>
+          </a:xfrm>
+          <a:prstGeom prst="rect">
+            <a:avLst/>
+          </a:prstGeom>
+        </p:spPr>
+      </p:pic>
+      <p:sp>
+        <p:nvSpPr>
+          <p:cNvPr id="14" name="Rounded Rectangle 13"/>
           <p:cNvSpPr/>
           <p:nvPr/>
         </p:nvSpPr>
         <p:spPr>
           <a:xfrm>
-            <a:off x="3072384" y="1920240"/>
-            <a:ext cx="2194560" cy="1225296"/>
+            <a:off x="6345936" y="1828800"/>
+            <a:ext cx="5212080" cy="4315968"/>
           </a:xfrm>
           <a:prstGeom prst="roundRect">
             <a:avLst>
-              <a:gd name="adj" fmla="val 22000"/>
+              <a:gd name="adj" fmla="val 18000"/>
             </a:avLst>
           </a:prstGeom>
           <a:solidFill>
@@ -5222,144 +5346,25 @@
       </p:sp>
       <p:sp>
         <p:nvSpPr>
-          <p:cNvPr id="12" name="TextBox 11"/>
-          <p:cNvSpPr txBox="1"/>
-          <p:nvPr/>
-        </p:nvSpPr>
-        <p:spPr>
-          <a:xfrm>
-            <a:off x="3300984" y="2057400"/>
-            <a:ext cx="1737360" cy="438912"/>
-          </a:xfrm>
-          <a:prstGeom prst="rect">
-            <a:avLst/>
-          </a:prstGeom>
-          <a:noFill/>
-        </p:spPr>
-        <p:txBody>
-          <a:bodyPr wrap="square" lIns="0" rIns="0" tIns="0" bIns="0" anchor="t">
-            <a:spAutoFit/>
-          </a:bodyPr>
-          <a:lstStyle/>
-          <a:p>
-            <a:pPr algn="l">
-              <a:lnSpc>
-                <a:spcPct val="115000"/>
-              </a:lnSpc>
-            </a:pPr>
-            <a:r>
-              <a:rPr sz="2400" b="1" i="0">
-                <a:solidFill>
-                  <a:srgbClr val="5BC0BE"/>
-                </a:solidFill>
-                <a:latin typeface="Aptos"/>
-              </a:rPr>
-              <a:t>/api/ping</a:t>
-            </a:r>
-          </a:p>
-        </p:txBody>
-      </p:sp>
-      <p:sp>
-        <p:nvSpPr>
-          <p:cNvPr id="13" name="TextBox 12"/>
-          <p:cNvSpPr txBox="1"/>
-          <p:nvPr/>
-        </p:nvSpPr>
-        <p:spPr>
-          <a:xfrm>
-            <a:off x="3300984" y="2487168"/>
-            <a:ext cx="1737360" cy="310896"/>
-          </a:xfrm>
-          <a:prstGeom prst="rect">
-            <a:avLst/>
-          </a:prstGeom>
-          <a:noFill/>
-        </p:spPr>
-        <p:txBody>
-          <a:bodyPr wrap="square" lIns="0" rIns="0" tIns="0" bIns="0" anchor="t">
-            <a:spAutoFit/>
-          </a:bodyPr>
-          <a:lstStyle/>
-          <a:p>
-            <a:pPr algn="l">
-              <a:lnSpc>
-                <a:spcPct val="115000"/>
-              </a:lnSpc>
-            </a:pPr>
-            <a:r>
-              <a:rPr sz="1250" b="1" i="0">
-                <a:solidFill>
-                  <a:srgbClr val="17324D"/>
-                </a:solidFill>
-                <a:latin typeface="Microsoft YaHei"/>
-              </a:rPr>
-              <a:t>健康检查</a:t>
-            </a:r>
-          </a:p>
-        </p:txBody>
-      </p:sp>
-      <p:sp>
-        <p:nvSpPr>
-          <p:cNvPr id="14" name="TextBox 13"/>
-          <p:cNvSpPr txBox="1"/>
-          <p:nvPr/>
-        </p:nvSpPr>
-        <p:spPr>
-          <a:xfrm>
-            <a:off x="3300984" y="2788920"/>
-            <a:ext cx="1737360" cy="256032"/>
-          </a:xfrm>
-          <a:prstGeom prst="rect">
-            <a:avLst/>
-          </a:prstGeom>
-          <a:noFill/>
-        </p:spPr>
-        <p:txBody>
-          <a:bodyPr wrap="square" lIns="0" rIns="0" tIns="0" bIns="0" anchor="t">
-            <a:spAutoFit/>
-          </a:bodyPr>
-          <a:lstStyle/>
-          <a:p>
-            <a:pPr algn="l">
-              <a:lnSpc>
-                <a:spcPct val="115000"/>
-              </a:lnSpc>
-            </a:pPr>
-            <a:r>
-              <a:rPr sz="1050" b="0" i="0">
-                <a:solidFill>
-                  <a:srgbClr val="62748A"/>
-                </a:solidFill>
-                <a:latin typeface="Microsoft YaHei"/>
-              </a:rPr>
-              <a:t>支持基础与 deep=1 检查</a:t>
-            </a:r>
-          </a:p>
-        </p:txBody>
-      </p:sp>
-      <p:sp>
-        <p:nvSpPr>
           <p:cNvPr id="15" name="Rounded Rectangle 14"/>
           <p:cNvSpPr/>
           <p:nvPr/>
         </p:nvSpPr>
         <p:spPr>
           <a:xfrm>
-            <a:off x="5486400" y="1920240"/>
-            <a:ext cx="2194560" cy="1225296"/>
+            <a:off x="6419088" y="1901952"/>
+            <a:ext cx="5065776" cy="237744"/>
           </a:xfrm>
           <a:prstGeom prst="roundRect">
             <a:avLst>
-              <a:gd name="adj" fmla="val 22000"/>
+              <a:gd name="adj" fmla="val 30000"/>
             </a:avLst>
           </a:prstGeom>
           <a:solidFill>
-            <a:srgbClr val="FFFFFF"/>
+            <a:srgbClr val="EEF3FB"/>
           </a:solidFill>
-          <a:ln w="15240">
-            <a:solidFill>
-              <a:srgbClr val="D9E2EF"/>
-            </a:solidFill>
+          <a:ln>
+            <a:noFill/>
           </a:ln>
         </p:spPr>
         <p:style>
@@ -5386,144 +5391,23 @@
       </p:sp>
       <p:sp>
         <p:nvSpPr>
-          <p:cNvPr id="16" name="TextBox 15"/>
-          <p:cNvSpPr txBox="1"/>
-          <p:nvPr/>
-        </p:nvSpPr>
-        <p:spPr>
-          <a:xfrm>
-            <a:off x="5715000" y="2057400"/>
-            <a:ext cx="1737360" cy="438912"/>
-          </a:xfrm>
-          <a:prstGeom prst="rect">
-            <a:avLst/>
-          </a:prstGeom>
-          <a:noFill/>
-        </p:spPr>
-        <p:txBody>
-          <a:bodyPr wrap="square" lIns="0" rIns="0" tIns="0" bIns="0" anchor="t">
-            <a:spAutoFit/>
-          </a:bodyPr>
-          <a:lstStyle/>
-          <a:p>
-            <a:pPr algn="l">
-              <a:lnSpc>
-                <a:spcPct val="115000"/>
-              </a:lnSpc>
-            </a:pPr>
-            <a:r>
-              <a:rPr sz="2400" b="1" i="0">
-                <a:solidFill>
-                  <a:srgbClr val="D6B36A"/>
-                </a:solidFill>
-                <a:latin typeface="Aptos"/>
-              </a:rPr>
-              <a:t>PostgreSQL 16</a:t>
-            </a:r>
-          </a:p>
-        </p:txBody>
-      </p:sp>
-      <p:sp>
-        <p:nvSpPr>
-          <p:cNvPr id="17" name="TextBox 16"/>
-          <p:cNvSpPr txBox="1"/>
-          <p:nvPr/>
-        </p:nvSpPr>
-        <p:spPr>
-          <a:xfrm>
-            <a:off x="5715000" y="2487168"/>
-            <a:ext cx="1737360" cy="310896"/>
-          </a:xfrm>
-          <a:prstGeom prst="rect">
-            <a:avLst/>
-          </a:prstGeom>
-          <a:noFill/>
-        </p:spPr>
-        <p:txBody>
-          <a:bodyPr wrap="square" lIns="0" rIns="0" tIns="0" bIns="0" anchor="t">
-            <a:spAutoFit/>
-          </a:bodyPr>
-          <a:lstStyle/>
-          <a:p>
-            <a:pPr algn="l">
-              <a:lnSpc>
-                <a:spcPct val="115000"/>
-              </a:lnSpc>
-            </a:pPr>
-            <a:r>
-              <a:rPr sz="1250" b="1" i="0">
-                <a:solidFill>
-                  <a:srgbClr val="17324D"/>
-                </a:solidFill>
-                <a:latin typeface="Microsoft YaHei"/>
-              </a:rPr>
-              <a:t>开发默认数据库</a:t>
-            </a:r>
-          </a:p>
-        </p:txBody>
-      </p:sp>
-      <p:sp>
-        <p:nvSpPr>
-          <p:cNvPr id="18" name="TextBox 17"/>
-          <p:cNvSpPr txBox="1"/>
-          <p:nvPr/>
-        </p:nvSpPr>
-        <p:spPr>
-          <a:xfrm>
-            <a:off x="5715000" y="2788920"/>
-            <a:ext cx="1737360" cy="256032"/>
-          </a:xfrm>
-          <a:prstGeom prst="rect">
-            <a:avLst/>
-          </a:prstGeom>
-          <a:noFill/>
-        </p:spPr>
-        <p:txBody>
-          <a:bodyPr wrap="square" lIns="0" rIns="0" tIns="0" bIns="0" anchor="t">
-            <a:spAutoFit/>
-          </a:bodyPr>
-          <a:lstStyle/>
-          <a:p>
-            <a:pPr algn="l">
-              <a:lnSpc>
-                <a:spcPct val="115000"/>
-              </a:lnSpc>
-            </a:pPr>
-            <a:r>
-              <a:rPr sz="1050" b="0" i="0">
-                <a:solidFill>
-                  <a:srgbClr val="62748A"/>
-                </a:solidFill>
-                <a:latin typeface="Microsoft YaHei"/>
-              </a:rPr>
-              <a:t>Redis + RQ 协同运行</a:t>
-            </a:r>
-          </a:p>
-        </p:txBody>
-      </p:sp>
-      <p:sp>
-        <p:nvSpPr>
-          <p:cNvPr id="19" name="Rounded Rectangle 18"/>
+          <p:cNvPr id="16" name="Oval 15"/>
           <p:cNvSpPr/>
           <p:nvPr/>
         </p:nvSpPr>
         <p:spPr>
           <a:xfrm>
-            <a:off x="7900416" y="1920240"/>
-            <a:ext cx="2743200" cy="1225296"/>
-          </a:xfrm>
-          <a:prstGeom prst="roundRect">
-            <a:avLst>
-              <a:gd name="adj" fmla="val 22000"/>
-            </a:avLst>
+            <a:off x="6501384" y="1961388"/>
+            <a:ext cx="54864" cy="54864"/>
+          </a:xfrm>
+          <a:prstGeom prst="ellipse">
+            <a:avLst/>
           </a:prstGeom>
           <a:solidFill>
-            <a:srgbClr val="FFFFFF"/>
+            <a:srgbClr val="FF6B6B"/>
           </a:solidFill>
-          <a:ln w="15240">
-            <a:solidFill>
-              <a:srgbClr val="D9E2EF"/>
-            </a:solidFill>
+          <a:ln>
+            <a:noFill/>
           </a:ln>
         </p:spPr>
         <p:style>
@@ -5550,144 +5434,23 @@
       </p:sp>
       <p:sp>
         <p:nvSpPr>
-          <p:cNvPr id="20" name="TextBox 19"/>
-          <p:cNvSpPr txBox="1"/>
-          <p:nvPr/>
-        </p:nvSpPr>
-        <p:spPr>
-          <a:xfrm>
-            <a:off x="8129016" y="2057400"/>
-            <a:ext cx="2286000" cy="438912"/>
-          </a:xfrm>
-          <a:prstGeom prst="rect">
-            <a:avLst/>
-          </a:prstGeom>
-          <a:noFill/>
-        </p:spPr>
-        <p:txBody>
-          <a:bodyPr wrap="square" lIns="0" rIns="0" tIns="0" bIns="0" anchor="t">
-            <a:spAutoFit/>
-          </a:bodyPr>
-          <a:lstStyle/>
-          <a:p>
-            <a:pPr algn="l">
-              <a:lnSpc>
-                <a:spcPct val="115000"/>
-              </a:lnSpc>
-            </a:pPr>
-            <a:r>
-              <a:rPr sz="2400" b="1" i="0">
-                <a:solidFill>
-                  <a:srgbClr val="4F6EF7"/>
-                </a:solidFill>
-                <a:latin typeface="Aptos"/>
-              </a:rPr>
-              <a:t>5 项服务</a:t>
-            </a:r>
-          </a:p>
-        </p:txBody>
-      </p:sp>
-      <p:sp>
-        <p:nvSpPr>
-          <p:cNvPr id="21" name="TextBox 20"/>
-          <p:cNvSpPr txBox="1"/>
-          <p:nvPr/>
-        </p:nvSpPr>
-        <p:spPr>
-          <a:xfrm>
-            <a:off x="8129016" y="2487168"/>
-            <a:ext cx="2286000" cy="310896"/>
-          </a:xfrm>
-          <a:prstGeom prst="rect">
-            <a:avLst/>
-          </a:prstGeom>
-          <a:noFill/>
-        </p:spPr>
-        <p:txBody>
-          <a:bodyPr wrap="square" lIns="0" rIns="0" tIns="0" bIns="0" anchor="t">
-            <a:spAutoFit/>
-          </a:bodyPr>
-          <a:lstStyle/>
-          <a:p>
-            <a:pPr algn="l">
-              <a:lnSpc>
-                <a:spcPct val="115000"/>
-              </a:lnSpc>
-            </a:pPr>
-            <a:r>
-              <a:rPr sz="1250" b="1" i="0">
-                <a:solidFill>
-                  <a:srgbClr val="17324D"/>
-                </a:solidFill>
-                <a:latin typeface="Microsoft YaHei"/>
-              </a:rPr>
-              <a:t>容器编排</a:t>
-            </a:r>
-          </a:p>
-        </p:txBody>
-      </p:sp>
-      <p:sp>
-        <p:nvSpPr>
-          <p:cNvPr id="22" name="TextBox 21"/>
-          <p:cNvSpPr txBox="1"/>
-          <p:nvPr/>
-        </p:nvSpPr>
-        <p:spPr>
-          <a:xfrm>
-            <a:off x="8129016" y="2788920"/>
-            <a:ext cx="2286000" cy="256032"/>
-          </a:xfrm>
-          <a:prstGeom prst="rect">
-            <a:avLst/>
-          </a:prstGeom>
-          <a:noFill/>
-        </p:spPr>
-        <p:txBody>
-          <a:bodyPr wrap="square" lIns="0" rIns="0" tIns="0" bIns="0" anchor="t">
-            <a:spAutoFit/>
-          </a:bodyPr>
-          <a:lstStyle/>
-          <a:p>
-            <a:pPr algn="l">
-              <a:lnSpc>
-                <a:spcPct val="115000"/>
-              </a:lnSpc>
-            </a:pPr>
-            <a:r>
-              <a:rPr sz="1050" b="0" i="0">
-                <a:solidFill>
-                  <a:srgbClr val="62748A"/>
-                </a:solidFill>
-                <a:latin typeface="Microsoft YaHei"/>
-              </a:rPr>
-              <a:t>web / worker / postgres / redis / backup</a:t>
-            </a:r>
-          </a:p>
-        </p:txBody>
-      </p:sp>
-      <p:sp>
-        <p:nvSpPr>
-          <p:cNvPr id="23" name="Rounded Rectangle 22"/>
+          <p:cNvPr id="17" name="Oval 16"/>
           <p:cNvSpPr/>
           <p:nvPr/>
         </p:nvSpPr>
         <p:spPr>
           <a:xfrm>
-            <a:off x="658368" y="3493008"/>
-            <a:ext cx="5257800" cy="2651760"/>
-          </a:xfrm>
-          <a:prstGeom prst="roundRect">
-            <a:avLst>
-              <a:gd name="adj" fmla="val 18000"/>
-            </a:avLst>
+            <a:off x="6611112" y="1961388"/>
+            <a:ext cx="54864" cy="54864"/>
+          </a:xfrm>
+          <a:prstGeom prst="ellipse">
+            <a:avLst/>
           </a:prstGeom>
           <a:solidFill>
-            <a:srgbClr val="FFFFFF"/>
+            <a:srgbClr val="F7B955"/>
           </a:solidFill>
-          <a:ln w="15240">
-            <a:solidFill>
-              <a:srgbClr val="D9E2EF"/>
-            </a:solidFill>
+          <a:ln>
+            <a:noFill/>
           </a:ln>
         </p:spPr>
         <p:style>
@@ -5714,27 +5477,23 @@
       </p:sp>
       <p:sp>
         <p:nvSpPr>
-          <p:cNvPr id="24" name="Rounded Rectangle 23"/>
+          <p:cNvPr id="18" name="Oval 17"/>
           <p:cNvSpPr/>
           <p:nvPr/>
         </p:nvSpPr>
         <p:spPr>
           <a:xfrm>
-            <a:off x="932688" y="3730752"/>
-            <a:ext cx="1143000" cy="292608"/>
-          </a:xfrm>
-          <a:prstGeom prst="roundRect">
-            <a:avLst>
-              <a:gd name="adj" fmla="val 35000"/>
-            </a:avLst>
+            <a:off x="6720840" y="1961388"/>
+            <a:ext cx="54864" cy="54864"/>
+          </a:xfrm>
+          <a:prstGeom prst="ellipse">
+            <a:avLst/>
           </a:prstGeom>
           <a:solidFill>
-            <a:srgbClr val="EEF4FF"/>
+            <a:srgbClr val="34C759"/>
           </a:solidFill>
-          <a:ln w="12700">
-            <a:solidFill>
-              <a:srgbClr val="D7E2F2"/>
-            </a:solidFill>
+          <a:ln>
+            <a:noFill/>
           </a:ln>
         </p:spPr>
         <p:style>
@@ -5761,14 +5520,14 @@
       </p:sp>
       <p:sp>
         <p:nvSpPr>
-          <p:cNvPr id="25" name="TextBox 24"/>
+          <p:cNvPr id="19" name="TextBox 18"/>
           <p:cNvSpPr txBox="1"/>
           <p:nvPr/>
         </p:nvSpPr>
         <p:spPr>
           <a:xfrm>
-            <a:off x="1042416" y="3785616"/>
-            <a:ext cx="923544" cy="182880"/>
+            <a:off x="6876288" y="1920240"/>
+            <a:ext cx="4462272" cy="164592"/>
           </a:xfrm>
           <a:prstGeom prst="rect">
             <a:avLst/>
@@ -5781,33 +5540,57 @@
           </a:bodyPr>
           <a:lstStyle/>
           <a:p>
-            <a:pPr algn="ctr">
-              <a:lnSpc>
-                <a:spcPct val="115000"/>
-              </a:lnSpc>
-            </a:pPr>
-            <a:r>
-              <a:rPr sz="1250" b="1" i="0">
-                <a:solidFill>
-                  <a:srgbClr val="4F6EF7"/>
+            <a:pPr algn="l">
+              <a:lnSpc>
+                <a:spcPct val="115000"/>
+              </a:lnSpc>
+            </a:pPr>
+            <a:r>
+              <a:rPr sz="1000" b="1" i="0">
+                <a:solidFill>
+                  <a:srgbClr val="62748A"/>
                 </a:solidFill>
                 <a:latin typeface="Microsoft YaHei"/>
               </a:rPr>
-              <a:t>推荐演示顺序</a:t>
-            </a:r>
-          </a:p>
-        </p:txBody>
-      </p:sp>
-      <p:sp>
-        <p:nvSpPr>
-          <p:cNvPr id="26" name="TextBox 25"/>
+              <a:t>Word 导入工作区</a:t>
+            </a:r>
+          </a:p>
+        </p:txBody>
+      </p:sp>
+      <p:pic>
+        <p:nvPicPr>
+          <p:cNvPr id="20" name="Picture 19" descr="Word 导入工作区-828x621.png"/>
+          <p:cNvPicPr>
+            <a:picLocks noChangeAspect="1"/>
+          </p:cNvPicPr>
+          <p:nvPr/>
+        </p:nvPicPr>
+        <p:blipFill>
+          <a:blip r:embed="rId4"/>
+          <a:stretch>
+            <a:fillRect/>
+          </a:stretch>
+        </p:blipFill>
+        <p:spPr>
+          <a:xfrm>
+            <a:off x="6428232" y="2194560"/>
+            <a:ext cx="5047488" cy="3858768"/>
+          </a:xfrm>
+          <a:prstGeom prst="rect">
+            <a:avLst/>
+          </a:prstGeom>
+        </p:spPr>
+      </p:pic>
+      <p:sp>
+        <p:nvSpPr>
+          <p:cNvPr id="21" name="TextBox 20"/>
           <p:cNvSpPr txBox="1"/>
           <p:nvPr/>
         </p:nvSpPr>
         <p:spPr>
           <a:xfrm>
-            <a:off x="932688" y="4151376"/>
-            <a:ext cx="4526280" cy="1664208"/>
+            <a:off x="658368" y="6473952"/>
+            <a:ext cx="2926080" cy="182880"/>
           </a:xfrm>
           <a:prstGeom prst="rect">
             <a:avLst/>
@@ -5824,339 +5607,6 @@
               <a:lnSpc>
                 <a:spcPct val="115000"/>
               </a:lnSpc>
-              <a:spcBef>
-                <a:spcPts val="0"/>
-              </a:spcBef>
-              <a:spcAft>
-                <a:spcPts val="400"/>
-              </a:spcAft>
-            </a:pPr>
-            <a:r>
-              <a:rPr sz="1600" b="1" i="0">
-                <a:solidFill>
-                  <a:srgbClr val="102A43"/>
-                </a:solidFill>
-                <a:latin typeface="Microsoft YaHei"/>
-              </a:rPr>
-              <a:t>首页 → 题库广场 → 题库详情 → 我的题库 → 数据中心 → 考试中心 → 论坛 → 后台</a:t>
-            </a:r>
-          </a:p>
-          <a:p>
-            <a:pPr algn="l">
-              <a:lnSpc>
-                <a:spcPct val="115000"/>
-              </a:lnSpc>
-              <a:spcBef>
-                <a:spcPts val="0"/>
-              </a:spcBef>
-              <a:spcAft>
-                <a:spcPts val="400"/>
-              </a:spcAft>
-            </a:pPr>
-            <a:r>
-              <a:rPr sz="1260" b="0" i="0">
-                <a:solidFill>
-                  <a:srgbClr val="17324D"/>
-                </a:solidFill>
-                <a:latin typeface="Microsoft YaHei"/>
-              </a:rPr>
-              <a:t>正式访问地址：https://saksk.top</a:t>
-            </a:r>
-          </a:p>
-          <a:p>
-            <a:pPr algn="l">
-              <a:lnSpc>
-                <a:spcPct val="115000"/>
-              </a:lnSpc>
-              <a:spcBef>
-                <a:spcPts val="0"/>
-              </a:spcBef>
-              <a:spcAft>
-                <a:spcPts val="400"/>
-              </a:spcAft>
-            </a:pPr>
-            <a:r>
-              <a:rPr sz="1260" b="0" i="0">
-                <a:solidFill>
-                  <a:srgbClr val="17324D"/>
-                </a:solidFill>
-                <a:latin typeface="Microsoft YaHei"/>
-              </a:rPr>
-              <a:t>本地演示备用：http://127.0.0.1:8000</a:t>
-            </a:r>
-          </a:p>
-        </p:txBody>
-      </p:sp>
-      <p:sp>
-        <p:nvSpPr>
-          <p:cNvPr id="27" name="Rounded Rectangle 26"/>
-          <p:cNvSpPr/>
-          <p:nvPr/>
-        </p:nvSpPr>
-        <p:spPr>
-          <a:xfrm>
-            <a:off x="6144768" y="3493008"/>
-            <a:ext cx="5394960" cy="2651760"/>
-          </a:xfrm>
-          <a:prstGeom prst="roundRect">
-            <a:avLst>
-              <a:gd name="adj" fmla="val 18000"/>
-            </a:avLst>
-          </a:prstGeom>
-          <a:solidFill>
-            <a:srgbClr val="FFFFFF"/>
-          </a:solidFill>
-          <a:ln w="15240">
-            <a:solidFill>
-              <a:srgbClr val="D9E2EF"/>
-            </a:solidFill>
-          </a:ln>
-        </p:spPr>
-        <p:style>
-          <a:lnRef idx="1">
-            <a:schemeClr val="accent1"/>
-          </a:lnRef>
-          <a:fillRef idx="3">
-            <a:schemeClr val="accent1"/>
-          </a:fillRef>
-          <a:effectRef idx="2">
-            <a:schemeClr val="accent1"/>
-          </a:effectRef>
-          <a:fontRef idx="minor">
-            <a:schemeClr val="lt1"/>
-          </a:fontRef>
-        </p:style>
-        <p:txBody>
-          <a:bodyPr rtlCol="0" anchor="ctr"/>
-          <a:lstStyle/>
-          <a:p>
-            <a:pPr algn="ctr"/>
-          </a:p>
-        </p:txBody>
-      </p:sp>
-      <p:sp>
-        <p:nvSpPr>
-          <p:cNvPr id="28" name="Rounded Rectangle 27"/>
-          <p:cNvSpPr/>
-          <p:nvPr/>
-        </p:nvSpPr>
-        <p:spPr>
-          <a:xfrm>
-            <a:off x="6419088" y="3730752"/>
-            <a:ext cx="1143000" cy="292608"/>
-          </a:xfrm>
-          <a:prstGeom prst="roundRect">
-            <a:avLst>
-              <a:gd name="adj" fmla="val 35000"/>
-            </a:avLst>
-          </a:prstGeom>
-          <a:solidFill>
-            <a:srgbClr val="EEF9F6"/>
-          </a:solidFill>
-          <a:ln w="12700">
-            <a:solidFill>
-              <a:srgbClr val="CFEDE8"/>
-            </a:solidFill>
-          </a:ln>
-        </p:spPr>
-        <p:style>
-          <a:lnRef idx="1">
-            <a:schemeClr val="accent1"/>
-          </a:lnRef>
-          <a:fillRef idx="3">
-            <a:schemeClr val="accent1"/>
-          </a:fillRef>
-          <a:effectRef idx="2">
-            <a:schemeClr val="accent1"/>
-          </a:effectRef>
-          <a:fontRef idx="minor">
-            <a:schemeClr val="lt1"/>
-          </a:fontRef>
-        </p:style>
-        <p:txBody>
-          <a:bodyPr rtlCol="0" anchor="ctr"/>
-          <a:lstStyle/>
-          <a:p>
-            <a:pPr algn="ctr"/>
-          </a:p>
-        </p:txBody>
-      </p:sp>
-      <p:sp>
-        <p:nvSpPr>
-          <p:cNvPr id="29" name="TextBox 28"/>
-          <p:cNvSpPr txBox="1"/>
-          <p:nvPr/>
-        </p:nvSpPr>
-        <p:spPr>
-          <a:xfrm>
-            <a:off x="6528816" y="3785616"/>
-            <a:ext cx="923544" cy="182880"/>
-          </a:xfrm>
-          <a:prstGeom prst="rect">
-            <a:avLst/>
-          </a:prstGeom>
-          <a:noFill/>
-        </p:spPr>
-        <p:txBody>
-          <a:bodyPr wrap="square" lIns="0" rIns="0" tIns="0" bIns="0" anchor="t">
-            <a:spAutoFit/>
-          </a:bodyPr>
-          <a:lstStyle/>
-          <a:p>
-            <a:pPr algn="ctr">
-              <a:lnSpc>
-                <a:spcPct val="115000"/>
-              </a:lnSpc>
-            </a:pPr>
-            <a:r>
-              <a:rPr sz="1250" b="1" i="0">
-                <a:solidFill>
-                  <a:srgbClr val="34A58D"/>
-                </a:solidFill>
-                <a:latin typeface="Microsoft YaHei"/>
-              </a:rPr>
-              <a:t>工程事实</a:t>
-            </a:r>
-          </a:p>
-        </p:txBody>
-      </p:sp>
-      <p:sp>
-        <p:nvSpPr>
-          <p:cNvPr id="30" name="TextBox 29"/>
-          <p:cNvSpPr txBox="1"/>
-          <p:nvPr/>
-        </p:nvSpPr>
-        <p:spPr>
-          <a:xfrm>
-            <a:off x="6419088" y="4114800"/>
-            <a:ext cx="4572000" cy="1737360"/>
-          </a:xfrm>
-          <a:prstGeom prst="rect">
-            <a:avLst/>
-          </a:prstGeom>
-          <a:noFill/>
-        </p:spPr>
-        <p:txBody>
-          <a:bodyPr wrap="square" lIns="0" rIns="0" tIns="0" bIns="0" anchor="t">
-            <a:spAutoFit/>
-          </a:bodyPr>
-          <a:lstStyle/>
-          <a:p>
-            <a:pPr algn="l">
-              <a:lnSpc>
-                <a:spcPct val="115000"/>
-              </a:lnSpc>
-              <a:spcBef>
-                <a:spcPts val="0"/>
-              </a:spcBef>
-              <a:spcAft>
-                <a:spcPts val="400"/>
-              </a:spcAft>
-            </a:pPr>
-            <a:r>
-              <a:rPr sz="1300" b="0" i="0">
-                <a:solidFill>
-                  <a:srgbClr val="17324D"/>
-                </a:solidFill>
-                <a:latin typeface="Microsoft YaHei"/>
-              </a:rPr>
-              <a:t>• Web 是主体交互端，采用 Flask + Jinja SSR。</a:t>
-            </a:r>
-          </a:p>
-          <a:p>
-            <a:pPr algn="l">
-              <a:lnSpc>
-                <a:spcPct val="115000"/>
-              </a:lnSpc>
-              <a:spcBef>
-                <a:spcPts val="0"/>
-              </a:spcBef>
-              <a:spcAft>
-                <a:spcPts val="400"/>
-              </a:spcAft>
-            </a:pPr>
-            <a:r>
-              <a:rPr sz="1300" b="0" i="0">
-                <a:solidFill>
-                  <a:srgbClr val="17324D"/>
-                </a:solidFill>
-                <a:latin typeface="Microsoft YaHei"/>
-              </a:rPr>
-              <a:t>• 小程序为微信原生工程，作为移动场景延展。</a:t>
-            </a:r>
-          </a:p>
-          <a:p>
-            <a:pPr algn="l">
-              <a:lnSpc>
-                <a:spcPct val="115000"/>
-              </a:lnSpc>
-              <a:spcBef>
-                <a:spcPts val="0"/>
-              </a:spcBef>
-              <a:spcAft>
-                <a:spcPts val="400"/>
-              </a:spcAft>
-            </a:pPr>
-            <a:r>
-              <a:rPr sz="1300" b="0" i="0">
-                <a:solidFill>
-                  <a:srgbClr val="17324D"/>
-                </a:solidFill>
-                <a:latin typeface="Microsoft YaHei"/>
-              </a:rPr>
-              <a:t>• 应用工厂 + Blueprint 模块化，便于后续扩展。</a:t>
-            </a:r>
-          </a:p>
-          <a:p>
-            <a:pPr algn="l">
-              <a:lnSpc>
-                <a:spcPct val="115000"/>
-              </a:lnSpc>
-              <a:spcBef>
-                <a:spcPts val="0"/>
-              </a:spcBef>
-              <a:spcAft>
-                <a:spcPts val="400"/>
-              </a:spcAft>
-            </a:pPr>
-            <a:r>
-              <a:rPr sz="1300" b="0" i="0">
-                <a:solidFill>
-                  <a:srgbClr val="17324D"/>
-                </a:solidFill>
-                <a:latin typeface="Microsoft YaHei"/>
-              </a:rPr>
-              <a:t>• 新接口遵循 status / code / data / message 信封结构。</a:t>
-            </a:r>
-          </a:p>
-        </p:txBody>
-      </p:sp>
-      <p:sp>
-        <p:nvSpPr>
-          <p:cNvPr id="31" name="TextBox 30"/>
-          <p:cNvSpPr txBox="1"/>
-          <p:nvPr/>
-        </p:nvSpPr>
-        <p:spPr>
-          <a:xfrm>
-            <a:off x="658368" y="6473952"/>
-            <a:ext cx="2926080" cy="182880"/>
-          </a:xfrm>
-          <a:prstGeom prst="rect">
-            <a:avLst/>
-          </a:prstGeom>
-          <a:noFill/>
-        </p:spPr>
-        <p:txBody>
-          <a:bodyPr wrap="square" lIns="0" rIns="0" tIns="0" bIns="0" anchor="t">
-            <a:spAutoFit/>
-          </a:bodyPr>
-          <a:lstStyle/>
-          <a:p>
-            <a:pPr algn="l">
-              <a:lnSpc>
-                <a:spcPct val="115000"/>
-              </a:lnSpc>
             </a:pPr>
             <a:r>
               <a:rPr sz="950" b="0" i="0">
@@ -6172,7 +5622,7 @@
       </p:sp>
       <p:sp>
         <p:nvSpPr>
-          <p:cNvPr id="32" name="TextBox 31"/>
+          <p:cNvPr id="22" name="TextBox 21"/>
           <p:cNvSpPr txBox="1"/>
           <p:nvPr/>
         </p:nvSpPr>
@@ -6229,6 +5679,5022 @@
       <p:grpSpPr/>
       <p:pic>
         <p:nvPicPr>
+          <p:cNvPr id="2" name="Picture 1" descr="bg_light_2.png"/>
+          <p:cNvPicPr>
+            <a:picLocks noChangeAspect="1"/>
+          </p:cNvPicPr>
+          <p:nvPr/>
+        </p:nvPicPr>
+        <p:blipFill>
+          <a:blip r:embed="rId2"/>
+          <a:stretch>
+            <a:fillRect/>
+          </a:stretch>
+        </p:blipFill>
+        <p:spPr>
+          <a:xfrm>
+            <a:off x="0" y="0"/>
+            <a:ext cx="12191695" cy="6858000"/>
+          </a:xfrm>
+          <a:prstGeom prst="rect">
+            <a:avLst/>
+          </a:prstGeom>
+        </p:spPr>
+      </p:pic>
+      <p:sp>
+        <p:nvSpPr>
+          <p:cNvPr id="3" name="TextBox 2"/>
+          <p:cNvSpPr txBox="1"/>
+          <p:nvPr/>
+        </p:nvSpPr>
+        <p:spPr>
+          <a:xfrm>
+            <a:off x="658368" y="475488"/>
+            <a:ext cx="2743200" cy="256032"/>
+          </a:xfrm>
+          <a:prstGeom prst="rect">
+            <a:avLst/>
+          </a:prstGeom>
+          <a:noFill/>
+        </p:spPr>
+        <p:txBody>
+          <a:bodyPr wrap="square" lIns="0" rIns="0" tIns="0" bIns="0" anchor="t">
+            <a:spAutoFit/>
+          </a:bodyPr>
+          <a:lstStyle/>
+          <a:p>
+            <a:pPr algn="l">
+              <a:lnSpc>
+                <a:spcPct val="115000"/>
+              </a:lnSpc>
+            </a:pPr>
+            <a:r>
+              <a:rPr sz="1200" b="1" i="0">
+                <a:solidFill>
+                  <a:srgbClr val="4F6EF7"/>
+                </a:solidFill>
+                <a:latin typeface="Aptos"/>
+              </a:rPr>
+              <a:t>ADMIN</a:t>
+            </a:r>
+          </a:p>
+        </p:txBody>
+      </p:sp>
+      <p:sp>
+        <p:nvSpPr>
+          <p:cNvPr id="4" name="Rectangle 3"/>
+          <p:cNvSpPr/>
+          <p:nvPr/>
+        </p:nvSpPr>
+        <p:spPr>
+          <a:xfrm>
+            <a:off x="658368" y="804672"/>
+            <a:ext cx="694944" cy="54864"/>
+          </a:xfrm>
+          <a:prstGeom prst="rect">
+            <a:avLst/>
+          </a:prstGeom>
+          <a:solidFill>
+            <a:srgbClr val="4F6EF7"/>
+          </a:solidFill>
+          <a:ln>
+            <a:noFill/>
+          </a:ln>
+        </p:spPr>
+        <p:style>
+          <a:lnRef idx="1">
+            <a:schemeClr val="accent1"/>
+          </a:lnRef>
+          <a:fillRef idx="3">
+            <a:schemeClr val="accent1"/>
+          </a:fillRef>
+          <a:effectRef idx="2">
+            <a:schemeClr val="accent1"/>
+          </a:effectRef>
+          <a:fontRef idx="minor">
+            <a:schemeClr val="lt1"/>
+          </a:fontRef>
+        </p:style>
+        <p:txBody>
+          <a:bodyPr rtlCol="0" anchor="ctr"/>
+          <a:lstStyle/>
+          <a:p>
+            <a:pPr algn="ctr"/>
+          </a:p>
+        </p:txBody>
+      </p:sp>
+      <p:sp>
+        <p:nvSpPr>
+          <p:cNvPr id="5" name="TextBox 4"/>
+          <p:cNvSpPr txBox="1"/>
+          <p:nvPr/>
+        </p:nvSpPr>
+        <p:spPr>
+          <a:xfrm>
+            <a:off x="658368" y="914400"/>
+            <a:ext cx="6217920" cy="530352"/>
+          </a:xfrm>
+          <a:prstGeom prst="rect">
+            <a:avLst/>
+          </a:prstGeom>
+          <a:noFill/>
+        </p:spPr>
+        <p:txBody>
+          <a:bodyPr wrap="square" lIns="0" rIns="0" tIns="0" bIns="0" anchor="t">
+            <a:spAutoFit/>
+          </a:bodyPr>
+          <a:lstStyle/>
+          <a:p>
+            <a:pPr algn="l">
+              <a:lnSpc>
+                <a:spcPct val="115000"/>
+              </a:lnSpc>
+            </a:pPr>
+            <a:r>
+              <a:rPr sz="2800" b="1" i="0">
+                <a:solidFill>
+                  <a:srgbClr val="102A43"/>
+                </a:solidFill>
+                <a:latin typeface="Microsoft YaHei"/>
+              </a:rPr>
+              <a:t>后台管理：总览、内容治理与 AI 配置</a:t>
+            </a:r>
+          </a:p>
+        </p:txBody>
+      </p:sp>
+      <p:sp>
+        <p:nvSpPr>
+          <p:cNvPr id="6" name="TextBox 5"/>
+          <p:cNvSpPr txBox="1"/>
+          <p:nvPr/>
+        </p:nvSpPr>
+        <p:spPr>
+          <a:xfrm>
+            <a:off x="658368" y="1426464"/>
+            <a:ext cx="7132320" cy="384048"/>
+          </a:xfrm>
+          <a:prstGeom prst="rect">
+            <a:avLst/>
+          </a:prstGeom>
+          <a:noFill/>
+        </p:spPr>
+        <p:txBody>
+          <a:bodyPr wrap="square" lIns="0" rIns="0" tIns="0" bIns="0" anchor="t">
+            <a:spAutoFit/>
+          </a:bodyPr>
+          <a:lstStyle/>
+          <a:p>
+            <a:pPr algn="l">
+              <a:lnSpc>
+                <a:spcPct val="115000"/>
+              </a:lnSpc>
+            </a:pPr>
+            <a:r>
+              <a:rPr sz="1350" b="0" i="0">
+                <a:solidFill>
+                  <a:srgbClr val="62748A"/>
+                </a:solidFill>
+                <a:latin typeface="Microsoft YaHei"/>
+              </a:rPr>
+              <a:t>后台不仅有仪表盘，还覆盖题目治理、论坛管理与系统级 AI 配置。</a:t>
+            </a:r>
+          </a:p>
+        </p:txBody>
+      </p:sp>
+      <p:sp>
+        <p:nvSpPr>
+          <p:cNvPr id="7" name="Rounded Rectangle 6"/>
+          <p:cNvSpPr/>
+          <p:nvPr/>
+        </p:nvSpPr>
+        <p:spPr>
+          <a:xfrm>
+            <a:off x="658368" y="1828800"/>
+            <a:ext cx="5440680" cy="2039112"/>
+          </a:xfrm>
+          <a:prstGeom prst="roundRect">
+            <a:avLst>
+              <a:gd name="adj" fmla="val 18000"/>
+            </a:avLst>
+          </a:prstGeom>
+          <a:solidFill>
+            <a:srgbClr val="FFFFFF"/>
+          </a:solidFill>
+          <a:ln w="15240">
+            <a:solidFill>
+              <a:srgbClr val="D9E2EF"/>
+            </a:solidFill>
+          </a:ln>
+        </p:spPr>
+        <p:style>
+          <a:lnRef idx="1">
+            <a:schemeClr val="accent1"/>
+          </a:lnRef>
+          <a:fillRef idx="3">
+            <a:schemeClr val="accent1"/>
+          </a:fillRef>
+          <a:effectRef idx="2">
+            <a:schemeClr val="accent1"/>
+          </a:effectRef>
+          <a:fontRef idx="minor">
+            <a:schemeClr val="lt1"/>
+          </a:fontRef>
+        </p:style>
+        <p:txBody>
+          <a:bodyPr rtlCol="0" anchor="ctr"/>
+          <a:lstStyle/>
+          <a:p>
+            <a:pPr algn="ctr"/>
+          </a:p>
+        </p:txBody>
+      </p:sp>
+      <p:sp>
+        <p:nvSpPr>
+          <p:cNvPr id="8" name="Rounded Rectangle 7"/>
+          <p:cNvSpPr/>
+          <p:nvPr/>
+        </p:nvSpPr>
+        <p:spPr>
+          <a:xfrm>
+            <a:off x="731520" y="1901952"/>
+            <a:ext cx="5294376" cy="237744"/>
+          </a:xfrm>
+          <a:prstGeom prst="roundRect">
+            <a:avLst>
+              <a:gd name="adj" fmla="val 30000"/>
+            </a:avLst>
+          </a:prstGeom>
+          <a:solidFill>
+            <a:srgbClr val="EEF3FB"/>
+          </a:solidFill>
+          <a:ln>
+            <a:noFill/>
+          </a:ln>
+        </p:spPr>
+        <p:style>
+          <a:lnRef idx="1">
+            <a:schemeClr val="accent1"/>
+          </a:lnRef>
+          <a:fillRef idx="3">
+            <a:schemeClr val="accent1"/>
+          </a:fillRef>
+          <a:effectRef idx="2">
+            <a:schemeClr val="accent1"/>
+          </a:effectRef>
+          <a:fontRef idx="minor">
+            <a:schemeClr val="lt1"/>
+          </a:fontRef>
+        </p:style>
+        <p:txBody>
+          <a:bodyPr rtlCol="0" anchor="ctr"/>
+          <a:lstStyle/>
+          <a:p>
+            <a:pPr algn="ctr"/>
+          </a:p>
+        </p:txBody>
+      </p:sp>
+      <p:sp>
+        <p:nvSpPr>
+          <p:cNvPr id="9" name="Oval 8"/>
+          <p:cNvSpPr/>
+          <p:nvPr/>
+        </p:nvSpPr>
+        <p:spPr>
+          <a:xfrm>
+            <a:off x="813816" y="1961388"/>
+            <a:ext cx="54864" cy="54864"/>
+          </a:xfrm>
+          <a:prstGeom prst="ellipse">
+            <a:avLst/>
+          </a:prstGeom>
+          <a:solidFill>
+            <a:srgbClr val="FF6B6B"/>
+          </a:solidFill>
+          <a:ln>
+            <a:noFill/>
+          </a:ln>
+        </p:spPr>
+        <p:style>
+          <a:lnRef idx="1">
+            <a:schemeClr val="accent1"/>
+          </a:lnRef>
+          <a:fillRef idx="3">
+            <a:schemeClr val="accent1"/>
+          </a:fillRef>
+          <a:effectRef idx="2">
+            <a:schemeClr val="accent1"/>
+          </a:effectRef>
+          <a:fontRef idx="minor">
+            <a:schemeClr val="lt1"/>
+          </a:fontRef>
+        </p:style>
+        <p:txBody>
+          <a:bodyPr rtlCol="0" anchor="ctr"/>
+          <a:lstStyle/>
+          <a:p>
+            <a:pPr algn="ctr"/>
+          </a:p>
+        </p:txBody>
+      </p:sp>
+      <p:sp>
+        <p:nvSpPr>
+          <p:cNvPr id="10" name="Oval 9"/>
+          <p:cNvSpPr/>
+          <p:nvPr/>
+        </p:nvSpPr>
+        <p:spPr>
+          <a:xfrm>
+            <a:off x="923544" y="1961388"/>
+            <a:ext cx="54864" cy="54864"/>
+          </a:xfrm>
+          <a:prstGeom prst="ellipse">
+            <a:avLst/>
+          </a:prstGeom>
+          <a:solidFill>
+            <a:srgbClr val="F7B955"/>
+          </a:solidFill>
+          <a:ln>
+            <a:noFill/>
+          </a:ln>
+        </p:spPr>
+        <p:style>
+          <a:lnRef idx="1">
+            <a:schemeClr val="accent1"/>
+          </a:lnRef>
+          <a:fillRef idx="3">
+            <a:schemeClr val="accent1"/>
+          </a:fillRef>
+          <a:effectRef idx="2">
+            <a:schemeClr val="accent1"/>
+          </a:effectRef>
+          <a:fontRef idx="minor">
+            <a:schemeClr val="lt1"/>
+          </a:fontRef>
+        </p:style>
+        <p:txBody>
+          <a:bodyPr rtlCol="0" anchor="ctr"/>
+          <a:lstStyle/>
+          <a:p>
+            <a:pPr algn="ctr"/>
+          </a:p>
+        </p:txBody>
+      </p:sp>
+      <p:sp>
+        <p:nvSpPr>
+          <p:cNvPr id="11" name="Oval 10"/>
+          <p:cNvSpPr/>
+          <p:nvPr/>
+        </p:nvSpPr>
+        <p:spPr>
+          <a:xfrm>
+            <a:off x="1033272" y="1961388"/>
+            <a:ext cx="54864" cy="54864"/>
+          </a:xfrm>
+          <a:prstGeom prst="ellipse">
+            <a:avLst/>
+          </a:prstGeom>
+          <a:solidFill>
+            <a:srgbClr val="34C759"/>
+          </a:solidFill>
+          <a:ln>
+            <a:noFill/>
+          </a:ln>
+        </p:spPr>
+        <p:style>
+          <a:lnRef idx="1">
+            <a:schemeClr val="accent1"/>
+          </a:lnRef>
+          <a:fillRef idx="3">
+            <a:schemeClr val="accent1"/>
+          </a:fillRef>
+          <a:effectRef idx="2">
+            <a:schemeClr val="accent1"/>
+          </a:effectRef>
+          <a:fontRef idx="minor">
+            <a:schemeClr val="lt1"/>
+          </a:fontRef>
+        </p:style>
+        <p:txBody>
+          <a:bodyPr rtlCol="0" anchor="ctr"/>
+          <a:lstStyle/>
+          <a:p>
+            <a:pPr algn="ctr"/>
+          </a:p>
+        </p:txBody>
+      </p:sp>
+      <p:sp>
+        <p:nvSpPr>
+          <p:cNvPr id="12" name="TextBox 11"/>
+          <p:cNvSpPr txBox="1"/>
+          <p:nvPr/>
+        </p:nvSpPr>
+        <p:spPr>
+          <a:xfrm>
+            <a:off x="1188720" y="1920240"/>
+            <a:ext cx="4690872" cy="164592"/>
+          </a:xfrm>
+          <a:prstGeom prst="rect">
+            <a:avLst/>
+          </a:prstGeom>
+          <a:noFill/>
+        </p:spPr>
+        <p:txBody>
+          <a:bodyPr wrap="square" lIns="0" rIns="0" tIns="0" bIns="0" anchor="t">
+            <a:spAutoFit/>
+          </a:bodyPr>
+          <a:lstStyle/>
+          <a:p>
+            <a:pPr algn="l">
+              <a:lnSpc>
+                <a:spcPct val="115000"/>
+              </a:lnSpc>
+            </a:pPr>
+            <a:r>
+              <a:rPr sz="1000" b="1" i="0">
+                <a:solidFill>
+                  <a:srgbClr val="62748A"/>
+                </a:solidFill>
+                <a:latin typeface="Microsoft YaHei"/>
+              </a:rPr>
+              <a:t>后台仪表盘</a:t>
+            </a:r>
+          </a:p>
+        </p:txBody>
+      </p:sp>
+      <p:pic>
+        <p:nvPicPr>
+          <p:cNvPr id="13" name="Picture 12" descr="后台仪表盘-865x248.png"/>
+          <p:cNvPicPr>
+            <a:picLocks noChangeAspect="1"/>
+          </p:cNvPicPr>
+          <p:nvPr/>
+        </p:nvPicPr>
+        <p:blipFill>
+          <a:blip r:embed="rId3"/>
+          <a:stretch>
+            <a:fillRect/>
+          </a:stretch>
+        </p:blipFill>
+        <p:spPr>
+          <a:xfrm>
+            <a:off x="740664" y="2194560"/>
+            <a:ext cx="5276088" cy="1581912"/>
+          </a:xfrm>
+          <a:prstGeom prst="rect">
+            <a:avLst/>
+          </a:prstGeom>
+        </p:spPr>
+      </p:pic>
+      <p:sp>
+        <p:nvSpPr>
+          <p:cNvPr id="14" name="Rounded Rectangle 13"/>
+          <p:cNvSpPr/>
+          <p:nvPr/>
+        </p:nvSpPr>
+        <p:spPr>
+          <a:xfrm>
+            <a:off x="6355080" y="1828800"/>
+            <a:ext cx="5175504" cy="2039112"/>
+          </a:xfrm>
+          <a:prstGeom prst="roundRect">
+            <a:avLst>
+              <a:gd name="adj" fmla="val 18000"/>
+            </a:avLst>
+          </a:prstGeom>
+          <a:solidFill>
+            <a:srgbClr val="FFFFFF"/>
+          </a:solidFill>
+          <a:ln w="15240">
+            <a:solidFill>
+              <a:srgbClr val="D9E2EF"/>
+            </a:solidFill>
+          </a:ln>
+        </p:spPr>
+        <p:style>
+          <a:lnRef idx="1">
+            <a:schemeClr val="accent1"/>
+          </a:lnRef>
+          <a:fillRef idx="3">
+            <a:schemeClr val="accent1"/>
+          </a:fillRef>
+          <a:effectRef idx="2">
+            <a:schemeClr val="accent1"/>
+          </a:effectRef>
+          <a:fontRef idx="minor">
+            <a:schemeClr val="lt1"/>
+          </a:fontRef>
+        </p:style>
+        <p:txBody>
+          <a:bodyPr rtlCol="0" anchor="ctr"/>
+          <a:lstStyle/>
+          <a:p>
+            <a:pPr algn="ctr"/>
+          </a:p>
+        </p:txBody>
+      </p:sp>
+      <p:sp>
+        <p:nvSpPr>
+          <p:cNvPr id="15" name="Rounded Rectangle 14"/>
+          <p:cNvSpPr/>
+          <p:nvPr/>
+        </p:nvSpPr>
+        <p:spPr>
+          <a:xfrm>
+            <a:off x="6428232" y="1901952"/>
+            <a:ext cx="5029200" cy="237744"/>
+          </a:xfrm>
+          <a:prstGeom prst="roundRect">
+            <a:avLst>
+              <a:gd name="adj" fmla="val 30000"/>
+            </a:avLst>
+          </a:prstGeom>
+          <a:solidFill>
+            <a:srgbClr val="EEF3FB"/>
+          </a:solidFill>
+          <a:ln>
+            <a:noFill/>
+          </a:ln>
+        </p:spPr>
+        <p:style>
+          <a:lnRef idx="1">
+            <a:schemeClr val="accent1"/>
+          </a:lnRef>
+          <a:fillRef idx="3">
+            <a:schemeClr val="accent1"/>
+          </a:fillRef>
+          <a:effectRef idx="2">
+            <a:schemeClr val="accent1"/>
+          </a:effectRef>
+          <a:fontRef idx="minor">
+            <a:schemeClr val="lt1"/>
+          </a:fontRef>
+        </p:style>
+        <p:txBody>
+          <a:bodyPr rtlCol="0" anchor="ctr"/>
+          <a:lstStyle/>
+          <a:p>
+            <a:pPr algn="ctr"/>
+          </a:p>
+        </p:txBody>
+      </p:sp>
+      <p:sp>
+        <p:nvSpPr>
+          <p:cNvPr id="16" name="Oval 15"/>
+          <p:cNvSpPr/>
+          <p:nvPr/>
+        </p:nvSpPr>
+        <p:spPr>
+          <a:xfrm>
+            <a:off x="6510528" y="1961388"/>
+            <a:ext cx="54864" cy="54864"/>
+          </a:xfrm>
+          <a:prstGeom prst="ellipse">
+            <a:avLst/>
+          </a:prstGeom>
+          <a:solidFill>
+            <a:srgbClr val="FF6B6B"/>
+          </a:solidFill>
+          <a:ln>
+            <a:noFill/>
+          </a:ln>
+        </p:spPr>
+        <p:style>
+          <a:lnRef idx="1">
+            <a:schemeClr val="accent1"/>
+          </a:lnRef>
+          <a:fillRef idx="3">
+            <a:schemeClr val="accent1"/>
+          </a:fillRef>
+          <a:effectRef idx="2">
+            <a:schemeClr val="accent1"/>
+          </a:effectRef>
+          <a:fontRef idx="minor">
+            <a:schemeClr val="lt1"/>
+          </a:fontRef>
+        </p:style>
+        <p:txBody>
+          <a:bodyPr rtlCol="0" anchor="ctr"/>
+          <a:lstStyle/>
+          <a:p>
+            <a:pPr algn="ctr"/>
+          </a:p>
+        </p:txBody>
+      </p:sp>
+      <p:sp>
+        <p:nvSpPr>
+          <p:cNvPr id="17" name="Oval 16"/>
+          <p:cNvSpPr/>
+          <p:nvPr/>
+        </p:nvSpPr>
+        <p:spPr>
+          <a:xfrm>
+            <a:off x="6620256" y="1961388"/>
+            <a:ext cx="54864" cy="54864"/>
+          </a:xfrm>
+          <a:prstGeom prst="ellipse">
+            <a:avLst/>
+          </a:prstGeom>
+          <a:solidFill>
+            <a:srgbClr val="F7B955"/>
+          </a:solidFill>
+          <a:ln>
+            <a:noFill/>
+          </a:ln>
+        </p:spPr>
+        <p:style>
+          <a:lnRef idx="1">
+            <a:schemeClr val="accent1"/>
+          </a:lnRef>
+          <a:fillRef idx="3">
+            <a:schemeClr val="accent1"/>
+          </a:fillRef>
+          <a:effectRef idx="2">
+            <a:schemeClr val="accent1"/>
+          </a:effectRef>
+          <a:fontRef idx="minor">
+            <a:schemeClr val="lt1"/>
+          </a:fontRef>
+        </p:style>
+        <p:txBody>
+          <a:bodyPr rtlCol="0" anchor="ctr"/>
+          <a:lstStyle/>
+          <a:p>
+            <a:pPr algn="ctr"/>
+          </a:p>
+        </p:txBody>
+      </p:sp>
+      <p:sp>
+        <p:nvSpPr>
+          <p:cNvPr id="18" name="Oval 17"/>
+          <p:cNvSpPr/>
+          <p:nvPr/>
+        </p:nvSpPr>
+        <p:spPr>
+          <a:xfrm>
+            <a:off x="6729984" y="1961388"/>
+            <a:ext cx="54864" cy="54864"/>
+          </a:xfrm>
+          <a:prstGeom prst="ellipse">
+            <a:avLst/>
+          </a:prstGeom>
+          <a:solidFill>
+            <a:srgbClr val="34C759"/>
+          </a:solidFill>
+          <a:ln>
+            <a:noFill/>
+          </a:ln>
+        </p:spPr>
+        <p:style>
+          <a:lnRef idx="1">
+            <a:schemeClr val="accent1"/>
+          </a:lnRef>
+          <a:fillRef idx="3">
+            <a:schemeClr val="accent1"/>
+          </a:fillRef>
+          <a:effectRef idx="2">
+            <a:schemeClr val="accent1"/>
+          </a:effectRef>
+          <a:fontRef idx="minor">
+            <a:schemeClr val="lt1"/>
+          </a:fontRef>
+        </p:style>
+        <p:txBody>
+          <a:bodyPr rtlCol="0" anchor="ctr"/>
+          <a:lstStyle/>
+          <a:p>
+            <a:pPr algn="ctr"/>
+          </a:p>
+        </p:txBody>
+      </p:sp>
+      <p:sp>
+        <p:nvSpPr>
+          <p:cNvPr id="19" name="TextBox 18"/>
+          <p:cNvSpPr txBox="1"/>
+          <p:nvPr/>
+        </p:nvSpPr>
+        <p:spPr>
+          <a:xfrm>
+            <a:off x="6885432" y="1920240"/>
+            <a:ext cx="4425696" cy="164592"/>
+          </a:xfrm>
+          <a:prstGeom prst="rect">
+            <a:avLst/>
+          </a:prstGeom>
+          <a:noFill/>
+        </p:spPr>
+        <p:txBody>
+          <a:bodyPr wrap="square" lIns="0" rIns="0" tIns="0" bIns="0" anchor="t">
+            <a:spAutoFit/>
+          </a:bodyPr>
+          <a:lstStyle/>
+          <a:p>
+            <a:pPr algn="l">
+              <a:lnSpc>
+                <a:spcPct val="115000"/>
+              </a:lnSpc>
+            </a:pPr>
+            <a:r>
+              <a:rPr sz="1000" b="1" i="0">
+                <a:solidFill>
+                  <a:srgbClr val="62748A"/>
+                </a:solidFill>
+                <a:latin typeface="Microsoft YaHei"/>
+              </a:rPr>
+              <a:t>后台题目管理</a:t>
+            </a:r>
+          </a:p>
+        </p:txBody>
+      </p:sp>
+      <p:pic>
+        <p:nvPicPr>
+          <p:cNvPr id="20" name="Picture 19" descr="后台题目管理-822x248.png"/>
+          <p:cNvPicPr>
+            <a:picLocks noChangeAspect="1"/>
+          </p:cNvPicPr>
+          <p:nvPr/>
+        </p:nvPicPr>
+        <p:blipFill>
+          <a:blip r:embed="rId4"/>
+          <a:stretch>
+            <a:fillRect/>
+          </a:stretch>
+        </p:blipFill>
+        <p:spPr>
+          <a:xfrm>
+            <a:off x="6437376" y="2194560"/>
+            <a:ext cx="5010912" cy="1581912"/>
+          </a:xfrm>
+          <a:prstGeom prst="rect">
+            <a:avLst/>
+          </a:prstGeom>
+        </p:spPr>
+      </p:pic>
+      <p:sp>
+        <p:nvSpPr>
+          <p:cNvPr id="21" name="Rounded Rectangle 20"/>
+          <p:cNvSpPr/>
+          <p:nvPr/>
+        </p:nvSpPr>
+        <p:spPr>
+          <a:xfrm>
+            <a:off x="658368" y="4069080"/>
+            <a:ext cx="5440680" cy="2039112"/>
+          </a:xfrm>
+          <a:prstGeom prst="roundRect">
+            <a:avLst>
+              <a:gd name="adj" fmla="val 18000"/>
+            </a:avLst>
+          </a:prstGeom>
+          <a:solidFill>
+            <a:srgbClr val="FFFFFF"/>
+          </a:solidFill>
+          <a:ln w="15240">
+            <a:solidFill>
+              <a:srgbClr val="D9E2EF"/>
+            </a:solidFill>
+          </a:ln>
+        </p:spPr>
+        <p:style>
+          <a:lnRef idx="1">
+            <a:schemeClr val="accent1"/>
+          </a:lnRef>
+          <a:fillRef idx="3">
+            <a:schemeClr val="accent1"/>
+          </a:fillRef>
+          <a:effectRef idx="2">
+            <a:schemeClr val="accent1"/>
+          </a:effectRef>
+          <a:fontRef idx="minor">
+            <a:schemeClr val="lt1"/>
+          </a:fontRef>
+        </p:style>
+        <p:txBody>
+          <a:bodyPr rtlCol="0" anchor="ctr"/>
+          <a:lstStyle/>
+          <a:p>
+            <a:pPr algn="ctr"/>
+          </a:p>
+        </p:txBody>
+      </p:sp>
+      <p:sp>
+        <p:nvSpPr>
+          <p:cNvPr id="22" name="Rounded Rectangle 21"/>
+          <p:cNvSpPr/>
+          <p:nvPr/>
+        </p:nvSpPr>
+        <p:spPr>
+          <a:xfrm>
+            <a:off x="731520" y="4142232"/>
+            <a:ext cx="5294376" cy="237744"/>
+          </a:xfrm>
+          <a:prstGeom prst="roundRect">
+            <a:avLst>
+              <a:gd name="adj" fmla="val 30000"/>
+            </a:avLst>
+          </a:prstGeom>
+          <a:solidFill>
+            <a:srgbClr val="EEF3FB"/>
+          </a:solidFill>
+          <a:ln>
+            <a:noFill/>
+          </a:ln>
+        </p:spPr>
+        <p:style>
+          <a:lnRef idx="1">
+            <a:schemeClr val="accent1"/>
+          </a:lnRef>
+          <a:fillRef idx="3">
+            <a:schemeClr val="accent1"/>
+          </a:fillRef>
+          <a:effectRef idx="2">
+            <a:schemeClr val="accent1"/>
+          </a:effectRef>
+          <a:fontRef idx="minor">
+            <a:schemeClr val="lt1"/>
+          </a:fontRef>
+        </p:style>
+        <p:txBody>
+          <a:bodyPr rtlCol="0" anchor="ctr"/>
+          <a:lstStyle/>
+          <a:p>
+            <a:pPr algn="ctr"/>
+          </a:p>
+        </p:txBody>
+      </p:sp>
+      <p:sp>
+        <p:nvSpPr>
+          <p:cNvPr id="23" name="Oval 22"/>
+          <p:cNvSpPr/>
+          <p:nvPr/>
+        </p:nvSpPr>
+        <p:spPr>
+          <a:xfrm>
+            <a:off x="813816" y="4201668"/>
+            <a:ext cx="54864" cy="54864"/>
+          </a:xfrm>
+          <a:prstGeom prst="ellipse">
+            <a:avLst/>
+          </a:prstGeom>
+          <a:solidFill>
+            <a:srgbClr val="FF6B6B"/>
+          </a:solidFill>
+          <a:ln>
+            <a:noFill/>
+          </a:ln>
+        </p:spPr>
+        <p:style>
+          <a:lnRef idx="1">
+            <a:schemeClr val="accent1"/>
+          </a:lnRef>
+          <a:fillRef idx="3">
+            <a:schemeClr val="accent1"/>
+          </a:fillRef>
+          <a:effectRef idx="2">
+            <a:schemeClr val="accent1"/>
+          </a:effectRef>
+          <a:fontRef idx="minor">
+            <a:schemeClr val="lt1"/>
+          </a:fontRef>
+        </p:style>
+        <p:txBody>
+          <a:bodyPr rtlCol="0" anchor="ctr"/>
+          <a:lstStyle/>
+          <a:p>
+            <a:pPr algn="ctr"/>
+          </a:p>
+        </p:txBody>
+      </p:sp>
+      <p:sp>
+        <p:nvSpPr>
+          <p:cNvPr id="24" name="Oval 23"/>
+          <p:cNvSpPr/>
+          <p:nvPr/>
+        </p:nvSpPr>
+        <p:spPr>
+          <a:xfrm>
+            <a:off x="923544" y="4201668"/>
+            <a:ext cx="54864" cy="54864"/>
+          </a:xfrm>
+          <a:prstGeom prst="ellipse">
+            <a:avLst/>
+          </a:prstGeom>
+          <a:solidFill>
+            <a:srgbClr val="F7B955"/>
+          </a:solidFill>
+          <a:ln>
+            <a:noFill/>
+          </a:ln>
+        </p:spPr>
+        <p:style>
+          <a:lnRef idx="1">
+            <a:schemeClr val="accent1"/>
+          </a:lnRef>
+          <a:fillRef idx="3">
+            <a:schemeClr val="accent1"/>
+          </a:fillRef>
+          <a:effectRef idx="2">
+            <a:schemeClr val="accent1"/>
+          </a:effectRef>
+          <a:fontRef idx="minor">
+            <a:schemeClr val="lt1"/>
+          </a:fontRef>
+        </p:style>
+        <p:txBody>
+          <a:bodyPr rtlCol="0" anchor="ctr"/>
+          <a:lstStyle/>
+          <a:p>
+            <a:pPr algn="ctr"/>
+          </a:p>
+        </p:txBody>
+      </p:sp>
+      <p:sp>
+        <p:nvSpPr>
+          <p:cNvPr id="25" name="Oval 24"/>
+          <p:cNvSpPr/>
+          <p:nvPr/>
+        </p:nvSpPr>
+        <p:spPr>
+          <a:xfrm>
+            <a:off x="1033272" y="4201668"/>
+            <a:ext cx="54864" cy="54864"/>
+          </a:xfrm>
+          <a:prstGeom prst="ellipse">
+            <a:avLst/>
+          </a:prstGeom>
+          <a:solidFill>
+            <a:srgbClr val="34C759"/>
+          </a:solidFill>
+          <a:ln>
+            <a:noFill/>
+          </a:ln>
+        </p:spPr>
+        <p:style>
+          <a:lnRef idx="1">
+            <a:schemeClr val="accent1"/>
+          </a:lnRef>
+          <a:fillRef idx="3">
+            <a:schemeClr val="accent1"/>
+          </a:fillRef>
+          <a:effectRef idx="2">
+            <a:schemeClr val="accent1"/>
+          </a:effectRef>
+          <a:fontRef idx="minor">
+            <a:schemeClr val="lt1"/>
+          </a:fontRef>
+        </p:style>
+        <p:txBody>
+          <a:bodyPr rtlCol="0" anchor="ctr"/>
+          <a:lstStyle/>
+          <a:p>
+            <a:pPr algn="ctr"/>
+          </a:p>
+        </p:txBody>
+      </p:sp>
+      <p:sp>
+        <p:nvSpPr>
+          <p:cNvPr id="26" name="TextBox 25"/>
+          <p:cNvSpPr txBox="1"/>
+          <p:nvPr/>
+        </p:nvSpPr>
+        <p:spPr>
+          <a:xfrm>
+            <a:off x="1188720" y="4160520"/>
+            <a:ext cx="4690872" cy="164592"/>
+          </a:xfrm>
+          <a:prstGeom prst="rect">
+            <a:avLst/>
+          </a:prstGeom>
+          <a:noFill/>
+        </p:spPr>
+        <p:txBody>
+          <a:bodyPr wrap="square" lIns="0" rIns="0" tIns="0" bIns="0" anchor="t">
+            <a:spAutoFit/>
+          </a:bodyPr>
+          <a:lstStyle/>
+          <a:p>
+            <a:pPr algn="l">
+              <a:lnSpc>
+                <a:spcPct val="115000"/>
+              </a:lnSpc>
+            </a:pPr>
+            <a:r>
+              <a:rPr sz="1000" b="1" i="0">
+                <a:solidFill>
+                  <a:srgbClr val="62748A"/>
+                </a:solidFill>
+                <a:latin typeface="Microsoft YaHei"/>
+              </a:rPr>
+              <a:t>后台论坛管理</a:t>
+            </a:r>
+          </a:p>
+        </p:txBody>
+      </p:sp>
+      <p:pic>
+        <p:nvPicPr>
+          <p:cNvPr id="27" name="Picture 26" descr="后台论坛管理-865x248.png"/>
+          <p:cNvPicPr>
+            <a:picLocks noChangeAspect="1"/>
+          </p:cNvPicPr>
+          <p:nvPr/>
+        </p:nvPicPr>
+        <p:blipFill>
+          <a:blip r:embed="rId5"/>
+          <a:stretch>
+            <a:fillRect/>
+          </a:stretch>
+        </p:blipFill>
+        <p:spPr>
+          <a:xfrm>
+            <a:off x="740664" y="4434840"/>
+            <a:ext cx="5276088" cy="1581912"/>
+          </a:xfrm>
+          <a:prstGeom prst="rect">
+            <a:avLst/>
+          </a:prstGeom>
+        </p:spPr>
+      </p:pic>
+      <p:sp>
+        <p:nvSpPr>
+          <p:cNvPr id="28" name="Rounded Rectangle 27"/>
+          <p:cNvSpPr/>
+          <p:nvPr/>
+        </p:nvSpPr>
+        <p:spPr>
+          <a:xfrm>
+            <a:off x="6355080" y="4069080"/>
+            <a:ext cx="5175504" cy="2039112"/>
+          </a:xfrm>
+          <a:prstGeom prst="roundRect">
+            <a:avLst>
+              <a:gd name="adj" fmla="val 18000"/>
+            </a:avLst>
+          </a:prstGeom>
+          <a:solidFill>
+            <a:srgbClr val="FFFFFF"/>
+          </a:solidFill>
+          <a:ln w="15240">
+            <a:solidFill>
+              <a:srgbClr val="D9E2EF"/>
+            </a:solidFill>
+          </a:ln>
+        </p:spPr>
+        <p:style>
+          <a:lnRef idx="1">
+            <a:schemeClr val="accent1"/>
+          </a:lnRef>
+          <a:fillRef idx="3">
+            <a:schemeClr val="accent1"/>
+          </a:fillRef>
+          <a:effectRef idx="2">
+            <a:schemeClr val="accent1"/>
+          </a:effectRef>
+          <a:fontRef idx="minor">
+            <a:schemeClr val="lt1"/>
+          </a:fontRef>
+        </p:style>
+        <p:txBody>
+          <a:bodyPr rtlCol="0" anchor="ctr"/>
+          <a:lstStyle/>
+          <a:p>
+            <a:pPr algn="ctr"/>
+          </a:p>
+        </p:txBody>
+      </p:sp>
+      <p:sp>
+        <p:nvSpPr>
+          <p:cNvPr id="29" name="Rounded Rectangle 28"/>
+          <p:cNvSpPr/>
+          <p:nvPr/>
+        </p:nvSpPr>
+        <p:spPr>
+          <a:xfrm>
+            <a:off x="6428232" y="4142232"/>
+            <a:ext cx="5029200" cy="237744"/>
+          </a:xfrm>
+          <a:prstGeom prst="roundRect">
+            <a:avLst>
+              <a:gd name="adj" fmla="val 30000"/>
+            </a:avLst>
+          </a:prstGeom>
+          <a:solidFill>
+            <a:srgbClr val="EEF3FB"/>
+          </a:solidFill>
+          <a:ln>
+            <a:noFill/>
+          </a:ln>
+        </p:spPr>
+        <p:style>
+          <a:lnRef idx="1">
+            <a:schemeClr val="accent1"/>
+          </a:lnRef>
+          <a:fillRef idx="3">
+            <a:schemeClr val="accent1"/>
+          </a:fillRef>
+          <a:effectRef idx="2">
+            <a:schemeClr val="accent1"/>
+          </a:effectRef>
+          <a:fontRef idx="minor">
+            <a:schemeClr val="lt1"/>
+          </a:fontRef>
+        </p:style>
+        <p:txBody>
+          <a:bodyPr rtlCol="0" anchor="ctr"/>
+          <a:lstStyle/>
+          <a:p>
+            <a:pPr algn="ctr"/>
+          </a:p>
+        </p:txBody>
+      </p:sp>
+      <p:sp>
+        <p:nvSpPr>
+          <p:cNvPr id="30" name="Oval 29"/>
+          <p:cNvSpPr/>
+          <p:nvPr/>
+        </p:nvSpPr>
+        <p:spPr>
+          <a:xfrm>
+            <a:off x="6510528" y="4201668"/>
+            <a:ext cx="54864" cy="54864"/>
+          </a:xfrm>
+          <a:prstGeom prst="ellipse">
+            <a:avLst/>
+          </a:prstGeom>
+          <a:solidFill>
+            <a:srgbClr val="FF6B6B"/>
+          </a:solidFill>
+          <a:ln>
+            <a:noFill/>
+          </a:ln>
+        </p:spPr>
+        <p:style>
+          <a:lnRef idx="1">
+            <a:schemeClr val="accent1"/>
+          </a:lnRef>
+          <a:fillRef idx="3">
+            <a:schemeClr val="accent1"/>
+          </a:fillRef>
+          <a:effectRef idx="2">
+            <a:schemeClr val="accent1"/>
+          </a:effectRef>
+          <a:fontRef idx="minor">
+            <a:schemeClr val="lt1"/>
+          </a:fontRef>
+        </p:style>
+        <p:txBody>
+          <a:bodyPr rtlCol="0" anchor="ctr"/>
+          <a:lstStyle/>
+          <a:p>
+            <a:pPr algn="ctr"/>
+          </a:p>
+        </p:txBody>
+      </p:sp>
+      <p:sp>
+        <p:nvSpPr>
+          <p:cNvPr id="31" name="Oval 30"/>
+          <p:cNvSpPr/>
+          <p:nvPr/>
+        </p:nvSpPr>
+        <p:spPr>
+          <a:xfrm>
+            <a:off x="6620256" y="4201668"/>
+            <a:ext cx="54864" cy="54864"/>
+          </a:xfrm>
+          <a:prstGeom prst="ellipse">
+            <a:avLst/>
+          </a:prstGeom>
+          <a:solidFill>
+            <a:srgbClr val="F7B955"/>
+          </a:solidFill>
+          <a:ln>
+            <a:noFill/>
+          </a:ln>
+        </p:spPr>
+        <p:style>
+          <a:lnRef idx="1">
+            <a:schemeClr val="accent1"/>
+          </a:lnRef>
+          <a:fillRef idx="3">
+            <a:schemeClr val="accent1"/>
+          </a:fillRef>
+          <a:effectRef idx="2">
+            <a:schemeClr val="accent1"/>
+          </a:effectRef>
+          <a:fontRef idx="minor">
+            <a:schemeClr val="lt1"/>
+          </a:fontRef>
+        </p:style>
+        <p:txBody>
+          <a:bodyPr rtlCol="0" anchor="ctr"/>
+          <a:lstStyle/>
+          <a:p>
+            <a:pPr algn="ctr"/>
+          </a:p>
+        </p:txBody>
+      </p:sp>
+      <p:sp>
+        <p:nvSpPr>
+          <p:cNvPr id="32" name="Oval 31"/>
+          <p:cNvSpPr/>
+          <p:nvPr/>
+        </p:nvSpPr>
+        <p:spPr>
+          <a:xfrm>
+            <a:off x="6729984" y="4201668"/>
+            <a:ext cx="54864" cy="54864"/>
+          </a:xfrm>
+          <a:prstGeom prst="ellipse">
+            <a:avLst/>
+          </a:prstGeom>
+          <a:solidFill>
+            <a:srgbClr val="34C759"/>
+          </a:solidFill>
+          <a:ln>
+            <a:noFill/>
+          </a:ln>
+        </p:spPr>
+        <p:style>
+          <a:lnRef idx="1">
+            <a:schemeClr val="accent1"/>
+          </a:lnRef>
+          <a:fillRef idx="3">
+            <a:schemeClr val="accent1"/>
+          </a:fillRef>
+          <a:effectRef idx="2">
+            <a:schemeClr val="accent1"/>
+          </a:effectRef>
+          <a:fontRef idx="minor">
+            <a:schemeClr val="lt1"/>
+          </a:fontRef>
+        </p:style>
+        <p:txBody>
+          <a:bodyPr rtlCol="0" anchor="ctr"/>
+          <a:lstStyle/>
+          <a:p>
+            <a:pPr algn="ctr"/>
+          </a:p>
+        </p:txBody>
+      </p:sp>
+      <p:sp>
+        <p:nvSpPr>
+          <p:cNvPr id="33" name="TextBox 32"/>
+          <p:cNvSpPr txBox="1"/>
+          <p:nvPr/>
+        </p:nvSpPr>
+        <p:spPr>
+          <a:xfrm>
+            <a:off x="6885432" y="4160520"/>
+            <a:ext cx="4425696" cy="164592"/>
+          </a:xfrm>
+          <a:prstGeom prst="rect">
+            <a:avLst/>
+          </a:prstGeom>
+          <a:noFill/>
+        </p:spPr>
+        <p:txBody>
+          <a:bodyPr wrap="square" lIns="0" rIns="0" tIns="0" bIns="0" anchor="t">
+            <a:spAutoFit/>
+          </a:bodyPr>
+          <a:lstStyle/>
+          <a:p>
+            <a:pPr algn="l">
+              <a:lnSpc>
+                <a:spcPct val="115000"/>
+              </a:lnSpc>
+            </a:pPr>
+            <a:r>
+              <a:rPr sz="1000" b="1" i="0">
+                <a:solidFill>
+                  <a:srgbClr val="62748A"/>
+                </a:solidFill>
+                <a:latin typeface="Microsoft YaHei"/>
+              </a:rPr>
+              <a:t>后台 AI 配置</a:t>
+            </a:r>
+          </a:p>
+        </p:txBody>
+      </p:sp>
+      <p:pic>
+        <p:nvPicPr>
+          <p:cNvPr id="34" name="Picture 33" descr="后台 AI 配置-822x248.png"/>
+          <p:cNvPicPr>
+            <a:picLocks noChangeAspect="1"/>
+          </p:cNvPicPr>
+          <p:nvPr/>
+        </p:nvPicPr>
+        <p:blipFill>
+          <a:blip r:embed="rId6"/>
+          <a:stretch>
+            <a:fillRect/>
+          </a:stretch>
+        </p:blipFill>
+        <p:spPr>
+          <a:xfrm>
+            <a:off x="6437376" y="4434840"/>
+            <a:ext cx="5010912" cy="1581912"/>
+          </a:xfrm>
+          <a:prstGeom prst="rect">
+            <a:avLst/>
+          </a:prstGeom>
+        </p:spPr>
+      </p:pic>
+      <p:sp>
+        <p:nvSpPr>
+          <p:cNvPr id="35" name="TextBox 34"/>
+          <p:cNvSpPr txBox="1"/>
+          <p:nvPr/>
+        </p:nvSpPr>
+        <p:spPr>
+          <a:xfrm>
+            <a:off x="658368" y="6473952"/>
+            <a:ext cx="2926080" cy="182880"/>
+          </a:xfrm>
+          <a:prstGeom prst="rect">
+            <a:avLst/>
+          </a:prstGeom>
+          <a:noFill/>
+        </p:spPr>
+        <p:txBody>
+          <a:bodyPr wrap="square" lIns="0" rIns="0" tIns="0" bIns="0" anchor="t">
+            <a:spAutoFit/>
+          </a:bodyPr>
+          <a:lstStyle/>
+          <a:p>
+            <a:pPr algn="l">
+              <a:lnSpc>
+                <a:spcPct val="115000"/>
+              </a:lnSpc>
+            </a:pPr>
+            <a:r>
+              <a:rPr sz="950" b="0" i="0">
+                <a:solidFill>
+                  <a:srgbClr val="94A3B8"/>
+                </a:solidFill>
+                <a:latin typeface="Aptos"/>
+              </a:rPr>
+              <a:t>Sak-AI答题助手｜答辩演示</a:t>
+            </a:r>
+          </a:p>
+        </p:txBody>
+      </p:sp>
+      <p:sp>
+        <p:nvSpPr>
+          <p:cNvPr id="36" name="TextBox 35"/>
+          <p:cNvSpPr txBox="1"/>
+          <p:nvPr/>
+        </p:nvSpPr>
+        <p:spPr>
+          <a:xfrm>
+            <a:off x="11384280" y="6400800"/>
+            <a:ext cx="347472" cy="219456"/>
+          </a:xfrm>
+          <a:prstGeom prst="rect">
+            <a:avLst/>
+          </a:prstGeom>
+          <a:noFill/>
+        </p:spPr>
+        <p:txBody>
+          <a:bodyPr wrap="square" lIns="0" rIns="0" tIns="0" bIns="0" anchor="t">
+            <a:spAutoFit/>
+          </a:bodyPr>
+          <a:lstStyle/>
+          <a:p>
+            <a:pPr algn="r">
+              <a:lnSpc>
+                <a:spcPct val="115000"/>
+              </a:lnSpc>
+            </a:pPr>
+            <a:r>
+              <a:rPr sz="1100" b="1" i="0">
+                <a:solidFill>
+                  <a:srgbClr val="17324D"/>
+                </a:solidFill>
+                <a:latin typeface="Aptos"/>
+              </a:rPr>
+              <a:t>11</a:t>
+            </a:r>
+          </a:p>
+        </p:txBody>
+      </p:sp>
+    </p:spTree>
+  </p:cSld>
+  <p:clrMapOvr>
+    <a:masterClrMapping/>
+  </p:clrMapOvr>
+</p:sld>
+</file>
+
+<file path=ppt/slides/slide12.xml><?xml version="1.0" encoding="utf-8"?>
+<p:sld xmlns:a="http://schemas.openxmlformats.org/drawingml/2006/main" xmlns:p="http://schemas.openxmlformats.org/presentationml/2006/main" xmlns:r="http://schemas.openxmlformats.org/officeDocument/2006/relationships">
+  <p:cSld>
+    <p:spTree>
+      <p:nvGrpSpPr>
+        <p:cNvPr id="1" name=""/>
+        <p:cNvGrpSpPr/>
+        <p:nvPr/>
+      </p:nvGrpSpPr>
+      <p:grpSpPr/>
+      <p:pic>
+        <p:nvPicPr>
+          <p:cNvPr id="2" name="Picture 1" descr="bg_dark.png"/>
+          <p:cNvPicPr>
+            <a:picLocks noChangeAspect="1"/>
+          </p:cNvPicPr>
+          <p:nvPr/>
+        </p:nvPicPr>
+        <p:blipFill>
+          <a:blip r:embed="rId2"/>
+          <a:stretch>
+            <a:fillRect/>
+          </a:stretch>
+        </p:blipFill>
+        <p:spPr>
+          <a:xfrm>
+            <a:off x="0" y="0"/>
+            <a:ext cx="12191695" cy="6858000"/>
+          </a:xfrm>
+          <a:prstGeom prst="rect">
+            <a:avLst/>
+          </a:prstGeom>
+        </p:spPr>
+      </p:pic>
+      <p:sp>
+        <p:nvSpPr>
+          <p:cNvPr id="3" name="TextBox 2"/>
+          <p:cNvSpPr txBox="1"/>
+          <p:nvPr/>
+        </p:nvSpPr>
+        <p:spPr>
+          <a:xfrm>
+            <a:off x="658368" y="475488"/>
+            <a:ext cx="2743200" cy="256032"/>
+          </a:xfrm>
+          <a:prstGeom prst="rect">
+            <a:avLst/>
+          </a:prstGeom>
+          <a:noFill/>
+        </p:spPr>
+        <p:txBody>
+          <a:bodyPr wrap="square" lIns="0" rIns="0" tIns="0" bIns="0" anchor="t">
+            <a:spAutoFit/>
+          </a:bodyPr>
+          <a:lstStyle/>
+          <a:p>
+            <a:pPr algn="l">
+              <a:lnSpc>
+                <a:spcPct val="115000"/>
+              </a:lnSpc>
+            </a:pPr>
+            <a:r>
+              <a:rPr sz="1200" b="1" i="0">
+                <a:solidFill>
+                  <a:srgbClr val="C7D2FE"/>
+                </a:solidFill>
+                <a:latin typeface="Aptos"/>
+              </a:rPr>
+              <a:t>CROSS-END</a:t>
+            </a:r>
+          </a:p>
+        </p:txBody>
+      </p:sp>
+      <p:sp>
+        <p:nvSpPr>
+          <p:cNvPr id="4" name="Rectangle 3"/>
+          <p:cNvSpPr/>
+          <p:nvPr/>
+        </p:nvSpPr>
+        <p:spPr>
+          <a:xfrm>
+            <a:off x="658368" y="804672"/>
+            <a:ext cx="694944" cy="54864"/>
+          </a:xfrm>
+          <a:prstGeom prst="rect">
+            <a:avLst/>
+          </a:prstGeom>
+          <a:solidFill>
+            <a:srgbClr val="4F6EF7"/>
+          </a:solidFill>
+          <a:ln>
+            <a:noFill/>
+          </a:ln>
+        </p:spPr>
+        <p:style>
+          <a:lnRef idx="1">
+            <a:schemeClr val="accent1"/>
+          </a:lnRef>
+          <a:fillRef idx="3">
+            <a:schemeClr val="accent1"/>
+          </a:fillRef>
+          <a:effectRef idx="2">
+            <a:schemeClr val="accent1"/>
+          </a:effectRef>
+          <a:fontRef idx="minor">
+            <a:schemeClr val="lt1"/>
+          </a:fontRef>
+        </p:style>
+        <p:txBody>
+          <a:bodyPr rtlCol="0" anchor="ctr"/>
+          <a:lstStyle/>
+          <a:p>
+            <a:pPr algn="ctr"/>
+          </a:p>
+        </p:txBody>
+      </p:sp>
+      <p:sp>
+        <p:nvSpPr>
+          <p:cNvPr id="5" name="TextBox 4"/>
+          <p:cNvSpPr txBox="1"/>
+          <p:nvPr/>
+        </p:nvSpPr>
+        <p:spPr>
+          <a:xfrm>
+            <a:off x="658368" y="914400"/>
+            <a:ext cx="6217920" cy="530352"/>
+          </a:xfrm>
+          <a:prstGeom prst="rect">
+            <a:avLst/>
+          </a:prstGeom>
+          <a:noFill/>
+        </p:spPr>
+        <p:txBody>
+          <a:bodyPr wrap="square" lIns="0" rIns="0" tIns="0" bIns="0" anchor="t">
+            <a:spAutoFit/>
+          </a:bodyPr>
+          <a:lstStyle/>
+          <a:p>
+            <a:pPr algn="l">
+              <a:lnSpc>
+                <a:spcPct val="115000"/>
+              </a:lnSpc>
+            </a:pPr>
+            <a:r>
+              <a:rPr sz="2800" b="1" i="0">
+                <a:solidFill>
+                  <a:srgbClr val="FFFFFF"/>
+                </a:solidFill>
+                <a:latin typeface="Microsoft YaHei"/>
+              </a:rPr>
+              <a:t>双端协同：Web 主体 + 小程序延展</a:t>
+            </a:r>
+          </a:p>
+        </p:txBody>
+      </p:sp>
+      <p:sp>
+        <p:nvSpPr>
+          <p:cNvPr id="6" name="TextBox 5"/>
+          <p:cNvSpPr txBox="1"/>
+          <p:nvPr/>
+        </p:nvSpPr>
+        <p:spPr>
+          <a:xfrm>
+            <a:off x="658368" y="1426464"/>
+            <a:ext cx="7132320" cy="384048"/>
+          </a:xfrm>
+          <a:prstGeom prst="rect">
+            <a:avLst/>
+          </a:prstGeom>
+          <a:noFill/>
+        </p:spPr>
+        <p:txBody>
+          <a:bodyPr wrap="square" lIns="0" rIns="0" tIns="0" bIns="0" anchor="t">
+            <a:spAutoFit/>
+          </a:bodyPr>
+          <a:lstStyle/>
+          <a:p>
+            <a:pPr algn="l">
+              <a:lnSpc>
+                <a:spcPct val="115000"/>
+              </a:lnSpc>
+            </a:pPr>
+            <a:r>
+              <a:rPr sz="1350" b="0" i="0">
+                <a:solidFill>
+                  <a:srgbClr val="D9E5F5"/>
+                </a:solidFill>
+                <a:latin typeface="Microsoft YaHei"/>
+              </a:rPr>
+              <a:t>展示主体是 Web；移动端延展同样复用同一套后端与数据语义。</a:t>
+            </a:r>
+          </a:p>
+        </p:txBody>
+      </p:sp>
+      <p:sp>
+        <p:nvSpPr>
+          <p:cNvPr id="7" name="Rounded Rectangle 6"/>
+          <p:cNvSpPr/>
+          <p:nvPr/>
+        </p:nvSpPr>
+        <p:spPr>
+          <a:xfrm>
+            <a:off x="868680" y="1755648"/>
+            <a:ext cx="2066543" cy="4407408"/>
+          </a:xfrm>
+          <a:prstGeom prst="roundRect">
+            <a:avLst>
+              <a:gd name="adj" fmla="val 22000"/>
+            </a:avLst>
+          </a:prstGeom>
+          <a:solidFill>
+            <a:srgbClr val="0B1120"/>
+          </a:solidFill>
+          <a:ln w="19050">
+            <a:solidFill>
+              <a:srgbClr val="283548"/>
+            </a:solidFill>
+          </a:ln>
+        </p:spPr>
+        <p:style>
+          <a:lnRef idx="1">
+            <a:schemeClr val="accent1"/>
+          </a:lnRef>
+          <a:fillRef idx="3">
+            <a:schemeClr val="accent1"/>
+          </a:fillRef>
+          <a:effectRef idx="2">
+            <a:schemeClr val="accent1"/>
+          </a:effectRef>
+          <a:fontRef idx="minor">
+            <a:schemeClr val="lt1"/>
+          </a:fontRef>
+        </p:style>
+        <p:txBody>
+          <a:bodyPr rtlCol="0" anchor="ctr"/>
+          <a:lstStyle/>
+          <a:p>
+            <a:pPr algn="ctr"/>
+          </a:p>
+        </p:txBody>
+      </p:sp>
+      <p:sp>
+        <p:nvSpPr>
+          <p:cNvPr id="8" name="Rounded Rectangle 7"/>
+          <p:cNvSpPr/>
+          <p:nvPr/>
+        </p:nvSpPr>
+        <p:spPr>
+          <a:xfrm>
+            <a:off x="978408" y="1901952"/>
+            <a:ext cx="1847087" cy="4114800"/>
+          </a:xfrm>
+          <a:prstGeom prst="roundRect">
+            <a:avLst>
+              <a:gd name="adj" fmla="val 18000"/>
+            </a:avLst>
+          </a:prstGeom>
+          <a:solidFill>
+            <a:srgbClr val="FFFFFF"/>
+          </a:solidFill>
+          <a:ln>
+            <a:noFill/>
+          </a:ln>
+        </p:spPr>
+        <p:style>
+          <a:lnRef idx="1">
+            <a:schemeClr val="accent1"/>
+          </a:lnRef>
+          <a:fillRef idx="3">
+            <a:schemeClr val="accent1"/>
+          </a:fillRef>
+          <a:effectRef idx="2">
+            <a:schemeClr val="accent1"/>
+          </a:effectRef>
+          <a:fontRef idx="minor">
+            <a:schemeClr val="lt1"/>
+          </a:fontRef>
+        </p:style>
+        <p:txBody>
+          <a:bodyPr rtlCol="0" anchor="ctr"/>
+          <a:lstStyle/>
+          <a:p>
+            <a:pPr algn="ctr"/>
+          </a:p>
+        </p:txBody>
+      </p:sp>
+      <p:sp>
+        <p:nvSpPr>
+          <p:cNvPr id="9" name="Rounded Rectangle 8"/>
+          <p:cNvSpPr/>
+          <p:nvPr/>
+        </p:nvSpPr>
+        <p:spPr>
+          <a:xfrm>
+            <a:off x="1399032" y="1828800"/>
+            <a:ext cx="1005839" cy="73152"/>
+          </a:xfrm>
+          <a:prstGeom prst="roundRect">
+            <a:avLst>
+              <a:gd name="adj" fmla="val 40000"/>
+            </a:avLst>
+          </a:prstGeom>
+          <a:solidFill>
+            <a:srgbClr val="172554"/>
+          </a:solidFill>
+          <a:ln>
+            <a:noFill/>
+          </a:ln>
+        </p:spPr>
+        <p:style>
+          <a:lnRef idx="1">
+            <a:schemeClr val="accent1"/>
+          </a:lnRef>
+          <a:fillRef idx="3">
+            <a:schemeClr val="accent1"/>
+          </a:fillRef>
+          <a:effectRef idx="2">
+            <a:schemeClr val="accent1"/>
+          </a:effectRef>
+          <a:fontRef idx="minor">
+            <a:schemeClr val="lt1"/>
+          </a:fontRef>
+        </p:style>
+        <p:txBody>
+          <a:bodyPr rtlCol="0" anchor="ctr"/>
+          <a:lstStyle/>
+          <a:p>
+            <a:pPr algn="ctr"/>
+          </a:p>
+        </p:txBody>
+      </p:sp>
+      <p:pic>
+        <p:nvPicPr>
+          <p:cNvPr id="10" name="Picture 9" descr="phone-303x675.png"/>
+          <p:cNvPicPr>
+            <a:picLocks noChangeAspect="1"/>
+          </p:cNvPicPr>
+          <p:nvPr/>
+        </p:nvPicPr>
+        <p:blipFill>
+          <a:blip r:embed="rId3"/>
+          <a:stretch>
+            <a:fillRect/>
+          </a:stretch>
+        </p:blipFill>
+        <p:spPr>
+          <a:xfrm>
+            <a:off x="978408" y="1901952"/>
+            <a:ext cx="1847087" cy="4114800"/>
+          </a:xfrm>
+          <a:prstGeom prst="rect">
+            <a:avLst/>
+          </a:prstGeom>
+        </p:spPr>
+      </p:pic>
+      <p:sp>
+        <p:nvSpPr>
+          <p:cNvPr id="11" name="Rounded Rectangle 10"/>
+          <p:cNvSpPr/>
+          <p:nvPr/>
+        </p:nvSpPr>
+        <p:spPr>
+          <a:xfrm>
+            <a:off x="3310128" y="2011680"/>
+            <a:ext cx="4078224" cy="2743200"/>
+          </a:xfrm>
+          <a:prstGeom prst="roundRect">
+            <a:avLst>
+              <a:gd name="adj" fmla="val 18000"/>
+            </a:avLst>
+          </a:prstGeom>
+          <a:solidFill>
+            <a:srgbClr val="FFFFFF"/>
+          </a:solidFill>
+          <a:ln w="15240">
+            <a:solidFill>
+              <a:srgbClr val="D9E2EF"/>
+            </a:solidFill>
+          </a:ln>
+        </p:spPr>
+        <p:style>
+          <a:lnRef idx="1">
+            <a:schemeClr val="accent1"/>
+          </a:lnRef>
+          <a:fillRef idx="3">
+            <a:schemeClr val="accent1"/>
+          </a:fillRef>
+          <a:effectRef idx="2">
+            <a:schemeClr val="accent1"/>
+          </a:effectRef>
+          <a:fontRef idx="minor">
+            <a:schemeClr val="lt1"/>
+          </a:fontRef>
+        </p:style>
+        <p:txBody>
+          <a:bodyPr rtlCol="0" anchor="ctr"/>
+          <a:lstStyle/>
+          <a:p>
+            <a:pPr algn="ctr"/>
+          </a:p>
+        </p:txBody>
+      </p:sp>
+      <p:sp>
+        <p:nvSpPr>
+          <p:cNvPr id="12" name="Rounded Rectangle 11"/>
+          <p:cNvSpPr/>
+          <p:nvPr/>
+        </p:nvSpPr>
+        <p:spPr>
+          <a:xfrm>
+            <a:off x="3383280" y="2084832"/>
+            <a:ext cx="3931920" cy="237744"/>
+          </a:xfrm>
+          <a:prstGeom prst="roundRect">
+            <a:avLst>
+              <a:gd name="adj" fmla="val 30000"/>
+            </a:avLst>
+          </a:prstGeom>
+          <a:solidFill>
+            <a:srgbClr val="EEF3FB"/>
+          </a:solidFill>
+          <a:ln>
+            <a:noFill/>
+          </a:ln>
+        </p:spPr>
+        <p:style>
+          <a:lnRef idx="1">
+            <a:schemeClr val="accent1"/>
+          </a:lnRef>
+          <a:fillRef idx="3">
+            <a:schemeClr val="accent1"/>
+          </a:fillRef>
+          <a:effectRef idx="2">
+            <a:schemeClr val="accent1"/>
+          </a:effectRef>
+          <a:fontRef idx="minor">
+            <a:schemeClr val="lt1"/>
+          </a:fontRef>
+        </p:style>
+        <p:txBody>
+          <a:bodyPr rtlCol="0" anchor="ctr"/>
+          <a:lstStyle/>
+          <a:p>
+            <a:pPr algn="ctr"/>
+          </a:p>
+        </p:txBody>
+      </p:sp>
+      <p:sp>
+        <p:nvSpPr>
+          <p:cNvPr id="13" name="Oval 12"/>
+          <p:cNvSpPr/>
+          <p:nvPr/>
+        </p:nvSpPr>
+        <p:spPr>
+          <a:xfrm>
+            <a:off x="3465576" y="2144268"/>
+            <a:ext cx="54864" cy="54864"/>
+          </a:xfrm>
+          <a:prstGeom prst="ellipse">
+            <a:avLst/>
+          </a:prstGeom>
+          <a:solidFill>
+            <a:srgbClr val="FF6B6B"/>
+          </a:solidFill>
+          <a:ln>
+            <a:noFill/>
+          </a:ln>
+        </p:spPr>
+        <p:style>
+          <a:lnRef idx="1">
+            <a:schemeClr val="accent1"/>
+          </a:lnRef>
+          <a:fillRef idx="3">
+            <a:schemeClr val="accent1"/>
+          </a:fillRef>
+          <a:effectRef idx="2">
+            <a:schemeClr val="accent1"/>
+          </a:effectRef>
+          <a:fontRef idx="minor">
+            <a:schemeClr val="lt1"/>
+          </a:fontRef>
+        </p:style>
+        <p:txBody>
+          <a:bodyPr rtlCol="0" anchor="ctr"/>
+          <a:lstStyle/>
+          <a:p>
+            <a:pPr algn="ctr"/>
+          </a:p>
+        </p:txBody>
+      </p:sp>
+      <p:sp>
+        <p:nvSpPr>
+          <p:cNvPr id="14" name="Oval 13"/>
+          <p:cNvSpPr/>
+          <p:nvPr/>
+        </p:nvSpPr>
+        <p:spPr>
+          <a:xfrm>
+            <a:off x="3575304" y="2144268"/>
+            <a:ext cx="54864" cy="54864"/>
+          </a:xfrm>
+          <a:prstGeom prst="ellipse">
+            <a:avLst/>
+          </a:prstGeom>
+          <a:solidFill>
+            <a:srgbClr val="F7B955"/>
+          </a:solidFill>
+          <a:ln>
+            <a:noFill/>
+          </a:ln>
+        </p:spPr>
+        <p:style>
+          <a:lnRef idx="1">
+            <a:schemeClr val="accent1"/>
+          </a:lnRef>
+          <a:fillRef idx="3">
+            <a:schemeClr val="accent1"/>
+          </a:fillRef>
+          <a:effectRef idx="2">
+            <a:schemeClr val="accent1"/>
+          </a:effectRef>
+          <a:fontRef idx="minor">
+            <a:schemeClr val="lt1"/>
+          </a:fontRef>
+        </p:style>
+        <p:txBody>
+          <a:bodyPr rtlCol="0" anchor="ctr"/>
+          <a:lstStyle/>
+          <a:p>
+            <a:pPr algn="ctr"/>
+          </a:p>
+        </p:txBody>
+      </p:sp>
+      <p:sp>
+        <p:nvSpPr>
+          <p:cNvPr id="15" name="Oval 14"/>
+          <p:cNvSpPr/>
+          <p:nvPr/>
+        </p:nvSpPr>
+        <p:spPr>
+          <a:xfrm>
+            <a:off x="3685032" y="2144268"/>
+            <a:ext cx="54864" cy="54864"/>
+          </a:xfrm>
+          <a:prstGeom prst="ellipse">
+            <a:avLst/>
+          </a:prstGeom>
+          <a:solidFill>
+            <a:srgbClr val="34C759"/>
+          </a:solidFill>
+          <a:ln>
+            <a:noFill/>
+          </a:ln>
+        </p:spPr>
+        <p:style>
+          <a:lnRef idx="1">
+            <a:schemeClr val="accent1"/>
+          </a:lnRef>
+          <a:fillRef idx="3">
+            <a:schemeClr val="accent1"/>
+          </a:fillRef>
+          <a:effectRef idx="2">
+            <a:schemeClr val="accent1"/>
+          </a:effectRef>
+          <a:fontRef idx="minor">
+            <a:schemeClr val="lt1"/>
+          </a:fontRef>
+        </p:style>
+        <p:txBody>
+          <a:bodyPr rtlCol="0" anchor="ctr"/>
+          <a:lstStyle/>
+          <a:p>
+            <a:pPr algn="ctr"/>
+          </a:p>
+        </p:txBody>
+      </p:sp>
+      <p:sp>
+        <p:nvSpPr>
+          <p:cNvPr id="16" name="TextBox 15"/>
+          <p:cNvSpPr txBox="1"/>
+          <p:nvPr/>
+        </p:nvSpPr>
+        <p:spPr>
+          <a:xfrm>
+            <a:off x="3840480" y="2103120"/>
+            <a:ext cx="3328416" cy="164592"/>
+          </a:xfrm>
+          <a:prstGeom prst="rect">
+            <a:avLst/>
+          </a:prstGeom>
+          <a:noFill/>
+        </p:spPr>
+        <p:txBody>
+          <a:bodyPr wrap="square" lIns="0" rIns="0" tIns="0" bIns="0" anchor="t">
+            <a:spAutoFit/>
+          </a:bodyPr>
+          <a:lstStyle/>
+          <a:p>
+            <a:pPr algn="l">
+              <a:lnSpc>
+                <a:spcPct val="115000"/>
+              </a:lnSpc>
+            </a:pPr>
+            <a:r>
+              <a:rPr sz="1000" b="1" i="0">
+                <a:solidFill>
+                  <a:srgbClr val="62748A"/>
+                </a:solidFill>
+                <a:latin typeface="Microsoft YaHei"/>
+              </a:rPr>
+              <a:t>Web 首页（响应式壳层）</a:t>
+            </a:r>
+          </a:p>
+        </p:txBody>
+      </p:sp>
+      <p:pic>
+        <p:nvPicPr>
+          <p:cNvPr id="17" name="Picture 16" descr="Web 首页（响应式壳层）-642x363.png"/>
+          <p:cNvPicPr>
+            <a:picLocks noChangeAspect="1"/>
+          </p:cNvPicPr>
+          <p:nvPr/>
+        </p:nvPicPr>
+        <p:blipFill>
+          <a:blip r:embed="rId4"/>
+          <a:stretch>
+            <a:fillRect/>
+          </a:stretch>
+        </p:blipFill>
+        <p:spPr>
+          <a:xfrm>
+            <a:off x="3392424" y="2377440"/>
+            <a:ext cx="3913632" cy="2286000"/>
+          </a:xfrm>
+          <a:prstGeom prst="rect">
+            <a:avLst/>
+          </a:prstGeom>
+        </p:spPr>
+      </p:pic>
+      <p:sp>
+        <p:nvSpPr>
+          <p:cNvPr id="18" name="Rounded Rectangle 17"/>
+          <p:cNvSpPr/>
+          <p:nvPr/>
+        </p:nvSpPr>
+        <p:spPr>
+          <a:xfrm>
+            <a:off x="7662672" y="1883664"/>
+            <a:ext cx="3886200" cy="4297680"/>
+          </a:xfrm>
+          <a:prstGeom prst="roundRect">
+            <a:avLst>
+              <a:gd name="adj" fmla="val 18000"/>
+            </a:avLst>
+          </a:prstGeom>
+          <a:solidFill>
+            <a:srgbClr val="18263F"/>
+          </a:solidFill>
+          <a:ln w="15240">
+            <a:solidFill>
+              <a:srgbClr val="324362"/>
+            </a:solidFill>
+          </a:ln>
+        </p:spPr>
+        <p:style>
+          <a:lnRef idx="1">
+            <a:schemeClr val="accent1"/>
+          </a:lnRef>
+          <a:fillRef idx="3">
+            <a:schemeClr val="accent1"/>
+          </a:fillRef>
+          <a:effectRef idx="2">
+            <a:schemeClr val="accent1"/>
+          </a:effectRef>
+          <a:fontRef idx="minor">
+            <a:schemeClr val="lt1"/>
+          </a:fontRef>
+        </p:style>
+        <p:txBody>
+          <a:bodyPr rtlCol="0" anchor="ctr"/>
+          <a:lstStyle/>
+          <a:p>
+            <a:pPr algn="ctr"/>
+          </a:p>
+        </p:txBody>
+      </p:sp>
+      <p:sp>
+        <p:nvSpPr>
+          <p:cNvPr id="19" name="Rounded Rectangle 18"/>
+          <p:cNvSpPr/>
+          <p:nvPr/>
+        </p:nvSpPr>
+        <p:spPr>
+          <a:xfrm>
+            <a:off x="7955279" y="2139696"/>
+            <a:ext cx="1325880" cy="292608"/>
+          </a:xfrm>
+          <a:prstGeom prst="roundRect">
+            <a:avLst>
+              <a:gd name="adj" fmla="val 35000"/>
+            </a:avLst>
+          </a:prstGeom>
+          <a:solidFill>
+            <a:srgbClr val="243656"/>
+          </a:solidFill>
+          <a:ln w="12700">
+            <a:solidFill>
+              <a:srgbClr val="39527B"/>
+            </a:solidFill>
+          </a:ln>
+        </p:spPr>
+        <p:style>
+          <a:lnRef idx="1">
+            <a:schemeClr val="accent1"/>
+          </a:lnRef>
+          <a:fillRef idx="3">
+            <a:schemeClr val="accent1"/>
+          </a:fillRef>
+          <a:effectRef idx="2">
+            <a:schemeClr val="accent1"/>
+          </a:effectRef>
+          <a:fontRef idx="minor">
+            <a:schemeClr val="lt1"/>
+          </a:fontRef>
+        </p:style>
+        <p:txBody>
+          <a:bodyPr rtlCol="0" anchor="ctr"/>
+          <a:lstStyle/>
+          <a:p>
+            <a:pPr algn="ctr"/>
+          </a:p>
+        </p:txBody>
+      </p:sp>
+      <p:sp>
+        <p:nvSpPr>
+          <p:cNvPr id="20" name="TextBox 19"/>
+          <p:cNvSpPr txBox="1"/>
+          <p:nvPr/>
+        </p:nvSpPr>
+        <p:spPr>
+          <a:xfrm>
+            <a:off x="8065007" y="2194560"/>
+            <a:ext cx="1106424" cy="182880"/>
+          </a:xfrm>
+          <a:prstGeom prst="rect">
+            <a:avLst/>
+          </a:prstGeom>
+          <a:noFill/>
+        </p:spPr>
+        <p:txBody>
+          <a:bodyPr wrap="square" lIns="0" rIns="0" tIns="0" bIns="0" anchor="t">
+            <a:spAutoFit/>
+          </a:bodyPr>
+          <a:lstStyle/>
+          <a:p>
+            <a:pPr algn="ctr">
+              <a:lnSpc>
+                <a:spcPct val="115000"/>
+              </a:lnSpc>
+            </a:pPr>
+            <a:r>
+              <a:rPr sz="1250" b="1" i="0">
+                <a:solidFill>
+                  <a:srgbClr val="D9E5F5"/>
+                </a:solidFill>
+                <a:latin typeface="Microsoft YaHei"/>
+              </a:rPr>
+              <a:t>共享关键语义</a:t>
+            </a:r>
+          </a:p>
+        </p:txBody>
+      </p:sp>
+      <p:sp>
+        <p:nvSpPr>
+          <p:cNvPr id="21" name="TextBox 20"/>
+          <p:cNvSpPr txBox="1"/>
+          <p:nvPr/>
+        </p:nvSpPr>
+        <p:spPr>
+          <a:xfrm>
+            <a:off x="7955279" y="2578608"/>
+            <a:ext cx="3154680" cy="2560320"/>
+          </a:xfrm>
+          <a:prstGeom prst="rect">
+            <a:avLst/>
+          </a:prstGeom>
+          <a:noFill/>
+        </p:spPr>
+        <p:txBody>
+          <a:bodyPr wrap="square" lIns="0" rIns="0" tIns="0" bIns="0" anchor="t">
+            <a:spAutoFit/>
+          </a:bodyPr>
+          <a:lstStyle/>
+          <a:p>
+            <a:pPr algn="l">
+              <a:lnSpc>
+                <a:spcPct val="115000"/>
+              </a:lnSpc>
+              <a:spcBef>
+                <a:spcPts val="0"/>
+              </a:spcBef>
+              <a:spcAft>
+                <a:spcPts val="400"/>
+              </a:spcAft>
+            </a:pPr>
+            <a:r>
+              <a:rPr sz="1600" b="1" i="0">
+                <a:solidFill>
+                  <a:srgbClr val="FFFFFF"/>
+                </a:solidFill>
+                <a:latin typeface="Microsoft YaHei"/>
+              </a:rPr>
+              <a:t>收藏 / 错题 / 用户答案 / 用户进度 / 模拟考试</a:t>
+            </a:r>
+          </a:p>
+          <a:p>
+            <a:pPr algn="l">
+              <a:lnSpc>
+                <a:spcPct val="115000"/>
+              </a:lnSpc>
+              <a:spcBef>
+                <a:spcPts val="0"/>
+              </a:spcBef>
+              <a:spcAft>
+                <a:spcPts val="400"/>
+              </a:spcAft>
+            </a:pPr>
+            <a:r>
+              <a:rPr sz="1280" b="0" i="0">
+                <a:solidFill>
+                  <a:srgbClr val="D9E5F5"/>
+                </a:solidFill>
+                <a:latin typeface="Microsoft YaHei"/>
+              </a:rPr>
+              <a:t>• Web 端承担主要交互与展示，是参赛主体。</a:t>
+            </a:r>
+          </a:p>
+          <a:p>
+            <a:pPr algn="l">
+              <a:lnSpc>
+                <a:spcPct val="115000"/>
+              </a:lnSpc>
+              <a:spcBef>
+                <a:spcPts val="0"/>
+              </a:spcBef>
+              <a:spcAft>
+                <a:spcPts val="400"/>
+              </a:spcAft>
+            </a:pPr>
+            <a:r>
+              <a:rPr sz="1280" b="0" i="0">
+                <a:solidFill>
+                  <a:srgbClr val="D9E5F5"/>
+                </a:solidFill>
+                <a:latin typeface="Microsoft YaHei"/>
+              </a:rPr>
+              <a:t>• 小程序按高频移动学习场景延展，减少语义割裂。</a:t>
+            </a:r>
+          </a:p>
+          <a:p>
+            <a:pPr algn="l">
+              <a:lnSpc>
+                <a:spcPct val="115000"/>
+              </a:lnSpc>
+              <a:spcBef>
+                <a:spcPts val="0"/>
+              </a:spcBef>
+              <a:spcAft>
+                <a:spcPts val="400"/>
+              </a:spcAft>
+            </a:pPr>
+            <a:r>
+              <a:rPr sz="1280" b="0" i="0">
+                <a:solidFill>
+                  <a:srgbClr val="D9E5F5"/>
+                </a:solidFill>
+                <a:latin typeface="Microsoft YaHei"/>
+              </a:rPr>
+              <a:t>• 统一经过后端与接口封装，降低维护与演示成本。</a:t>
+            </a:r>
+          </a:p>
+        </p:txBody>
+      </p:sp>
+      <p:sp>
+        <p:nvSpPr>
+          <p:cNvPr id="22" name="Rounded Rectangle 21"/>
+          <p:cNvSpPr/>
+          <p:nvPr/>
+        </p:nvSpPr>
+        <p:spPr>
+          <a:xfrm>
+            <a:off x="7955279" y="5230368"/>
+            <a:ext cx="1591056" cy="841248"/>
+          </a:xfrm>
+          <a:prstGeom prst="roundRect">
+            <a:avLst>
+              <a:gd name="adj" fmla="val 22000"/>
+            </a:avLst>
+          </a:prstGeom>
+          <a:solidFill>
+            <a:srgbClr val="0F172A"/>
+          </a:solidFill>
+          <a:ln w="15240">
+            <a:solidFill>
+              <a:srgbClr val="31415F"/>
+            </a:solidFill>
+          </a:ln>
+        </p:spPr>
+        <p:style>
+          <a:lnRef idx="1">
+            <a:schemeClr val="accent1"/>
+          </a:lnRef>
+          <a:fillRef idx="3">
+            <a:schemeClr val="accent1"/>
+          </a:fillRef>
+          <a:effectRef idx="2">
+            <a:schemeClr val="accent1"/>
+          </a:effectRef>
+          <a:fontRef idx="minor">
+            <a:schemeClr val="lt1"/>
+          </a:fontRef>
+        </p:style>
+        <p:txBody>
+          <a:bodyPr rtlCol="0" anchor="ctr"/>
+          <a:lstStyle/>
+          <a:p>
+            <a:pPr algn="ctr"/>
+          </a:p>
+        </p:txBody>
+      </p:sp>
+      <p:sp>
+        <p:nvSpPr>
+          <p:cNvPr id="23" name="TextBox 22"/>
+          <p:cNvSpPr txBox="1"/>
+          <p:nvPr/>
+        </p:nvSpPr>
+        <p:spPr>
+          <a:xfrm>
+            <a:off x="8183879" y="5367528"/>
+            <a:ext cx="1133856" cy="438912"/>
+          </a:xfrm>
+          <a:prstGeom prst="rect">
+            <a:avLst/>
+          </a:prstGeom>
+          <a:noFill/>
+        </p:spPr>
+        <p:txBody>
+          <a:bodyPr wrap="square" lIns="0" rIns="0" tIns="0" bIns="0" anchor="t">
+            <a:spAutoFit/>
+          </a:bodyPr>
+          <a:lstStyle/>
+          <a:p>
+            <a:pPr algn="l">
+              <a:lnSpc>
+                <a:spcPct val="115000"/>
+              </a:lnSpc>
+            </a:pPr>
+            <a:r>
+              <a:rPr sz="2400" b="1" i="0">
+                <a:solidFill>
+                  <a:srgbClr val="FFFFFF"/>
+                </a:solidFill>
+                <a:latin typeface="Aptos"/>
+              </a:rPr>
+              <a:t>SSR</a:t>
+            </a:r>
+          </a:p>
+        </p:txBody>
+      </p:sp>
+      <p:sp>
+        <p:nvSpPr>
+          <p:cNvPr id="24" name="TextBox 23"/>
+          <p:cNvSpPr txBox="1"/>
+          <p:nvPr/>
+        </p:nvSpPr>
+        <p:spPr>
+          <a:xfrm>
+            <a:off x="8183879" y="5797296"/>
+            <a:ext cx="1133856" cy="310896"/>
+          </a:xfrm>
+          <a:prstGeom prst="rect">
+            <a:avLst/>
+          </a:prstGeom>
+          <a:noFill/>
+        </p:spPr>
+        <p:txBody>
+          <a:bodyPr wrap="square" lIns="0" rIns="0" tIns="0" bIns="0" anchor="t">
+            <a:spAutoFit/>
+          </a:bodyPr>
+          <a:lstStyle/>
+          <a:p>
+            <a:pPr algn="l">
+              <a:lnSpc>
+                <a:spcPct val="115000"/>
+              </a:lnSpc>
+            </a:pPr>
+            <a:r>
+              <a:rPr sz="1250" b="1" i="0">
+                <a:solidFill>
+                  <a:srgbClr val="D7DEEA"/>
+                </a:solidFill>
+                <a:latin typeface="Microsoft YaHei"/>
+              </a:rPr>
+              <a:t>Web 形态</a:t>
+            </a:r>
+          </a:p>
+        </p:txBody>
+      </p:sp>
+      <p:sp>
+        <p:nvSpPr>
+          <p:cNvPr id="25" name="TextBox 24"/>
+          <p:cNvSpPr txBox="1"/>
+          <p:nvPr/>
+        </p:nvSpPr>
+        <p:spPr>
+          <a:xfrm>
+            <a:off x="8183879" y="6099048"/>
+            <a:ext cx="1133856" cy="256032"/>
+          </a:xfrm>
+          <a:prstGeom prst="rect">
+            <a:avLst/>
+          </a:prstGeom>
+          <a:noFill/>
+        </p:spPr>
+        <p:txBody>
+          <a:bodyPr wrap="square" lIns="0" rIns="0" tIns="0" bIns="0" anchor="t">
+            <a:spAutoFit/>
+          </a:bodyPr>
+          <a:lstStyle/>
+          <a:p>
+            <a:pPr algn="l">
+              <a:lnSpc>
+                <a:spcPct val="115000"/>
+              </a:lnSpc>
+            </a:pPr>
+            <a:r>
+              <a:rPr sz="1050" b="0" i="0">
+                <a:solidFill>
+                  <a:srgbClr val="9FB0C7"/>
+                </a:solidFill>
+                <a:latin typeface="Microsoft YaHei"/>
+              </a:rPr>
+              <a:t>Flask + Jinja</a:t>
+            </a:r>
+          </a:p>
+        </p:txBody>
+      </p:sp>
+      <p:sp>
+        <p:nvSpPr>
+          <p:cNvPr id="26" name="Rounded Rectangle 25"/>
+          <p:cNvSpPr/>
+          <p:nvPr/>
+        </p:nvSpPr>
+        <p:spPr>
+          <a:xfrm>
+            <a:off x="9646920" y="5230368"/>
+            <a:ext cx="1591056" cy="841248"/>
+          </a:xfrm>
+          <a:prstGeom prst="roundRect">
+            <a:avLst>
+              <a:gd name="adj" fmla="val 22000"/>
+            </a:avLst>
+          </a:prstGeom>
+          <a:solidFill>
+            <a:srgbClr val="0F172A"/>
+          </a:solidFill>
+          <a:ln w="15240">
+            <a:solidFill>
+              <a:srgbClr val="31415F"/>
+            </a:solidFill>
+          </a:ln>
+        </p:spPr>
+        <p:style>
+          <a:lnRef idx="1">
+            <a:schemeClr val="accent1"/>
+          </a:lnRef>
+          <a:fillRef idx="3">
+            <a:schemeClr val="accent1"/>
+          </a:fillRef>
+          <a:effectRef idx="2">
+            <a:schemeClr val="accent1"/>
+          </a:effectRef>
+          <a:fontRef idx="minor">
+            <a:schemeClr val="lt1"/>
+          </a:fontRef>
+        </p:style>
+        <p:txBody>
+          <a:bodyPr rtlCol="0" anchor="ctr"/>
+          <a:lstStyle/>
+          <a:p>
+            <a:pPr algn="ctr"/>
+          </a:p>
+        </p:txBody>
+      </p:sp>
+      <p:sp>
+        <p:nvSpPr>
+          <p:cNvPr id="27" name="TextBox 26"/>
+          <p:cNvSpPr txBox="1"/>
+          <p:nvPr/>
+        </p:nvSpPr>
+        <p:spPr>
+          <a:xfrm>
+            <a:off x="9875520" y="5367528"/>
+            <a:ext cx="1133856" cy="438912"/>
+          </a:xfrm>
+          <a:prstGeom prst="rect">
+            <a:avLst/>
+          </a:prstGeom>
+          <a:noFill/>
+        </p:spPr>
+        <p:txBody>
+          <a:bodyPr wrap="square" lIns="0" rIns="0" tIns="0" bIns="0" anchor="t">
+            <a:spAutoFit/>
+          </a:bodyPr>
+          <a:lstStyle/>
+          <a:p>
+            <a:pPr algn="l">
+              <a:lnSpc>
+                <a:spcPct val="115000"/>
+              </a:lnSpc>
+            </a:pPr>
+            <a:r>
+              <a:rPr sz="2400" b="1" i="0">
+                <a:solidFill>
+                  <a:srgbClr val="FFFFFF"/>
+                </a:solidFill>
+                <a:latin typeface="Aptos"/>
+              </a:rPr>
+              <a:t>JWT</a:t>
+            </a:r>
+          </a:p>
+        </p:txBody>
+      </p:sp>
+      <p:sp>
+        <p:nvSpPr>
+          <p:cNvPr id="28" name="TextBox 27"/>
+          <p:cNvSpPr txBox="1"/>
+          <p:nvPr/>
+        </p:nvSpPr>
+        <p:spPr>
+          <a:xfrm>
+            <a:off x="9875520" y="5797296"/>
+            <a:ext cx="1133856" cy="310896"/>
+          </a:xfrm>
+          <a:prstGeom prst="rect">
+            <a:avLst/>
+          </a:prstGeom>
+          <a:noFill/>
+        </p:spPr>
+        <p:txBody>
+          <a:bodyPr wrap="square" lIns="0" rIns="0" tIns="0" bIns="0" anchor="t">
+            <a:spAutoFit/>
+          </a:bodyPr>
+          <a:lstStyle/>
+          <a:p>
+            <a:pPr algn="l">
+              <a:lnSpc>
+                <a:spcPct val="115000"/>
+              </a:lnSpc>
+            </a:pPr>
+            <a:r>
+              <a:rPr sz="1250" b="1" i="0">
+                <a:solidFill>
+                  <a:srgbClr val="D7DEEA"/>
+                </a:solidFill>
+                <a:latin typeface="Microsoft YaHei"/>
+              </a:rPr>
+              <a:t>API / 小程序</a:t>
+            </a:r>
+          </a:p>
+        </p:txBody>
+      </p:sp>
+      <p:sp>
+        <p:nvSpPr>
+          <p:cNvPr id="29" name="TextBox 28"/>
+          <p:cNvSpPr txBox="1"/>
+          <p:nvPr/>
+        </p:nvSpPr>
+        <p:spPr>
+          <a:xfrm>
+            <a:off x="9875520" y="6099048"/>
+            <a:ext cx="1133856" cy="256032"/>
+          </a:xfrm>
+          <a:prstGeom prst="rect">
+            <a:avLst/>
+          </a:prstGeom>
+          <a:noFill/>
+        </p:spPr>
+        <p:txBody>
+          <a:bodyPr wrap="square" lIns="0" rIns="0" tIns="0" bIns="0" anchor="t">
+            <a:spAutoFit/>
+          </a:bodyPr>
+          <a:lstStyle/>
+          <a:p>
+            <a:pPr algn="l">
+              <a:lnSpc>
+                <a:spcPct val="115000"/>
+              </a:lnSpc>
+            </a:pPr>
+            <a:r>
+              <a:rPr sz="1050" b="0" i="0">
+                <a:solidFill>
+                  <a:srgbClr val="9FB0C7"/>
+                </a:solidFill>
+                <a:latin typeface="Microsoft YaHei"/>
+              </a:rPr>
+              <a:t>Bearer Token</a:t>
+            </a:r>
+          </a:p>
+        </p:txBody>
+      </p:sp>
+      <p:sp>
+        <p:nvSpPr>
+          <p:cNvPr id="30" name="TextBox 29"/>
+          <p:cNvSpPr txBox="1"/>
+          <p:nvPr/>
+        </p:nvSpPr>
+        <p:spPr>
+          <a:xfrm>
+            <a:off x="658368" y="6473952"/>
+            <a:ext cx="2926080" cy="182880"/>
+          </a:xfrm>
+          <a:prstGeom prst="rect">
+            <a:avLst/>
+          </a:prstGeom>
+          <a:noFill/>
+        </p:spPr>
+        <p:txBody>
+          <a:bodyPr wrap="square" lIns="0" rIns="0" tIns="0" bIns="0" anchor="t">
+            <a:spAutoFit/>
+          </a:bodyPr>
+          <a:lstStyle/>
+          <a:p>
+            <a:pPr algn="l">
+              <a:lnSpc>
+                <a:spcPct val="115000"/>
+              </a:lnSpc>
+            </a:pPr>
+            <a:r>
+              <a:rPr sz="950" b="0" i="0">
+                <a:solidFill>
+                  <a:srgbClr val="D6DFEC"/>
+                </a:solidFill>
+                <a:latin typeface="Aptos"/>
+              </a:rPr>
+              <a:t>Sak-AI答题助手｜答辩演示</a:t>
+            </a:r>
+          </a:p>
+        </p:txBody>
+      </p:sp>
+      <p:sp>
+        <p:nvSpPr>
+          <p:cNvPr id="31" name="TextBox 30"/>
+          <p:cNvSpPr txBox="1"/>
+          <p:nvPr/>
+        </p:nvSpPr>
+        <p:spPr>
+          <a:xfrm>
+            <a:off x="11384280" y="6400800"/>
+            <a:ext cx="347472" cy="219456"/>
+          </a:xfrm>
+          <a:prstGeom prst="rect">
+            <a:avLst/>
+          </a:prstGeom>
+          <a:noFill/>
+        </p:spPr>
+        <p:txBody>
+          <a:bodyPr wrap="square" lIns="0" rIns="0" tIns="0" bIns="0" anchor="t">
+            <a:spAutoFit/>
+          </a:bodyPr>
+          <a:lstStyle/>
+          <a:p>
+            <a:pPr algn="r">
+              <a:lnSpc>
+                <a:spcPct val="115000"/>
+              </a:lnSpc>
+            </a:pPr>
+            <a:r>
+              <a:rPr sz="1100" b="1" i="0">
+                <a:solidFill>
+                  <a:srgbClr val="F8FAFC"/>
+                </a:solidFill>
+                <a:latin typeface="Aptos"/>
+              </a:rPr>
+              <a:t>12</a:t>
+            </a:r>
+          </a:p>
+        </p:txBody>
+      </p:sp>
+    </p:spTree>
+  </p:cSld>
+  <p:clrMapOvr>
+    <a:masterClrMapping/>
+  </p:clrMapOvr>
+</p:sld>
+</file>
+
+<file path=ppt/slides/slide13.xml><?xml version="1.0" encoding="utf-8"?>
+<p:sld xmlns:a="http://schemas.openxmlformats.org/drawingml/2006/main" xmlns:p="http://schemas.openxmlformats.org/presentationml/2006/main" xmlns:r="http://schemas.openxmlformats.org/officeDocument/2006/relationships">
+  <p:cSld>
+    <p:spTree>
+      <p:nvGrpSpPr>
+        <p:cNvPr id="1" name=""/>
+        <p:cNvGrpSpPr/>
+        <p:nvPr/>
+      </p:nvGrpSpPr>
+      <p:grpSpPr/>
+      <p:pic>
+        <p:nvPicPr>
+          <p:cNvPr id="2" name="Picture 1" descr="bg_light.png"/>
+          <p:cNvPicPr>
+            <a:picLocks noChangeAspect="1"/>
+          </p:cNvPicPr>
+          <p:nvPr/>
+        </p:nvPicPr>
+        <p:blipFill>
+          <a:blip r:embed="rId2"/>
+          <a:stretch>
+            <a:fillRect/>
+          </a:stretch>
+        </p:blipFill>
+        <p:spPr>
+          <a:xfrm>
+            <a:off x="0" y="0"/>
+            <a:ext cx="12191695" cy="6858000"/>
+          </a:xfrm>
+          <a:prstGeom prst="rect">
+            <a:avLst/>
+          </a:prstGeom>
+        </p:spPr>
+      </p:pic>
+      <p:sp>
+        <p:nvSpPr>
+          <p:cNvPr id="3" name="TextBox 2"/>
+          <p:cNvSpPr txBox="1"/>
+          <p:nvPr/>
+        </p:nvSpPr>
+        <p:spPr>
+          <a:xfrm>
+            <a:off x="658368" y="475488"/>
+            <a:ext cx="2743200" cy="256032"/>
+          </a:xfrm>
+          <a:prstGeom prst="rect">
+            <a:avLst/>
+          </a:prstGeom>
+          <a:noFill/>
+        </p:spPr>
+        <p:txBody>
+          <a:bodyPr wrap="square" lIns="0" rIns="0" tIns="0" bIns="0" anchor="t">
+            <a:spAutoFit/>
+          </a:bodyPr>
+          <a:lstStyle/>
+          <a:p>
+            <a:pPr algn="l">
+              <a:lnSpc>
+                <a:spcPct val="115000"/>
+              </a:lnSpc>
+            </a:pPr>
+            <a:r>
+              <a:rPr sz="1200" b="1" i="0">
+                <a:solidFill>
+                  <a:srgbClr val="4F6EF7"/>
+                </a:solidFill>
+                <a:latin typeface="Aptos"/>
+              </a:rPr>
+              <a:t>INNOVATION</a:t>
+            </a:r>
+          </a:p>
+        </p:txBody>
+      </p:sp>
+      <p:sp>
+        <p:nvSpPr>
+          <p:cNvPr id="4" name="Rectangle 3"/>
+          <p:cNvSpPr/>
+          <p:nvPr/>
+        </p:nvSpPr>
+        <p:spPr>
+          <a:xfrm>
+            <a:off x="658368" y="804672"/>
+            <a:ext cx="694944" cy="54864"/>
+          </a:xfrm>
+          <a:prstGeom prst="rect">
+            <a:avLst/>
+          </a:prstGeom>
+          <a:solidFill>
+            <a:srgbClr val="4F6EF7"/>
+          </a:solidFill>
+          <a:ln>
+            <a:noFill/>
+          </a:ln>
+        </p:spPr>
+        <p:style>
+          <a:lnRef idx="1">
+            <a:schemeClr val="accent1"/>
+          </a:lnRef>
+          <a:fillRef idx="3">
+            <a:schemeClr val="accent1"/>
+          </a:fillRef>
+          <a:effectRef idx="2">
+            <a:schemeClr val="accent1"/>
+          </a:effectRef>
+          <a:fontRef idx="minor">
+            <a:schemeClr val="lt1"/>
+          </a:fontRef>
+        </p:style>
+        <p:txBody>
+          <a:bodyPr rtlCol="0" anchor="ctr"/>
+          <a:lstStyle/>
+          <a:p>
+            <a:pPr algn="ctr"/>
+          </a:p>
+        </p:txBody>
+      </p:sp>
+      <p:sp>
+        <p:nvSpPr>
+          <p:cNvPr id="5" name="TextBox 4"/>
+          <p:cNvSpPr txBox="1"/>
+          <p:nvPr/>
+        </p:nvSpPr>
+        <p:spPr>
+          <a:xfrm>
+            <a:off x="658368" y="914400"/>
+            <a:ext cx="6217920" cy="530352"/>
+          </a:xfrm>
+          <a:prstGeom prst="rect">
+            <a:avLst/>
+          </a:prstGeom>
+          <a:noFill/>
+        </p:spPr>
+        <p:txBody>
+          <a:bodyPr wrap="square" lIns="0" rIns="0" tIns="0" bIns="0" anchor="t">
+            <a:spAutoFit/>
+          </a:bodyPr>
+          <a:lstStyle/>
+          <a:p>
+            <a:pPr algn="l">
+              <a:lnSpc>
+                <a:spcPct val="115000"/>
+              </a:lnSpc>
+            </a:pPr>
+            <a:r>
+              <a:rPr sz="2800" b="1" i="0">
+                <a:solidFill>
+                  <a:srgbClr val="102A43"/>
+                </a:solidFill>
+                <a:latin typeface="Microsoft YaHei"/>
+              </a:rPr>
+              <a:t>关键亮点：工程化表达与应用价值并重</a:t>
+            </a:r>
+          </a:p>
+        </p:txBody>
+      </p:sp>
+      <p:sp>
+        <p:nvSpPr>
+          <p:cNvPr id="6" name="TextBox 5"/>
+          <p:cNvSpPr txBox="1"/>
+          <p:nvPr/>
+        </p:nvSpPr>
+        <p:spPr>
+          <a:xfrm>
+            <a:off x="658368" y="1426464"/>
+            <a:ext cx="7132320" cy="384048"/>
+          </a:xfrm>
+          <a:prstGeom prst="rect">
+            <a:avLst/>
+          </a:prstGeom>
+          <a:noFill/>
+        </p:spPr>
+        <p:txBody>
+          <a:bodyPr wrap="square" lIns="0" rIns="0" tIns="0" bIns="0" anchor="t">
+            <a:spAutoFit/>
+          </a:bodyPr>
+          <a:lstStyle/>
+          <a:p>
+            <a:pPr algn="l">
+              <a:lnSpc>
+                <a:spcPct val="115000"/>
+              </a:lnSpc>
+            </a:pPr>
+            <a:r>
+              <a:rPr sz="1350" b="0" i="0">
+                <a:solidFill>
+                  <a:srgbClr val="62748A"/>
+                </a:solidFill>
+                <a:latin typeface="Microsoft YaHei"/>
+              </a:rPr>
+              <a:t>在题库系统常见能力之外，重点强化共享语义、可复现交付与学习辅助增强。</a:t>
+            </a:r>
+          </a:p>
+        </p:txBody>
+      </p:sp>
+      <p:sp>
+        <p:nvSpPr>
+          <p:cNvPr id="7" name="Rounded Rectangle 6"/>
+          <p:cNvSpPr/>
+          <p:nvPr/>
+        </p:nvSpPr>
+        <p:spPr>
+          <a:xfrm>
+            <a:off x="658368" y="2029968"/>
+            <a:ext cx="3566160" cy="3602736"/>
+          </a:xfrm>
+          <a:prstGeom prst="roundRect">
+            <a:avLst>
+              <a:gd name="adj" fmla="val 18000"/>
+            </a:avLst>
+          </a:prstGeom>
+          <a:solidFill>
+            <a:srgbClr val="FFFFFF"/>
+          </a:solidFill>
+          <a:ln w="15240">
+            <a:solidFill>
+              <a:srgbClr val="D9E2EF"/>
+            </a:solidFill>
+          </a:ln>
+        </p:spPr>
+        <p:style>
+          <a:lnRef idx="1">
+            <a:schemeClr val="accent1"/>
+          </a:lnRef>
+          <a:fillRef idx="3">
+            <a:schemeClr val="accent1"/>
+          </a:fillRef>
+          <a:effectRef idx="2">
+            <a:schemeClr val="accent1"/>
+          </a:effectRef>
+          <a:fontRef idx="minor">
+            <a:schemeClr val="lt1"/>
+          </a:fontRef>
+        </p:style>
+        <p:txBody>
+          <a:bodyPr rtlCol="0" anchor="ctr"/>
+          <a:lstStyle/>
+          <a:p>
+            <a:pPr algn="ctr"/>
+          </a:p>
+        </p:txBody>
+      </p:sp>
+      <p:sp>
+        <p:nvSpPr>
+          <p:cNvPr id="8" name="Oval 7"/>
+          <p:cNvSpPr/>
+          <p:nvPr/>
+        </p:nvSpPr>
+        <p:spPr>
+          <a:xfrm>
+            <a:off x="822960" y="2194560"/>
+            <a:ext cx="310896" cy="310896"/>
+          </a:xfrm>
+          <a:prstGeom prst="ellipse">
+            <a:avLst/>
+          </a:prstGeom>
+          <a:solidFill>
+            <a:srgbClr val="4F6EF7"/>
+          </a:solidFill>
+          <a:ln>
+            <a:noFill/>
+          </a:ln>
+        </p:spPr>
+        <p:style>
+          <a:lnRef idx="1">
+            <a:schemeClr val="accent1"/>
+          </a:lnRef>
+          <a:fillRef idx="3">
+            <a:schemeClr val="accent1"/>
+          </a:fillRef>
+          <a:effectRef idx="2">
+            <a:schemeClr val="accent1"/>
+          </a:effectRef>
+          <a:fontRef idx="minor">
+            <a:schemeClr val="lt1"/>
+          </a:fontRef>
+        </p:style>
+        <p:txBody>
+          <a:bodyPr rtlCol="0" anchor="ctr"/>
+          <a:lstStyle/>
+          <a:p>
+            <a:pPr algn="ctr"/>
+          </a:p>
+        </p:txBody>
+      </p:sp>
+      <p:sp>
+        <p:nvSpPr>
+          <p:cNvPr id="9" name="TextBox 8"/>
+          <p:cNvSpPr txBox="1"/>
+          <p:nvPr/>
+        </p:nvSpPr>
+        <p:spPr>
+          <a:xfrm>
+            <a:off x="822960" y="2203704"/>
+            <a:ext cx="310896" cy="164592"/>
+          </a:xfrm>
+          <a:prstGeom prst="rect">
+            <a:avLst/>
+          </a:prstGeom>
+          <a:noFill/>
+        </p:spPr>
+        <p:txBody>
+          <a:bodyPr wrap="square" lIns="0" rIns="0" tIns="0" bIns="0" anchor="t">
+            <a:spAutoFit/>
+          </a:bodyPr>
+          <a:lstStyle/>
+          <a:p>
+            <a:pPr algn="ctr">
+              <a:lnSpc>
+                <a:spcPct val="115000"/>
+              </a:lnSpc>
+            </a:pPr>
+            <a:r>
+              <a:rPr sz="1200" b="1" i="0">
+                <a:solidFill>
+                  <a:srgbClr val="FFFFFF"/>
+                </a:solidFill>
+                <a:latin typeface="Aptos"/>
+              </a:rPr>
+              <a:t>1</a:t>
+            </a:r>
+          </a:p>
+        </p:txBody>
+      </p:sp>
+      <p:sp>
+        <p:nvSpPr>
+          <p:cNvPr id="10" name="TextBox 9"/>
+          <p:cNvSpPr txBox="1"/>
+          <p:nvPr/>
+        </p:nvSpPr>
+        <p:spPr>
+          <a:xfrm>
+            <a:off x="1225296" y="2176272"/>
+            <a:ext cx="2816352" cy="256032"/>
+          </a:xfrm>
+          <a:prstGeom prst="rect">
+            <a:avLst/>
+          </a:prstGeom>
+          <a:noFill/>
+        </p:spPr>
+        <p:txBody>
+          <a:bodyPr wrap="square" lIns="0" rIns="0" tIns="0" bIns="0" anchor="t">
+            <a:spAutoFit/>
+          </a:bodyPr>
+          <a:lstStyle/>
+          <a:p>
+            <a:pPr algn="l">
+              <a:lnSpc>
+                <a:spcPct val="115000"/>
+              </a:lnSpc>
+            </a:pPr>
+            <a:r>
+              <a:rPr sz="1400" b="1" i="0">
+                <a:solidFill>
+                  <a:srgbClr val="102A43"/>
+                </a:solidFill>
+                <a:latin typeface="Microsoft YaHei"/>
+              </a:rPr>
+              <a:t>共享数据语义</a:t>
+            </a:r>
+          </a:p>
+        </p:txBody>
+      </p:sp>
+      <p:sp>
+        <p:nvSpPr>
+          <p:cNvPr id="11" name="TextBox 10"/>
+          <p:cNvSpPr txBox="1"/>
+          <p:nvPr/>
+        </p:nvSpPr>
+        <p:spPr>
+          <a:xfrm>
+            <a:off x="822960" y="2542032"/>
+            <a:ext cx="3236976" cy="2944368"/>
+          </a:xfrm>
+          <a:prstGeom prst="rect">
+            <a:avLst/>
+          </a:prstGeom>
+          <a:noFill/>
+        </p:spPr>
+        <p:txBody>
+          <a:bodyPr wrap="square" lIns="0" rIns="0" tIns="0" bIns="0" anchor="t">
+            <a:spAutoFit/>
+          </a:bodyPr>
+          <a:lstStyle/>
+          <a:p>
+            <a:pPr algn="l">
+              <a:lnSpc>
+                <a:spcPct val="115000"/>
+              </a:lnSpc>
+            </a:pPr>
+            <a:r>
+              <a:rPr sz="1120" b="0" i="0">
+                <a:solidFill>
+                  <a:srgbClr val="62748A"/>
+                </a:solidFill>
+                <a:latin typeface="Microsoft YaHei"/>
+              </a:rPr>
+              <a:t>公共题库、个人题库、题目、收藏、错题、答案、进度、考试等能力在 Web 与小程序两端保持同一套后端语义，降低维护复杂度，也让学习记录真正可连续。</a:t>
+            </a:r>
+          </a:p>
+        </p:txBody>
+      </p:sp>
+      <p:sp>
+        <p:nvSpPr>
+          <p:cNvPr id="12" name="Rounded Rectangle 11"/>
+          <p:cNvSpPr/>
+          <p:nvPr/>
+        </p:nvSpPr>
+        <p:spPr>
+          <a:xfrm>
+            <a:off x="4315968" y="2029968"/>
+            <a:ext cx="3566160" cy="3602736"/>
+          </a:xfrm>
+          <a:prstGeom prst="roundRect">
+            <a:avLst>
+              <a:gd name="adj" fmla="val 18000"/>
+            </a:avLst>
+          </a:prstGeom>
+          <a:solidFill>
+            <a:srgbClr val="FFFFFF"/>
+          </a:solidFill>
+          <a:ln w="15240">
+            <a:solidFill>
+              <a:srgbClr val="D9E2EF"/>
+            </a:solidFill>
+          </a:ln>
+        </p:spPr>
+        <p:style>
+          <a:lnRef idx="1">
+            <a:schemeClr val="accent1"/>
+          </a:lnRef>
+          <a:fillRef idx="3">
+            <a:schemeClr val="accent1"/>
+          </a:fillRef>
+          <a:effectRef idx="2">
+            <a:schemeClr val="accent1"/>
+          </a:effectRef>
+          <a:fontRef idx="minor">
+            <a:schemeClr val="lt1"/>
+          </a:fontRef>
+        </p:style>
+        <p:txBody>
+          <a:bodyPr rtlCol="0" anchor="ctr"/>
+          <a:lstStyle/>
+          <a:p>
+            <a:pPr algn="ctr"/>
+          </a:p>
+        </p:txBody>
+      </p:sp>
+      <p:sp>
+        <p:nvSpPr>
+          <p:cNvPr id="13" name="Oval 12"/>
+          <p:cNvSpPr/>
+          <p:nvPr/>
+        </p:nvSpPr>
+        <p:spPr>
+          <a:xfrm>
+            <a:off x="4480560" y="2194560"/>
+            <a:ext cx="310896" cy="310896"/>
+          </a:xfrm>
+          <a:prstGeom prst="ellipse">
+            <a:avLst/>
+          </a:prstGeom>
+          <a:solidFill>
+            <a:srgbClr val="5BC0BE"/>
+          </a:solidFill>
+          <a:ln>
+            <a:noFill/>
+          </a:ln>
+        </p:spPr>
+        <p:style>
+          <a:lnRef idx="1">
+            <a:schemeClr val="accent1"/>
+          </a:lnRef>
+          <a:fillRef idx="3">
+            <a:schemeClr val="accent1"/>
+          </a:fillRef>
+          <a:effectRef idx="2">
+            <a:schemeClr val="accent1"/>
+          </a:effectRef>
+          <a:fontRef idx="minor">
+            <a:schemeClr val="lt1"/>
+          </a:fontRef>
+        </p:style>
+        <p:txBody>
+          <a:bodyPr rtlCol="0" anchor="ctr"/>
+          <a:lstStyle/>
+          <a:p>
+            <a:pPr algn="ctr"/>
+          </a:p>
+        </p:txBody>
+      </p:sp>
+      <p:sp>
+        <p:nvSpPr>
+          <p:cNvPr id="14" name="TextBox 13"/>
+          <p:cNvSpPr txBox="1"/>
+          <p:nvPr/>
+        </p:nvSpPr>
+        <p:spPr>
+          <a:xfrm>
+            <a:off x="4480560" y="2203704"/>
+            <a:ext cx="310896" cy="164592"/>
+          </a:xfrm>
+          <a:prstGeom prst="rect">
+            <a:avLst/>
+          </a:prstGeom>
+          <a:noFill/>
+        </p:spPr>
+        <p:txBody>
+          <a:bodyPr wrap="square" lIns="0" rIns="0" tIns="0" bIns="0" anchor="t">
+            <a:spAutoFit/>
+          </a:bodyPr>
+          <a:lstStyle/>
+          <a:p>
+            <a:pPr algn="ctr">
+              <a:lnSpc>
+                <a:spcPct val="115000"/>
+              </a:lnSpc>
+            </a:pPr>
+            <a:r>
+              <a:rPr sz="1200" b="1" i="0">
+                <a:solidFill>
+                  <a:srgbClr val="FFFFFF"/>
+                </a:solidFill>
+                <a:latin typeface="Aptos"/>
+              </a:rPr>
+              <a:t>2</a:t>
+            </a:r>
+          </a:p>
+        </p:txBody>
+      </p:sp>
+      <p:sp>
+        <p:nvSpPr>
+          <p:cNvPr id="15" name="TextBox 14"/>
+          <p:cNvSpPr txBox="1"/>
+          <p:nvPr/>
+        </p:nvSpPr>
+        <p:spPr>
+          <a:xfrm>
+            <a:off x="4882896" y="2176272"/>
+            <a:ext cx="2816352" cy="256032"/>
+          </a:xfrm>
+          <a:prstGeom prst="rect">
+            <a:avLst/>
+          </a:prstGeom>
+          <a:noFill/>
+        </p:spPr>
+        <p:txBody>
+          <a:bodyPr wrap="square" lIns="0" rIns="0" tIns="0" bIns="0" anchor="t">
+            <a:spAutoFit/>
+          </a:bodyPr>
+          <a:lstStyle/>
+          <a:p>
+            <a:pPr algn="l">
+              <a:lnSpc>
+                <a:spcPct val="115000"/>
+              </a:lnSpc>
+            </a:pPr>
+            <a:r>
+              <a:rPr sz="1400" b="1" i="0">
+                <a:solidFill>
+                  <a:srgbClr val="102A43"/>
+                </a:solidFill>
+                <a:latin typeface="Microsoft YaHei"/>
+              </a:rPr>
+              <a:t>Docker 化可复现</a:t>
+            </a:r>
+          </a:p>
+        </p:txBody>
+      </p:sp>
+      <p:sp>
+        <p:nvSpPr>
+          <p:cNvPr id="16" name="TextBox 15"/>
+          <p:cNvSpPr txBox="1"/>
+          <p:nvPr/>
+        </p:nvSpPr>
+        <p:spPr>
+          <a:xfrm>
+            <a:off x="4480560" y="2542032"/>
+            <a:ext cx="3236976" cy="2944368"/>
+          </a:xfrm>
+          <a:prstGeom prst="rect">
+            <a:avLst/>
+          </a:prstGeom>
+          <a:noFill/>
+        </p:spPr>
+        <p:txBody>
+          <a:bodyPr wrap="square" lIns="0" rIns="0" tIns="0" bIns="0" anchor="t">
+            <a:spAutoFit/>
+          </a:bodyPr>
+          <a:lstStyle/>
+          <a:p>
+            <a:pPr algn="l">
+              <a:lnSpc>
+                <a:spcPct val="115000"/>
+              </a:lnSpc>
+            </a:pPr>
+            <a:r>
+              <a:rPr sz="1120" b="0" i="0">
+                <a:solidFill>
+                  <a:srgbClr val="62748A"/>
+                </a:solidFill>
+                <a:latin typeface="Microsoft YaHei"/>
+              </a:rPr>
+              <a:t>开发环境默认通过 compose.dev.yml 统一拉起 web、worker、postgres、redis、backup。无论课堂演示、现场答辩还是后续交付，都能更稳定地复现运行环境。</a:t>
+            </a:r>
+          </a:p>
+        </p:txBody>
+      </p:sp>
+      <p:sp>
+        <p:nvSpPr>
+          <p:cNvPr id="17" name="Rounded Rectangle 16"/>
+          <p:cNvSpPr/>
+          <p:nvPr/>
+        </p:nvSpPr>
+        <p:spPr>
+          <a:xfrm>
+            <a:off x="7973568" y="2029968"/>
+            <a:ext cx="3566160" cy="3602736"/>
+          </a:xfrm>
+          <a:prstGeom prst="roundRect">
+            <a:avLst>
+              <a:gd name="adj" fmla="val 18000"/>
+            </a:avLst>
+          </a:prstGeom>
+          <a:solidFill>
+            <a:srgbClr val="FFFFFF"/>
+          </a:solidFill>
+          <a:ln w="15240">
+            <a:solidFill>
+              <a:srgbClr val="D9E2EF"/>
+            </a:solidFill>
+          </a:ln>
+        </p:spPr>
+        <p:style>
+          <a:lnRef idx="1">
+            <a:schemeClr val="accent1"/>
+          </a:lnRef>
+          <a:fillRef idx="3">
+            <a:schemeClr val="accent1"/>
+          </a:fillRef>
+          <a:effectRef idx="2">
+            <a:schemeClr val="accent1"/>
+          </a:effectRef>
+          <a:fontRef idx="minor">
+            <a:schemeClr val="lt1"/>
+          </a:fontRef>
+        </p:style>
+        <p:txBody>
+          <a:bodyPr rtlCol="0" anchor="ctr"/>
+          <a:lstStyle/>
+          <a:p>
+            <a:pPr algn="ctr"/>
+          </a:p>
+        </p:txBody>
+      </p:sp>
+      <p:sp>
+        <p:nvSpPr>
+          <p:cNvPr id="18" name="Oval 17"/>
+          <p:cNvSpPr/>
+          <p:nvPr/>
+        </p:nvSpPr>
+        <p:spPr>
+          <a:xfrm>
+            <a:off x="8138160" y="2194560"/>
+            <a:ext cx="310896" cy="310896"/>
+          </a:xfrm>
+          <a:prstGeom prst="ellipse">
+            <a:avLst/>
+          </a:prstGeom>
+          <a:solidFill>
+            <a:srgbClr val="D6B36A"/>
+          </a:solidFill>
+          <a:ln>
+            <a:noFill/>
+          </a:ln>
+        </p:spPr>
+        <p:style>
+          <a:lnRef idx="1">
+            <a:schemeClr val="accent1"/>
+          </a:lnRef>
+          <a:fillRef idx="3">
+            <a:schemeClr val="accent1"/>
+          </a:fillRef>
+          <a:effectRef idx="2">
+            <a:schemeClr val="accent1"/>
+          </a:effectRef>
+          <a:fontRef idx="minor">
+            <a:schemeClr val="lt1"/>
+          </a:fontRef>
+        </p:style>
+        <p:txBody>
+          <a:bodyPr rtlCol="0" anchor="ctr"/>
+          <a:lstStyle/>
+          <a:p>
+            <a:pPr algn="ctr"/>
+          </a:p>
+        </p:txBody>
+      </p:sp>
+      <p:sp>
+        <p:nvSpPr>
+          <p:cNvPr id="19" name="TextBox 18"/>
+          <p:cNvSpPr txBox="1"/>
+          <p:nvPr/>
+        </p:nvSpPr>
+        <p:spPr>
+          <a:xfrm>
+            <a:off x="8138160" y="2203704"/>
+            <a:ext cx="310896" cy="164592"/>
+          </a:xfrm>
+          <a:prstGeom prst="rect">
+            <a:avLst/>
+          </a:prstGeom>
+          <a:noFill/>
+        </p:spPr>
+        <p:txBody>
+          <a:bodyPr wrap="square" lIns="0" rIns="0" tIns="0" bIns="0" anchor="t">
+            <a:spAutoFit/>
+          </a:bodyPr>
+          <a:lstStyle/>
+          <a:p>
+            <a:pPr algn="ctr">
+              <a:lnSpc>
+                <a:spcPct val="115000"/>
+              </a:lnSpc>
+            </a:pPr>
+            <a:r>
+              <a:rPr sz="1200" b="1" i="0">
+                <a:solidFill>
+                  <a:srgbClr val="FFFFFF"/>
+                </a:solidFill>
+                <a:latin typeface="Aptos"/>
+              </a:rPr>
+              <a:t>3</a:t>
+            </a:r>
+          </a:p>
+        </p:txBody>
+      </p:sp>
+      <p:sp>
+        <p:nvSpPr>
+          <p:cNvPr id="20" name="TextBox 19"/>
+          <p:cNvSpPr txBox="1"/>
+          <p:nvPr/>
+        </p:nvSpPr>
+        <p:spPr>
+          <a:xfrm>
+            <a:off x="8540496" y="2176272"/>
+            <a:ext cx="2816352" cy="256032"/>
+          </a:xfrm>
+          <a:prstGeom prst="rect">
+            <a:avLst/>
+          </a:prstGeom>
+          <a:noFill/>
+        </p:spPr>
+        <p:txBody>
+          <a:bodyPr wrap="square" lIns="0" rIns="0" tIns="0" bIns="0" anchor="t">
+            <a:spAutoFit/>
+          </a:bodyPr>
+          <a:lstStyle/>
+          <a:p>
+            <a:pPr algn="l">
+              <a:lnSpc>
+                <a:spcPct val="115000"/>
+              </a:lnSpc>
+            </a:pPr>
+            <a:r>
+              <a:rPr sz="1400" b="1" i="0">
+                <a:solidFill>
+                  <a:srgbClr val="102A43"/>
+                </a:solidFill>
+                <a:latin typeface="Microsoft YaHei"/>
+              </a:rPr>
+              <a:t>AI 学习辅助增强</a:t>
+            </a:r>
+          </a:p>
+        </p:txBody>
+      </p:sp>
+      <p:sp>
+        <p:nvSpPr>
+          <p:cNvPr id="21" name="TextBox 20"/>
+          <p:cNvSpPr txBox="1"/>
+          <p:nvPr/>
+        </p:nvSpPr>
+        <p:spPr>
+          <a:xfrm>
+            <a:off x="8138160" y="2542032"/>
+            <a:ext cx="3236976" cy="2944368"/>
+          </a:xfrm>
+          <a:prstGeom prst="rect">
+            <a:avLst/>
+          </a:prstGeom>
+          <a:noFill/>
+        </p:spPr>
+        <p:txBody>
+          <a:bodyPr wrap="square" lIns="0" rIns="0" tIns="0" bIns="0" anchor="t">
+            <a:spAutoFit/>
+          </a:bodyPr>
+          <a:lstStyle/>
+          <a:p>
+            <a:pPr algn="l">
+              <a:lnSpc>
+                <a:spcPct val="115000"/>
+              </a:lnSpc>
+            </a:pPr>
+            <a:r>
+              <a:rPr sz="1120" b="0" i="0">
+                <a:solidFill>
+                  <a:srgbClr val="62748A"/>
+                </a:solidFill>
+                <a:latin typeface="Microsoft YaHei"/>
+              </a:rPr>
+              <a:t>围绕刷题流程补充 AI 解析、主观题判分与后台 AI 配置能力，让系统更贴近教学、练习与复盘的真实场景。</a:t>
+            </a:r>
+          </a:p>
+        </p:txBody>
+      </p:sp>
+      <p:sp>
+        <p:nvSpPr>
+          <p:cNvPr id="22" name="TextBox 21"/>
+          <p:cNvSpPr txBox="1"/>
+          <p:nvPr/>
+        </p:nvSpPr>
+        <p:spPr>
+          <a:xfrm>
+            <a:off x="658368" y="6473952"/>
+            <a:ext cx="2926080" cy="182880"/>
+          </a:xfrm>
+          <a:prstGeom prst="rect">
+            <a:avLst/>
+          </a:prstGeom>
+          <a:noFill/>
+        </p:spPr>
+        <p:txBody>
+          <a:bodyPr wrap="square" lIns="0" rIns="0" tIns="0" bIns="0" anchor="t">
+            <a:spAutoFit/>
+          </a:bodyPr>
+          <a:lstStyle/>
+          <a:p>
+            <a:pPr algn="l">
+              <a:lnSpc>
+                <a:spcPct val="115000"/>
+              </a:lnSpc>
+            </a:pPr>
+            <a:r>
+              <a:rPr sz="950" b="0" i="0">
+                <a:solidFill>
+                  <a:srgbClr val="94A3B8"/>
+                </a:solidFill>
+                <a:latin typeface="Aptos"/>
+              </a:rPr>
+              <a:t>Sak-AI答题助手｜答辩演示</a:t>
+            </a:r>
+          </a:p>
+        </p:txBody>
+      </p:sp>
+      <p:sp>
+        <p:nvSpPr>
+          <p:cNvPr id="23" name="TextBox 22"/>
+          <p:cNvSpPr txBox="1"/>
+          <p:nvPr/>
+        </p:nvSpPr>
+        <p:spPr>
+          <a:xfrm>
+            <a:off x="11384280" y="6400800"/>
+            <a:ext cx="347472" cy="219456"/>
+          </a:xfrm>
+          <a:prstGeom prst="rect">
+            <a:avLst/>
+          </a:prstGeom>
+          <a:noFill/>
+        </p:spPr>
+        <p:txBody>
+          <a:bodyPr wrap="square" lIns="0" rIns="0" tIns="0" bIns="0" anchor="t">
+            <a:spAutoFit/>
+          </a:bodyPr>
+          <a:lstStyle/>
+          <a:p>
+            <a:pPr algn="r">
+              <a:lnSpc>
+                <a:spcPct val="115000"/>
+              </a:lnSpc>
+            </a:pPr>
+            <a:r>
+              <a:rPr sz="1100" b="1" i="0">
+                <a:solidFill>
+                  <a:srgbClr val="17324D"/>
+                </a:solidFill>
+                <a:latin typeface="Aptos"/>
+              </a:rPr>
+              <a:t>13</a:t>
+            </a:r>
+          </a:p>
+        </p:txBody>
+      </p:sp>
+    </p:spTree>
+  </p:cSld>
+  <p:clrMapOvr>
+    <a:masterClrMapping/>
+  </p:clrMapOvr>
+</p:sld>
+</file>
+
+<file path=ppt/slides/slide14.xml><?xml version="1.0" encoding="utf-8"?>
+<p:sld xmlns:a="http://schemas.openxmlformats.org/drawingml/2006/main" xmlns:p="http://schemas.openxmlformats.org/presentationml/2006/main" xmlns:r="http://schemas.openxmlformats.org/officeDocument/2006/relationships">
+  <p:cSld>
+    <p:spTree>
+      <p:nvGrpSpPr>
+        <p:cNvPr id="1" name=""/>
+        <p:cNvGrpSpPr/>
+        <p:nvPr/>
+      </p:nvGrpSpPr>
+      <p:grpSpPr/>
+      <p:pic>
+        <p:nvPicPr>
+          <p:cNvPr id="2" name="Picture 1" descr="bg_light_2.png"/>
+          <p:cNvPicPr>
+            <a:picLocks noChangeAspect="1"/>
+          </p:cNvPicPr>
+          <p:nvPr/>
+        </p:nvPicPr>
+        <p:blipFill>
+          <a:blip r:embed="rId2"/>
+          <a:stretch>
+            <a:fillRect/>
+          </a:stretch>
+        </p:blipFill>
+        <p:spPr>
+          <a:xfrm>
+            <a:off x="0" y="0"/>
+            <a:ext cx="12191695" cy="6858000"/>
+          </a:xfrm>
+          <a:prstGeom prst="rect">
+            <a:avLst/>
+          </a:prstGeom>
+        </p:spPr>
+      </p:pic>
+      <p:sp>
+        <p:nvSpPr>
+          <p:cNvPr id="3" name="TextBox 2"/>
+          <p:cNvSpPr txBox="1"/>
+          <p:nvPr/>
+        </p:nvSpPr>
+        <p:spPr>
+          <a:xfrm>
+            <a:off x="658368" y="475488"/>
+            <a:ext cx="2743200" cy="256032"/>
+          </a:xfrm>
+          <a:prstGeom prst="rect">
+            <a:avLst/>
+          </a:prstGeom>
+          <a:noFill/>
+        </p:spPr>
+        <p:txBody>
+          <a:bodyPr wrap="square" lIns="0" rIns="0" tIns="0" bIns="0" anchor="t">
+            <a:spAutoFit/>
+          </a:bodyPr>
+          <a:lstStyle/>
+          <a:p>
+            <a:pPr algn="l">
+              <a:lnSpc>
+                <a:spcPct val="115000"/>
+              </a:lnSpc>
+            </a:pPr>
+            <a:r>
+              <a:rPr sz="1200" b="1" i="0">
+                <a:solidFill>
+                  <a:srgbClr val="4F6EF7"/>
+                </a:solidFill>
+                <a:latin typeface="Aptos"/>
+              </a:rPr>
+              <a:t>VALIDATION</a:t>
+            </a:r>
+          </a:p>
+        </p:txBody>
+      </p:sp>
+      <p:sp>
+        <p:nvSpPr>
+          <p:cNvPr id="4" name="Rectangle 3"/>
+          <p:cNvSpPr/>
+          <p:nvPr/>
+        </p:nvSpPr>
+        <p:spPr>
+          <a:xfrm>
+            <a:off x="658368" y="804672"/>
+            <a:ext cx="694944" cy="54864"/>
+          </a:xfrm>
+          <a:prstGeom prst="rect">
+            <a:avLst/>
+          </a:prstGeom>
+          <a:solidFill>
+            <a:srgbClr val="4F6EF7"/>
+          </a:solidFill>
+          <a:ln>
+            <a:noFill/>
+          </a:ln>
+        </p:spPr>
+        <p:style>
+          <a:lnRef idx="1">
+            <a:schemeClr val="accent1"/>
+          </a:lnRef>
+          <a:fillRef idx="3">
+            <a:schemeClr val="accent1"/>
+          </a:fillRef>
+          <a:effectRef idx="2">
+            <a:schemeClr val="accent1"/>
+          </a:effectRef>
+          <a:fontRef idx="minor">
+            <a:schemeClr val="lt1"/>
+          </a:fontRef>
+        </p:style>
+        <p:txBody>
+          <a:bodyPr rtlCol="0" anchor="ctr"/>
+          <a:lstStyle/>
+          <a:p>
+            <a:pPr algn="ctr"/>
+          </a:p>
+        </p:txBody>
+      </p:sp>
+      <p:sp>
+        <p:nvSpPr>
+          <p:cNvPr id="5" name="TextBox 4"/>
+          <p:cNvSpPr txBox="1"/>
+          <p:nvPr/>
+        </p:nvSpPr>
+        <p:spPr>
+          <a:xfrm>
+            <a:off x="658368" y="914400"/>
+            <a:ext cx="6217920" cy="530352"/>
+          </a:xfrm>
+          <a:prstGeom prst="rect">
+            <a:avLst/>
+          </a:prstGeom>
+          <a:noFill/>
+        </p:spPr>
+        <p:txBody>
+          <a:bodyPr wrap="square" lIns="0" rIns="0" tIns="0" bIns="0" anchor="t">
+            <a:spAutoFit/>
+          </a:bodyPr>
+          <a:lstStyle/>
+          <a:p>
+            <a:pPr algn="l">
+              <a:lnSpc>
+                <a:spcPct val="115000"/>
+              </a:lnSpc>
+            </a:pPr>
+            <a:r>
+              <a:rPr sz="2800" b="1" i="0">
+                <a:solidFill>
+                  <a:srgbClr val="102A43"/>
+                </a:solidFill>
+                <a:latin typeface="Microsoft YaHei"/>
+              </a:rPr>
+              <a:t>工程验证与答辩可演示性</a:t>
+            </a:r>
+          </a:p>
+        </p:txBody>
+      </p:sp>
+      <p:sp>
+        <p:nvSpPr>
+          <p:cNvPr id="6" name="TextBox 5"/>
+          <p:cNvSpPr txBox="1"/>
+          <p:nvPr/>
+        </p:nvSpPr>
+        <p:spPr>
+          <a:xfrm>
+            <a:off x="658368" y="1426464"/>
+            <a:ext cx="7132320" cy="384048"/>
+          </a:xfrm>
+          <a:prstGeom prst="rect">
+            <a:avLst/>
+          </a:prstGeom>
+          <a:noFill/>
+        </p:spPr>
+        <p:txBody>
+          <a:bodyPr wrap="square" lIns="0" rIns="0" tIns="0" bIns="0" anchor="t">
+            <a:spAutoFit/>
+          </a:bodyPr>
+          <a:lstStyle/>
+          <a:p>
+            <a:pPr algn="l">
+              <a:lnSpc>
+                <a:spcPct val="115000"/>
+              </a:lnSpc>
+            </a:pPr>
+            <a:r>
+              <a:rPr sz="1350" b="0" i="0">
+                <a:solidFill>
+                  <a:srgbClr val="62748A"/>
+                </a:solidFill>
+                <a:latin typeface="Microsoft YaHei"/>
+              </a:rPr>
+              <a:t>答辩现场不仅要讲清功能，还要展示项目具备稳定运行与工程交付能力。</a:t>
+            </a:r>
+          </a:p>
+        </p:txBody>
+      </p:sp>
+      <p:sp>
+        <p:nvSpPr>
+          <p:cNvPr id="7" name="Rounded Rectangle 6"/>
+          <p:cNvSpPr/>
+          <p:nvPr/>
+        </p:nvSpPr>
+        <p:spPr>
+          <a:xfrm>
+            <a:off x="658368" y="1920240"/>
+            <a:ext cx="2194560" cy="1225296"/>
+          </a:xfrm>
+          <a:prstGeom prst="roundRect">
+            <a:avLst>
+              <a:gd name="adj" fmla="val 22000"/>
+            </a:avLst>
+          </a:prstGeom>
+          <a:solidFill>
+            <a:srgbClr val="FFFFFF"/>
+          </a:solidFill>
+          <a:ln w="15240">
+            <a:solidFill>
+              <a:srgbClr val="D9E2EF"/>
+            </a:solidFill>
+          </a:ln>
+        </p:spPr>
+        <p:style>
+          <a:lnRef idx="1">
+            <a:schemeClr val="accent1"/>
+          </a:lnRef>
+          <a:fillRef idx="3">
+            <a:schemeClr val="accent1"/>
+          </a:fillRef>
+          <a:effectRef idx="2">
+            <a:schemeClr val="accent1"/>
+          </a:effectRef>
+          <a:fontRef idx="minor">
+            <a:schemeClr val="lt1"/>
+          </a:fontRef>
+        </p:style>
+        <p:txBody>
+          <a:bodyPr rtlCol="0" anchor="ctr"/>
+          <a:lstStyle/>
+          <a:p>
+            <a:pPr algn="ctr"/>
+          </a:p>
+        </p:txBody>
+      </p:sp>
+      <p:sp>
+        <p:nvSpPr>
+          <p:cNvPr id="8" name="TextBox 7"/>
+          <p:cNvSpPr txBox="1"/>
+          <p:nvPr/>
+        </p:nvSpPr>
+        <p:spPr>
+          <a:xfrm>
+            <a:off x="886968" y="2057400"/>
+            <a:ext cx="1737360" cy="438912"/>
+          </a:xfrm>
+          <a:prstGeom prst="rect">
+            <a:avLst/>
+          </a:prstGeom>
+          <a:noFill/>
+        </p:spPr>
+        <p:txBody>
+          <a:bodyPr wrap="square" lIns="0" rIns="0" tIns="0" bIns="0" anchor="t">
+            <a:spAutoFit/>
+          </a:bodyPr>
+          <a:lstStyle/>
+          <a:p>
+            <a:pPr algn="l">
+              <a:lnSpc>
+                <a:spcPct val="115000"/>
+              </a:lnSpc>
+            </a:pPr>
+            <a:r>
+              <a:rPr sz="2400" b="1" i="0">
+                <a:solidFill>
+                  <a:srgbClr val="4F6EF7"/>
+                </a:solidFill>
+                <a:latin typeface="Aptos"/>
+              </a:rPr>
+              <a:t>8000</a:t>
+            </a:r>
+          </a:p>
+        </p:txBody>
+      </p:sp>
+      <p:sp>
+        <p:nvSpPr>
+          <p:cNvPr id="9" name="TextBox 8"/>
+          <p:cNvSpPr txBox="1"/>
+          <p:nvPr/>
+        </p:nvSpPr>
+        <p:spPr>
+          <a:xfrm>
+            <a:off x="886968" y="2487168"/>
+            <a:ext cx="1737360" cy="310896"/>
+          </a:xfrm>
+          <a:prstGeom prst="rect">
+            <a:avLst/>
+          </a:prstGeom>
+          <a:noFill/>
+        </p:spPr>
+        <p:txBody>
+          <a:bodyPr wrap="square" lIns="0" rIns="0" tIns="0" bIns="0" anchor="t">
+            <a:spAutoFit/>
+          </a:bodyPr>
+          <a:lstStyle/>
+          <a:p>
+            <a:pPr algn="l">
+              <a:lnSpc>
+                <a:spcPct val="115000"/>
+              </a:lnSpc>
+            </a:pPr>
+            <a:r>
+              <a:rPr sz="1250" b="1" i="0">
+                <a:solidFill>
+                  <a:srgbClr val="17324D"/>
+                </a:solidFill>
+                <a:latin typeface="Microsoft YaHei"/>
+              </a:rPr>
+              <a:t>Web 暴露端口</a:t>
+            </a:r>
+          </a:p>
+        </p:txBody>
+      </p:sp>
+      <p:sp>
+        <p:nvSpPr>
+          <p:cNvPr id="10" name="TextBox 9"/>
+          <p:cNvSpPr txBox="1"/>
+          <p:nvPr/>
+        </p:nvSpPr>
+        <p:spPr>
+          <a:xfrm>
+            <a:off x="886968" y="2788920"/>
+            <a:ext cx="1737360" cy="256032"/>
+          </a:xfrm>
+          <a:prstGeom prst="rect">
+            <a:avLst/>
+          </a:prstGeom>
+          <a:noFill/>
+        </p:spPr>
+        <p:txBody>
+          <a:bodyPr wrap="square" lIns="0" rIns="0" tIns="0" bIns="0" anchor="t">
+            <a:spAutoFit/>
+          </a:bodyPr>
+          <a:lstStyle/>
+          <a:p>
+            <a:pPr algn="l">
+              <a:lnSpc>
+                <a:spcPct val="115000"/>
+              </a:lnSpc>
+            </a:pPr>
+            <a:r>
+              <a:rPr sz="1050" b="0" i="0">
+                <a:solidFill>
+                  <a:srgbClr val="62748A"/>
+                </a:solidFill>
+                <a:latin typeface="Microsoft YaHei"/>
+              </a:rPr>
+              <a:t>compose.dev.yml：flask run --reload</a:t>
+            </a:r>
+          </a:p>
+        </p:txBody>
+      </p:sp>
+      <p:sp>
+        <p:nvSpPr>
+          <p:cNvPr id="11" name="Rounded Rectangle 10"/>
+          <p:cNvSpPr/>
+          <p:nvPr/>
+        </p:nvSpPr>
+        <p:spPr>
+          <a:xfrm>
+            <a:off x="3072384" y="1920240"/>
+            <a:ext cx="2194560" cy="1225296"/>
+          </a:xfrm>
+          <a:prstGeom prst="roundRect">
+            <a:avLst>
+              <a:gd name="adj" fmla="val 22000"/>
+            </a:avLst>
+          </a:prstGeom>
+          <a:solidFill>
+            <a:srgbClr val="FFFFFF"/>
+          </a:solidFill>
+          <a:ln w="15240">
+            <a:solidFill>
+              <a:srgbClr val="D9E2EF"/>
+            </a:solidFill>
+          </a:ln>
+        </p:spPr>
+        <p:style>
+          <a:lnRef idx="1">
+            <a:schemeClr val="accent1"/>
+          </a:lnRef>
+          <a:fillRef idx="3">
+            <a:schemeClr val="accent1"/>
+          </a:fillRef>
+          <a:effectRef idx="2">
+            <a:schemeClr val="accent1"/>
+          </a:effectRef>
+          <a:fontRef idx="minor">
+            <a:schemeClr val="lt1"/>
+          </a:fontRef>
+        </p:style>
+        <p:txBody>
+          <a:bodyPr rtlCol="0" anchor="ctr"/>
+          <a:lstStyle/>
+          <a:p>
+            <a:pPr algn="ctr"/>
+          </a:p>
+        </p:txBody>
+      </p:sp>
+      <p:sp>
+        <p:nvSpPr>
+          <p:cNvPr id="12" name="TextBox 11"/>
+          <p:cNvSpPr txBox="1"/>
+          <p:nvPr/>
+        </p:nvSpPr>
+        <p:spPr>
+          <a:xfrm>
+            <a:off x="3300984" y="2057400"/>
+            <a:ext cx="1737360" cy="438912"/>
+          </a:xfrm>
+          <a:prstGeom prst="rect">
+            <a:avLst/>
+          </a:prstGeom>
+          <a:noFill/>
+        </p:spPr>
+        <p:txBody>
+          <a:bodyPr wrap="square" lIns="0" rIns="0" tIns="0" bIns="0" anchor="t">
+            <a:spAutoFit/>
+          </a:bodyPr>
+          <a:lstStyle/>
+          <a:p>
+            <a:pPr algn="l">
+              <a:lnSpc>
+                <a:spcPct val="115000"/>
+              </a:lnSpc>
+            </a:pPr>
+            <a:r>
+              <a:rPr sz="2400" b="1" i="0">
+                <a:solidFill>
+                  <a:srgbClr val="5BC0BE"/>
+                </a:solidFill>
+                <a:latin typeface="Aptos"/>
+              </a:rPr>
+              <a:t>/api/ping</a:t>
+            </a:r>
+          </a:p>
+        </p:txBody>
+      </p:sp>
+      <p:sp>
+        <p:nvSpPr>
+          <p:cNvPr id="13" name="TextBox 12"/>
+          <p:cNvSpPr txBox="1"/>
+          <p:nvPr/>
+        </p:nvSpPr>
+        <p:spPr>
+          <a:xfrm>
+            <a:off x="3300984" y="2487168"/>
+            <a:ext cx="1737360" cy="310896"/>
+          </a:xfrm>
+          <a:prstGeom prst="rect">
+            <a:avLst/>
+          </a:prstGeom>
+          <a:noFill/>
+        </p:spPr>
+        <p:txBody>
+          <a:bodyPr wrap="square" lIns="0" rIns="0" tIns="0" bIns="0" anchor="t">
+            <a:spAutoFit/>
+          </a:bodyPr>
+          <a:lstStyle/>
+          <a:p>
+            <a:pPr algn="l">
+              <a:lnSpc>
+                <a:spcPct val="115000"/>
+              </a:lnSpc>
+            </a:pPr>
+            <a:r>
+              <a:rPr sz="1250" b="1" i="0">
+                <a:solidFill>
+                  <a:srgbClr val="17324D"/>
+                </a:solidFill>
+                <a:latin typeface="Microsoft YaHei"/>
+              </a:rPr>
+              <a:t>健康检查</a:t>
+            </a:r>
+          </a:p>
+        </p:txBody>
+      </p:sp>
+      <p:sp>
+        <p:nvSpPr>
+          <p:cNvPr id="14" name="TextBox 13"/>
+          <p:cNvSpPr txBox="1"/>
+          <p:nvPr/>
+        </p:nvSpPr>
+        <p:spPr>
+          <a:xfrm>
+            <a:off x="3300984" y="2788920"/>
+            <a:ext cx="1737360" cy="256032"/>
+          </a:xfrm>
+          <a:prstGeom prst="rect">
+            <a:avLst/>
+          </a:prstGeom>
+          <a:noFill/>
+        </p:spPr>
+        <p:txBody>
+          <a:bodyPr wrap="square" lIns="0" rIns="0" tIns="0" bIns="0" anchor="t">
+            <a:spAutoFit/>
+          </a:bodyPr>
+          <a:lstStyle/>
+          <a:p>
+            <a:pPr algn="l">
+              <a:lnSpc>
+                <a:spcPct val="115000"/>
+              </a:lnSpc>
+            </a:pPr>
+            <a:r>
+              <a:rPr sz="1050" b="0" i="0">
+                <a:solidFill>
+                  <a:srgbClr val="62748A"/>
+                </a:solidFill>
+                <a:latin typeface="Microsoft YaHei"/>
+              </a:rPr>
+              <a:t>支持基础与 deep=1 检查</a:t>
+            </a:r>
+          </a:p>
+        </p:txBody>
+      </p:sp>
+      <p:sp>
+        <p:nvSpPr>
+          <p:cNvPr id="15" name="Rounded Rectangle 14"/>
+          <p:cNvSpPr/>
+          <p:nvPr/>
+        </p:nvSpPr>
+        <p:spPr>
+          <a:xfrm>
+            <a:off x="5486400" y="1920240"/>
+            <a:ext cx="2194560" cy="1225296"/>
+          </a:xfrm>
+          <a:prstGeom prst="roundRect">
+            <a:avLst>
+              <a:gd name="adj" fmla="val 22000"/>
+            </a:avLst>
+          </a:prstGeom>
+          <a:solidFill>
+            <a:srgbClr val="FFFFFF"/>
+          </a:solidFill>
+          <a:ln w="15240">
+            <a:solidFill>
+              <a:srgbClr val="D9E2EF"/>
+            </a:solidFill>
+          </a:ln>
+        </p:spPr>
+        <p:style>
+          <a:lnRef idx="1">
+            <a:schemeClr val="accent1"/>
+          </a:lnRef>
+          <a:fillRef idx="3">
+            <a:schemeClr val="accent1"/>
+          </a:fillRef>
+          <a:effectRef idx="2">
+            <a:schemeClr val="accent1"/>
+          </a:effectRef>
+          <a:fontRef idx="minor">
+            <a:schemeClr val="lt1"/>
+          </a:fontRef>
+        </p:style>
+        <p:txBody>
+          <a:bodyPr rtlCol="0" anchor="ctr"/>
+          <a:lstStyle/>
+          <a:p>
+            <a:pPr algn="ctr"/>
+          </a:p>
+        </p:txBody>
+      </p:sp>
+      <p:sp>
+        <p:nvSpPr>
+          <p:cNvPr id="16" name="TextBox 15"/>
+          <p:cNvSpPr txBox="1"/>
+          <p:nvPr/>
+        </p:nvSpPr>
+        <p:spPr>
+          <a:xfrm>
+            <a:off x="5715000" y="2057400"/>
+            <a:ext cx="1737360" cy="438912"/>
+          </a:xfrm>
+          <a:prstGeom prst="rect">
+            <a:avLst/>
+          </a:prstGeom>
+          <a:noFill/>
+        </p:spPr>
+        <p:txBody>
+          <a:bodyPr wrap="square" lIns="0" rIns="0" tIns="0" bIns="0" anchor="t">
+            <a:spAutoFit/>
+          </a:bodyPr>
+          <a:lstStyle/>
+          <a:p>
+            <a:pPr algn="l">
+              <a:lnSpc>
+                <a:spcPct val="115000"/>
+              </a:lnSpc>
+            </a:pPr>
+            <a:r>
+              <a:rPr sz="2400" b="1" i="0">
+                <a:solidFill>
+                  <a:srgbClr val="D6B36A"/>
+                </a:solidFill>
+                <a:latin typeface="Aptos"/>
+              </a:rPr>
+              <a:t>PostgreSQL 16</a:t>
+            </a:r>
+          </a:p>
+        </p:txBody>
+      </p:sp>
+      <p:sp>
+        <p:nvSpPr>
+          <p:cNvPr id="17" name="TextBox 16"/>
+          <p:cNvSpPr txBox="1"/>
+          <p:nvPr/>
+        </p:nvSpPr>
+        <p:spPr>
+          <a:xfrm>
+            <a:off x="5715000" y="2487168"/>
+            <a:ext cx="1737360" cy="310896"/>
+          </a:xfrm>
+          <a:prstGeom prst="rect">
+            <a:avLst/>
+          </a:prstGeom>
+          <a:noFill/>
+        </p:spPr>
+        <p:txBody>
+          <a:bodyPr wrap="square" lIns="0" rIns="0" tIns="0" bIns="0" anchor="t">
+            <a:spAutoFit/>
+          </a:bodyPr>
+          <a:lstStyle/>
+          <a:p>
+            <a:pPr algn="l">
+              <a:lnSpc>
+                <a:spcPct val="115000"/>
+              </a:lnSpc>
+            </a:pPr>
+            <a:r>
+              <a:rPr sz="1250" b="1" i="0">
+                <a:solidFill>
+                  <a:srgbClr val="17324D"/>
+                </a:solidFill>
+                <a:latin typeface="Microsoft YaHei"/>
+              </a:rPr>
+              <a:t>开发默认数据库</a:t>
+            </a:r>
+          </a:p>
+        </p:txBody>
+      </p:sp>
+      <p:sp>
+        <p:nvSpPr>
+          <p:cNvPr id="18" name="TextBox 17"/>
+          <p:cNvSpPr txBox="1"/>
+          <p:nvPr/>
+        </p:nvSpPr>
+        <p:spPr>
+          <a:xfrm>
+            <a:off x="5715000" y="2788920"/>
+            <a:ext cx="1737360" cy="256032"/>
+          </a:xfrm>
+          <a:prstGeom prst="rect">
+            <a:avLst/>
+          </a:prstGeom>
+          <a:noFill/>
+        </p:spPr>
+        <p:txBody>
+          <a:bodyPr wrap="square" lIns="0" rIns="0" tIns="0" bIns="0" anchor="t">
+            <a:spAutoFit/>
+          </a:bodyPr>
+          <a:lstStyle/>
+          <a:p>
+            <a:pPr algn="l">
+              <a:lnSpc>
+                <a:spcPct val="115000"/>
+              </a:lnSpc>
+            </a:pPr>
+            <a:r>
+              <a:rPr sz="1050" b="0" i="0">
+                <a:solidFill>
+                  <a:srgbClr val="62748A"/>
+                </a:solidFill>
+                <a:latin typeface="Microsoft YaHei"/>
+              </a:rPr>
+              <a:t>Redis + RQ 协同运行</a:t>
+            </a:r>
+          </a:p>
+        </p:txBody>
+      </p:sp>
+      <p:sp>
+        <p:nvSpPr>
+          <p:cNvPr id="19" name="Rounded Rectangle 18"/>
+          <p:cNvSpPr/>
+          <p:nvPr/>
+        </p:nvSpPr>
+        <p:spPr>
+          <a:xfrm>
+            <a:off x="7900416" y="1920240"/>
+            <a:ext cx="2743200" cy="1225296"/>
+          </a:xfrm>
+          <a:prstGeom prst="roundRect">
+            <a:avLst>
+              <a:gd name="adj" fmla="val 22000"/>
+            </a:avLst>
+          </a:prstGeom>
+          <a:solidFill>
+            <a:srgbClr val="FFFFFF"/>
+          </a:solidFill>
+          <a:ln w="15240">
+            <a:solidFill>
+              <a:srgbClr val="D9E2EF"/>
+            </a:solidFill>
+          </a:ln>
+        </p:spPr>
+        <p:style>
+          <a:lnRef idx="1">
+            <a:schemeClr val="accent1"/>
+          </a:lnRef>
+          <a:fillRef idx="3">
+            <a:schemeClr val="accent1"/>
+          </a:fillRef>
+          <a:effectRef idx="2">
+            <a:schemeClr val="accent1"/>
+          </a:effectRef>
+          <a:fontRef idx="minor">
+            <a:schemeClr val="lt1"/>
+          </a:fontRef>
+        </p:style>
+        <p:txBody>
+          <a:bodyPr rtlCol="0" anchor="ctr"/>
+          <a:lstStyle/>
+          <a:p>
+            <a:pPr algn="ctr"/>
+          </a:p>
+        </p:txBody>
+      </p:sp>
+      <p:sp>
+        <p:nvSpPr>
+          <p:cNvPr id="20" name="TextBox 19"/>
+          <p:cNvSpPr txBox="1"/>
+          <p:nvPr/>
+        </p:nvSpPr>
+        <p:spPr>
+          <a:xfrm>
+            <a:off x="8129016" y="2057400"/>
+            <a:ext cx="2286000" cy="438912"/>
+          </a:xfrm>
+          <a:prstGeom prst="rect">
+            <a:avLst/>
+          </a:prstGeom>
+          <a:noFill/>
+        </p:spPr>
+        <p:txBody>
+          <a:bodyPr wrap="square" lIns="0" rIns="0" tIns="0" bIns="0" anchor="t">
+            <a:spAutoFit/>
+          </a:bodyPr>
+          <a:lstStyle/>
+          <a:p>
+            <a:pPr algn="l">
+              <a:lnSpc>
+                <a:spcPct val="115000"/>
+              </a:lnSpc>
+            </a:pPr>
+            <a:r>
+              <a:rPr sz="2400" b="1" i="0">
+                <a:solidFill>
+                  <a:srgbClr val="4F6EF7"/>
+                </a:solidFill>
+                <a:latin typeface="Aptos"/>
+              </a:rPr>
+              <a:t>5 项服务</a:t>
+            </a:r>
+          </a:p>
+        </p:txBody>
+      </p:sp>
+      <p:sp>
+        <p:nvSpPr>
+          <p:cNvPr id="21" name="TextBox 20"/>
+          <p:cNvSpPr txBox="1"/>
+          <p:nvPr/>
+        </p:nvSpPr>
+        <p:spPr>
+          <a:xfrm>
+            <a:off x="8129016" y="2487168"/>
+            <a:ext cx="2286000" cy="310896"/>
+          </a:xfrm>
+          <a:prstGeom prst="rect">
+            <a:avLst/>
+          </a:prstGeom>
+          <a:noFill/>
+        </p:spPr>
+        <p:txBody>
+          <a:bodyPr wrap="square" lIns="0" rIns="0" tIns="0" bIns="0" anchor="t">
+            <a:spAutoFit/>
+          </a:bodyPr>
+          <a:lstStyle/>
+          <a:p>
+            <a:pPr algn="l">
+              <a:lnSpc>
+                <a:spcPct val="115000"/>
+              </a:lnSpc>
+            </a:pPr>
+            <a:r>
+              <a:rPr sz="1250" b="1" i="0">
+                <a:solidFill>
+                  <a:srgbClr val="17324D"/>
+                </a:solidFill>
+                <a:latin typeface="Microsoft YaHei"/>
+              </a:rPr>
+              <a:t>容器编排</a:t>
+            </a:r>
+          </a:p>
+        </p:txBody>
+      </p:sp>
+      <p:sp>
+        <p:nvSpPr>
+          <p:cNvPr id="22" name="TextBox 21"/>
+          <p:cNvSpPr txBox="1"/>
+          <p:nvPr/>
+        </p:nvSpPr>
+        <p:spPr>
+          <a:xfrm>
+            <a:off x="8129016" y="2788920"/>
+            <a:ext cx="2286000" cy="256032"/>
+          </a:xfrm>
+          <a:prstGeom prst="rect">
+            <a:avLst/>
+          </a:prstGeom>
+          <a:noFill/>
+        </p:spPr>
+        <p:txBody>
+          <a:bodyPr wrap="square" lIns="0" rIns="0" tIns="0" bIns="0" anchor="t">
+            <a:spAutoFit/>
+          </a:bodyPr>
+          <a:lstStyle/>
+          <a:p>
+            <a:pPr algn="l">
+              <a:lnSpc>
+                <a:spcPct val="115000"/>
+              </a:lnSpc>
+            </a:pPr>
+            <a:r>
+              <a:rPr sz="1050" b="0" i="0">
+                <a:solidFill>
+                  <a:srgbClr val="62748A"/>
+                </a:solidFill>
+                <a:latin typeface="Microsoft YaHei"/>
+              </a:rPr>
+              <a:t>web / worker / postgres / redis / backup</a:t>
+            </a:r>
+          </a:p>
+        </p:txBody>
+      </p:sp>
+      <p:sp>
+        <p:nvSpPr>
+          <p:cNvPr id="23" name="Rounded Rectangle 22"/>
+          <p:cNvSpPr/>
+          <p:nvPr/>
+        </p:nvSpPr>
+        <p:spPr>
+          <a:xfrm>
+            <a:off x="658368" y="3493008"/>
+            <a:ext cx="5257800" cy="2651760"/>
+          </a:xfrm>
+          <a:prstGeom prst="roundRect">
+            <a:avLst>
+              <a:gd name="adj" fmla="val 18000"/>
+            </a:avLst>
+          </a:prstGeom>
+          <a:solidFill>
+            <a:srgbClr val="FFFFFF"/>
+          </a:solidFill>
+          <a:ln w="15240">
+            <a:solidFill>
+              <a:srgbClr val="D9E2EF"/>
+            </a:solidFill>
+          </a:ln>
+        </p:spPr>
+        <p:style>
+          <a:lnRef idx="1">
+            <a:schemeClr val="accent1"/>
+          </a:lnRef>
+          <a:fillRef idx="3">
+            <a:schemeClr val="accent1"/>
+          </a:fillRef>
+          <a:effectRef idx="2">
+            <a:schemeClr val="accent1"/>
+          </a:effectRef>
+          <a:fontRef idx="minor">
+            <a:schemeClr val="lt1"/>
+          </a:fontRef>
+        </p:style>
+        <p:txBody>
+          <a:bodyPr rtlCol="0" anchor="ctr"/>
+          <a:lstStyle/>
+          <a:p>
+            <a:pPr algn="ctr"/>
+          </a:p>
+        </p:txBody>
+      </p:sp>
+      <p:sp>
+        <p:nvSpPr>
+          <p:cNvPr id="24" name="Rounded Rectangle 23"/>
+          <p:cNvSpPr/>
+          <p:nvPr/>
+        </p:nvSpPr>
+        <p:spPr>
+          <a:xfrm>
+            <a:off x="932688" y="3730752"/>
+            <a:ext cx="1143000" cy="292608"/>
+          </a:xfrm>
+          <a:prstGeom prst="roundRect">
+            <a:avLst>
+              <a:gd name="adj" fmla="val 35000"/>
+            </a:avLst>
+          </a:prstGeom>
+          <a:solidFill>
+            <a:srgbClr val="EEF4FF"/>
+          </a:solidFill>
+          <a:ln w="12700">
+            <a:solidFill>
+              <a:srgbClr val="D7E2F2"/>
+            </a:solidFill>
+          </a:ln>
+        </p:spPr>
+        <p:style>
+          <a:lnRef idx="1">
+            <a:schemeClr val="accent1"/>
+          </a:lnRef>
+          <a:fillRef idx="3">
+            <a:schemeClr val="accent1"/>
+          </a:fillRef>
+          <a:effectRef idx="2">
+            <a:schemeClr val="accent1"/>
+          </a:effectRef>
+          <a:fontRef idx="minor">
+            <a:schemeClr val="lt1"/>
+          </a:fontRef>
+        </p:style>
+        <p:txBody>
+          <a:bodyPr rtlCol="0" anchor="ctr"/>
+          <a:lstStyle/>
+          <a:p>
+            <a:pPr algn="ctr"/>
+          </a:p>
+        </p:txBody>
+      </p:sp>
+      <p:sp>
+        <p:nvSpPr>
+          <p:cNvPr id="25" name="TextBox 24"/>
+          <p:cNvSpPr txBox="1"/>
+          <p:nvPr/>
+        </p:nvSpPr>
+        <p:spPr>
+          <a:xfrm>
+            <a:off x="1042416" y="3785616"/>
+            <a:ext cx="923544" cy="182880"/>
+          </a:xfrm>
+          <a:prstGeom prst="rect">
+            <a:avLst/>
+          </a:prstGeom>
+          <a:noFill/>
+        </p:spPr>
+        <p:txBody>
+          <a:bodyPr wrap="square" lIns="0" rIns="0" tIns="0" bIns="0" anchor="t">
+            <a:spAutoFit/>
+          </a:bodyPr>
+          <a:lstStyle/>
+          <a:p>
+            <a:pPr algn="ctr">
+              <a:lnSpc>
+                <a:spcPct val="115000"/>
+              </a:lnSpc>
+            </a:pPr>
+            <a:r>
+              <a:rPr sz="1250" b="1" i="0">
+                <a:solidFill>
+                  <a:srgbClr val="4F6EF7"/>
+                </a:solidFill>
+                <a:latin typeface="Microsoft YaHei"/>
+              </a:rPr>
+              <a:t>推荐演示顺序</a:t>
+            </a:r>
+          </a:p>
+        </p:txBody>
+      </p:sp>
+      <p:sp>
+        <p:nvSpPr>
+          <p:cNvPr id="26" name="TextBox 25"/>
+          <p:cNvSpPr txBox="1"/>
+          <p:nvPr/>
+        </p:nvSpPr>
+        <p:spPr>
+          <a:xfrm>
+            <a:off x="932688" y="4151376"/>
+            <a:ext cx="4526280" cy="1664208"/>
+          </a:xfrm>
+          <a:prstGeom prst="rect">
+            <a:avLst/>
+          </a:prstGeom>
+          <a:noFill/>
+        </p:spPr>
+        <p:txBody>
+          <a:bodyPr wrap="square" lIns="0" rIns="0" tIns="0" bIns="0" anchor="t">
+            <a:spAutoFit/>
+          </a:bodyPr>
+          <a:lstStyle/>
+          <a:p>
+            <a:pPr algn="l">
+              <a:lnSpc>
+                <a:spcPct val="115000"/>
+              </a:lnSpc>
+              <a:spcBef>
+                <a:spcPts val="0"/>
+              </a:spcBef>
+              <a:spcAft>
+                <a:spcPts val="400"/>
+              </a:spcAft>
+            </a:pPr>
+            <a:r>
+              <a:rPr sz="1520" b="1" i="0">
+                <a:solidFill>
+                  <a:srgbClr val="102A43"/>
+                </a:solidFill>
+                <a:latin typeface="Microsoft YaHei"/>
+              </a:rPr>
+              <a:t>首页 → 题库广场 → 题库详情 → 刷题/AI → 论坛帖子 → 聊天 → 个人导入 → 后台管理</a:t>
+            </a:r>
+          </a:p>
+          <a:p>
+            <a:pPr algn="l">
+              <a:lnSpc>
+                <a:spcPct val="115000"/>
+              </a:lnSpc>
+              <a:spcBef>
+                <a:spcPts val="0"/>
+              </a:spcBef>
+              <a:spcAft>
+                <a:spcPts val="400"/>
+              </a:spcAft>
+            </a:pPr>
+            <a:r>
+              <a:rPr sz="1260" b="0" i="0">
+                <a:solidFill>
+                  <a:srgbClr val="17324D"/>
+                </a:solidFill>
+                <a:latin typeface="Microsoft YaHei"/>
+              </a:rPr>
+              <a:t>正式访问地址：https://saksk.top</a:t>
+            </a:r>
+          </a:p>
+          <a:p>
+            <a:pPr algn="l">
+              <a:lnSpc>
+                <a:spcPct val="115000"/>
+              </a:lnSpc>
+              <a:spcBef>
+                <a:spcPts val="0"/>
+              </a:spcBef>
+              <a:spcAft>
+                <a:spcPts val="400"/>
+              </a:spcAft>
+            </a:pPr>
+            <a:r>
+              <a:rPr sz="1260" b="0" i="0">
+                <a:solidFill>
+                  <a:srgbClr val="17324D"/>
+                </a:solidFill>
+                <a:latin typeface="Microsoft YaHei"/>
+              </a:rPr>
+              <a:t>本地演示备用：http://127.0.0.1:8000</a:t>
+            </a:r>
+          </a:p>
+        </p:txBody>
+      </p:sp>
+      <p:sp>
+        <p:nvSpPr>
+          <p:cNvPr id="27" name="Rounded Rectangle 26"/>
+          <p:cNvSpPr/>
+          <p:nvPr/>
+        </p:nvSpPr>
+        <p:spPr>
+          <a:xfrm>
+            <a:off x="6144768" y="3493008"/>
+            <a:ext cx="5394960" cy="2651760"/>
+          </a:xfrm>
+          <a:prstGeom prst="roundRect">
+            <a:avLst>
+              <a:gd name="adj" fmla="val 18000"/>
+            </a:avLst>
+          </a:prstGeom>
+          <a:solidFill>
+            <a:srgbClr val="FFFFFF"/>
+          </a:solidFill>
+          <a:ln w="15240">
+            <a:solidFill>
+              <a:srgbClr val="D9E2EF"/>
+            </a:solidFill>
+          </a:ln>
+        </p:spPr>
+        <p:style>
+          <a:lnRef idx="1">
+            <a:schemeClr val="accent1"/>
+          </a:lnRef>
+          <a:fillRef idx="3">
+            <a:schemeClr val="accent1"/>
+          </a:fillRef>
+          <a:effectRef idx="2">
+            <a:schemeClr val="accent1"/>
+          </a:effectRef>
+          <a:fontRef idx="minor">
+            <a:schemeClr val="lt1"/>
+          </a:fontRef>
+        </p:style>
+        <p:txBody>
+          <a:bodyPr rtlCol="0" anchor="ctr"/>
+          <a:lstStyle/>
+          <a:p>
+            <a:pPr algn="ctr"/>
+          </a:p>
+        </p:txBody>
+      </p:sp>
+      <p:sp>
+        <p:nvSpPr>
+          <p:cNvPr id="28" name="Rounded Rectangle 27"/>
+          <p:cNvSpPr/>
+          <p:nvPr/>
+        </p:nvSpPr>
+        <p:spPr>
+          <a:xfrm>
+            <a:off x="6419088" y="3730752"/>
+            <a:ext cx="1143000" cy="292608"/>
+          </a:xfrm>
+          <a:prstGeom prst="roundRect">
+            <a:avLst>
+              <a:gd name="adj" fmla="val 35000"/>
+            </a:avLst>
+          </a:prstGeom>
+          <a:solidFill>
+            <a:srgbClr val="EEF9F6"/>
+          </a:solidFill>
+          <a:ln w="12700">
+            <a:solidFill>
+              <a:srgbClr val="CFEDE8"/>
+            </a:solidFill>
+          </a:ln>
+        </p:spPr>
+        <p:style>
+          <a:lnRef idx="1">
+            <a:schemeClr val="accent1"/>
+          </a:lnRef>
+          <a:fillRef idx="3">
+            <a:schemeClr val="accent1"/>
+          </a:fillRef>
+          <a:effectRef idx="2">
+            <a:schemeClr val="accent1"/>
+          </a:effectRef>
+          <a:fontRef idx="minor">
+            <a:schemeClr val="lt1"/>
+          </a:fontRef>
+        </p:style>
+        <p:txBody>
+          <a:bodyPr rtlCol="0" anchor="ctr"/>
+          <a:lstStyle/>
+          <a:p>
+            <a:pPr algn="ctr"/>
+          </a:p>
+        </p:txBody>
+      </p:sp>
+      <p:sp>
+        <p:nvSpPr>
+          <p:cNvPr id="29" name="TextBox 28"/>
+          <p:cNvSpPr txBox="1"/>
+          <p:nvPr/>
+        </p:nvSpPr>
+        <p:spPr>
+          <a:xfrm>
+            <a:off x="6528816" y="3785616"/>
+            <a:ext cx="923544" cy="182880"/>
+          </a:xfrm>
+          <a:prstGeom prst="rect">
+            <a:avLst/>
+          </a:prstGeom>
+          <a:noFill/>
+        </p:spPr>
+        <p:txBody>
+          <a:bodyPr wrap="square" lIns="0" rIns="0" tIns="0" bIns="0" anchor="t">
+            <a:spAutoFit/>
+          </a:bodyPr>
+          <a:lstStyle/>
+          <a:p>
+            <a:pPr algn="ctr">
+              <a:lnSpc>
+                <a:spcPct val="115000"/>
+              </a:lnSpc>
+            </a:pPr>
+            <a:r>
+              <a:rPr sz="1250" b="1" i="0">
+                <a:solidFill>
+                  <a:srgbClr val="34A58D"/>
+                </a:solidFill>
+                <a:latin typeface="Microsoft YaHei"/>
+              </a:rPr>
+              <a:t>工程事实</a:t>
+            </a:r>
+          </a:p>
+        </p:txBody>
+      </p:sp>
+      <p:sp>
+        <p:nvSpPr>
+          <p:cNvPr id="30" name="TextBox 29"/>
+          <p:cNvSpPr txBox="1"/>
+          <p:nvPr/>
+        </p:nvSpPr>
+        <p:spPr>
+          <a:xfrm>
+            <a:off x="6419088" y="4114800"/>
+            <a:ext cx="4572000" cy="1737360"/>
+          </a:xfrm>
+          <a:prstGeom prst="rect">
+            <a:avLst/>
+          </a:prstGeom>
+          <a:noFill/>
+        </p:spPr>
+        <p:txBody>
+          <a:bodyPr wrap="square" lIns="0" rIns="0" tIns="0" bIns="0" anchor="t">
+            <a:spAutoFit/>
+          </a:bodyPr>
+          <a:lstStyle/>
+          <a:p>
+            <a:pPr algn="l">
+              <a:lnSpc>
+                <a:spcPct val="115000"/>
+              </a:lnSpc>
+              <a:spcBef>
+                <a:spcPts val="0"/>
+              </a:spcBef>
+              <a:spcAft>
+                <a:spcPts val="400"/>
+              </a:spcAft>
+            </a:pPr>
+            <a:r>
+              <a:rPr sz="1300" b="0" i="0">
+                <a:solidFill>
+                  <a:srgbClr val="17324D"/>
+                </a:solidFill>
+                <a:latin typeface="Microsoft YaHei"/>
+              </a:rPr>
+              <a:t>• Web 是主体交互端，采用 Flask + Jinja SSR。</a:t>
+            </a:r>
+          </a:p>
+          <a:p>
+            <a:pPr algn="l">
+              <a:lnSpc>
+                <a:spcPct val="115000"/>
+              </a:lnSpc>
+              <a:spcBef>
+                <a:spcPts val="0"/>
+              </a:spcBef>
+              <a:spcAft>
+                <a:spcPts val="400"/>
+              </a:spcAft>
+            </a:pPr>
+            <a:r>
+              <a:rPr sz="1300" b="0" i="0">
+                <a:solidFill>
+                  <a:srgbClr val="17324D"/>
+                </a:solidFill>
+                <a:latin typeface="Microsoft YaHei"/>
+              </a:rPr>
+              <a:t>• 小程序为微信原生工程，作为移动场景延展。</a:t>
+            </a:r>
+          </a:p>
+          <a:p>
+            <a:pPr algn="l">
+              <a:lnSpc>
+                <a:spcPct val="115000"/>
+              </a:lnSpc>
+              <a:spcBef>
+                <a:spcPts val="0"/>
+              </a:spcBef>
+              <a:spcAft>
+                <a:spcPts val="400"/>
+              </a:spcAft>
+            </a:pPr>
+            <a:r>
+              <a:rPr sz="1300" b="0" i="0">
+                <a:solidFill>
+                  <a:srgbClr val="17324D"/>
+                </a:solidFill>
+                <a:latin typeface="Microsoft YaHei"/>
+              </a:rPr>
+              <a:t>• 应用工厂 + Blueprint 模块化，便于后续扩展。</a:t>
+            </a:r>
+          </a:p>
+          <a:p>
+            <a:pPr algn="l">
+              <a:lnSpc>
+                <a:spcPct val="115000"/>
+              </a:lnSpc>
+              <a:spcBef>
+                <a:spcPts val="0"/>
+              </a:spcBef>
+              <a:spcAft>
+                <a:spcPts val="400"/>
+              </a:spcAft>
+            </a:pPr>
+            <a:r>
+              <a:rPr sz="1300" b="0" i="0">
+                <a:solidFill>
+                  <a:srgbClr val="17324D"/>
+                </a:solidFill>
+                <a:latin typeface="Microsoft YaHei"/>
+              </a:rPr>
+              <a:t>• 新接口遵循 status / code / data / message 信封结构。</a:t>
+            </a:r>
+          </a:p>
+        </p:txBody>
+      </p:sp>
+      <p:sp>
+        <p:nvSpPr>
+          <p:cNvPr id="31" name="TextBox 30"/>
+          <p:cNvSpPr txBox="1"/>
+          <p:nvPr/>
+        </p:nvSpPr>
+        <p:spPr>
+          <a:xfrm>
+            <a:off x="658368" y="6473952"/>
+            <a:ext cx="2926080" cy="182880"/>
+          </a:xfrm>
+          <a:prstGeom prst="rect">
+            <a:avLst/>
+          </a:prstGeom>
+          <a:noFill/>
+        </p:spPr>
+        <p:txBody>
+          <a:bodyPr wrap="square" lIns="0" rIns="0" tIns="0" bIns="0" anchor="t">
+            <a:spAutoFit/>
+          </a:bodyPr>
+          <a:lstStyle/>
+          <a:p>
+            <a:pPr algn="l">
+              <a:lnSpc>
+                <a:spcPct val="115000"/>
+              </a:lnSpc>
+            </a:pPr>
+            <a:r>
+              <a:rPr sz="950" b="0" i="0">
+                <a:solidFill>
+                  <a:srgbClr val="94A3B8"/>
+                </a:solidFill>
+                <a:latin typeface="Aptos"/>
+              </a:rPr>
+              <a:t>Sak-AI答题助手｜答辩演示</a:t>
+            </a:r>
+          </a:p>
+        </p:txBody>
+      </p:sp>
+      <p:sp>
+        <p:nvSpPr>
+          <p:cNvPr id="32" name="TextBox 31"/>
+          <p:cNvSpPr txBox="1"/>
+          <p:nvPr/>
+        </p:nvSpPr>
+        <p:spPr>
+          <a:xfrm>
+            <a:off x="11384280" y="6400800"/>
+            <a:ext cx="347472" cy="219456"/>
+          </a:xfrm>
+          <a:prstGeom prst="rect">
+            <a:avLst/>
+          </a:prstGeom>
+          <a:noFill/>
+        </p:spPr>
+        <p:txBody>
+          <a:bodyPr wrap="square" lIns="0" rIns="0" tIns="0" bIns="0" anchor="t">
+            <a:spAutoFit/>
+          </a:bodyPr>
+          <a:lstStyle/>
+          <a:p>
+            <a:pPr algn="r">
+              <a:lnSpc>
+                <a:spcPct val="115000"/>
+              </a:lnSpc>
+            </a:pPr>
+            <a:r>
+              <a:rPr sz="1100" b="1" i="0">
+                <a:solidFill>
+                  <a:srgbClr val="17324D"/>
+                </a:solidFill>
+                <a:latin typeface="Aptos"/>
+              </a:rPr>
+              <a:t>14</a:t>
+            </a:r>
+          </a:p>
+        </p:txBody>
+      </p:sp>
+    </p:spTree>
+  </p:cSld>
+  <p:clrMapOvr>
+    <a:masterClrMapping/>
+  </p:clrMapOvr>
+</p:sld>
+</file>
+
+<file path=ppt/slides/slide15.xml><?xml version="1.0" encoding="utf-8"?>
+<p:sld xmlns:a="http://schemas.openxmlformats.org/drawingml/2006/main" xmlns:p="http://schemas.openxmlformats.org/presentationml/2006/main" xmlns:r="http://schemas.openxmlformats.org/officeDocument/2006/relationships">
+  <p:cSld>
+    <p:spTree>
+      <p:nvGrpSpPr>
+        <p:cNvPr id="1" name=""/>
+        <p:cNvGrpSpPr/>
+        <p:nvPr/>
+      </p:nvGrpSpPr>
+      <p:grpSpPr/>
+      <p:pic>
+        <p:nvPicPr>
           <p:cNvPr id="2" name="Picture 1" descr="bg_cover.png"/>
           <p:cNvPicPr>
             <a:picLocks noChangeAspect="1"/>
@@ -6399,7 +10865,7 @@
                 </a:solidFill>
                 <a:latin typeface="Microsoft YaHei"/>
               </a:rPr>
-              <a:t>让题库沉淀、刷题训练、模拟考试、数据复盘与平台运营在一个系统中完整闭环。</a:t>
+              <a:t>让题库沉淀、刷题训练、模拟考试、数据复盘、论坛互动与平台运营在一个系统中完整闭环。</a:t>
             </a:r>
           </a:p>
           <a:p>
@@ -6817,14 +11283,14 @@
                 </a:solidFill>
                 <a:latin typeface="Microsoft YaHei"/>
               </a:rPr>
-              <a:t>首页工作台</a:t>
+              <a:t>刷题 + AI解析</a:t>
             </a:r>
           </a:p>
         </p:txBody>
       </p:sp>
       <p:pic>
         <p:nvPicPr>
-          <p:cNvPr id="14" name="Picture 13" descr="首页工作台-807x384.png"/>
+          <p:cNvPr id="14" name="Picture 13" descr="刷题 + AI解析-807x384.png"/>
           <p:cNvPicPr>
             <a:picLocks noChangeAspect="1"/>
           </p:cNvPicPr>
@@ -7101,14 +11567,14 @@
                 </a:solidFill>
                 <a:latin typeface="Microsoft YaHei"/>
               </a:rPr>
-              <a:t>后台仪表盘</a:t>
+              <a:t>后台论坛管理</a:t>
             </a:r>
           </a:p>
         </p:txBody>
       </p:sp>
       <p:pic>
         <p:nvPicPr>
-          <p:cNvPr id="21" name="Picture 20" descr="后台仪表盘-486x231.png"/>
+          <p:cNvPr id="21" name="Picture 20" descr="后台论坛管理-486x231.png"/>
           <p:cNvPicPr>
             <a:picLocks noChangeAspect="1"/>
           </p:cNvPicPr>
@@ -7364,7 +11830,7 @@
                 </a:solidFill>
                 <a:latin typeface="Aptos"/>
               </a:rPr>
-              <a:t>11</a:t>
+              <a:t>15</a:t>
             </a:r>
           </a:p>
         </p:txBody>
@@ -15785,7 +20251,7 @@
                 </a:solidFill>
                 <a:latin typeface="Aptos"/>
               </a:rPr>
-              <a:t>SHOWCASE B</a:t>
+              <a:t>QUIZ + AI</a:t>
             </a:r>
           </a:p>
         </p:txBody>
@@ -15867,7 +20333,7 @@
                 </a:solidFill>
                 <a:latin typeface="Microsoft YaHei"/>
               </a:rPr>
-              <a:t>真实界面展示：复盘分析、考试与平台支撑</a:t>
+              <a:t>刷题、AI 解析与 AI 判分</a:t>
             </a:r>
           </a:p>
         </p:txBody>
@@ -15906,7 +20372,7 @@
                 </a:solidFill>
                 <a:latin typeface="Microsoft YaHei"/>
               </a:rPr>
-              <a:t>数据中心、考试、论坛与后台共同构成完整应用闭环。</a:t>
+              <a:t>重点展示答题工作台、即时解析与主观题判分配置。</a:t>
             </a:r>
           </a:p>
         </p:txBody>
@@ -15919,8 +20385,8 @@
         </p:nvSpPr>
         <p:spPr>
           <a:xfrm>
-            <a:off x="658368" y="1828800"/>
-            <a:ext cx="5532120" cy="2039112"/>
+            <a:off x="658368" y="1810512"/>
+            <a:ext cx="6565392" cy="4370832"/>
           </a:xfrm>
           <a:prstGeom prst="roundRect">
             <a:avLst>
@@ -15966,8 +20432,8 @@
         </p:nvSpPr>
         <p:spPr>
           <a:xfrm>
-            <a:off x="731520" y="1901952"/>
-            <a:ext cx="5385816" cy="237744"/>
+            <a:off x="731520" y="1883664"/>
+            <a:ext cx="6419088" cy="237744"/>
           </a:xfrm>
           <a:prstGeom prst="roundRect">
             <a:avLst>
@@ -16011,7 +20477,7 @@
         </p:nvSpPr>
         <p:spPr>
           <a:xfrm>
-            <a:off x="813816" y="1961388"/>
+            <a:off x="813816" y="1943100"/>
             <a:ext cx="54864" cy="54864"/>
           </a:xfrm>
           <a:prstGeom prst="ellipse">
@@ -16054,7 +20520,7 @@
         </p:nvSpPr>
         <p:spPr>
           <a:xfrm>
-            <a:off x="923544" y="1961388"/>
+            <a:off x="923544" y="1943100"/>
             <a:ext cx="54864" cy="54864"/>
           </a:xfrm>
           <a:prstGeom prst="ellipse">
@@ -16097,7 +20563,7 @@
         </p:nvSpPr>
         <p:spPr>
           <a:xfrm>
-            <a:off x="1033272" y="1961388"/>
+            <a:off x="1033272" y="1943100"/>
             <a:ext cx="54864" cy="54864"/>
           </a:xfrm>
           <a:prstGeom prst="ellipse">
@@ -16140,8 +20606,8 @@
         </p:nvSpPr>
         <p:spPr>
           <a:xfrm>
-            <a:off x="1188720" y="1920240"/>
-            <a:ext cx="4782312" cy="164592"/>
+            <a:off x="1188720" y="1901952"/>
+            <a:ext cx="5815584" cy="164592"/>
           </a:xfrm>
           <a:prstGeom prst="rect">
             <a:avLst/>
@@ -16166,14 +20632,14 @@
                 </a:solidFill>
                 <a:latin typeface="Microsoft YaHei"/>
               </a:rPr>
-              <a:t>数据中心</a:t>
+              <a:t>刷题工作台 + AI解析</a:t>
             </a:r>
           </a:p>
         </p:txBody>
       </p:sp>
       <p:pic>
         <p:nvPicPr>
-          <p:cNvPr id="13" name="Picture 12" descr="数据中心-880x248.png"/>
+          <p:cNvPr id="13" name="Picture 12" descr="刷题工作台 + AI解析-1050x630.png"/>
           <p:cNvPicPr>
             <a:picLocks noChangeAspect="1"/>
           </p:cNvPicPr>
@@ -16187,8 +20653,8 @@
         </p:blipFill>
         <p:spPr>
           <a:xfrm>
-            <a:off x="740664" y="2194560"/>
-            <a:ext cx="5367528" cy="1581912"/>
+            <a:off x="740664" y="2176272"/>
+            <a:ext cx="6400800" cy="3913632"/>
           </a:xfrm>
           <a:prstGeom prst="rect">
             <a:avLst/>
@@ -16203,8 +20669,8 @@
         </p:nvSpPr>
         <p:spPr>
           <a:xfrm>
-            <a:off x="6327648" y="1828800"/>
-            <a:ext cx="5202936" cy="2039112"/>
+            <a:off x="7461504" y="1810512"/>
+            <a:ext cx="4087368" cy="2377440"/>
           </a:xfrm>
           <a:prstGeom prst="roundRect">
             <a:avLst>
@@ -16250,8 +20716,8 @@
         </p:nvSpPr>
         <p:spPr>
           <a:xfrm>
-            <a:off x="6400800" y="1901952"/>
-            <a:ext cx="5056632" cy="237744"/>
+            <a:off x="7534656" y="1883664"/>
+            <a:ext cx="3941064" cy="237744"/>
           </a:xfrm>
           <a:prstGeom prst="roundRect">
             <a:avLst>
@@ -16295,7 +20761,7 @@
         </p:nvSpPr>
         <p:spPr>
           <a:xfrm>
-            <a:off x="6483096" y="1961388"/>
+            <a:off x="7616952" y="1943100"/>
             <a:ext cx="54864" cy="54864"/>
           </a:xfrm>
           <a:prstGeom prst="ellipse">
@@ -16338,7 +20804,7 @@
         </p:nvSpPr>
         <p:spPr>
           <a:xfrm>
-            <a:off x="6592824" y="1961388"/>
+            <a:off x="7726680" y="1943100"/>
             <a:ext cx="54864" cy="54864"/>
           </a:xfrm>
           <a:prstGeom prst="ellipse">
@@ -16381,7 +20847,7 @@
         </p:nvSpPr>
         <p:spPr>
           <a:xfrm>
-            <a:off x="6702552" y="1961388"/>
+            <a:off x="7836408" y="1943100"/>
             <a:ext cx="54864" cy="54864"/>
           </a:xfrm>
           <a:prstGeom prst="ellipse">
@@ -16424,8 +20890,8 @@
         </p:nvSpPr>
         <p:spPr>
           <a:xfrm>
-            <a:off x="6858000" y="1920240"/>
-            <a:ext cx="4453128" cy="164592"/>
+            <a:off x="7991856" y="1901952"/>
+            <a:ext cx="3337560" cy="164592"/>
           </a:xfrm>
           <a:prstGeom prst="rect">
             <a:avLst/>
@@ -16450,14 +20916,14 @@
                 </a:solidFill>
                 <a:latin typeface="Microsoft YaHei"/>
               </a:rPr>
-              <a:t>考试中心</a:t>
+              <a:t>主观题 AI 判分设置</a:t>
             </a:r>
           </a:p>
         </p:txBody>
       </p:sp>
       <p:pic>
         <p:nvPicPr>
-          <p:cNvPr id="20" name="Picture 19" descr="考试中心-826x248.png"/>
+          <p:cNvPr id="20" name="Picture 19" descr="主观题 AI 判分设置-644x303.png"/>
           <p:cNvPicPr>
             <a:picLocks noChangeAspect="1"/>
           </p:cNvPicPr>
@@ -16471,8 +20937,8 @@
         </p:blipFill>
         <p:spPr>
           <a:xfrm>
-            <a:off x="6409944" y="2194560"/>
-            <a:ext cx="5038344" cy="1581912"/>
+            <a:off x="7543800" y="2176272"/>
+            <a:ext cx="3922776" cy="1920240"/>
           </a:xfrm>
           <a:prstGeom prst="rect">
             <a:avLst/>
@@ -16487,8 +20953,8 @@
         </p:nvSpPr>
         <p:spPr>
           <a:xfrm>
-            <a:off x="658368" y="4069080"/>
-            <a:ext cx="5532120" cy="2039112"/>
+            <a:off x="7461504" y="4407408"/>
+            <a:ext cx="4087368" cy="1773936"/>
           </a:xfrm>
           <a:prstGeom prst="roundRect">
             <a:avLst>
@@ -16534,19 +21000,21 @@
         </p:nvSpPr>
         <p:spPr>
           <a:xfrm>
-            <a:off x="731520" y="4142232"/>
-            <a:ext cx="5385816" cy="237744"/>
+            <a:off x="7717536" y="4645152"/>
+            <a:ext cx="1097280" cy="292608"/>
           </a:xfrm>
           <a:prstGeom prst="roundRect">
             <a:avLst>
-              <a:gd name="adj" fmla="val 30000"/>
+              <a:gd name="adj" fmla="val 35000"/>
             </a:avLst>
           </a:prstGeom>
           <a:solidFill>
-            <a:srgbClr val="EEF3FB"/>
+            <a:srgbClr val="EEF4FF"/>
           </a:solidFill>
-          <a:ln>
-            <a:noFill/>
+          <a:ln w="12700">
+            <a:solidFill>
+              <a:srgbClr val="D7E2F2"/>
+            </a:solidFill>
           </a:ln>
         </p:spPr>
         <p:style>
@@ -16573,143 +21041,14 @@
       </p:sp>
       <p:sp>
         <p:nvSpPr>
-          <p:cNvPr id="23" name="Oval 22"/>
-          <p:cNvSpPr/>
-          <p:nvPr/>
-        </p:nvSpPr>
-        <p:spPr>
-          <a:xfrm>
-            <a:off x="813816" y="4201668"/>
-            <a:ext cx="54864" cy="54864"/>
-          </a:xfrm>
-          <a:prstGeom prst="ellipse">
-            <a:avLst/>
-          </a:prstGeom>
-          <a:solidFill>
-            <a:srgbClr val="FF6B6B"/>
-          </a:solidFill>
-          <a:ln>
-            <a:noFill/>
-          </a:ln>
-        </p:spPr>
-        <p:style>
-          <a:lnRef idx="1">
-            <a:schemeClr val="accent1"/>
-          </a:lnRef>
-          <a:fillRef idx="3">
-            <a:schemeClr val="accent1"/>
-          </a:fillRef>
-          <a:effectRef idx="2">
-            <a:schemeClr val="accent1"/>
-          </a:effectRef>
-          <a:fontRef idx="minor">
-            <a:schemeClr val="lt1"/>
-          </a:fontRef>
-        </p:style>
-        <p:txBody>
-          <a:bodyPr rtlCol="0" anchor="ctr"/>
-          <a:lstStyle/>
-          <a:p>
-            <a:pPr algn="ctr"/>
-          </a:p>
-        </p:txBody>
-      </p:sp>
-      <p:sp>
-        <p:nvSpPr>
-          <p:cNvPr id="24" name="Oval 23"/>
-          <p:cNvSpPr/>
-          <p:nvPr/>
-        </p:nvSpPr>
-        <p:spPr>
-          <a:xfrm>
-            <a:off x="923544" y="4201668"/>
-            <a:ext cx="54864" cy="54864"/>
-          </a:xfrm>
-          <a:prstGeom prst="ellipse">
-            <a:avLst/>
-          </a:prstGeom>
-          <a:solidFill>
-            <a:srgbClr val="F7B955"/>
-          </a:solidFill>
-          <a:ln>
-            <a:noFill/>
-          </a:ln>
-        </p:spPr>
-        <p:style>
-          <a:lnRef idx="1">
-            <a:schemeClr val="accent1"/>
-          </a:lnRef>
-          <a:fillRef idx="3">
-            <a:schemeClr val="accent1"/>
-          </a:fillRef>
-          <a:effectRef idx="2">
-            <a:schemeClr val="accent1"/>
-          </a:effectRef>
-          <a:fontRef idx="minor">
-            <a:schemeClr val="lt1"/>
-          </a:fontRef>
-        </p:style>
-        <p:txBody>
-          <a:bodyPr rtlCol="0" anchor="ctr"/>
-          <a:lstStyle/>
-          <a:p>
-            <a:pPr algn="ctr"/>
-          </a:p>
-        </p:txBody>
-      </p:sp>
-      <p:sp>
-        <p:nvSpPr>
-          <p:cNvPr id="25" name="Oval 24"/>
-          <p:cNvSpPr/>
-          <p:nvPr/>
-        </p:nvSpPr>
-        <p:spPr>
-          <a:xfrm>
-            <a:off x="1033272" y="4201668"/>
-            <a:ext cx="54864" cy="54864"/>
-          </a:xfrm>
-          <a:prstGeom prst="ellipse">
-            <a:avLst/>
-          </a:prstGeom>
-          <a:solidFill>
-            <a:srgbClr val="34C759"/>
-          </a:solidFill>
-          <a:ln>
-            <a:noFill/>
-          </a:ln>
-        </p:spPr>
-        <p:style>
-          <a:lnRef idx="1">
-            <a:schemeClr val="accent1"/>
-          </a:lnRef>
-          <a:fillRef idx="3">
-            <a:schemeClr val="accent1"/>
-          </a:fillRef>
-          <a:effectRef idx="2">
-            <a:schemeClr val="accent1"/>
-          </a:effectRef>
-          <a:fontRef idx="minor">
-            <a:schemeClr val="lt1"/>
-          </a:fontRef>
-        </p:style>
-        <p:txBody>
-          <a:bodyPr rtlCol="0" anchor="ctr"/>
-          <a:lstStyle/>
-          <a:p>
-            <a:pPr algn="ctr"/>
-          </a:p>
-        </p:txBody>
-      </p:sp>
-      <p:sp>
-        <p:nvSpPr>
-          <p:cNvPr id="26" name="TextBox 25"/>
+          <p:cNvPr id="23" name="TextBox 22"/>
           <p:cNvSpPr txBox="1"/>
           <p:nvPr/>
         </p:nvSpPr>
         <p:spPr>
           <a:xfrm>
-            <a:off x="1188720" y="4160520"/>
-            <a:ext cx="4782312" cy="164592"/>
+            <a:off x="7827264" y="4700016"/>
+            <a:ext cx="877824" cy="182880"/>
           </a:xfrm>
           <a:prstGeom prst="rect">
             <a:avLst/>
@@ -16722,278 +21061,33 @@
           </a:bodyPr>
           <a:lstStyle/>
           <a:p>
-            <a:pPr algn="l">
-              <a:lnSpc>
-                <a:spcPct val="115000"/>
-              </a:lnSpc>
-            </a:pPr>
-            <a:r>
-              <a:rPr sz="1000" b="1" i="0">
-                <a:solidFill>
-                  <a:srgbClr val="62748A"/>
+            <a:pPr algn="ctr">
+              <a:lnSpc>
+                <a:spcPct val="115000"/>
+              </a:lnSpc>
+            </a:pPr>
+            <a:r>
+              <a:rPr sz="1250" b="1" i="0">
+                <a:solidFill>
+                  <a:srgbClr val="4F6EF7"/>
                 </a:solidFill>
                 <a:latin typeface="Microsoft YaHei"/>
               </a:rPr>
-              <a:t>论坛互动</a:t>
-            </a:r>
-          </a:p>
-        </p:txBody>
-      </p:sp>
-      <p:pic>
-        <p:nvPicPr>
-          <p:cNvPr id="27" name="Picture 26" descr="论坛互动-880x248.png"/>
-          <p:cNvPicPr>
-            <a:picLocks noChangeAspect="1"/>
-          </p:cNvPicPr>
-          <p:nvPr/>
-        </p:nvPicPr>
-        <p:blipFill>
-          <a:blip r:embed="rId5"/>
-          <a:stretch>
-            <a:fillRect/>
-          </a:stretch>
-        </p:blipFill>
-        <p:spPr>
-          <a:xfrm>
-            <a:off x="740664" y="4434840"/>
-            <a:ext cx="5367528" cy="1581912"/>
-          </a:xfrm>
-          <a:prstGeom prst="rect">
-            <a:avLst/>
-          </a:prstGeom>
-        </p:spPr>
-      </p:pic>
-      <p:sp>
-        <p:nvSpPr>
-          <p:cNvPr id="28" name="Rounded Rectangle 27"/>
-          <p:cNvSpPr/>
-          <p:nvPr/>
-        </p:nvSpPr>
-        <p:spPr>
-          <a:xfrm>
-            <a:off x="6327648" y="4069080"/>
-            <a:ext cx="5202936" cy="2039112"/>
-          </a:xfrm>
-          <a:prstGeom prst="roundRect">
-            <a:avLst>
-              <a:gd name="adj" fmla="val 18000"/>
-            </a:avLst>
-          </a:prstGeom>
-          <a:solidFill>
-            <a:srgbClr val="FFFFFF"/>
-          </a:solidFill>
-          <a:ln w="15240">
-            <a:solidFill>
-              <a:srgbClr val="D9E2EF"/>
-            </a:solidFill>
-          </a:ln>
-        </p:spPr>
-        <p:style>
-          <a:lnRef idx="1">
-            <a:schemeClr val="accent1"/>
-          </a:lnRef>
-          <a:fillRef idx="3">
-            <a:schemeClr val="accent1"/>
-          </a:fillRef>
-          <a:effectRef idx="2">
-            <a:schemeClr val="accent1"/>
-          </a:effectRef>
-          <a:fontRef idx="minor">
-            <a:schemeClr val="lt1"/>
-          </a:fontRef>
-        </p:style>
-        <p:txBody>
-          <a:bodyPr rtlCol="0" anchor="ctr"/>
-          <a:lstStyle/>
-          <a:p>
-            <a:pPr algn="ctr"/>
-          </a:p>
-        </p:txBody>
-      </p:sp>
-      <p:sp>
-        <p:nvSpPr>
-          <p:cNvPr id="29" name="Rounded Rectangle 28"/>
-          <p:cNvSpPr/>
-          <p:nvPr/>
-        </p:nvSpPr>
-        <p:spPr>
-          <a:xfrm>
-            <a:off x="6400800" y="4142232"/>
-            <a:ext cx="5056632" cy="237744"/>
-          </a:xfrm>
-          <a:prstGeom prst="roundRect">
-            <a:avLst>
-              <a:gd name="adj" fmla="val 30000"/>
-            </a:avLst>
-          </a:prstGeom>
-          <a:solidFill>
-            <a:srgbClr val="EEF3FB"/>
-          </a:solidFill>
-          <a:ln>
-            <a:noFill/>
-          </a:ln>
-        </p:spPr>
-        <p:style>
-          <a:lnRef idx="1">
-            <a:schemeClr val="accent1"/>
-          </a:lnRef>
-          <a:fillRef idx="3">
-            <a:schemeClr val="accent1"/>
-          </a:fillRef>
-          <a:effectRef idx="2">
-            <a:schemeClr val="accent1"/>
-          </a:effectRef>
-          <a:fontRef idx="minor">
-            <a:schemeClr val="lt1"/>
-          </a:fontRef>
-        </p:style>
-        <p:txBody>
-          <a:bodyPr rtlCol="0" anchor="ctr"/>
-          <a:lstStyle/>
-          <a:p>
-            <a:pPr algn="ctr"/>
-          </a:p>
-        </p:txBody>
-      </p:sp>
-      <p:sp>
-        <p:nvSpPr>
-          <p:cNvPr id="30" name="Oval 29"/>
-          <p:cNvSpPr/>
-          <p:nvPr/>
-        </p:nvSpPr>
-        <p:spPr>
-          <a:xfrm>
-            <a:off x="6483096" y="4201668"/>
-            <a:ext cx="54864" cy="54864"/>
-          </a:xfrm>
-          <a:prstGeom prst="ellipse">
-            <a:avLst/>
-          </a:prstGeom>
-          <a:solidFill>
-            <a:srgbClr val="FF6B6B"/>
-          </a:solidFill>
-          <a:ln>
-            <a:noFill/>
-          </a:ln>
-        </p:spPr>
-        <p:style>
-          <a:lnRef idx="1">
-            <a:schemeClr val="accent1"/>
-          </a:lnRef>
-          <a:fillRef idx="3">
-            <a:schemeClr val="accent1"/>
-          </a:fillRef>
-          <a:effectRef idx="2">
-            <a:schemeClr val="accent1"/>
-          </a:effectRef>
-          <a:fontRef idx="minor">
-            <a:schemeClr val="lt1"/>
-          </a:fontRef>
-        </p:style>
-        <p:txBody>
-          <a:bodyPr rtlCol="0" anchor="ctr"/>
-          <a:lstStyle/>
-          <a:p>
-            <a:pPr algn="ctr"/>
-          </a:p>
-        </p:txBody>
-      </p:sp>
-      <p:sp>
-        <p:nvSpPr>
-          <p:cNvPr id="31" name="Oval 30"/>
-          <p:cNvSpPr/>
-          <p:nvPr/>
-        </p:nvSpPr>
-        <p:spPr>
-          <a:xfrm>
-            <a:off x="6592824" y="4201668"/>
-            <a:ext cx="54864" cy="54864"/>
-          </a:xfrm>
-          <a:prstGeom prst="ellipse">
-            <a:avLst/>
-          </a:prstGeom>
-          <a:solidFill>
-            <a:srgbClr val="F7B955"/>
-          </a:solidFill>
-          <a:ln>
-            <a:noFill/>
-          </a:ln>
-        </p:spPr>
-        <p:style>
-          <a:lnRef idx="1">
-            <a:schemeClr val="accent1"/>
-          </a:lnRef>
-          <a:fillRef idx="3">
-            <a:schemeClr val="accent1"/>
-          </a:fillRef>
-          <a:effectRef idx="2">
-            <a:schemeClr val="accent1"/>
-          </a:effectRef>
-          <a:fontRef idx="minor">
-            <a:schemeClr val="lt1"/>
-          </a:fontRef>
-        </p:style>
-        <p:txBody>
-          <a:bodyPr rtlCol="0" anchor="ctr"/>
-          <a:lstStyle/>
-          <a:p>
-            <a:pPr algn="ctr"/>
-          </a:p>
-        </p:txBody>
-      </p:sp>
-      <p:sp>
-        <p:nvSpPr>
-          <p:cNvPr id="32" name="Oval 31"/>
-          <p:cNvSpPr/>
-          <p:nvPr/>
-        </p:nvSpPr>
-        <p:spPr>
-          <a:xfrm>
-            <a:off x="6702552" y="4201668"/>
-            <a:ext cx="54864" cy="54864"/>
-          </a:xfrm>
-          <a:prstGeom prst="ellipse">
-            <a:avLst/>
-          </a:prstGeom>
-          <a:solidFill>
-            <a:srgbClr val="34C759"/>
-          </a:solidFill>
-          <a:ln>
-            <a:noFill/>
-          </a:ln>
-        </p:spPr>
-        <p:style>
-          <a:lnRef idx="1">
-            <a:schemeClr val="accent1"/>
-          </a:lnRef>
-          <a:fillRef idx="3">
-            <a:schemeClr val="accent1"/>
-          </a:fillRef>
-          <a:effectRef idx="2">
-            <a:schemeClr val="accent1"/>
-          </a:effectRef>
-          <a:fontRef idx="minor">
-            <a:schemeClr val="lt1"/>
-          </a:fontRef>
-        </p:style>
-        <p:txBody>
-          <a:bodyPr rtlCol="0" anchor="ctr"/>
-          <a:lstStyle/>
-          <a:p>
-            <a:pPr algn="ctr"/>
-          </a:p>
-        </p:txBody>
-      </p:sp>
-      <p:sp>
-        <p:nvSpPr>
-          <p:cNvPr id="33" name="TextBox 32"/>
+              <a:t>模块亮点</a:t>
+            </a:r>
+          </a:p>
+        </p:txBody>
+      </p:sp>
+      <p:sp>
+        <p:nvSpPr>
+          <p:cNvPr id="24" name="TextBox 23"/>
           <p:cNvSpPr txBox="1"/>
           <p:nvPr/>
         </p:nvSpPr>
         <p:spPr>
           <a:xfrm>
-            <a:off x="6858000" y="4160520"/>
-            <a:ext cx="4453128" cy="164592"/>
+            <a:off x="7717536" y="5029200"/>
+            <a:ext cx="3474720" cy="914400"/>
           </a:xfrm>
           <a:prstGeom prst="rect">
             <a:avLst/>
@@ -17010,46 +21104,72 @@
               <a:lnSpc>
                 <a:spcPct val="115000"/>
               </a:lnSpc>
-            </a:pPr>
-            <a:r>
-              <a:rPr sz="1000" b="1" i="0">
-                <a:solidFill>
-                  <a:srgbClr val="62748A"/>
+              <a:spcBef>
+                <a:spcPts val="0"/>
+              </a:spcBef>
+              <a:spcAft>
+                <a:spcPts val="400"/>
+              </a:spcAft>
+            </a:pPr>
+            <a:r>
+              <a:rPr sz="1240" b="0" i="0">
+                <a:solidFill>
+                  <a:srgbClr val="17324D"/>
                 </a:solidFill>
                 <a:latin typeface="Microsoft YaHei"/>
               </a:rPr>
-              <a:t>后台仪表盘</a:t>
-            </a:r>
-          </a:p>
-        </p:txBody>
-      </p:sp>
-      <p:pic>
-        <p:nvPicPr>
-          <p:cNvPr id="34" name="Picture 33" descr="后台仪表盘-826x248.png"/>
-          <p:cNvPicPr>
-            <a:picLocks noChangeAspect="1"/>
-          </p:cNvPicPr>
-          <p:nvPr/>
-        </p:nvPicPr>
-        <p:blipFill>
-          <a:blip r:embed="rId6"/>
-          <a:stretch>
-            <a:fillRect/>
-          </a:stretch>
-        </p:blipFill>
-        <p:spPr>
-          <a:xfrm>
-            <a:off x="6409944" y="4434840"/>
-            <a:ext cx="5038344" cy="1581912"/>
-          </a:xfrm>
-          <a:prstGeom prst="rect">
-            <a:avLst/>
-          </a:prstGeom>
-        </p:spPr>
-      </p:pic>
-      <p:sp>
-        <p:nvSpPr>
-          <p:cNvPr id="35" name="TextBox 34"/>
+              <a:t>• 支持题目列表、答题卡片与解析联动。</a:t>
+            </a:r>
+          </a:p>
+          <a:p>
+            <a:pPr algn="l">
+              <a:lnSpc>
+                <a:spcPct val="115000"/>
+              </a:lnSpc>
+              <a:spcBef>
+                <a:spcPts val="0"/>
+              </a:spcBef>
+              <a:spcAft>
+                <a:spcPts val="400"/>
+              </a:spcAft>
+            </a:pPr>
+            <a:r>
+              <a:rPr sz="1240" b="0" i="0">
+                <a:solidFill>
+                  <a:srgbClr val="17324D"/>
+                </a:solidFill>
+                <a:latin typeface="Microsoft YaHei"/>
+              </a:rPr>
+              <a:t>• AI 解析可按题触发，辅助理解知识点。</a:t>
+            </a:r>
+          </a:p>
+          <a:p>
+            <a:pPr algn="l">
+              <a:lnSpc>
+                <a:spcPct val="115000"/>
+              </a:lnSpc>
+              <a:spcBef>
+                <a:spcPts val="0"/>
+              </a:spcBef>
+              <a:spcAft>
+                <a:spcPts val="400"/>
+              </a:spcAft>
+            </a:pPr>
+            <a:r>
+              <a:rPr sz="1240" b="0" i="0">
+                <a:solidFill>
+                  <a:srgbClr val="17324D"/>
+                </a:solidFill>
+                <a:latin typeface="Microsoft YaHei"/>
+              </a:rPr>
+              <a:t>• 主观题支持有答即对 / AI 判分 / 自评模式。</a:t>
+            </a:r>
+          </a:p>
+        </p:txBody>
+      </p:sp>
+      <p:sp>
+        <p:nvSpPr>
+          <p:cNvPr id="25" name="TextBox 24"/>
           <p:cNvSpPr txBox="1"/>
           <p:nvPr/>
         </p:nvSpPr>
@@ -17088,7 +21208,7 @@
       </p:sp>
       <p:sp>
         <p:nvSpPr>
-          <p:cNvPr id="36" name="TextBox 35"/>
+          <p:cNvPr id="26" name="TextBox 25"/>
           <p:cNvSpPr txBox="1"/>
           <p:nvPr/>
         </p:nvSpPr>
@@ -17145,7 +21265,7 @@
       <p:grpSpPr/>
       <p:pic>
         <p:nvPicPr>
-          <p:cNvPr id="2" name="Picture 1" descr="bg_dark.png"/>
+          <p:cNvPr id="2" name="Picture 1" descr="bg_light_2.png"/>
           <p:cNvPicPr>
             <a:picLocks noChangeAspect="1"/>
           </p:cNvPicPr>
@@ -17197,11 +21317,11 @@
             <a:r>
               <a:rPr sz="1200" b="1" i="0">
                 <a:solidFill>
-                  <a:srgbClr val="C7D2FE"/>
+                  <a:srgbClr val="4F6EF7"/>
                 </a:solidFill>
                 <a:latin typeface="Aptos"/>
               </a:rPr>
-              <a:t>CROSS-END</a:t>
+              <a:t>FORUM</a:t>
             </a:r>
           </a:p>
         </p:txBody>
@@ -17279,11 +21399,11 @@
             <a:r>
               <a:rPr sz="2800" b="1" i="0">
                 <a:solidFill>
-                  <a:srgbClr val="FFFFFF"/>
+                  <a:srgbClr val="102A43"/>
                 </a:solidFill>
                 <a:latin typeface="Microsoft YaHei"/>
               </a:rPr>
-              <a:t>双端协同：Web 主体 + 小程序延展</a:t>
+              <a:t>论坛模块：社区首页到帖子详情</a:t>
             </a:r>
           </a:p>
         </p:txBody>
@@ -17318,11 +21438,11 @@
             <a:r>
               <a:rPr sz="1350" b="0" i="0">
                 <a:solidFill>
-                  <a:srgbClr val="D9E5F5"/>
+                  <a:srgbClr val="62748A"/>
                 </a:solidFill>
                 <a:latin typeface="Microsoft YaHei"/>
               </a:rPr>
-              <a:t>展示主体是 Web；移动端延展同样复用同一套后端与数据语义。</a:t>
+              <a:t>不仅有帖子列表，也有完整的帖子阅读、目录、标签与互动结构。</a:t>
             </a:r>
           </a:p>
         </p:txBody>
@@ -17335,169 +21455,8 @@
         </p:nvSpPr>
         <p:spPr>
           <a:xfrm>
-            <a:off x="868680" y="1755648"/>
-            <a:ext cx="2066543" cy="4407408"/>
-          </a:xfrm>
-          <a:prstGeom prst="roundRect">
-            <a:avLst>
-              <a:gd name="adj" fmla="val 22000"/>
-            </a:avLst>
-          </a:prstGeom>
-          <a:solidFill>
-            <a:srgbClr val="0B1120"/>
-          </a:solidFill>
-          <a:ln w="19050">
-            <a:solidFill>
-              <a:srgbClr val="283548"/>
-            </a:solidFill>
-          </a:ln>
-        </p:spPr>
-        <p:style>
-          <a:lnRef idx="1">
-            <a:schemeClr val="accent1"/>
-          </a:lnRef>
-          <a:fillRef idx="3">
-            <a:schemeClr val="accent1"/>
-          </a:fillRef>
-          <a:effectRef idx="2">
-            <a:schemeClr val="accent1"/>
-          </a:effectRef>
-          <a:fontRef idx="minor">
-            <a:schemeClr val="lt1"/>
-          </a:fontRef>
-        </p:style>
-        <p:txBody>
-          <a:bodyPr rtlCol="0" anchor="ctr"/>
-          <a:lstStyle/>
-          <a:p>
-            <a:pPr algn="ctr"/>
-          </a:p>
-        </p:txBody>
-      </p:sp>
-      <p:sp>
-        <p:nvSpPr>
-          <p:cNvPr id="8" name="Rounded Rectangle 7"/>
-          <p:cNvSpPr/>
-          <p:nvPr/>
-        </p:nvSpPr>
-        <p:spPr>
-          <a:xfrm>
-            <a:off x="978408" y="1901952"/>
-            <a:ext cx="1847087" cy="4114800"/>
-          </a:xfrm>
-          <a:prstGeom prst="roundRect">
-            <a:avLst>
-              <a:gd name="adj" fmla="val 18000"/>
-            </a:avLst>
-          </a:prstGeom>
-          <a:solidFill>
-            <a:srgbClr val="FFFFFF"/>
-          </a:solidFill>
-          <a:ln>
-            <a:noFill/>
-          </a:ln>
-        </p:spPr>
-        <p:style>
-          <a:lnRef idx="1">
-            <a:schemeClr val="accent1"/>
-          </a:lnRef>
-          <a:fillRef idx="3">
-            <a:schemeClr val="accent1"/>
-          </a:fillRef>
-          <a:effectRef idx="2">
-            <a:schemeClr val="accent1"/>
-          </a:effectRef>
-          <a:fontRef idx="minor">
-            <a:schemeClr val="lt1"/>
-          </a:fontRef>
-        </p:style>
-        <p:txBody>
-          <a:bodyPr rtlCol="0" anchor="ctr"/>
-          <a:lstStyle/>
-          <a:p>
-            <a:pPr algn="ctr"/>
-          </a:p>
-        </p:txBody>
-      </p:sp>
-      <p:sp>
-        <p:nvSpPr>
-          <p:cNvPr id="9" name="Rounded Rectangle 8"/>
-          <p:cNvSpPr/>
-          <p:nvPr/>
-        </p:nvSpPr>
-        <p:spPr>
-          <a:xfrm>
-            <a:off x="1399032" y="1828800"/>
-            <a:ext cx="1005839" cy="73152"/>
-          </a:xfrm>
-          <a:prstGeom prst="roundRect">
-            <a:avLst>
-              <a:gd name="adj" fmla="val 40000"/>
-            </a:avLst>
-          </a:prstGeom>
-          <a:solidFill>
-            <a:srgbClr val="172554"/>
-          </a:solidFill>
-          <a:ln>
-            <a:noFill/>
-          </a:ln>
-        </p:spPr>
-        <p:style>
-          <a:lnRef idx="1">
-            <a:schemeClr val="accent1"/>
-          </a:lnRef>
-          <a:fillRef idx="3">
-            <a:schemeClr val="accent1"/>
-          </a:fillRef>
-          <a:effectRef idx="2">
-            <a:schemeClr val="accent1"/>
-          </a:effectRef>
-          <a:fontRef idx="minor">
-            <a:schemeClr val="lt1"/>
-          </a:fontRef>
-        </p:style>
-        <p:txBody>
-          <a:bodyPr rtlCol="0" anchor="ctr"/>
-          <a:lstStyle/>
-          <a:p>
-            <a:pPr algn="ctr"/>
-          </a:p>
-        </p:txBody>
-      </p:sp>
-      <p:pic>
-        <p:nvPicPr>
-          <p:cNvPr id="10" name="Picture 9" descr="phone-303x675.png"/>
-          <p:cNvPicPr>
-            <a:picLocks noChangeAspect="1"/>
-          </p:cNvPicPr>
-          <p:nvPr/>
-        </p:nvPicPr>
-        <p:blipFill>
-          <a:blip r:embed="rId3"/>
-          <a:stretch>
-            <a:fillRect/>
-          </a:stretch>
-        </p:blipFill>
-        <p:spPr>
-          <a:xfrm>
-            <a:off x="978408" y="1901952"/>
-            <a:ext cx="1847087" cy="4114800"/>
-          </a:xfrm>
-          <a:prstGeom prst="rect">
-            <a:avLst/>
-          </a:prstGeom>
-        </p:spPr>
-      </p:pic>
-      <p:sp>
-        <p:nvSpPr>
-          <p:cNvPr id="11" name="Rounded Rectangle 10"/>
-          <p:cNvSpPr/>
-          <p:nvPr/>
-        </p:nvSpPr>
-        <p:spPr>
-          <a:xfrm>
-            <a:off x="3310128" y="2011680"/>
-            <a:ext cx="4078224" cy="2743200"/>
+            <a:off x="658368" y="1828800"/>
+            <a:ext cx="5358384" cy="4315968"/>
           </a:xfrm>
           <a:prstGeom prst="roundRect">
             <a:avLst>
@@ -17537,14 +21496,14 @@
       </p:sp>
       <p:sp>
         <p:nvSpPr>
-          <p:cNvPr id="12" name="Rounded Rectangle 11"/>
+          <p:cNvPr id="8" name="Rounded Rectangle 7"/>
           <p:cNvSpPr/>
           <p:nvPr/>
         </p:nvSpPr>
         <p:spPr>
           <a:xfrm>
-            <a:off x="3383280" y="2084832"/>
-            <a:ext cx="3931920" cy="237744"/>
+            <a:off x="731520" y="1901952"/>
+            <a:ext cx="5212080" cy="237744"/>
           </a:xfrm>
           <a:prstGeom prst="roundRect">
             <a:avLst>
@@ -17582,13 +21541,13 @@
       </p:sp>
       <p:sp>
         <p:nvSpPr>
-          <p:cNvPr id="13" name="Oval 12"/>
+          <p:cNvPr id="9" name="Oval 8"/>
           <p:cNvSpPr/>
           <p:nvPr/>
         </p:nvSpPr>
         <p:spPr>
           <a:xfrm>
-            <a:off x="3465576" y="2144268"/>
+            <a:off x="813816" y="1961388"/>
             <a:ext cx="54864" cy="54864"/>
           </a:xfrm>
           <a:prstGeom prst="ellipse">
@@ -17625,13 +21584,13 @@
       </p:sp>
       <p:sp>
         <p:nvSpPr>
-          <p:cNvPr id="14" name="Oval 13"/>
+          <p:cNvPr id="10" name="Oval 9"/>
           <p:cNvSpPr/>
           <p:nvPr/>
         </p:nvSpPr>
         <p:spPr>
           <a:xfrm>
-            <a:off x="3575304" y="2144268"/>
+            <a:off x="923544" y="1961388"/>
             <a:ext cx="54864" cy="54864"/>
           </a:xfrm>
           <a:prstGeom prst="ellipse">
@@ -17668,13 +21627,13 @@
       </p:sp>
       <p:sp>
         <p:nvSpPr>
-          <p:cNvPr id="15" name="Oval 14"/>
+          <p:cNvPr id="11" name="Oval 10"/>
           <p:cNvSpPr/>
           <p:nvPr/>
         </p:nvSpPr>
         <p:spPr>
           <a:xfrm>
-            <a:off x="3685032" y="2144268"/>
+            <a:off x="1033272" y="1961388"/>
             <a:ext cx="54864" cy="54864"/>
           </a:xfrm>
           <a:prstGeom prst="ellipse">
@@ -17711,14 +21670,14 @@
       </p:sp>
       <p:sp>
         <p:nvSpPr>
-          <p:cNvPr id="16" name="TextBox 15"/>
+          <p:cNvPr id="12" name="TextBox 11"/>
           <p:cNvSpPr txBox="1"/>
           <p:nvPr/>
         </p:nvSpPr>
         <p:spPr>
           <a:xfrm>
-            <a:off x="3840480" y="2103120"/>
-            <a:ext cx="3328416" cy="164592"/>
+            <a:off x="1188720" y="1920240"/>
+            <a:ext cx="4608576" cy="164592"/>
           </a:xfrm>
           <a:prstGeom prst="rect">
             <a:avLst/>
@@ -17743,14 +21702,298 @@
                 </a:solidFill>
                 <a:latin typeface="Microsoft YaHei"/>
               </a:rPr>
-              <a:t>Web 首页（响应式壳层）</a:t>
+              <a:t>论坛首页</a:t>
             </a:r>
           </a:p>
         </p:txBody>
       </p:sp>
       <p:pic>
         <p:nvPicPr>
-          <p:cNvPr id="17" name="Picture 16" descr="Web 首页（响应式壳层）-642x363.png"/>
+          <p:cNvPr id="13" name="Picture 12" descr="论坛首页-852x621.png"/>
+          <p:cNvPicPr>
+            <a:picLocks noChangeAspect="1"/>
+          </p:cNvPicPr>
+          <p:nvPr/>
+        </p:nvPicPr>
+        <p:blipFill>
+          <a:blip r:embed="rId3"/>
+          <a:stretch>
+            <a:fillRect/>
+          </a:stretch>
+        </p:blipFill>
+        <p:spPr>
+          <a:xfrm>
+            <a:off x="740664" y="2194560"/>
+            <a:ext cx="5193792" cy="3858768"/>
+          </a:xfrm>
+          <a:prstGeom prst="rect">
+            <a:avLst/>
+          </a:prstGeom>
+        </p:spPr>
+      </p:pic>
+      <p:sp>
+        <p:nvSpPr>
+          <p:cNvPr id="14" name="Rounded Rectangle 13"/>
+          <p:cNvSpPr/>
+          <p:nvPr/>
+        </p:nvSpPr>
+        <p:spPr>
+          <a:xfrm>
+            <a:off x="6272784" y="1828800"/>
+            <a:ext cx="5285232" cy="4315968"/>
+          </a:xfrm>
+          <a:prstGeom prst="roundRect">
+            <a:avLst>
+              <a:gd name="adj" fmla="val 18000"/>
+            </a:avLst>
+          </a:prstGeom>
+          <a:solidFill>
+            <a:srgbClr val="FFFFFF"/>
+          </a:solidFill>
+          <a:ln w="15240">
+            <a:solidFill>
+              <a:srgbClr val="D9E2EF"/>
+            </a:solidFill>
+          </a:ln>
+        </p:spPr>
+        <p:style>
+          <a:lnRef idx="1">
+            <a:schemeClr val="accent1"/>
+          </a:lnRef>
+          <a:fillRef idx="3">
+            <a:schemeClr val="accent1"/>
+          </a:fillRef>
+          <a:effectRef idx="2">
+            <a:schemeClr val="accent1"/>
+          </a:effectRef>
+          <a:fontRef idx="minor">
+            <a:schemeClr val="lt1"/>
+          </a:fontRef>
+        </p:style>
+        <p:txBody>
+          <a:bodyPr rtlCol="0" anchor="ctr"/>
+          <a:lstStyle/>
+          <a:p>
+            <a:pPr algn="ctr"/>
+          </a:p>
+        </p:txBody>
+      </p:sp>
+      <p:sp>
+        <p:nvSpPr>
+          <p:cNvPr id="15" name="Rounded Rectangle 14"/>
+          <p:cNvSpPr/>
+          <p:nvPr/>
+        </p:nvSpPr>
+        <p:spPr>
+          <a:xfrm>
+            <a:off x="6345936" y="1901952"/>
+            <a:ext cx="5138928" cy="237744"/>
+          </a:xfrm>
+          <a:prstGeom prst="roundRect">
+            <a:avLst>
+              <a:gd name="adj" fmla="val 30000"/>
+            </a:avLst>
+          </a:prstGeom>
+          <a:solidFill>
+            <a:srgbClr val="EEF3FB"/>
+          </a:solidFill>
+          <a:ln>
+            <a:noFill/>
+          </a:ln>
+        </p:spPr>
+        <p:style>
+          <a:lnRef idx="1">
+            <a:schemeClr val="accent1"/>
+          </a:lnRef>
+          <a:fillRef idx="3">
+            <a:schemeClr val="accent1"/>
+          </a:fillRef>
+          <a:effectRef idx="2">
+            <a:schemeClr val="accent1"/>
+          </a:effectRef>
+          <a:fontRef idx="minor">
+            <a:schemeClr val="lt1"/>
+          </a:fontRef>
+        </p:style>
+        <p:txBody>
+          <a:bodyPr rtlCol="0" anchor="ctr"/>
+          <a:lstStyle/>
+          <a:p>
+            <a:pPr algn="ctr"/>
+          </a:p>
+        </p:txBody>
+      </p:sp>
+      <p:sp>
+        <p:nvSpPr>
+          <p:cNvPr id="16" name="Oval 15"/>
+          <p:cNvSpPr/>
+          <p:nvPr/>
+        </p:nvSpPr>
+        <p:spPr>
+          <a:xfrm>
+            <a:off x="6428232" y="1961388"/>
+            <a:ext cx="54864" cy="54864"/>
+          </a:xfrm>
+          <a:prstGeom prst="ellipse">
+            <a:avLst/>
+          </a:prstGeom>
+          <a:solidFill>
+            <a:srgbClr val="FF6B6B"/>
+          </a:solidFill>
+          <a:ln>
+            <a:noFill/>
+          </a:ln>
+        </p:spPr>
+        <p:style>
+          <a:lnRef idx="1">
+            <a:schemeClr val="accent1"/>
+          </a:lnRef>
+          <a:fillRef idx="3">
+            <a:schemeClr val="accent1"/>
+          </a:fillRef>
+          <a:effectRef idx="2">
+            <a:schemeClr val="accent1"/>
+          </a:effectRef>
+          <a:fontRef idx="minor">
+            <a:schemeClr val="lt1"/>
+          </a:fontRef>
+        </p:style>
+        <p:txBody>
+          <a:bodyPr rtlCol="0" anchor="ctr"/>
+          <a:lstStyle/>
+          <a:p>
+            <a:pPr algn="ctr"/>
+          </a:p>
+        </p:txBody>
+      </p:sp>
+      <p:sp>
+        <p:nvSpPr>
+          <p:cNvPr id="17" name="Oval 16"/>
+          <p:cNvSpPr/>
+          <p:nvPr/>
+        </p:nvSpPr>
+        <p:spPr>
+          <a:xfrm>
+            <a:off x="6537960" y="1961388"/>
+            <a:ext cx="54864" cy="54864"/>
+          </a:xfrm>
+          <a:prstGeom prst="ellipse">
+            <a:avLst/>
+          </a:prstGeom>
+          <a:solidFill>
+            <a:srgbClr val="F7B955"/>
+          </a:solidFill>
+          <a:ln>
+            <a:noFill/>
+          </a:ln>
+        </p:spPr>
+        <p:style>
+          <a:lnRef idx="1">
+            <a:schemeClr val="accent1"/>
+          </a:lnRef>
+          <a:fillRef idx="3">
+            <a:schemeClr val="accent1"/>
+          </a:fillRef>
+          <a:effectRef idx="2">
+            <a:schemeClr val="accent1"/>
+          </a:effectRef>
+          <a:fontRef idx="minor">
+            <a:schemeClr val="lt1"/>
+          </a:fontRef>
+        </p:style>
+        <p:txBody>
+          <a:bodyPr rtlCol="0" anchor="ctr"/>
+          <a:lstStyle/>
+          <a:p>
+            <a:pPr algn="ctr"/>
+          </a:p>
+        </p:txBody>
+      </p:sp>
+      <p:sp>
+        <p:nvSpPr>
+          <p:cNvPr id="18" name="Oval 17"/>
+          <p:cNvSpPr/>
+          <p:nvPr/>
+        </p:nvSpPr>
+        <p:spPr>
+          <a:xfrm>
+            <a:off x="6647688" y="1961388"/>
+            <a:ext cx="54864" cy="54864"/>
+          </a:xfrm>
+          <a:prstGeom prst="ellipse">
+            <a:avLst/>
+          </a:prstGeom>
+          <a:solidFill>
+            <a:srgbClr val="34C759"/>
+          </a:solidFill>
+          <a:ln>
+            <a:noFill/>
+          </a:ln>
+        </p:spPr>
+        <p:style>
+          <a:lnRef idx="1">
+            <a:schemeClr val="accent1"/>
+          </a:lnRef>
+          <a:fillRef idx="3">
+            <a:schemeClr val="accent1"/>
+          </a:fillRef>
+          <a:effectRef idx="2">
+            <a:schemeClr val="accent1"/>
+          </a:effectRef>
+          <a:fontRef idx="minor">
+            <a:schemeClr val="lt1"/>
+          </a:fontRef>
+        </p:style>
+        <p:txBody>
+          <a:bodyPr rtlCol="0" anchor="ctr"/>
+          <a:lstStyle/>
+          <a:p>
+            <a:pPr algn="ctr"/>
+          </a:p>
+        </p:txBody>
+      </p:sp>
+      <p:sp>
+        <p:nvSpPr>
+          <p:cNvPr id="19" name="TextBox 18"/>
+          <p:cNvSpPr txBox="1"/>
+          <p:nvPr/>
+        </p:nvSpPr>
+        <p:spPr>
+          <a:xfrm>
+            <a:off x="6803136" y="1920240"/>
+            <a:ext cx="4535424" cy="164592"/>
+          </a:xfrm>
+          <a:prstGeom prst="rect">
+            <a:avLst/>
+          </a:prstGeom>
+          <a:noFill/>
+        </p:spPr>
+        <p:txBody>
+          <a:bodyPr wrap="square" lIns="0" rIns="0" tIns="0" bIns="0" anchor="t">
+            <a:spAutoFit/>
+          </a:bodyPr>
+          <a:lstStyle/>
+          <a:p>
+            <a:pPr algn="l">
+              <a:lnSpc>
+                <a:spcPct val="115000"/>
+              </a:lnSpc>
+            </a:pPr>
+            <a:r>
+              <a:rPr sz="1000" b="1" i="0">
+                <a:solidFill>
+                  <a:srgbClr val="62748A"/>
+                </a:solidFill>
+                <a:latin typeface="Microsoft YaHei"/>
+              </a:rPr>
+              <a:t>论坛帖子详情</a:t>
+            </a:r>
+          </a:p>
+        </p:txBody>
+      </p:sp>
+      <p:pic>
+        <p:nvPicPr>
+          <p:cNvPr id="20" name="Picture 19" descr="论坛帖子详情-840x621.png"/>
           <p:cNvPicPr>
             <a:picLocks noChangeAspect="1"/>
           </p:cNvPicPr>
@@ -17764,8 +22007,8 @@
         </p:blipFill>
         <p:spPr>
           <a:xfrm>
-            <a:off x="3392424" y="2377440"/>
-            <a:ext cx="3913632" cy="2286000"/>
+            <a:off x="6355080" y="2194560"/>
+            <a:ext cx="5120640" cy="3858768"/>
           </a:xfrm>
           <a:prstGeom prst="rect">
             <a:avLst/>
@@ -17774,108 +22017,14 @@
       </p:pic>
       <p:sp>
         <p:nvSpPr>
-          <p:cNvPr id="18" name="Rounded Rectangle 17"/>
-          <p:cNvSpPr/>
-          <p:nvPr/>
-        </p:nvSpPr>
-        <p:spPr>
-          <a:xfrm>
-            <a:off x="7662672" y="1883664"/>
-            <a:ext cx="3886200" cy="4297680"/>
-          </a:xfrm>
-          <a:prstGeom prst="roundRect">
-            <a:avLst>
-              <a:gd name="adj" fmla="val 18000"/>
-            </a:avLst>
-          </a:prstGeom>
-          <a:solidFill>
-            <a:srgbClr val="18263F"/>
-          </a:solidFill>
-          <a:ln w="15240">
-            <a:solidFill>
-              <a:srgbClr val="324362"/>
-            </a:solidFill>
-          </a:ln>
-        </p:spPr>
-        <p:style>
-          <a:lnRef idx="1">
-            <a:schemeClr val="accent1"/>
-          </a:lnRef>
-          <a:fillRef idx="3">
-            <a:schemeClr val="accent1"/>
-          </a:fillRef>
-          <a:effectRef idx="2">
-            <a:schemeClr val="accent1"/>
-          </a:effectRef>
-          <a:fontRef idx="minor">
-            <a:schemeClr val="lt1"/>
-          </a:fontRef>
-        </p:style>
-        <p:txBody>
-          <a:bodyPr rtlCol="0" anchor="ctr"/>
-          <a:lstStyle/>
-          <a:p>
-            <a:pPr algn="ctr"/>
-          </a:p>
-        </p:txBody>
-      </p:sp>
-      <p:sp>
-        <p:nvSpPr>
-          <p:cNvPr id="19" name="Rounded Rectangle 18"/>
-          <p:cNvSpPr/>
-          <p:nvPr/>
-        </p:nvSpPr>
-        <p:spPr>
-          <a:xfrm>
-            <a:off x="7955279" y="2139696"/>
-            <a:ext cx="1325880" cy="292608"/>
-          </a:xfrm>
-          <a:prstGeom prst="roundRect">
-            <a:avLst>
-              <a:gd name="adj" fmla="val 35000"/>
-            </a:avLst>
-          </a:prstGeom>
-          <a:solidFill>
-            <a:srgbClr val="243656"/>
-          </a:solidFill>
-          <a:ln w="12700">
-            <a:solidFill>
-              <a:srgbClr val="39527B"/>
-            </a:solidFill>
-          </a:ln>
-        </p:spPr>
-        <p:style>
-          <a:lnRef idx="1">
-            <a:schemeClr val="accent1"/>
-          </a:lnRef>
-          <a:fillRef idx="3">
-            <a:schemeClr val="accent1"/>
-          </a:fillRef>
-          <a:effectRef idx="2">
-            <a:schemeClr val="accent1"/>
-          </a:effectRef>
-          <a:fontRef idx="minor">
-            <a:schemeClr val="lt1"/>
-          </a:fontRef>
-        </p:style>
-        <p:txBody>
-          <a:bodyPr rtlCol="0" anchor="ctr"/>
-          <a:lstStyle/>
-          <a:p>
-            <a:pPr algn="ctr"/>
-          </a:p>
-        </p:txBody>
-      </p:sp>
-      <p:sp>
-        <p:nvSpPr>
-          <p:cNvPr id="20" name="TextBox 19"/>
+          <p:cNvPr id="21" name="TextBox 20"/>
           <p:cNvSpPr txBox="1"/>
           <p:nvPr/>
         </p:nvSpPr>
         <p:spPr>
           <a:xfrm>
-            <a:off x="8065007" y="2194560"/>
-            <a:ext cx="1106424" cy="182880"/>
+            <a:off x="658368" y="6473952"/>
+            <a:ext cx="2926080" cy="182880"/>
           </a:xfrm>
           <a:prstGeom prst="rect">
             <a:avLst/>
@@ -17888,33 +22037,33 @@
           </a:bodyPr>
           <a:lstStyle/>
           <a:p>
-            <a:pPr algn="ctr">
-              <a:lnSpc>
-                <a:spcPct val="115000"/>
-              </a:lnSpc>
-            </a:pPr>
-            <a:r>
-              <a:rPr sz="1250" b="1" i="0">
-                <a:solidFill>
-                  <a:srgbClr val="D9E5F5"/>
-                </a:solidFill>
-                <a:latin typeface="Microsoft YaHei"/>
-              </a:rPr>
-              <a:t>共享关键语义</a:t>
-            </a:r>
-          </a:p>
-        </p:txBody>
-      </p:sp>
-      <p:sp>
-        <p:nvSpPr>
-          <p:cNvPr id="21" name="TextBox 20"/>
+            <a:pPr algn="l">
+              <a:lnSpc>
+                <a:spcPct val="115000"/>
+              </a:lnSpc>
+            </a:pPr>
+            <a:r>
+              <a:rPr sz="950" b="0" i="0">
+                <a:solidFill>
+                  <a:srgbClr val="94A3B8"/>
+                </a:solidFill>
+                <a:latin typeface="Aptos"/>
+              </a:rPr>
+              <a:t>Sak-AI答题助手｜答辩演示</a:t>
+            </a:r>
+          </a:p>
+        </p:txBody>
+      </p:sp>
+      <p:sp>
+        <p:nvSpPr>
+          <p:cNvPr id="22" name="TextBox 21"/>
           <p:cNvSpPr txBox="1"/>
           <p:nvPr/>
         </p:nvSpPr>
         <p:spPr>
           <a:xfrm>
-            <a:off x="7955279" y="2578608"/>
-            <a:ext cx="3154680" cy="2560320"/>
+            <a:off x="11384280" y="6400800"/>
+            <a:ext cx="347472" cy="219456"/>
           </a:xfrm>
           <a:prstGeom prst="rect">
             <a:avLst/>
@@ -17927,484 +22076,6 @@
           </a:bodyPr>
           <a:lstStyle/>
           <a:p>
-            <a:pPr algn="l">
-              <a:lnSpc>
-                <a:spcPct val="115000"/>
-              </a:lnSpc>
-              <a:spcBef>
-                <a:spcPts val="0"/>
-              </a:spcBef>
-              <a:spcAft>
-                <a:spcPts val="400"/>
-              </a:spcAft>
-            </a:pPr>
-            <a:r>
-              <a:rPr sz="1600" b="1" i="0">
-                <a:solidFill>
-                  <a:srgbClr val="FFFFFF"/>
-                </a:solidFill>
-                <a:latin typeface="Microsoft YaHei"/>
-              </a:rPr>
-              <a:t>收藏 / 错题 / 用户答案 / 用户进度 / 模拟考试</a:t>
-            </a:r>
-          </a:p>
-          <a:p>
-            <a:pPr algn="l">
-              <a:lnSpc>
-                <a:spcPct val="115000"/>
-              </a:lnSpc>
-              <a:spcBef>
-                <a:spcPts val="0"/>
-              </a:spcBef>
-              <a:spcAft>
-                <a:spcPts val="400"/>
-              </a:spcAft>
-            </a:pPr>
-            <a:r>
-              <a:rPr sz="1280" b="0" i="0">
-                <a:solidFill>
-                  <a:srgbClr val="D9E5F5"/>
-                </a:solidFill>
-                <a:latin typeface="Microsoft YaHei"/>
-              </a:rPr>
-              <a:t>• Web 端承担主要交互与展示，是参赛主体。</a:t>
-            </a:r>
-          </a:p>
-          <a:p>
-            <a:pPr algn="l">
-              <a:lnSpc>
-                <a:spcPct val="115000"/>
-              </a:lnSpc>
-              <a:spcBef>
-                <a:spcPts val="0"/>
-              </a:spcBef>
-              <a:spcAft>
-                <a:spcPts val="400"/>
-              </a:spcAft>
-            </a:pPr>
-            <a:r>
-              <a:rPr sz="1280" b="0" i="0">
-                <a:solidFill>
-                  <a:srgbClr val="D9E5F5"/>
-                </a:solidFill>
-                <a:latin typeface="Microsoft YaHei"/>
-              </a:rPr>
-              <a:t>• 小程序按高频移动学习场景延展，减少语义割裂。</a:t>
-            </a:r>
-          </a:p>
-          <a:p>
-            <a:pPr algn="l">
-              <a:lnSpc>
-                <a:spcPct val="115000"/>
-              </a:lnSpc>
-              <a:spcBef>
-                <a:spcPts val="0"/>
-              </a:spcBef>
-              <a:spcAft>
-                <a:spcPts val="400"/>
-              </a:spcAft>
-            </a:pPr>
-            <a:r>
-              <a:rPr sz="1280" b="0" i="0">
-                <a:solidFill>
-                  <a:srgbClr val="D9E5F5"/>
-                </a:solidFill>
-                <a:latin typeface="Microsoft YaHei"/>
-              </a:rPr>
-              <a:t>• 统一经过后端与接口封装，降低维护与演示成本。</a:t>
-            </a:r>
-          </a:p>
-        </p:txBody>
-      </p:sp>
-      <p:sp>
-        <p:nvSpPr>
-          <p:cNvPr id="22" name="Rounded Rectangle 21"/>
-          <p:cNvSpPr/>
-          <p:nvPr/>
-        </p:nvSpPr>
-        <p:spPr>
-          <a:xfrm>
-            <a:off x="7955279" y="5230368"/>
-            <a:ext cx="1591056" cy="841248"/>
-          </a:xfrm>
-          <a:prstGeom prst="roundRect">
-            <a:avLst>
-              <a:gd name="adj" fmla="val 22000"/>
-            </a:avLst>
-          </a:prstGeom>
-          <a:solidFill>
-            <a:srgbClr val="0F172A"/>
-          </a:solidFill>
-          <a:ln w="15240">
-            <a:solidFill>
-              <a:srgbClr val="31415F"/>
-            </a:solidFill>
-          </a:ln>
-        </p:spPr>
-        <p:style>
-          <a:lnRef idx="1">
-            <a:schemeClr val="accent1"/>
-          </a:lnRef>
-          <a:fillRef idx="3">
-            <a:schemeClr val="accent1"/>
-          </a:fillRef>
-          <a:effectRef idx="2">
-            <a:schemeClr val="accent1"/>
-          </a:effectRef>
-          <a:fontRef idx="minor">
-            <a:schemeClr val="lt1"/>
-          </a:fontRef>
-        </p:style>
-        <p:txBody>
-          <a:bodyPr rtlCol="0" anchor="ctr"/>
-          <a:lstStyle/>
-          <a:p>
-            <a:pPr algn="ctr"/>
-          </a:p>
-        </p:txBody>
-      </p:sp>
-      <p:sp>
-        <p:nvSpPr>
-          <p:cNvPr id="23" name="TextBox 22"/>
-          <p:cNvSpPr txBox="1"/>
-          <p:nvPr/>
-        </p:nvSpPr>
-        <p:spPr>
-          <a:xfrm>
-            <a:off x="8183879" y="5367528"/>
-            <a:ext cx="1133856" cy="438912"/>
-          </a:xfrm>
-          <a:prstGeom prst="rect">
-            <a:avLst/>
-          </a:prstGeom>
-          <a:noFill/>
-        </p:spPr>
-        <p:txBody>
-          <a:bodyPr wrap="square" lIns="0" rIns="0" tIns="0" bIns="0" anchor="t">
-            <a:spAutoFit/>
-          </a:bodyPr>
-          <a:lstStyle/>
-          <a:p>
-            <a:pPr algn="l">
-              <a:lnSpc>
-                <a:spcPct val="115000"/>
-              </a:lnSpc>
-            </a:pPr>
-            <a:r>
-              <a:rPr sz="2400" b="1" i="0">
-                <a:solidFill>
-                  <a:srgbClr val="FFFFFF"/>
-                </a:solidFill>
-                <a:latin typeface="Aptos"/>
-              </a:rPr>
-              <a:t>SSR</a:t>
-            </a:r>
-          </a:p>
-        </p:txBody>
-      </p:sp>
-      <p:sp>
-        <p:nvSpPr>
-          <p:cNvPr id="24" name="TextBox 23"/>
-          <p:cNvSpPr txBox="1"/>
-          <p:nvPr/>
-        </p:nvSpPr>
-        <p:spPr>
-          <a:xfrm>
-            <a:off x="8183879" y="5797296"/>
-            <a:ext cx="1133856" cy="310896"/>
-          </a:xfrm>
-          <a:prstGeom prst="rect">
-            <a:avLst/>
-          </a:prstGeom>
-          <a:noFill/>
-        </p:spPr>
-        <p:txBody>
-          <a:bodyPr wrap="square" lIns="0" rIns="0" tIns="0" bIns="0" anchor="t">
-            <a:spAutoFit/>
-          </a:bodyPr>
-          <a:lstStyle/>
-          <a:p>
-            <a:pPr algn="l">
-              <a:lnSpc>
-                <a:spcPct val="115000"/>
-              </a:lnSpc>
-            </a:pPr>
-            <a:r>
-              <a:rPr sz="1250" b="1" i="0">
-                <a:solidFill>
-                  <a:srgbClr val="D7DEEA"/>
-                </a:solidFill>
-                <a:latin typeface="Microsoft YaHei"/>
-              </a:rPr>
-              <a:t>Web 形态</a:t>
-            </a:r>
-          </a:p>
-        </p:txBody>
-      </p:sp>
-      <p:sp>
-        <p:nvSpPr>
-          <p:cNvPr id="25" name="TextBox 24"/>
-          <p:cNvSpPr txBox="1"/>
-          <p:nvPr/>
-        </p:nvSpPr>
-        <p:spPr>
-          <a:xfrm>
-            <a:off x="8183879" y="6099048"/>
-            <a:ext cx="1133856" cy="256032"/>
-          </a:xfrm>
-          <a:prstGeom prst="rect">
-            <a:avLst/>
-          </a:prstGeom>
-          <a:noFill/>
-        </p:spPr>
-        <p:txBody>
-          <a:bodyPr wrap="square" lIns="0" rIns="0" tIns="0" bIns="0" anchor="t">
-            <a:spAutoFit/>
-          </a:bodyPr>
-          <a:lstStyle/>
-          <a:p>
-            <a:pPr algn="l">
-              <a:lnSpc>
-                <a:spcPct val="115000"/>
-              </a:lnSpc>
-            </a:pPr>
-            <a:r>
-              <a:rPr sz="1050" b="0" i="0">
-                <a:solidFill>
-                  <a:srgbClr val="9FB0C7"/>
-                </a:solidFill>
-                <a:latin typeface="Microsoft YaHei"/>
-              </a:rPr>
-              <a:t>Flask + Jinja</a:t>
-            </a:r>
-          </a:p>
-        </p:txBody>
-      </p:sp>
-      <p:sp>
-        <p:nvSpPr>
-          <p:cNvPr id="26" name="Rounded Rectangle 25"/>
-          <p:cNvSpPr/>
-          <p:nvPr/>
-        </p:nvSpPr>
-        <p:spPr>
-          <a:xfrm>
-            <a:off x="9646920" y="5230368"/>
-            <a:ext cx="1591056" cy="841248"/>
-          </a:xfrm>
-          <a:prstGeom prst="roundRect">
-            <a:avLst>
-              <a:gd name="adj" fmla="val 22000"/>
-            </a:avLst>
-          </a:prstGeom>
-          <a:solidFill>
-            <a:srgbClr val="0F172A"/>
-          </a:solidFill>
-          <a:ln w="15240">
-            <a:solidFill>
-              <a:srgbClr val="31415F"/>
-            </a:solidFill>
-          </a:ln>
-        </p:spPr>
-        <p:style>
-          <a:lnRef idx="1">
-            <a:schemeClr val="accent1"/>
-          </a:lnRef>
-          <a:fillRef idx="3">
-            <a:schemeClr val="accent1"/>
-          </a:fillRef>
-          <a:effectRef idx="2">
-            <a:schemeClr val="accent1"/>
-          </a:effectRef>
-          <a:fontRef idx="minor">
-            <a:schemeClr val="lt1"/>
-          </a:fontRef>
-        </p:style>
-        <p:txBody>
-          <a:bodyPr rtlCol="0" anchor="ctr"/>
-          <a:lstStyle/>
-          <a:p>
-            <a:pPr algn="ctr"/>
-          </a:p>
-        </p:txBody>
-      </p:sp>
-      <p:sp>
-        <p:nvSpPr>
-          <p:cNvPr id="27" name="TextBox 26"/>
-          <p:cNvSpPr txBox="1"/>
-          <p:nvPr/>
-        </p:nvSpPr>
-        <p:spPr>
-          <a:xfrm>
-            <a:off x="9875520" y="5367528"/>
-            <a:ext cx="1133856" cy="438912"/>
-          </a:xfrm>
-          <a:prstGeom prst="rect">
-            <a:avLst/>
-          </a:prstGeom>
-          <a:noFill/>
-        </p:spPr>
-        <p:txBody>
-          <a:bodyPr wrap="square" lIns="0" rIns="0" tIns="0" bIns="0" anchor="t">
-            <a:spAutoFit/>
-          </a:bodyPr>
-          <a:lstStyle/>
-          <a:p>
-            <a:pPr algn="l">
-              <a:lnSpc>
-                <a:spcPct val="115000"/>
-              </a:lnSpc>
-            </a:pPr>
-            <a:r>
-              <a:rPr sz="2400" b="1" i="0">
-                <a:solidFill>
-                  <a:srgbClr val="FFFFFF"/>
-                </a:solidFill>
-                <a:latin typeface="Aptos"/>
-              </a:rPr>
-              <a:t>JWT</a:t>
-            </a:r>
-          </a:p>
-        </p:txBody>
-      </p:sp>
-      <p:sp>
-        <p:nvSpPr>
-          <p:cNvPr id="28" name="TextBox 27"/>
-          <p:cNvSpPr txBox="1"/>
-          <p:nvPr/>
-        </p:nvSpPr>
-        <p:spPr>
-          <a:xfrm>
-            <a:off x="9875520" y="5797296"/>
-            <a:ext cx="1133856" cy="310896"/>
-          </a:xfrm>
-          <a:prstGeom prst="rect">
-            <a:avLst/>
-          </a:prstGeom>
-          <a:noFill/>
-        </p:spPr>
-        <p:txBody>
-          <a:bodyPr wrap="square" lIns="0" rIns="0" tIns="0" bIns="0" anchor="t">
-            <a:spAutoFit/>
-          </a:bodyPr>
-          <a:lstStyle/>
-          <a:p>
-            <a:pPr algn="l">
-              <a:lnSpc>
-                <a:spcPct val="115000"/>
-              </a:lnSpc>
-            </a:pPr>
-            <a:r>
-              <a:rPr sz="1250" b="1" i="0">
-                <a:solidFill>
-                  <a:srgbClr val="D7DEEA"/>
-                </a:solidFill>
-                <a:latin typeface="Microsoft YaHei"/>
-              </a:rPr>
-              <a:t>API / 小程序</a:t>
-            </a:r>
-          </a:p>
-        </p:txBody>
-      </p:sp>
-      <p:sp>
-        <p:nvSpPr>
-          <p:cNvPr id="29" name="TextBox 28"/>
-          <p:cNvSpPr txBox="1"/>
-          <p:nvPr/>
-        </p:nvSpPr>
-        <p:spPr>
-          <a:xfrm>
-            <a:off x="9875520" y="6099048"/>
-            <a:ext cx="1133856" cy="256032"/>
-          </a:xfrm>
-          <a:prstGeom prst="rect">
-            <a:avLst/>
-          </a:prstGeom>
-          <a:noFill/>
-        </p:spPr>
-        <p:txBody>
-          <a:bodyPr wrap="square" lIns="0" rIns="0" tIns="0" bIns="0" anchor="t">
-            <a:spAutoFit/>
-          </a:bodyPr>
-          <a:lstStyle/>
-          <a:p>
-            <a:pPr algn="l">
-              <a:lnSpc>
-                <a:spcPct val="115000"/>
-              </a:lnSpc>
-            </a:pPr>
-            <a:r>
-              <a:rPr sz="1050" b="0" i="0">
-                <a:solidFill>
-                  <a:srgbClr val="9FB0C7"/>
-                </a:solidFill>
-                <a:latin typeface="Microsoft YaHei"/>
-              </a:rPr>
-              <a:t>Bearer Token</a:t>
-            </a:r>
-          </a:p>
-        </p:txBody>
-      </p:sp>
-      <p:sp>
-        <p:nvSpPr>
-          <p:cNvPr id="30" name="TextBox 29"/>
-          <p:cNvSpPr txBox="1"/>
-          <p:nvPr/>
-        </p:nvSpPr>
-        <p:spPr>
-          <a:xfrm>
-            <a:off x="658368" y="6473952"/>
-            <a:ext cx="2926080" cy="182880"/>
-          </a:xfrm>
-          <a:prstGeom prst="rect">
-            <a:avLst/>
-          </a:prstGeom>
-          <a:noFill/>
-        </p:spPr>
-        <p:txBody>
-          <a:bodyPr wrap="square" lIns="0" rIns="0" tIns="0" bIns="0" anchor="t">
-            <a:spAutoFit/>
-          </a:bodyPr>
-          <a:lstStyle/>
-          <a:p>
-            <a:pPr algn="l">
-              <a:lnSpc>
-                <a:spcPct val="115000"/>
-              </a:lnSpc>
-            </a:pPr>
-            <a:r>
-              <a:rPr sz="950" b="0" i="0">
-                <a:solidFill>
-                  <a:srgbClr val="D6DFEC"/>
-                </a:solidFill>
-                <a:latin typeface="Aptos"/>
-              </a:rPr>
-              <a:t>Sak-AI答题助手｜答辩演示</a:t>
-            </a:r>
-          </a:p>
-        </p:txBody>
-      </p:sp>
-      <p:sp>
-        <p:nvSpPr>
-          <p:cNvPr id="31" name="TextBox 30"/>
-          <p:cNvSpPr txBox="1"/>
-          <p:nvPr/>
-        </p:nvSpPr>
-        <p:spPr>
-          <a:xfrm>
-            <a:off x="11384280" y="6400800"/>
-            <a:ext cx="347472" cy="219456"/>
-          </a:xfrm>
-          <a:prstGeom prst="rect">
-            <a:avLst/>
-          </a:prstGeom>
-          <a:noFill/>
-        </p:spPr>
-        <p:txBody>
-          <a:bodyPr wrap="square" lIns="0" rIns="0" tIns="0" bIns="0" anchor="t">
-            <a:spAutoFit/>
-          </a:bodyPr>
-          <a:lstStyle/>
-          <a:p>
             <a:pPr algn="r">
               <a:lnSpc>
                 <a:spcPct val="115000"/>
@@ -18413,7 +22084,7 @@
             <a:r>
               <a:rPr sz="1100" b="1" i="0">
                 <a:solidFill>
-                  <a:srgbClr val="F8FAFC"/>
+                  <a:srgbClr val="17324D"/>
                 </a:solidFill>
                 <a:latin typeface="Aptos"/>
               </a:rPr>
@@ -18442,7 +22113,7 @@
       <p:grpSpPr/>
       <p:pic>
         <p:nvPicPr>
-          <p:cNvPr id="2" name="Picture 1" descr="bg_light.png"/>
+          <p:cNvPr id="2" name="Picture 1" descr="bg_dark.png"/>
           <p:cNvPicPr>
             <a:picLocks noChangeAspect="1"/>
           </p:cNvPicPr>
@@ -18494,11 +22165,11 @@
             <a:r>
               <a:rPr sz="1200" b="1" i="0">
                 <a:solidFill>
-                  <a:srgbClr val="4F6EF7"/>
+                  <a:srgbClr val="C7D2FE"/>
                 </a:solidFill>
                 <a:latin typeface="Aptos"/>
               </a:rPr>
-              <a:t>INNOVATION</a:t>
+              <a:t>CHAT</a:t>
             </a:r>
           </a:p>
         </p:txBody>
@@ -18576,11 +22247,11 @@
             <a:r>
               <a:rPr sz="2800" b="1" i="0">
                 <a:solidFill>
-                  <a:srgbClr val="102A43"/>
+                  <a:srgbClr val="FFFFFF"/>
                 </a:solidFill>
                 <a:latin typeface="Microsoft YaHei"/>
               </a:rPr>
-              <a:t>关键亮点：工程化表达与应用价值并重</a:t>
+              <a:t>聊天模块：会话、搜索与互动内容承接</a:t>
             </a:r>
           </a:p>
         </p:txBody>
@@ -18615,11 +22286,11 @@
             <a:r>
               <a:rPr sz="1350" b="0" i="0">
                 <a:solidFill>
-                  <a:srgbClr val="62748A"/>
+                  <a:srgbClr val="D9E5F5"/>
                 </a:solidFill>
                 <a:latin typeface="Microsoft YaHei"/>
               </a:rPr>
-              <a:t>在题库系统常见能力之外，重点强化共享语义、可复现交付与学习辅助增强。</a:t>
+              <a:t>支持从资料页或系统入口进入聊天，会话中可承接题目、图片、语音与帖子转发。</a:t>
             </a:r>
           </a:p>
         </p:txBody>
@@ -18632,8 +22303,8 @@
         </p:nvSpPr>
         <p:spPr>
           <a:xfrm>
-            <a:off x="658368" y="2029968"/>
-            <a:ext cx="3566160" cy="3602736"/>
+            <a:off x="658368" y="1810512"/>
+            <a:ext cx="6766560" cy="4407408"/>
           </a:xfrm>
           <a:prstGeom prst="roundRect">
             <a:avLst>
@@ -18673,20 +22344,22 @@
       </p:sp>
       <p:sp>
         <p:nvSpPr>
-          <p:cNvPr id="8" name="Oval 7"/>
+          <p:cNvPr id="8" name="Rounded Rectangle 7"/>
           <p:cNvSpPr/>
           <p:nvPr/>
         </p:nvSpPr>
         <p:spPr>
           <a:xfrm>
-            <a:off x="822960" y="2194560"/>
-            <a:ext cx="310896" cy="310896"/>
-          </a:xfrm>
-          <a:prstGeom prst="ellipse">
-            <a:avLst/>
+            <a:off x="731520" y="1883664"/>
+            <a:ext cx="6620256" cy="237744"/>
+          </a:xfrm>
+          <a:prstGeom prst="roundRect">
+            <a:avLst>
+              <a:gd name="adj" fmla="val 30000"/>
+            </a:avLst>
           </a:prstGeom>
           <a:solidFill>
-            <a:srgbClr val="4F6EF7"/>
+            <a:srgbClr val="EEF3FB"/>
           </a:solidFill>
           <a:ln>
             <a:noFill/>
@@ -18716,144 +22389,23 @@
       </p:sp>
       <p:sp>
         <p:nvSpPr>
-          <p:cNvPr id="9" name="TextBox 8"/>
-          <p:cNvSpPr txBox="1"/>
-          <p:nvPr/>
-        </p:nvSpPr>
-        <p:spPr>
-          <a:xfrm>
-            <a:off x="822960" y="2203704"/>
-            <a:ext cx="310896" cy="164592"/>
-          </a:xfrm>
-          <a:prstGeom prst="rect">
-            <a:avLst/>
-          </a:prstGeom>
-          <a:noFill/>
-        </p:spPr>
-        <p:txBody>
-          <a:bodyPr wrap="square" lIns="0" rIns="0" tIns="0" bIns="0" anchor="t">
-            <a:spAutoFit/>
-          </a:bodyPr>
-          <a:lstStyle/>
-          <a:p>
-            <a:pPr algn="ctr">
-              <a:lnSpc>
-                <a:spcPct val="115000"/>
-              </a:lnSpc>
-            </a:pPr>
-            <a:r>
-              <a:rPr sz="1200" b="1" i="0">
-                <a:solidFill>
-                  <a:srgbClr val="FFFFFF"/>
-                </a:solidFill>
-                <a:latin typeface="Aptos"/>
-              </a:rPr>
-              <a:t>1</a:t>
-            </a:r>
-          </a:p>
-        </p:txBody>
-      </p:sp>
-      <p:sp>
-        <p:nvSpPr>
-          <p:cNvPr id="10" name="TextBox 9"/>
-          <p:cNvSpPr txBox="1"/>
-          <p:nvPr/>
-        </p:nvSpPr>
-        <p:spPr>
-          <a:xfrm>
-            <a:off x="1225296" y="2176272"/>
-            <a:ext cx="2816352" cy="256032"/>
-          </a:xfrm>
-          <a:prstGeom prst="rect">
-            <a:avLst/>
-          </a:prstGeom>
-          <a:noFill/>
-        </p:spPr>
-        <p:txBody>
-          <a:bodyPr wrap="square" lIns="0" rIns="0" tIns="0" bIns="0" anchor="t">
-            <a:spAutoFit/>
-          </a:bodyPr>
-          <a:lstStyle/>
-          <a:p>
-            <a:pPr algn="l">
-              <a:lnSpc>
-                <a:spcPct val="115000"/>
-              </a:lnSpc>
-            </a:pPr>
-            <a:r>
-              <a:rPr sz="1400" b="1" i="0">
-                <a:solidFill>
-                  <a:srgbClr val="102A43"/>
-                </a:solidFill>
-                <a:latin typeface="Microsoft YaHei"/>
-              </a:rPr>
-              <a:t>共享数据语义</a:t>
-            </a:r>
-          </a:p>
-        </p:txBody>
-      </p:sp>
-      <p:sp>
-        <p:nvSpPr>
-          <p:cNvPr id="11" name="TextBox 10"/>
-          <p:cNvSpPr txBox="1"/>
-          <p:nvPr/>
-        </p:nvSpPr>
-        <p:spPr>
-          <a:xfrm>
-            <a:off x="822960" y="2542032"/>
-            <a:ext cx="3236976" cy="2944368"/>
-          </a:xfrm>
-          <a:prstGeom prst="rect">
-            <a:avLst/>
-          </a:prstGeom>
-          <a:noFill/>
-        </p:spPr>
-        <p:txBody>
-          <a:bodyPr wrap="square" lIns="0" rIns="0" tIns="0" bIns="0" anchor="t">
-            <a:spAutoFit/>
-          </a:bodyPr>
-          <a:lstStyle/>
-          <a:p>
-            <a:pPr algn="l">
-              <a:lnSpc>
-                <a:spcPct val="115000"/>
-              </a:lnSpc>
-            </a:pPr>
-            <a:r>
-              <a:rPr sz="1120" b="0" i="0">
-                <a:solidFill>
-                  <a:srgbClr val="62748A"/>
-                </a:solidFill>
-                <a:latin typeface="Microsoft YaHei"/>
-              </a:rPr>
-              <a:t>公共题库、个人题库、题目、收藏、错题、答案、进度、考试等能力在 Web 与小程序两端保持同一套后端语义，降低维护复杂度，也让学习记录真正可连续。</a:t>
-            </a:r>
-          </a:p>
-        </p:txBody>
-      </p:sp>
-      <p:sp>
-        <p:nvSpPr>
-          <p:cNvPr id="12" name="Rounded Rectangle 11"/>
+          <p:cNvPr id="9" name="Oval 8"/>
           <p:cNvSpPr/>
           <p:nvPr/>
         </p:nvSpPr>
         <p:spPr>
           <a:xfrm>
-            <a:off x="4315968" y="2029968"/>
-            <a:ext cx="3566160" cy="3602736"/>
-          </a:xfrm>
-          <a:prstGeom prst="roundRect">
-            <a:avLst>
-              <a:gd name="adj" fmla="val 18000"/>
-            </a:avLst>
+            <a:off x="813816" y="1943100"/>
+            <a:ext cx="54864" cy="54864"/>
+          </a:xfrm>
+          <a:prstGeom prst="ellipse">
+            <a:avLst/>
           </a:prstGeom>
           <a:solidFill>
-            <a:srgbClr val="FFFFFF"/>
+            <a:srgbClr val="FF6B6B"/>
           </a:solidFill>
-          <a:ln w="15240">
-            <a:solidFill>
-              <a:srgbClr val="D9E2EF"/>
-            </a:solidFill>
+          <a:ln>
+            <a:noFill/>
           </a:ln>
         </p:spPr>
         <p:style>
@@ -18880,20 +22432,20 @@
       </p:sp>
       <p:sp>
         <p:nvSpPr>
-          <p:cNvPr id="13" name="Oval 12"/>
+          <p:cNvPr id="10" name="Oval 9"/>
           <p:cNvSpPr/>
           <p:nvPr/>
         </p:nvSpPr>
         <p:spPr>
           <a:xfrm>
-            <a:off x="4480560" y="2194560"/>
-            <a:ext cx="310896" cy="310896"/>
+            <a:off x="923544" y="1943100"/>
+            <a:ext cx="54864" cy="54864"/>
           </a:xfrm>
           <a:prstGeom prst="ellipse">
             <a:avLst/>
           </a:prstGeom>
           <a:solidFill>
-            <a:srgbClr val="5BC0BE"/>
+            <a:srgbClr val="F7B955"/>
           </a:solidFill>
           <a:ln>
             <a:noFill/>
@@ -18923,144 +22475,23 @@
       </p:sp>
       <p:sp>
         <p:nvSpPr>
-          <p:cNvPr id="14" name="TextBox 13"/>
-          <p:cNvSpPr txBox="1"/>
-          <p:nvPr/>
-        </p:nvSpPr>
-        <p:spPr>
-          <a:xfrm>
-            <a:off x="4480560" y="2203704"/>
-            <a:ext cx="310896" cy="164592"/>
-          </a:xfrm>
-          <a:prstGeom prst="rect">
-            <a:avLst/>
-          </a:prstGeom>
-          <a:noFill/>
-        </p:spPr>
-        <p:txBody>
-          <a:bodyPr wrap="square" lIns="0" rIns="0" tIns="0" bIns="0" anchor="t">
-            <a:spAutoFit/>
-          </a:bodyPr>
-          <a:lstStyle/>
-          <a:p>
-            <a:pPr algn="ctr">
-              <a:lnSpc>
-                <a:spcPct val="115000"/>
-              </a:lnSpc>
-            </a:pPr>
-            <a:r>
-              <a:rPr sz="1200" b="1" i="0">
-                <a:solidFill>
-                  <a:srgbClr val="FFFFFF"/>
-                </a:solidFill>
-                <a:latin typeface="Aptos"/>
-              </a:rPr>
-              <a:t>2</a:t>
-            </a:r>
-          </a:p>
-        </p:txBody>
-      </p:sp>
-      <p:sp>
-        <p:nvSpPr>
-          <p:cNvPr id="15" name="TextBox 14"/>
-          <p:cNvSpPr txBox="1"/>
-          <p:nvPr/>
-        </p:nvSpPr>
-        <p:spPr>
-          <a:xfrm>
-            <a:off x="4882896" y="2176272"/>
-            <a:ext cx="2816352" cy="256032"/>
-          </a:xfrm>
-          <a:prstGeom prst="rect">
-            <a:avLst/>
-          </a:prstGeom>
-          <a:noFill/>
-        </p:spPr>
-        <p:txBody>
-          <a:bodyPr wrap="square" lIns="0" rIns="0" tIns="0" bIns="0" anchor="t">
-            <a:spAutoFit/>
-          </a:bodyPr>
-          <a:lstStyle/>
-          <a:p>
-            <a:pPr algn="l">
-              <a:lnSpc>
-                <a:spcPct val="115000"/>
-              </a:lnSpc>
-            </a:pPr>
-            <a:r>
-              <a:rPr sz="1400" b="1" i="0">
-                <a:solidFill>
-                  <a:srgbClr val="102A43"/>
-                </a:solidFill>
-                <a:latin typeface="Microsoft YaHei"/>
-              </a:rPr>
-              <a:t>Docker 化可复现</a:t>
-            </a:r>
-          </a:p>
-        </p:txBody>
-      </p:sp>
-      <p:sp>
-        <p:nvSpPr>
-          <p:cNvPr id="16" name="TextBox 15"/>
-          <p:cNvSpPr txBox="1"/>
-          <p:nvPr/>
-        </p:nvSpPr>
-        <p:spPr>
-          <a:xfrm>
-            <a:off x="4480560" y="2542032"/>
-            <a:ext cx="3236976" cy="2944368"/>
-          </a:xfrm>
-          <a:prstGeom prst="rect">
-            <a:avLst/>
-          </a:prstGeom>
-          <a:noFill/>
-        </p:spPr>
-        <p:txBody>
-          <a:bodyPr wrap="square" lIns="0" rIns="0" tIns="0" bIns="0" anchor="t">
-            <a:spAutoFit/>
-          </a:bodyPr>
-          <a:lstStyle/>
-          <a:p>
-            <a:pPr algn="l">
-              <a:lnSpc>
-                <a:spcPct val="115000"/>
-              </a:lnSpc>
-            </a:pPr>
-            <a:r>
-              <a:rPr sz="1120" b="0" i="0">
-                <a:solidFill>
-                  <a:srgbClr val="62748A"/>
-                </a:solidFill>
-                <a:latin typeface="Microsoft YaHei"/>
-              </a:rPr>
-              <a:t>开发环境默认通过 compose.dev.yml 统一拉起 web、worker、postgres、redis、backup。无论课堂演示、现场答辩还是后续交付，都能更稳定地复现运行环境。</a:t>
-            </a:r>
-          </a:p>
-        </p:txBody>
-      </p:sp>
-      <p:sp>
-        <p:nvSpPr>
-          <p:cNvPr id="17" name="Rounded Rectangle 16"/>
+          <p:cNvPr id="11" name="Oval 10"/>
           <p:cNvSpPr/>
           <p:nvPr/>
         </p:nvSpPr>
         <p:spPr>
           <a:xfrm>
-            <a:off x="7973568" y="2029968"/>
-            <a:ext cx="3566160" cy="3602736"/>
-          </a:xfrm>
-          <a:prstGeom prst="roundRect">
-            <a:avLst>
-              <a:gd name="adj" fmla="val 18000"/>
-            </a:avLst>
+            <a:off x="1033272" y="1943100"/>
+            <a:ext cx="54864" cy="54864"/>
+          </a:xfrm>
+          <a:prstGeom prst="ellipse">
+            <a:avLst/>
           </a:prstGeom>
           <a:solidFill>
-            <a:srgbClr val="FFFFFF"/>
+            <a:srgbClr val="34C759"/>
           </a:solidFill>
-          <a:ln w="15240">
-            <a:solidFill>
-              <a:srgbClr val="D9E2EF"/>
-            </a:solidFill>
+          <a:ln>
+            <a:noFill/>
           </a:ln>
         </p:spPr>
         <p:style>
@@ -19087,23 +22518,90 @@
       </p:sp>
       <p:sp>
         <p:nvSpPr>
-          <p:cNvPr id="18" name="Oval 17"/>
+          <p:cNvPr id="12" name="TextBox 11"/>
+          <p:cNvSpPr txBox="1"/>
+          <p:nvPr/>
+        </p:nvSpPr>
+        <p:spPr>
+          <a:xfrm>
+            <a:off x="1188720" y="1901952"/>
+            <a:ext cx="6016752" cy="164592"/>
+          </a:xfrm>
+          <a:prstGeom prst="rect">
+            <a:avLst/>
+          </a:prstGeom>
+          <a:noFill/>
+        </p:spPr>
+        <p:txBody>
+          <a:bodyPr wrap="square" lIns="0" rIns="0" tIns="0" bIns="0" anchor="t">
+            <a:spAutoFit/>
+          </a:bodyPr>
+          <a:lstStyle/>
+          <a:p>
+            <a:pPr algn="l">
+              <a:lnSpc>
+                <a:spcPct val="115000"/>
+              </a:lnSpc>
+            </a:pPr>
+            <a:r>
+              <a:rPr sz="1000" b="1" i="0">
+                <a:solidFill>
+                  <a:srgbClr val="62748A"/>
+                </a:solidFill>
+                <a:latin typeface="Microsoft YaHei"/>
+              </a:rPr>
+              <a:t>聊天界面</a:t>
+            </a:r>
+          </a:p>
+        </p:txBody>
+      </p:sp>
+      <p:pic>
+        <p:nvPicPr>
+          <p:cNvPr id="13" name="Picture 12" descr="聊天界面-1083x636.png"/>
+          <p:cNvPicPr>
+            <a:picLocks noChangeAspect="1"/>
+          </p:cNvPicPr>
+          <p:nvPr/>
+        </p:nvPicPr>
+        <p:blipFill>
+          <a:blip r:embed="rId3"/>
+          <a:stretch>
+            <a:fillRect/>
+          </a:stretch>
+        </p:blipFill>
+        <p:spPr>
+          <a:xfrm>
+            <a:off x="740664" y="2176272"/>
+            <a:ext cx="6601968" cy="3950208"/>
+          </a:xfrm>
+          <a:prstGeom prst="rect">
+            <a:avLst/>
+          </a:prstGeom>
+        </p:spPr>
+      </p:pic>
+      <p:sp>
+        <p:nvSpPr>
+          <p:cNvPr id="14" name="Rounded Rectangle 13"/>
           <p:cNvSpPr/>
           <p:nvPr/>
         </p:nvSpPr>
         <p:spPr>
           <a:xfrm>
-            <a:off x="8138160" y="2194560"/>
-            <a:ext cx="310896" cy="310896"/>
-          </a:xfrm>
-          <a:prstGeom prst="ellipse">
-            <a:avLst/>
+            <a:off x="7662672" y="1901952"/>
+            <a:ext cx="3840480" cy="4224528"/>
+          </a:xfrm>
+          <a:prstGeom prst="roundRect">
+            <a:avLst>
+              <a:gd name="adj" fmla="val 18000"/>
+            </a:avLst>
           </a:prstGeom>
           <a:solidFill>
-            <a:srgbClr val="D6B36A"/>
+            <a:srgbClr val="18263F"/>
           </a:solidFill>
-          <a:ln>
-            <a:noFill/>
+          <a:ln w="15240">
+            <a:solidFill>
+              <a:srgbClr val="324362"/>
+            </a:solidFill>
           </a:ln>
         </p:spPr>
         <p:style>
@@ -19130,14 +22628,61 @@
       </p:sp>
       <p:sp>
         <p:nvSpPr>
-          <p:cNvPr id="19" name="TextBox 18"/>
+          <p:cNvPr id="15" name="Rounded Rectangle 14"/>
+          <p:cNvSpPr/>
+          <p:nvPr/>
+        </p:nvSpPr>
+        <p:spPr>
+          <a:xfrm>
+            <a:off x="7955279" y="2139696"/>
+            <a:ext cx="1207008" cy="292608"/>
+          </a:xfrm>
+          <a:prstGeom prst="roundRect">
+            <a:avLst>
+              <a:gd name="adj" fmla="val 35000"/>
+            </a:avLst>
+          </a:prstGeom>
+          <a:solidFill>
+            <a:srgbClr val="243656"/>
+          </a:solidFill>
+          <a:ln w="12700">
+            <a:solidFill>
+              <a:srgbClr val="39527B"/>
+            </a:solidFill>
+          </a:ln>
+        </p:spPr>
+        <p:style>
+          <a:lnRef idx="1">
+            <a:schemeClr val="accent1"/>
+          </a:lnRef>
+          <a:fillRef idx="3">
+            <a:schemeClr val="accent1"/>
+          </a:fillRef>
+          <a:effectRef idx="2">
+            <a:schemeClr val="accent1"/>
+          </a:effectRef>
+          <a:fontRef idx="minor">
+            <a:schemeClr val="lt1"/>
+          </a:fontRef>
+        </p:style>
+        <p:txBody>
+          <a:bodyPr rtlCol="0" anchor="ctr"/>
+          <a:lstStyle/>
+          <a:p>
+            <a:pPr algn="ctr"/>
+          </a:p>
+        </p:txBody>
+      </p:sp>
+      <p:sp>
+        <p:nvSpPr>
+          <p:cNvPr id="16" name="TextBox 15"/>
           <p:cNvSpPr txBox="1"/>
           <p:nvPr/>
         </p:nvSpPr>
         <p:spPr>
           <a:xfrm>
-            <a:off x="8138160" y="2203704"/>
-            <a:ext cx="310896" cy="164592"/>
+            <a:off x="8065007" y="2194560"/>
+            <a:ext cx="987552" cy="182880"/>
           </a:xfrm>
           <a:prstGeom prst="rect">
             <a:avLst/>
@@ -19156,27 +22701,27 @@
               </a:lnSpc>
             </a:pPr>
             <a:r>
-              <a:rPr sz="1200" b="1" i="0">
-                <a:solidFill>
-                  <a:srgbClr val="FFFFFF"/>
-                </a:solidFill>
-                <a:latin typeface="Aptos"/>
-              </a:rPr>
-              <a:t>3</a:t>
-            </a:r>
-          </a:p>
-        </p:txBody>
-      </p:sp>
-      <p:sp>
-        <p:nvSpPr>
-          <p:cNvPr id="20" name="TextBox 19"/>
+              <a:rPr sz="1250" b="1" i="0">
+                <a:solidFill>
+                  <a:srgbClr val="D9E5F5"/>
+                </a:solidFill>
+                <a:latin typeface="Microsoft YaHei"/>
+              </a:rPr>
+              <a:t>交互能力</a:t>
+            </a:r>
+          </a:p>
+        </p:txBody>
+      </p:sp>
+      <p:sp>
+        <p:nvSpPr>
+          <p:cNvPr id="17" name="TextBox 16"/>
           <p:cNvSpPr txBox="1"/>
           <p:nvPr/>
         </p:nvSpPr>
         <p:spPr>
           <a:xfrm>
-            <a:off x="8540496" y="2176272"/>
-            <a:ext cx="2816352" cy="256032"/>
+            <a:off x="7955279" y="2578608"/>
+            <a:ext cx="3163824" cy="2286000"/>
           </a:xfrm>
           <a:prstGeom prst="rect">
             <a:avLst/>
@@ -19193,29 +22738,148 @@
               <a:lnSpc>
                 <a:spcPct val="115000"/>
               </a:lnSpc>
-            </a:pPr>
-            <a:r>
-              <a:rPr sz="1400" b="1" i="0">
-                <a:solidFill>
-                  <a:srgbClr val="102A43"/>
+              <a:spcBef>
+                <a:spcPts val="0"/>
+              </a:spcBef>
+              <a:spcAft>
+                <a:spcPts val="400"/>
+              </a:spcAft>
+            </a:pPr>
+            <a:r>
+              <a:rPr sz="1300" b="1" i="0">
+                <a:solidFill>
+                  <a:srgbClr val="EAF1FF"/>
                 </a:solidFill>
                 <a:latin typeface="Microsoft YaHei"/>
               </a:rPr>
-              <a:t>AI 题解增强</a:t>
-            </a:r>
-          </a:p>
-        </p:txBody>
-      </p:sp>
-      <p:sp>
-        <p:nvSpPr>
-          <p:cNvPr id="21" name="TextBox 20"/>
+              <a:t>搜索用户后可直接发起讨论。</a:t>
+            </a:r>
+          </a:p>
+          <a:p>
+            <a:pPr algn="l">
+              <a:lnSpc>
+                <a:spcPct val="115000"/>
+              </a:lnSpc>
+              <a:spcBef>
+                <a:spcPts val="0"/>
+              </a:spcBef>
+              <a:spcAft>
+                <a:spcPts val="400"/>
+              </a:spcAft>
+            </a:pPr>
+            <a:r>
+              <a:rPr sz="1240" b="0" i="0">
+                <a:solidFill>
+                  <a:srgbClr val="D9E5F5"/>
+                </a:solidFill>
+                <a:latin typeface="Microsoft YaHei"/>
+              </a:rPr>
+              <a:t>• 会话列表区分消息与互动。</a:t>
+            </a:r>
+          </a:p>
+          <a:p>
+            <a:pPr algn="l">
+              <a:lnSpc>
+                <a:spcPct val="115000"/>
+              </a:lnSpc>
+              <a:spcBef>
+                <a:spcPts val="0"/>
+              </a:spcBef>
+              <a:spcAft>
+                <a:spcPts val="400"/>
+              </a:spcAft>
+            </a:pPr>
+            <a:r>
+              <a:rPr sz="1240" b="0" i="0">
+                <a:solidFill>
+                  <a:srgbClr val="D9E5F5"/>
+                </a:solidFill>
+                <a:latin typeface="Microsoft YaHei"/>
+              </a:rPr>
+              <a:t>• 消息类型覆盖图片、语音、题目与帖子转发。</a:t>
+            </a:r>
+          </a:p>
+          <a:p>
+            <a:pPr algn="l">
+              <a:lnSpc>
+                <a:spcPct val="115000"/>
+              </a:lnSpc>
+              <a:spcBef>
+                <a:spcPts val="0"/>
+              </a:spcBef>
+              <a:spcAft>
+                <a:spcPts val="400"/>
+              </a:spcAft>
+            </a:pPr>
+            <a:r>
+              <a:rPr sz="1240" b="0" i="0">
+                <a:solidFill>
+                  <a:srgbClr val="D9E5F5"/>
+                </a:solidFill>
+                <a:latin typeface="Microsoft YaHei"/>
+              </a:rPr>
+              <a:t>• 与论坛、个人资料等模块形成联动。</a:t>
+            </a:r>
+          </a:p>
+        </p:txBody>
+      </p:sp>
+      <p:sp>
+        <p:nvSpPr>
+          <p:cNvPr id="18" name="Rounded Rectangle 17"/>
+          <p:cNvSpPr/>
+          <p:nvPr/>
+        </p:nvSpPr>
+        <p:spPr>
+          <a:xfrm>
+            <a:off x="7955279" y="5285232"/>
+            <a:ext cx="1572768" cy="822960"/>
+          </a:xfrm>
+          <a:prstGeom prst="roundRect">
+            <a:avLst>
+              <a:gd name="adj" fmla="val 22000"/>
+            </a:avLst>
+          </a:prstGeom>
+          <a:solidFill>
+            <a:srgbClr val="0F172A"/>
+          </a:solidFill>
+          <a:ln w="15240">
+            <a:solidFill>
+              <a:srgbClr val="31415F"/>
+            </a:solidFill>
+          </a:ln>
+        </p:spPr>
+        <p:style>
+          <a:lnRef idx="1">
+            <a:schemeClr val="accent1"/>
+          </a:lnRef>
+          <a:fillRef idx="3">
+            <a:schemeClr val="accent1"/>
+          </a:fillRef>
+          <a:effectRef idx="2">
+            <a:schemeClr val="accent1"/>
+          </a:effectRef>
+          <a:fontRef idx="minor">
+            <a:schemeClr val="lt1"/>
+          </a:fontRef>
+        </p:style>
+        <p:txBody>
+          <a:bodyPr rtlCol="0" anchor="ctr"/>
+          <a:lstStyle/>
+          <a:p>
+            <a:pPr algn="ctr"/>
+          </a:p>
+        </p:txBody>
+      </p:sp>
+      <p:sp>
+        <p:nvSpPr>
+          <p:cNvPr id="19" name="TextBox 18"/>
           <p:cNvSpPr txBox="1"/>
           <p:nvPr/>
         </p:nvSpPr>
         <p:spPr>
           <a:xfrm>
-            <a:off x="8138160" y="2542032"/>
-            <a:ext cx="3236976" cy="2944368"/>
+            <a:off x="8183879" y="5422392"/>
+            <a:ext cx="1115568" cy="438912"/>
           </a:xfrm>
           <a:prstGeom prst="rect">
             <a:avLst/>
@@ -19234,27 +22898,27 @@
               </a:lnSpc>
             </a:pPr>
             <a:r>
-              <a:rPr sz="1120" b="0" i="0">
-                <a:solidFill>
-                  <a:srgbClr val="62748A"/>
-                </a:solidFill>
-                <a:latin typeface="Microsoft YaHei"/>
-              </a:rPr>
-              <a:t>在传统刷题流程上补充 AI 题目解析接口，用于帮助理解题目与知识点，强调“学会”而不只是“做完”，提升平台在教学和备考场景中的延展价值。</a:t>
-            </a:r>
-          </a:p>
-        </p:txBody>
-      </p:sp>
-      <p:sp>
-        <p:nvSpPr>
-          <p:cNvPr id="22" name="TextBox 21"/>
+              <a:rPr sz="2400" b="1" i="0">
+                <a:solidFill>
+                  <a:srgbClr val="FFFFFF"/>
+                </a:solidFill>
+                <a:latin typeface="Aptos"/>
+              </a:rPr>
+              <a:t>IM</a:t>
+            </a:r>
+          </a:p>
+        </p:txBody>
+      </p:sp>
+      <p:sp>
+        <p:nvSpPr>
+          <p:cNvPr id="20" name="TextBox 19"/>
           <p:cNvSpPr txBox="1"/>
           <p:nvPr/>
         </p:nvSpPr>
         <p:spPr>
           <a:xfrm>
-            <a:off x="658368" y="6473952"/>
-            <a:ext cx="2926080" cy="182880"/>
+            <a:off x="8183879" y="5852160"/>
+            <a:ext cx="1115568" cy="310896"/>
           </a:xfrm>
           <a:prstGeom prst="rect">
             <a:avLst/>
@@ -19273,27 +22937,27 @@
               </a:lnSpc>
             </a:pPr>
             <a:r>
-              <a:rPr sz="950" b="0" i="0">
-                <a:solidFill>
-                  <a:srgbClr val="94A3B8"/>
-                </a:solidFill>
-                <a:latin typeface="Aptos"/>
-              </a:rPr>
-              <a:t>Sak-AI答题助手｜答辩演示</a:t>
-            </a:r>
-          </a:p>
-        </p:txBody>
-      </p:sp>
-      <p:sp>
-        <p:nvSpPr>
-          <p:cNvPr id="23" name="TextBox 22"/>
+              <a:rPr sz="1250" b="1" i="0">
+                <a:solidFill>
+                  <a:srgbClr val="D7DEEA"/>
+                </a:solidFill>
+                <a:latin typeface="Microsoft YaHei"/>
+              </a:rPr>
+              <a:t>消息流</a:t>
+            </a:r>
+          </a:p>
+        </p:txBody>
+      </p:sp>
+      <p:sp>
+        <p:nvSpPr>
+          <p:cNvPr id="21" name="TextBox 20"/>
           <p:cNvSpPr txBox="1"/>
           <p:nvPr/>
         </p:nvSpPr>
         <p:spPr>
           <a:xfrm>
-            <a:off x="11384280" y="6400800"/>
-            <a:ext cx="347472" cy="219456"/>
+            <a:off x="8183879" y="6153912"/>
+            <a:ext cx="1115568" cy="256032"/>
           </a:xfrm>
           <a:prstGeom prst="rect">
             <a:avLst/>
@@ -19306,6 +22970,248 @@
           </a:bodyPr>
           <a:lstStyle/>
           <a:p>
+            <a:pPr algn="l">
+              <a:lnSpc>
+                <a:spcPct val="115000"/>
+              </a:lnSpc>
+            </a:pPr>
+            <a:r>
+              <a:rPr sz="1050" b="0" i="0">
+                <a:solidFill>
+                  <a:srgbClr val="9FB0C7"/>
+                </a:solidFill>
+                <a:latin typeface="Microsoft YaHei"/>
+              </a:rPr>
+              <a:t>会话 / 搜索 / 发送</a:t>
+            </a:r>
+          </a:p>
+        </p:txBody>
+      </p:sp>
+      <p:sp>
+        <p:nvSpPr>
+          <p:cNvPr id="22" name="Rounded Rectangle 21"/>
+          <p:cNvSpPr/>
+          <p:nvPr/>
+        </p:nvSpPr>
+        <p:spPr>
+          <a:xfrm>
+            <a:off x="9656064" y="5285232"/>
+            <a:ext cx="1572768" cy="822960"/>
+          </a:xfrm>
+          <a:prstGeom prst="roundRect">
+            <a:avLst>
+              <a:gd name="adj" fmla="val 22000"/>
+            </a:avLst>
+          </a:prstGeom>
+          <a:solidFill>
+            <a:srgbClr val="0F172A"/>
+          </a:solidFill>
+          <a:ln w="15240">
+            <a:solidFill>
+              <a:srgbClr val="31415F"/>
+            </a:solidFill>
+          </a:ln>
+        </p:spPr>
+        <p:style>
+          <a:lnRef idx="1">
+            <a:schemeClr val="accent1"/>
+          </a:lnRef>
+          <a:fillRef idx="3">
+            <a:schemeClr val="accent1"/>
+          </a:fillRef>
+          <a:effectRef idx="2">
+            <a:schemeClr val="accent1"/>
+          </a:effectRef>
+          <a:fontRef idx="minor">
+            <a:schemeClr val="lt1"/>
+          </a:fontRef>
+        </p:style>
+        <p:txBody>
+          <a:bodyPr rtlCol="0" anchor="ctr"/>
+          <a:lstStyle/>
+          <a:p>
+            <a:pPr algn="ctr"/>
+          </a:p>
+        </p:txBody>
+      </p:sp>
+      <p:sp>
+        <p:nvSpPr>
+          <p:cNvPr id="23" name="TextBox 22"/>
+          <p:cNvSpPr txBox="1"/>
+          <p:nvPr/>
+        </p:nvSpPr>
+        <p:spPr>
+          <a:xfrm>
+            <a:off x="9884664" y="5422392"/>
+            <a:ext cx="1115568" cy="438912"/>
+          </a:xfrm>
+          <a:prstGeom prst="rect">
+            <a:avLst/>
+          </a:prstGeom>
+          <a:noFill/>
+        </p:spPr>
+        <p:txBody>
+          <a:bodyPr wrap="square" lIns="0" rIns="0" tIns="0" bIns="0" anchor="t">
+            <a:spAutoFit/>
+          </a:bodyPr>
+          <a:lstStyle/>
+          <a:p>
+            <a:pPr algn="l">
+              <a:lnSpc>
+                <a:spcPct val="115000"/>
+              </a:lnSpc>
+            </a:pPr>
+            <a:r>
+              <a:rPr sz="2400" b="1" i="0">
+                <a:solidFill>
+                  <a:srgbClr val="FFFFFF"/>
+                </a:solidFill>
+                <a:latin typeface="Aptos"/>
+              </a:rPr>
+              <a:t>Link</a:t>
+            </a:r>
+          </a:p>
+        </p:txBody>
+      </p:sp>
+      <p:sp>
+        <p:nvSpPr>
+          <p:cNvPr id="24" name="TextBox 23"/>
+          <p:cNvSpPr txBox="1"/>
+          <p:nvPr/>
+        </p:nvSpPr>
+        <p:spPr>
+          <a:xfrm>
+            <a:off x="9884664" y="5852160"/>
+            <a:ext cx="1115568" cy="310896"/>
+          </a:xfrm>
+          <a:prstGeom prst="rect">
+            <a:avLst/>
+          </a:prstGeom>
+          <a:noFill/>
+        </p:spPr>
+        <p:txBody>
+          <a:bodyPr wrap="square" lIns="0" rIns="0" tIns="0" bIns="0" anchor="t">
+            <a:spAutoFit/>
+          </a:bodyPr>
+          <a:lstStyle/>
+          <a:p>
+            <a:pPr algn="l">
+              <a:lnSpc>
+                <a:spcPct val="115000"/>
+              </a:lnSpc>
+            </a:pPr>
+            <a:r>
+              <a:rPr sz="1250" b="1" i="0">
+                <a:solidFill>
+                  <a:srgbClr val="D7DEEA"/>
+                </a:solidFill>
+                <a:latin typeface="Microsoft YaHei"/>
+              </a:rPr>
+              <a:t>内容互通</a:t>
+            </a:r>
+          </a:p>
+        </p:txBody>
+      </p:sp>
+      <p:sp>
+        <p:nvSpPr>
+          <p:cNvPr id="25" name="TextBox 24"/>
+          <p:cNvSpPr txBox="1"/>
+          <p:nvPr/>
+        </p:nvSpPr>
+        <p:spPr>
+          <a:xfrm>
+            <a:off x="9884664" y="6153912"/>
+            <a:ext cx="1115568" cy="256032"/>
+          </a:xfrm>
+          <a:prstGeom prst="rect">
+            <a:avLst/>
+          </a:prstGeom>
+          <a:noFill/>
+        </p:spPr>
+        <p:txBody>
+          <a:bodyPr wrap="square" lIns="0" rIns="0" tIns="0" bIns="0" anchor="t">
+            <a:spAutoFit/>
+          </a:bodyPr>
+          <a:lstStyle/>
+          <a:p>
+            <a:pPr algn="l">
+              <a:lnSpc>
+                <a:spcPct val="115000"/>
+              </a:lnSpc>
+            </a:pPr>
+            <a:r>
+              <a:rPr sz="1050" b="0" i="0">
+                <a:solidFill>
+                  <a:srgbClr val="9FB0C7"/>
+                </a:solidFill>
+                <a:latin typeface="Microsoft YaHei"/>
+              </a:rPr>
+              <a:t>题目 / 帖子 / 图片</a:t>
+            </a:r>
+          </a:p>
+        </p:txBody>
+      </p:sp>
+      <p:sp>
+        <p:nvSpPr>
+          <p:cNvPr id="26" name="TextBox 25"/>
+          <p:cNvSpPr txBox="1"/>
+          <p:nvPr/>
+        </p:nvSpPr>
+        <p:spPr>
+          <a:xfrm>
+            <a:off x="658368" y="6473952"/>
+            <a:ext cx="2926080" cy="182880"/>
+          </a:xfrm>
+          <a:prstGeom prst="rect">
+            <a:avLst/>
+          </a:prstGeom>
+          <a:noFill/>
+        </p:spPr>
+        <p:txBody>
+          <a:bodyPr wrap="square" lIns="0" rIns="0" tIns="0" bIns="0" anchor="t">
+            <a:spAutoFit/>
+          </a:bodyPr>
+          <a:lstStyle/>
+          <a:p>
+            <a:pPr algn="l">
+              <a:lnSpc>
+                <a:spcPct val="115000"/>
+              </a:lnSpc>
+            </a:pPr>
+            <a:r>
+              <a:rPr sz="950" b="0" i="0">
+                <a:solidFill>
+                  <a:srgbClr val="D6DFEC"/>
+                </a:solidFill>
+                <a:latin typeface="Aptos"/>
+              </a:rPr>
+              <a:t>Sak-AI答题助手｜答辩演示</a:t>
+            </a:r>
+          </a:p>
+        </p:txBody>
+      </p:sp>
+      <p:sp>
+        <p:nvSpPr>
+          <p:cNvPr id="27" name="TextBox 26"/>
+          <p:cNvSpPr txBox="1"/>
+          <p:nvPr/>
+        </p:nvSpPr>
+        <p:spPr>
+          <a:xfrm>
+            <a:off x="11384280" y="6400800"/>
+            <a:ext cx="347472" cy="219456"/>
+          </a:xfrm>
+          <a:prstGeom prst="rect">
+            <a:avLst/>
+          </a:prstGeom>
+          <a:noFill/>
+        </p:spPr>
+        <p:txBody>
+          <a:bodyPr wrap="square" lIns="0" rIns="0" tIns="0" bIns="0" anchor="t">
+            <a:spAutoFit/>
+          </a:bodyPr>
+          <a:lstStyle/>
+          <a:p>
             <a:pPr algn="r">
               <a:lnSpc>
                 <a:spcPct val="115000"/>
@@ -19314,7 +23220,7 @@
             <a:r>
               <a:rPr sz="1100" b="1" i="0">
                 <a:solidFill>
-                  <a:srgbClr val="17324D"/>
+                  <a:srgbClr val="F8FAFC"/>
                 </a:solidFill>
                 <a:latin typeface="Aptos"/>
               </a:rPr>

--- a/output/doc/1软件应用与开发_1Web应用与开发_Sak-AI答题助手/01作品与答辩材料/Sak-AI答题助手-答辩演示PPT.pptx
+++ b/output/doc/1软件应用与开发_1Web应用与开发_Sak-AI答题助手/01作品与答辩材料/Sak-AI答题助手-答辩演示PPT.pptx
@@ -1,31 +1,31 @@
 
 <file path=ppt/presentation.xml><?xml version="1.0" encoding="utf-8"?>
-<p:presentation xmlns:a="http://schemas.openxmlformats.org/drawingml/2006/main" xmlns:r="http://schemas.openxmlformats.org/officeDocument/2006/relationships" xmlns:p="http://schemas.openxmlformats.org/presentationml/2006/main" saveSubsetFonts="1" autoCompressPictures="0">
+<p:presentation xmlns:a="http://schemas.openxmlformats.org/drawingml/2006/main" xmlns:r="http://schemas.openxmlformats.org/officeDocument/2006/relationships" xmlns:p="http://schemas.openxmlformats.org/presentationml/2006/main" autoCompressPictures="0">
   <p:sldMasterIdLst>
     <p:sldMasterId id="2147483648" r:id="rId1"/>
   </p:sldMasterIdLst>
   <p:sldIdLst>
-    <p:sldId id="256" r:id="rId7"/>
-    <p:sldId id="257" r:id="rId8"/>
-    <p:sldId id="258" r:id="rId9"/>
-    <p:sldId id="259" r:id="rId10"/>
-    <p:sldId id="260" r:id="rId11"/>
-    <p:sldId id="261" r:id="rId12"/>
-    <p:sldId id="262" r:id="rId13"/>
-    <p:sldId id="263" r:id="rId14"/>
-    <p:sldId id="264" r:id="rId15"/>
-    <p:sldId id="265" r:id="rId16"/>
-    <p:sldId id="266" r:id="rId17"/>
-    <p:sldId id="267" r:id="rId18"/>
-    <p:sldId id="268" r:id="rId19"/>
-    <p:sldId id="269" r:id="rId20"/>
-    <p:sldId id="270" r:id="rId21"/>
-    <p:sldId id="271" r:id="rId22"/>
-    <p:sldId id="272" r:id="rId23"/>
-    <p:sldId id="273" r:id="rId24"/>
-    <p:sldId id="274" r:id="rId25"/>
+    <p:sldId id="256" r:id="rId3"/>
+    <p:sldId id="257" r:id="rId4"/>
+    <p:sldId id="258" r:id="rId5"/>
+    <p:sldId id="259" r:id="rId6"/>
+    <p:sldId id="260" r:id="rId7"/>
+    <p:sldId id="261" r:id="rId8"/>
+    <p:sldId id="262" r:id="rId9"/>
+    <p:sldId id="263" r:id="rId10"/>
+    <p:sldId id="264" r:id="rId11"/>
+    <p:sldId id="265" r:id="rId12"/>
+    <p:sldId id="266" r:id="rId13"/>
+    <p:sldId id="267" r:id="rId14"/>
+    <p:sldId id="268" r:id="rId15"/>
+    <p:sldId id="269" r:id="rId16"/>
+    <p:sldId id="270" r:id="rId17"/>
+    <p:sldId id="271" r:id="rId18"/>
+    <p:sldId id="272" r:id="rId19"/>
+    <p:sldId id="273" r:id="rId20"/>
+    <p:sldId id="274" r:id="rId21"/>
   </p:sldIdLst>
-  <p:sldSz cx="12191695" cy="6858000" type="screen4x3"/>
+  <p:sldSz cx="12191365" cy="6858000" type="screen4x3"/>
   <p:notesSz cx="6858000" cy="9144000"/>
   <p:defaultTextStyle>
     <a:defPPr>
@@ -122,6 +122,22 @@
       </a:defRPr>
     </a:lvl9pPr>
   </p:defaultTextStyle>
+  <p:extLst>
+    <p:ext uri="{EFAFB233-063F-42B5-8137-9DF3F51BA10A}">
+      <p15:sldGuideLst xmlns:p15="http://schemas.microsoft.com/office/powerpoint/2012/main">
+        <p15:guide id="1" orient="horz" pos="2160" userDrawn="1">
+          <p15:clr>
+            <a:srgbClr val="A4A3A4"/>
+          </p15:clr>
+        </p15:guide>
+        <p15:guide id="2" pos="2880" userDrawn="1">
+          <p15:clr>
+            <a:srgbClr val="A4A3A4"/>
+          </p15:clr>
+        </p15:guide>
+      </p15:sldGuideLst>
+    </p:ext>
+  </p:extLst>
 </p:presentation>
 </file>
 
@@ -306,7 +322,6 @@
           <a:p>
             <a:fld id="{5BCAD085-E8A6-8845-BD4E-CB4CCA059FC4}" type="datetimeFigureOut">
               <a:rPr lang="en-US" smtClean="0"/>
-              <a:t>1/27/13</a:t>
             </a:fld>
             <a:endParaRPr lang="en-US"/>
           </a:p>
@@ -348,18 +363,12 @@
           <a:p>
             <a:fld id="{C1FF6DA9-008F-8B48-92A6-B652298478BF}" type="slidenum">
               <a:rPr lang="en-US" smtClean="0"/>
-              <a:t>‹#›</a:t>
             </a:fld>
             <a:endParaRPr lang="en-US"/>
           </a:p>
         </p:txBody>
       </p:sp>
     </p:spTree>
-    <p:extLst>
-      <p:ext uri="{BB962C8B-B14F-4D97-AF65-F5344CB8AC3E}">
-        <p14:creationId xmlns:p14="http://schemas.microsoft.com/office/powerpoint/2010/main" val="3168075583"/>
-      </p:ext>
-    </p:extLst>
   </p:cSld>
   <p:clrMapOvr>
     <a:masterClrMapping/>
@@ -427,6 +436,7 @@
               <a:rPr lang="en-US" smtClean="0"/>
               <a:t>Click to edit Master text styles</a:t>
             </a:r>
+            <a:endParaRPr lang="en-US" smtClean="0"/>
           </a:p>
           <a:p>
             <a:pPr lvl="1"/>
@@ -434,6 +444,7 @@
               <a:rPr lang="en-US" smtClean="0"/>
               <a:t>Second level</a:t>
             </a:r>
+            <a:endParaRPr lang="en-US" smtClean="0"/>
           </a:p>
           <a:p>
             <a:pPr lvl="2"/>
@@ -441,6 +452,7 @@
               <a:rPr lang="en-US" smtClean="0"/>
               <a:t>Third level</a:t>
             </a:r>
+            <a:endParaRPr lang="en-US" smtClean="0"/>
           </a:p>
           <a:p>
             <a:pPr lvl="3"/>
@@ -448,6 +460,7 @@
               <a:rPr lang="en-US" smtClean="0"/>
               <a:t>Fourth level</a:t>
             </a:r>
+            <a:endParaRPr lang="en-US" smtClean="0"/>
           </a:p>
           <a:p>
             <a:pPr lvl="4"/>
@@ -476,7 +489,6 @@
           <a:p>
             <a:fld id="{5BCAD085-E8A6-8845-BD4E-CB4CCA059FC4}" type="datetimeFigureOut">
               <a:rPr lang="en-US" smtClean="0"/>
-              <a:t>1/27/13</a:t>
             </a:fld>
             <a:endParaRPr lang="en-US"/>
           </a:p>
@@ -518,18 +530,12 @@
           <a:p>
             <a:fld id="{C1FF6DA9-008F-8B48-92A6-B652298478BF}" type="slidenum">
               <a:rPr lang="en-US" smtClean="0"/>
-              <a:t>‹#›</a:t>
             </a:fld>
             <a:endParaRPr lang="en-US"/>
           </a:p>
         </p:txBody>
       </p:sp>
     </p:spTree>
-    <p:extLst>
-      <p:ext uri="{BB962C8B-B14F-4D97-AF65-F5344CB8AC3E}">
-        <p14:creationId xmlns:p14="http://schemas.microsoft.com/office/powerpoint/2010/main" val="2910927964"/>
-      </p:ext>
-    </p:extLst>
   </p:cSld>
   <p:clrMapOvr>
     <a:masterClrMapping/>
@@ -607,6 +613,7 @@
               <a:rPr lang="en-US" smtClean="0"/>
               <a:t>Click to edit Master text styles</a:t>
             </a:r>
+            <a:endParaRPr lang="en-US" smtClean="0"/>
           </a:p>
           <a:p>
             <a:pPr lvl="1"/>
@@ -614,6 +621,7 @@
               <a:rPr lang="en-US" smtClean="0"/>
               <a:t>Second level</a:t>
             </a:r>
+            <a:endParaRPr lang="en-US" smtClean="0"/>
           </a:p>
           <a:p>
             <a:pPr lvl="2"/>
@@ -621,6 +629,7 @@
               <a:rPr lang="en-US" smtClean="0"/>
               <a:t>Third level</a:t>
             </a:r>
+            <a:endParaRPr lang="en-US" smtClean="0"/>
           </a:p>
           <a:p>
             <a:pPr lvl="3"/>
@@ -628,6 +637,7 @@
               <a:rPr lang="en-US" smtClean="0"/>
               <a:t>Fourth level</a:t>
             </a:r>
+            <a:endParaRPr lang="en-US" smtClean="0"/>
           </a:p>
           <a:p>
             <a:pPr lvl="4"/>
@@ -656,7 +666,6 @@
           <a:p>
             <a:fld id="{5BCAD085-E8A6-8845-BD4E-CB4CCA059FC4}" type="datetimeFigureOut">
               <a:rPr lang="en-US" smtClean="0"/>
-              <a:t>1/27/13</a:t>
             </a:fld>
             <a:endParaRPr lang="en-US"/>
           </a:p>
@@ -698,18 +707,12 @@
           <a:p>
             <a:fld id="{C1FF6DA9-008F-8B48-92A6-B652298478BF}" type="slidenum">
               <a:rPr lang="en-US" smtClean="0"/>
-              <a:t>‹#›</a:t>
             </a:fld>
             <a:endParaRPr lang="en-US"/>
           </a:p>
         </p:txBody>
       </p:sp>
     </p:spTree>
-    <p:extLst>
-      <p:ext uri="{BB962C8B-B14F-4D97-AF65-F5344CB8AC3E}">
-        <p14:creationId xmlns:p14="http://schemas.microsoft.com/office/powerpoint/2010/main" val="3612223792"/>
-      </p:ext>
-    </p:extLst>
   </p:cSld>
   <p:clrMapOvr>
     <a:masterClrMapping/>
@@ -777,6 +780,7 @@
               <a:rPr lang="en-US" smtClean="0"/>
               <a:t>Click to edit Master text styles</a:t>
             </a:r>
+            <a:endParaRPr lang="en-US" smtClean="0"/>
           </a:p>
           <a:p>
             <a:pPr lvl="1"/>
@@ -784,6 +788,7 @@
               <a:rPr lang="en-US" smtClean="0"/>
               <a:t>Second level</a:t>
             </a:r>
+            <a:endParaRPr lang="en-US" smtClean="0"/>
           </a:p>
           <a:p>
             <a:pPr lvl="2"/>
@@ -791,6 +796,7 @@
               <a:rPr lang="en-US" smtClean="0"/>
               <a:t>Third level</a:t>
             </a:r>
+            <a:endParaRPr lang="en-US" smtClean="0"/>
           </a:p>
           <a:p>
             <a:pPr lvl="3"/>
@@ -798,6 +804,7 @@
               <a:rPr lang="en-US" smtClean="0"/>
               <a:t>Fourth level</a:t>
             </a:r>
+            <a:endParaRPr lang="en-US" smtClean="0"/>
           </a:p>
           <a:p>
             <a:pPr lvl="4"/>
@@ -826,7 +833,6 @@
           <a:p>
             <a:fld id="{5BCAD085-E8A6-8845-BD4E-CB4CCA059FC4}" type="datetimeFigureOut">
               <a:rPr lang="en-US" smtClean="0"/>
-              <a:t>1/27/13</a:t>
             </a:fld>
             <a:endParaRPr lang="en-US"/>
           </a:p>
@@ -868,18 +874,12 @@
           <a:p>
             <a:fld id="{C1FF6DA9-008F-8B48-92A6-B652298478BF}" type="slidenum">
               <a:rPr lang="en-US" smtClean="0"/>
-              <a:t>‹#›</a:t>
             </a:fld>
             <a:endParaRPr lang="en-US"/>
           </a:p>
         </p:txBody>
       </p:sp>
     </p:spTree>
-    <p:extLst>
-      <p:ext uri="{BB962C8B-B14F-4D97-AF65-F5344CB8AC3E}">
-        <p14:creationId xmlns:p14="http://schemas.microsoft.com/office/powerpoint/2010/main" val="2614314258"/>
-      </p:ext>
-    </p:extLst>
   </p:cSld>
   <p:clrMapOvr>
     <a:masterClrMapping/>
@@ -1052,6 +1052,7 @@
               <a:rPr lang="en-US" smtClean="0"/>
               <a:t>Click to edit Master text styles</a:t>
             </a:r>
+            <a:endParaRPr lang="en-US" smtClean="0"/>
           </a:p>
         </p:txBody>
       </p:sp>
@@ -1072,7 +1073,6 @@
           <a:p>
             <a:fld id="{5BCAD085-E8A6-8845-BD4E-CB4CCA059FC4}" type="datetimeFigureOut">
               <a:rPr lang="en-US" smtClean="0"/>
-              <a:t>1/27/13</a:t>
             </a:fld>
             <a:endParaRPr lang="en-US"/>
           </a:p>
@@ -1114,18 +1114,12 @@
           <a:p>
             <a:fld id="{C1FF6DA9-008F-8B48-92A6-B652298478BF}" type="slidenum">
               <a:rPr lang="en-US" smtClean="0"/>
-              <a:t>‹#›</a:t>
             </a:fld>
             <a:endParaRPr lang="en-US"/>
           </a:p>
         </p:txBody>
       </p:sp>
     </p:spTree>
-    <p:extLst>
-      <p:ext uri="{BB962C8B-B14F-4D97-AF65-F5344CB8AC3E}">
-        <p14:creationId xmlns:p14="http://schemas.microsoft.com/office/powerpoint/2010/main" val="960648375"/>
-      </p:ext>
-    </p:extLst>
   </p:cSld>
   <p:clrMapOvr>
     <a:masterClrMapping/>
@@ -1226,6 +1220,7 @@
               <a:rPr lang="en-US" smtClean="0"/>
               <a:t>Click to edit Master text styles</a:t>
             </a:r>
+            <a:endParaRPr lang="en-US" smtClean="0"/>
           </a:p>
           <a:p>
             <a:pPr lvl="1"/>
@@ -1233,6 +1228,7 @@
               <a:rPr lang="en-US" smtClean="0"/>
               <a:t>Second level</a:t>
             </a:r>
+            <a:endParaRPr lang="en-US" smtClean="0"/>
           </a:p>
           <a:p>
             <a:pPr lvl="2"/>
@@ -1240,6 +1236,7 @@
               <a:rPr lang="en-US" smtClean="0"/>
               <a:t>Third level</a:t>
             </a:r>
+            <a:endParaRPr lang="en-US" smtClean="0"/>
           </a:p>
           <a:p>
             <a:pPr lvl="3"/>
@@ -1247,6 +1244,7 @@
               <a:rPr lang="en-US" smtClean="0"/>
               <a:t>Fourth level</a:t>
             </a:r>
+            <a:endParaRPr lang="en-US" smtClean="0"/>
           </a:p>
           <a:p>
             <a:pPr lvl="4"/>
@@ -1311,6 +1309,7 @@
               <a:rPr lang="en-US" smtClean="0"/>
               <a:t>Click to edit Master text styles</a:t>
             </a:r>
+            <a:endParaRPr lang="en-US" smtClean="0"/>
           </a:p>
           <a:p>
             <a:pPr lvl="1"/>
@@ -1318,6 +1317,7 @@
               <a:rPr lang="en-US" smtClean="0"/>
               <a:t>Second level</a:t>
             </a:r>
+            <a:endParaRPr lang="en-US" smtClean="0"/>
           </a:p>
           <a:p>
             <a:pPr lvl="2"/>
@@ -1325,6 +1325,7 @@
               <a:rPr lang="en-US" smtClean="0"/>
               <a:t>Third level</a:t>
             </a:r>
+            <a:endParaRPr lang="en-US" smtClean="0"/>
           </a:p>
           <a:p>
             <a:pPr lvl="3"/>
@@ -1332,6 +1333,7 @@
               <a:rPr lang="en-US" smtClean="0"/>
               <a:t>Fourth level</a:t>
             </a:r>
+            <a:endParaRPr lang="en-US" smtClean="0"/>
           </a:p>
           <a:p>
             <a:pPr lvl="4"/>
@@ -1360,7 +1362,6 @@
           <a:p>
             <a:fld id="{5BCAD085-E8A6-8845-BD4E-CB4CCA059FC4}" type="datetimeFigureOut">
               <a:rPr lang="en-US" smtClean="0"/>
-              <a:t>1/27/13</a:t>
             </a:fld>
             <a:endParaRPr lang="en-US"/>
           </a:p>
@@ -1402,18 +1403,12 @@
           <a:p>
             <a:fld id="{C1FF6DA9-008F-8B48-92A6-B652298478BF}" type="slidenum">
               <a:rPr lang="en-US" smtClean="0"/>
-              <a:t>‹#›</a:t>
             </a:fld>
             <a:endParaRPr lang="en-US"/>
           </a:p>
         </p:txBody>
       </p:sp>
     </p:spTree>
-    <p:extLst>
-      <p:ext uri="{BB962C8B-B14F-4D97-AF65-F5344CB8AC3E}">
-        <p14:creationId xmlns:p14="http://schemas.microsoft.com/office/powerpoint/2010/main" val="2782244947"/>
-      </p:ext>
-    </p:extLst>
   </p:cSld>
   <p:clrMapOvr>
     <a:masterClrMapping/>
@@ -1527,6 +1522,7 @@
               <a:rPr lang="en-US" smtClean="0"/>
               <a:t>Click to edit Master text styles</a:t>
             </a:r>
+            <a:endParaRPr lang="en-US" smtClean="0"/>
           </a:p>
         </p:txBody>
       </p:sp>
@@ -1583,6 +1579,7 @@
               <a:rPr lang="en-US" smtClean="0"/>
               <a:t>Click to edit Master text styles</a:t>
             </a:r>
+            <a:endParaRPr lang="en-US" smtClean="0"/>
           </a:p>
           <a:p>
             <a:pPr lvl="1"/>
@@ -1590,6 +1587,7 @@
               <a:rPr lang="en-US" smtClean="0"/>
               <a:t>Second level</a:t>
             </a:r>
+            <a:endParaRPr lang="en-US" smtClean="0"/>
           </a:p>
           <a:p>
             <a:pPr lvl="2"/>
@@ -1597,6 +1595,7 @@
               <a:rPr lang="en-US" smtClean="0"/>
               <a:t>Third level</a:t>
             </a:r>
+            <a:endParaRPr lang="en-US" smtClean="0"/>
           </a:p>
           <a:p>
             <a:pPr lvl="3"/>
@@ -1604,6 +1603,7 @@
               <a:rPr lang="en-US" smtClean="0"/>
               <a:t>Fourth level</a:t>
             </a:r>
+            <a:endParaRPr lang="en-US" smtClean="0"/>
           </a:p>
           <a:p>
             <a:pPr lvl="4"/>
@@ -1677,6 +1677,7 @@
               <a:rPr lang="en-US" smtClean="0"/>
               <a:t>Click to edit Master text styles</a:t>
             </a:r>
+            <a:endParaRPr lang="en-US" smtClean="0"/>
           </a:p>
         </p:txBody>
       </p:sp>
@@ -1733,6 +1734,7 @@
               <a:rPr lang="en-US" smtClean="0"/>
               <a:t>Click to edit Master text styles</a:t>
             </a:r>
+            <a:endParaRPr lang="en-US" smtClean="0"/>
           </a:p>
           <a:p>
             <a:pPr lvl="1"/>
@@ -1740,6 +1742,7 @@
               <a:rPr lang="en-US" smtClean="0"/>
               <a:t>Second level</a:t>
             </a:r>
+            <a:endParaRPr lang="en-US" smtClean="0"/>
           </a:p>
           <a:p>
             <a:pPr lvl="2"/>
@@ -1747,6 +1750,7 @@
               <a:rPr lang="en-US" smtClean="0"/>
               <a:t>Third level</a:t>
             </a:r>
+            <a:endParaRPr lang="en-US" smtClean="0"/>
           </a:p>
           <a:p>
             <a:pPr lvl="3"/>
@@ -1754,6 +1758,7 @@
               <a:rPr lang="en-US" smtClean="0"/>
               <a:t>Fourth level</a:t>
             </a:r>
+            <a:endParaRPr lang="en-US" smtClean="0"/>
           </a:p>
           <a:p>
             <a:pPr lvl="4"/>
@@ -1782,7 +1787,6 @@
           <a:p>
             <a:fld id="{5BCAD085-E8A6-8845-BD4E-CB4CCA059FC4}" type="datetimeFigureOut">
               <a:rPr lang="en-US" smtClean="0"/>
-              <a:t>1/27/13</a:t>
             </a:fld>
             <a:endParaRPr lang="en-US"/>
           </a:p>
@@ -1824,18 +1828,12 @@
           <a:p>
             <a:fld id="{C1FF6DA9-008F-8B48-92A6-B652298478BF}" type="slidenum">
               <a:rPr lang="en-US" smtClean="0"/>
-              <a:t>‹#›</a:t>
             </a:fld>
             <a:endParaRPr lang="en-US"/>
           </a:p>
         </p:txBody>
       </p:sp>
     </p:spTree>
-    <p:extLst>
-      <p:ext uri="{BB962C8B-B14F-4D97-AF65-F5344CB8AC3E}">
-        <p14:creationId xmlns:p14="http://schemas.microsoft.com/office/powerpoint/2010/main" val="990158736"/>
-      </p:ext>
-    </p:extLst>
   </p:cSld>
   <p:clrMapOvr>
     <a:masterClrMapping/>
@@ -1900,7 +1898,6 @@
           <a:p>
             <a:fld id="{5BCAD085-E8A6-8845-BD4E-CB4CCA059FC4}" type="datetimeFigureOut">
               <a:rPr lang="en-US" smtClean="0"/>
-              <a:t>1/27/13</a:t>
             </a:fld>
             <a:endParaRPr lang="en-US"/>
           </a:p>
@@ -1942,18 +1939,12 @@
           <a:p>
             <a:fld id="{C1FF6DA9-008F-8B48-92A6-B652298478BF}" type="slidenum">
               <a:rPr lang="en-US" smtClean="0"/>
-              <a:t>‹#›</a:t>
             </a:fld>
             <a:endParaRPr lang="en-US"/>
           </a:p>
         </p:txBody>
       </p:sp>
     </p:spTree>
-    <p:extLst>
-      <p:ext uri="{BB962C8B-B14F-4D97-AF65-F5344CB8AC3E}">
-        <p14:creationId xmlns:p14="http://schemas.microsoft.com/office/powerpoint/2010/main" val="727027711"/>
-      </p:ext>
-    </p:extLst>
   </p:cSld>
   <p:clrMapOvr>
     <a:masterClrMapping/>
@@ -1995,7 +1986,6 @@
           <a:p>
             <a:fld id="{5BCAD085-E8A6-8845-BD4E-CB4CCA059FC4}" type="datetimeFigureOut">
               <a:rPr lang="en-US" smtClean="0"/>
-              <a:t>1/27/13</a:t>
             </a:fld>
             <a:endParaRPr lang="en-US"/>
           </a:p>
@@ -2037,18 +2027,12 @@
           <a:p>
             <a:fld id="{C1FF6DA9-008F-8B48-92A6-B652298478BF}" type="slidenum">
               <a:rPr lang="en-US" smtClean="0"/>
-              <a:t>‹#›</a:t>
             </a:fld>
             <a:endParaRPr lang="en-US"/>
           </a:p>
         </p:txBody>
       </p:sp>
     </p:spTree>
-    <p:extLst>
-      <p:ext uri="{BB962C8B-B14F-4D97-AF65-F5344CB8AC3E}">
-        <p14:creationId xmlns:p14="http://schemas.microsoft.com/office/powerpoint/2010/main" val="1212999818"/>
-      </p:ext>
-    </p:extLst>
   </p:cSld>
   <p:clrMapOvr>
     <a:masterClrMapping/>
@@ -2158,6 +2142,7 @@
               <a:rPr lang="en-US" smtClean="0"/>
               <a:t>Click to edit Master text styles</a:t>
             </a:r>
+            <a:endParaRPr lang="en-US" smtClean="0"/>
           </a:p>
           <a:p>
             <a:pPr lvl="1"/>
@@ -2165,6 +2150,7 @@
               <a:rPr lang="en-US" smtClean="0"/>
               <a:t>Second level</a:t>
             </a:r>
+            <a:endParaRPr lang="en-US" smtClean="0"/>
           </a:p>
           <a:p>
             <a:pPr lvl="2"/>
@@ -2172,6 +2158,7 @@
               <a:rPr lang="en-US" smtClean="0"/>
               <a:t>Third level</a:t>
             </a:r>
+            <a:endParaRPr lang="en-US" smtClean="0"/>
           </a:p>
           <a:p>
             <a:pPr lvl="3"/>
@@ -2179,6 +2166,7 @@
               <a:rPr lang="en-US" smtClean="0"/>
               <a:t>Fourth level</a:t>
             </a:r>
+            <a:endParaRPr lang="en-US" smtClean="0"/>
           </a:p>
           <a:p>
             <a:pPr lvl="4"/>
@@ -2252,6 +2240,7 @@
               <a:rPr lang="en-US" smtClean="0"/>
               <a:t>Click to edit Master text styles</a:t>
             </a:r>
+            <a:endParaRPr lang="en-US" smtClean="0"/>
           </a:p>
         </p:txBody>
       </p:sp>
@@ -2272,7 +2261,6 @@
           <a:p>
             <a:fld id="{5BCAD085-E8A6-8845-BD4E-CB4CCA059FC4}" type="datetimeFigureOut">
               <a:rPr lang="en-US" smtClean="0"/>
-              <a:t>1/27/13</a:t>
             </a:fld>
             <a:endParaRPr lang="en-US"/>
           </a:p>
@@ -2314,18 +2302,12 @@
           <a:p>
             <a:fld id="{C1FF6DA9-008F-8B48-92A6-B652298478BF}" type="slidenum">
               <a:rPr lang="en-US" smtClean="0"/>
-              <a:t>‹#›</a:t>
             </a:fld>
             <a:endParaRPr lang="en-US"/>
           </a:p>
         </p:txBody>
       </p:sp>
     </p:spTree>
-    <p:extLst>
-      <p:ext uri="{BB962C8B-B14F-4D97-AF65-F5344CB8AC3E}">
-        <p14:creationId xmlns:p14="http://schemas.microsoft.com/office/powerpoint/2010/main" val="1840726560"/>
-      </p:ext>
-    </p:extLst>
   </p:cSld>
   <p:clrMapOvr>
     <a:masterClrMapping/>
@@ -2505,6 +2487,7 @@
               <a:rPr lang="en-US" smtClean="0"/>
               <a:t>Click to edit Master text styles</a:t>
             </a:r>
+            <a:endParaRPr lang="en-US" smtClean="0"/>
           </a:p>
         </p:txBody>
       </p:sp>
@@ -2525,7 +2508,6 @@
           <a:p>
             <a:fld id="{5BCAD085-E8A6-8845-BD4E-CB4CCA059FC4}" type="datetimeFigureOut">
               <a:rPr lang="en-US" smtClean="0"/>
-              <a:t>1/27/13</a:t>
             </a:fld>
             <a:endParaRPr lang="en-US"/>
           </a:p>
@@ -2567,18 +2549,12 @@
           <a:p>
             <a:fld id="{C1FF6DA9-008F-8B48-92A6-B652298478BF}" type="slidenum">
               <a:rPr lang="en-US" smtClean="0"/>
-              <a:t>‹#›</a:t>
             </a:fld>
             <a:endParaRPr lang="en-US"/>
           </a:p>
         </p:txBody>
       </p:sp>
     </p:spTree>
-    <p:extLst>
-      <p:ext uri="{BB962C8B-B14F-4D97-AF65-F5344CB8AC3E}">
-        <p14:creationId xmlns:p14="http://schemas.microsoft.com/office/powerpoint/2010/main" val="3889236939"/>
-      </p:ext>
-    </p:extLst>
   </p:cSld>
   <p:clrMapOvr>
     <a:masterClrMapping/>
@@ -2671,6 +2647,7 @@
               <a:rPr lang="en-US" smtClean="0"/>
               <a:t>Click to edit Master text styles</a:t>
             </a:r>
+            <a:endParaRPr lang="en-US" smtClean="0"/>
           </a:p>
           <a:p>
             <a:pPr lvl="1"/>
@@ -2678,6 +2655,7 @@
               <a:rPr lang="en-US" smtClean="0"/>
               <a:t>Second level</a:t>
             </a:r>
+            <a:endParaRPr lang="en-US" smtClean="0"/>
           </a:p>
           <a:p>
             <a:pPr lvl="2"/>
@@ -2685,6 +2663,7 @@
               <a:rPr lang="en-US" smtClean="0"/>
               <a:t>Third level</a:t>
             </a:r>
+            <a:endParaRPr lang="en-US" smtClean="0"/>
           </a:p>
           <a:p>
             <a:pPr lvl="3"/>
@@ -2692,6 +2671,7 @@
               <a:rPr lang="en-US" smtClean="0"/>
               <a:t>Fourth level</a:t>
             </a:r>
+            <a:endParaRPr lang="en-US" smtClean="0"/>
           </a:p>
           <a:p>
             <a:pPr lvl="4"/>
@@ -2738,7 +2718,6 @@
           <a:p>
             <a:fld id="{5BCAD085-E8A6-8845-BD4E-CB4CCA059FC4}" type="datetimeFigureOut">
               <a:rPr lang="en-US" smtClean="0"/>
-              <a:t>1/27/13</a:t>
             </a:fld>
             <a:endParaRPr lang="en-US"/>
           </a:p>
@@ -2816,18 +2795,12 @@
           <a:p>
             <a:fld id="{C1FF6DA9-008F-8B48-92A6-B652298478BF}" type="slidenum">
               <a:rPr lang="en-US" smtClean="0"/>
-              <a:t>‹#›</a:t>
             </a:fld>
             <a:endParaRPr lang="en-US"/>
           </a:p>
         </p:txBody>
       </p:sp>
     </p:spTree>
-    <p:extLst>
-      <p:ext uri="{BB962C8B-B14F-4D97-AF65-F5344CB8AC3E}">
-        <p14:creationId xmlns:p14="http://schemas.microsoft.com/office/powerpoint/2010/main" val="2209977519"/>
-      </p:ext>
-    </p:extLst>
   </p:cSld>
   <p:clrMap bg1="lt1" tx1="dk1" bg2="lt2" tx2="dk2" accent1="accent1" accent2="accent2" accent3="accent3" accent4="accent4" accent5="accent5" accent6="accent6" hlink="hlink" folHlink="folHlink"/>
   <p:sldLayoutIdLst>
@@ -2865,7 +2838,7 @@
         <a:spcBef>
           <a:spcPct val="20000"/>
         </a:spcBef>
-        <a:buFont typeface="Arial"/>
+        <a:buFont typeface="Arial" panose="020B0604020202090204"/>
         <a:buChar char="•"/>
         <a:defRPr sz="3200" kern="1200">
           <a:solidFill>
@@ -2880,7 +2853,7 @@
         <a:spcBef>
           <a:spcPct val="20000"/>
         </a:spcBef>
-        <a:buFont typeface="Arial"/>
+        <a:buFont typeface="Arial" panose="020B0604020202090204"/>
         <a:buChar char="–"/>
         <a:defRPr sz="2800" kern="1200">
           <a:solidFill>
@@ -2895,7 +2868,7 @@
         <a:spcBef>
           <a:spcPct val="20000"/>
         </a:spcBef>
-        <a:buFont typeface="Arial"/>
+        <a:buFont typeface="Arial" panose="020B0604020202090204"/>
         <a:buChar char="•"/>
         <a:defRPr sz="2400" kern="1200">
           <a:solidFill>
@@ -2910,7 +2883,7 @@
         <a:spcBef>
           <a:spcPct val="20000"/>
         </a:spcBef>
-        <a:buFont typeface="Arial"/>
+        <a:buFont typeface="Arial" panose="020B0604020202090204"/>
         <a:buChar char="–"/>
         <a:defRPr sz="2000" kern="1200">
           <a:solidFill>
@@ -2925,7 +2898,7 @@
         <a:spcBef>
           <a:spcPct val="20000"/>
         </a:spcBef>
-        <a:buFont typeface="Arial"/>
+        <a:buFont typeface="Arial" panose="020B0604020202090204"/>
         <a:buChar char="»"/>
         <a:defRPr sz="2000" kern="1200">
           <a:solidFill>
@@ -2940,7 +2913,7 @@
         <a:spcBef>
           <a:spcPct val="20000"/>
         </a:spcBef>
-        <a:buFont typeface="Arial"/>
+        <a:buFont typeface="Arial" panose="020B0604020202090204"/>
         <a:buChar char="•"/>
         <a:defRPr sz="2000" kern="1200">
           <a:solidFill>
@@ -2955,7 +2928,7 @@
         <a:spcBef>
           <a:spcPct val="20000"/>
         </a:spcBef>
-        <a:buFont typeface="Arial"/>
+        <a:buFont typeface="Arial" panose="020B0604020202090204"/>
         <a:buChar char="•"/>
         <a:defRPr sz="2000" kern="1200">
           <a:solidFill>
@@ -2970,7 +2943,7 @@
         <a:spcBef>
           <a:spcPct val="20000"/>
         </a:spcBef>
-        <a:buFont typeface="Arial"/>
+        <a:buFont typeface="Arial" panose="020B0604020202090204"/>
         <a:buChar char="•"/>
         <a:defRPr sz="2000" kern="1200">
           <a:solidFill>
@@ -2985,7 +2958,7 @@
         <a:spcBef>
           <a:spcPct val="20000"/>
         </a:spcBef>
-        <a:buFont typeface="Arial"/>
+        <a:buFont typeface="Arial" panose="020B0604020202090204"/>
         <a:buChar char="•"/>
         <a:defRPr sz="2000" kern="1200">
           <a:solidFill>
@@ -3097,7 +3070,7 @@
 </file>
 
 <file path=ppt/slides/slide1.xml><?xml version="1.0" encoding="utf-8"?>
-<p:sld xmlns:a="http://schemas.openxmlformats.org/drawingml/2006/main" xmlns:p="http://schemas.openxmlformats.org/presentationml/2006/main" xmlns:r="http://schemas.openxmlformats.org/officeDocument/2006/relationships">
+<p:sld xmlns:a="http://schemas.openxmlformats.org/drawingml/2006/main" xmlns:r="http://schemas.openxmlformats.org/officeDocument/2006/relationships" xmlns:p="http://schemas.openxmlformats.org/presentationml/2006/main">
   <p:cSld>
     <p:spTree>
       <p:nvGrpSpPr>
@@ -3115,7 +3088,7 @@
           <p:nvPr/>
         </p:nvPicPr>
         <p:blipFill>
-          <a:blip r:embed="rId2"/>
+          <a:blip r:embed="rId1"/>
           <a:stretch>
             <a:fillRect/>
           </a:stretch>
@@ -3194,7 +3167,7 @@
           <a:noFill/>
         </p:spPr>
         <p:txBody>
-          <a:bodyPr wrap="square" lIns="0" rIns="0" tIns="0" bIns="0" anchor="t">
+          <a:bodyPr wrap="square" lIns="0" tIns="0" rIns="0" bIns="0" anchor="t">
             <a:spAutoFit/>
           </a:bodyPr>
           <a:lstStyle/>
@@ -3209,10 +3182,16 @@
                 <a:solidFill>
                   <a:srgbClr val="DDE7FF"/>
                 </a:solidFill>
-                <a:latin typeface="Microsoft YaHei"/>
+                <a:latin typeface="微软雅黑"/>
               </a:rPr>
               <a:t>Web 应用为主体</a:t>
             </a:r>
+            <a:endParaRPr sz="1250" b="1" i="0">
+              <a:solidFill>
+                <a:srgbClr val="DDE7FF"/>
+              </a:solidFill>
+              <a:latin typeface="微软雅黑"/>
+            </a:endParaRPr>
           </a:p>
         </p:txBody>
       </p:sp>
@@ -3224,16 +3203,16 @@
         </p:nvSpPr>
         <p:spPr>
           <a:xfrm>
-            <a:off x="658368" y="1078992"/>
-            <a:ext cx="5029200" cy="1280160"/>
-          </a:xfrm>
-          <a:prstGeom prst="rect">
-            <a:avLst/>
-          </a:prstGeom>
-          <a:noFill/>
-        </p:spPr>
-        <p:txBody>
-          <a:bodyPr wrap="square" lIns="0" rIns="0" tIns="0" bIns="0" anchor="t">
+            <a:off x="658495" y="1078865"/>
+            <a:ext cx="5550535" cy="1153160"/>
+          </a:xfrm>
+          <a:prstGeom prst="rect">
+            <a:avLst/>
+          </a:prstGeom>
+          <a:noFill/>
+        </p:spPr>
+        <p:txBody>
+          <a:bodyPr wrap="square" lIns="0" tIns="0" rIns="0" bIns="0" anchor="t">
             <a:spAutoFit/>
           </a:bodyPr>
           <a:lstStyle/>
@@ -3254,10 +3233,16 @@
                 <a:solidFill>
                   <a:srgbClr val="FFFFFF"/>
                 </a:solidFill>
-                <a:latin typeface="Microsoft YaHei"/>
+                <a:latin typeface="微软雅黑"/>
               </a:rPr>
               <a:t>Sak-AI答题助手</a:t>
             </a:r>
+            <a:endParaRPr sz="2900" b="1" i="0">
+              <a:solidFill>
+                <a:srgbClr val="FFFFFF"/>
+              </a:solidFill>
+              <a:latin typeface="微软雅黑"/>
+            </a:endParaRPr>
           </a:p>
           <a:p>
             <a:pPr algn="l">
@@ -3276,10 +3261,16 @@
                 <a:solidFill>
                   <a:srgbClr val="D9E5F5"/>
                 </a:solidFill>
-                <a:latin typeface="Microsoft YaHei"/>
+                <a:latin typeface="微软雅黑"/>
               </a:rPr>
               <a:t>面向备考学习与题库运营场景的单仓全栈 Web 应用</a:t>
             </a:r>
+            <a:endParaRPr sz="1500" b="0" i="0">
+              <a:solidFill>
+                <a:srgbClr val="D9E5F5"/>
+              </a:solidFill>
+              <a:latin typeface="微软雅黑"/>
+            </a:endParaRPr>
           </a:p>
           <a:p>
             <a:pPr algn="l">
@@ -3298,10 +3289,16 @@
                 <a:solidFill>
                   <a:srgbClr val="B8C7DC"/>
                 </a:solidFill>
-                <a:latin typeface="Microsoft YaHei"/>
+                <a:latin typeface="微软雅黑"/>
               </a:rPr>
               <a:t>题库广场｜个人题库｜刷题练习｜模拟考试｜数据中心｜论坛互动｜后台管理</a:t>
             </a:r>
+            <a:endParaRPr sz="1250" b="0" i="0">
+              <a:solidFill>
+                <a:srgbClr val="B8C7DC"/>
+              </a:solidFill>
+              <a:latin typeface="微软雅黑"/>
+            </a:endParaRPr>
           </a:p>
         </p:txBody>
       </p:sp>
@@ -3322,7 +3319,7 @@
           <a:noFill/>
         </p:spPr>
         <p:txBody>
-          <a:bodyPr wrap="square" lIns="0" rIns="0" tIns="0" bIns="0" anchor="t">
+          <a:bodyPr wrap="square" lIns="0" tIns="0" rIns="0" bIns="0" anchor="t">
             <a:spAutoFit/>
           </a:bodyPr>
           <a:lstStyle/>
@@ -3337,10 +3334,16 @@
                 <a:solidFill>
                   <a:srgbClr val="ECF3FF"/>
                 </a:solidFill>
-                <a:latin typeface="Microsoft YaHei"/>
+                <a:latin typeface="微软雅黑"/>
               </a:rPr>
               <a:t>不是单一刷题页面，而是围绕“题库沉淀—训练—复盘—运营”构建的完整业务系统。</a:t>
             </a:r>
+            <a:endParaRPr sz="1600" b="0" i="0">
+              <a:solidFill>
+                <a:srgbClr val="ECF3FF"/>
+              </a:solidFill>
+              <a:latin typeface="微软雅黑"/>
+            </a:endParaRPr>
           </a:p>
         </p:txBody>
       </p:sp>
@@ -3408,7 +3411,7 @@
           <a:noFill/>
         </p:spPr>
         <p:txBody>
-          <a:bodyPr wrap="square" lIns="0" rIns="0" tIns="0" bIns="0" anchor="t">
+          <a:bodyPr wrap="square" lIns="0" tIns="0" rIns="0" bIns="0" anchor="t">
             <a:spAutoFit/>
           </a:bodyPr>
           <a:lstStyle/>
@@ -3427,6 +3430,12 @@
               </a:rPr>
               <a:t>12+</a:t>
             </a:r>
+            <a:endParaRPr sz="2400" b="1" i="0">
+              <a:solidFill>
+                <a:srgbClr val="FFFFFF"/>
+              </a:solidFill>
+              <a:latin typeface="Aptos"/>
+            </a:endParaRPr>
           </a:p>
         </p:txBody>
       </p:sp>
@@ -3447,7 +3456,7 @@
           <a:noFill/>
         </p:spPr>
         <p:txBody>
-          <a:bodyPr wrap="square" lIns="0" rIns="0" tIns="0" bIns="0" anchor="t">
+          <a:bodyPr wrap="square" lIns="0" tIns="0" rIns="0" bIns="0" anchor="t">
             <a:spAutoFit/>
           </a:bodyPr>
           <a:lstStyle/>
@@ -3462,10 +3471,16 @@
                 <a:solidFill>
                   <a:srgbClr val="D7DEEA"/>
                 </a:solidFill>
-                <a:latin typeface="Microsoft YaHei"/>
+                <a:latin typeface="微软雅黑"/>
               </a:rPr>
               <a:t>业务模块</a:t>
             </a:r>
+            <a:endParaRPr sz="1250" b="1" i="0">
+              <a:solidFill>
+                <a:srgbClr val="D7DEEA"/>
+              </a:solidFill>
+              <a:latin typeface="微软雅黑"/>
+            </a:endParaRPr>
           </a:p>
         </p:txBody>
       </p:sp>
@@ -3477,16 +3492,16 @@
         </p:nvSpPr>
         <p:spPr>
           <a:xfrm>
-            <a:off x="886968" y="4690871"/>
-            <a:ext cx="1115568" cy="256032"/>
-          </a:xfrm>
-          <a:prstGeom prst="rect">
-            <a:avLst/>
-          </a:prstGeom>
-          <a:noFill/>
-        </p:spPr>
-        <p:txBody>
-          <a:bodyPr wrap="square" lIns="0" rIns="0" tIns="0" bIns="0" anchor="t">
+            <a:off x="810260" y="4662805"/>
+            <a:ext cx="1447800" cy="184785"/>
+          </a:xfrm>
+          <a:prstGeom prst="rect">
+            <a:avLst/>
+          </a:prstGeom>
+          <a:noFill/>
+        </p:spPr>
+        <p:txBody>
+          <a:bodyPr wrap="square" lIns="0" tIns="0" rIns="0" bIns="0" anchor="t">
             <a:spAutoFit/>
           </a:bodyPr>
           <a:lstStyle/>
@@ -3501,10 +3516,16 @@
                 <a:solidFill>
                   <a:srgbClr val="9FB0C7"/>
                 </a:solidFill>
-                <a:latin typeface="Microsoft YaHei"/>
+                <a:latin typeface="微软雅黑"/>
               </a:rPr>
               <a:t>Blueprint 按边界拆分</a:t>
             </a:r>
+            <a:endParaRPr sz="1050" b="0" i="0">
+              <a:solidFill>
+                <a:srgbClr val="9FB0C7"/>
+              </a:solidFill>
+              <a:latin typeface="微软雅黑"/>
+            </a:endParaRPr>
           </a:p>
         </p:txBody>
       </p:sp>
@@ -3572,7 +3593,7 @@
           <a:noFill/>
         </p:spPr>
         <p:txBody>
-          <a:bodyPr wrap="square" lIns="0" rIns="0" tIns="0" bIns="0" anchor="t">
+          <a:bodyPr wrap="square" lIns="0" tIns="0" rIns="0" bIns="0" anchor="t">
             <a:spAutoFit/>
           </a:bodyPr>
           <a:lstStyle/>
@@ -3591,6 +3612,12 @@
               </a:rPr>
               <a:t>2 端</a:t>
             </a:r>
+            <a:endParaRPr sz="2400" b="1" i="0">
+              <a:solidFill>
+                <a:srgbClr val="FFFFFF"/>
+              </a:solidFill>
+              <a:latin typeface="Aptos"/>
+            </a:endParaRPr>
           </a:p>
         </p:txBody>
       </p:sp>
@@ -3611,7 +3638,7 @@
           <a:noFill/>
         </p:spPr>
         <p:txBody>
-          <a:bodyPr wrap="square" lIns="0" rIns="0" tIns="0" bIns="0" anchor="t">
+          <a:bodyPr wrap="square" lIns="0" tIns="0" rIns="0" bIns="0" anchor="t">
             <a:spAutoFit/>
           </a:bodyPr>
           <a:lstStyle/>
@@ -3626,10 +3653,16 @@
                 <a:solidFill>
                   <a:srgbClr val="D7DEEA"/>
                 </a:solidFill>
-                <a:latin typeface="Microsoft YaHei"/>
+                <a:latin typeface="微软雅黑"/>
               </a:rPr>
               <a:t>共享语义</a:t>
             </a:r>
+            <a:endParaRPr sz="1250" b="1" i="0">
+              <a:solidFill>
+                <a:srgbClr val="D7DEEA"/>
+              </a:solidFill>
+              <a:latin typeface="微软雅黑"/>
+            </a:endParaRPr>
           </a:p>
         </p:txBody>
       </p:sp>
@@ -3641,16 +3674,16 @@
         </p:nvSpPr>
         <p:spPr>
           <a:xfrm>
-            <a:off x="2587752" y="4690871"/>
-            <a:ext cx="1115568" cy="256032"/>
-          </a:xfrm>
-          <a:prstGeom prst="rect">
-            <a:avLst/>
-          </a:prstGeom>
-          <a:noFill/>
-        </p:spPr>
-        <p:txBody>
-          <a:bodyPr wrap="square" lIns="0" rIns="0" tIns="0" bIns="0" anchor="t">
+            <a:off x="2468880" y="4662805"/>
+            <a:ext cx="1447800" cy="184785"/>
+          </a:xfrm>
+          <a:prstGeom prst="rect">
+            <a:avLst/>
+          </a:prstGeom>
+          <a:noFill/>
+        </p:spPr>
+        <p:txBody>
+          <a:bodyPr wrap="square" lIns="0" tIns="0" rIns="0" bIns="0" anchor="t">
             <a:spAutoFit/>
           </a:bodyPr>
           <a:lstStyle/>
@@ -3665,10 +3698,16 @@
                 <a:solidFill>
                   <a:srgbClr val="9FB0C7"/>
                 </a:solidFill>
-                <a:latin typeface="Microsoft YaHei"/>
+                <a:latin typeface="微软雅黑"/>
               </a:rPr>
               <a:t>Web + 微信原生小程序</a:t>
             </a:r>
+            <a:endParaRPr sz="1050" b="0" i="0">
+              <a:solidFill>
+                <a:srgbClr val="9FB0C7"/>
+              </a:solidFill>
+              <a:latin typeface="微软雅黑"/>
+            </a:endParaRPr>
           </a:p>
         </p:txBody>
       </p:sp>
@@ -3736,7 +3775,7 @@
           <a:noFill/>
         </p:spPr>
         <p:txBody>
-          <a:bodyPr wrap="square" lIns="0" rIns="0" tIns="0" bIns="0" anchor="t">
+          <a:bodyPr wrap="square" lIns="0" tIns="0" rIns="0" bIns="0" anchor="t">
             <a:spAutoFit/>
           </a:bodyPr>
           <a:lstStyle/>
@@ -3755,6 +3794,12 @@
               </a:rPr>
               <a:t>Docker</a:t>
             </a:r>
+            <a:endParaRPr sz="2400" b="1" i="0">
+              <a:solidFill>
+                <a:srgbClr val="FFFFFF"/>
+              </a:solidFill>
+              <a:latin typeface="Aptos"/>
+            </a:endParaRPr>
           </a:p>
         </p:txBody>
       </p:sp>
@@ -3775,7 +3820,7 @@
           <a:noFill/>
         </p:spPr>
         <p:txBody>
-          <a:bodyPr wrap="square" lIns="0" rIns="0" tIns="0" bIns="0" anchor="t">
+          <a:bodyPr wrap="square" lIns="0" tIns="0" rIns="0" bIns="0" anchor="t">
             <a:spAutoFit/>
           </a:bodyPr>
           <a:lstStyle/>
@@ -3790,10 +3835,16 @@
                 <a:solidFill>
                   <a:srgbClr val="D7DEEA"/>
                 </a:solidFill>
-                <a:latin typeface="Microsoft YaHei"/>
+                <a:latin typeface="微软雅黑"/>
               </a:rPr>
               <a:t>可复现部署</a:t>
             </a:r>
+            <a:endParaRPr sz="1250" b="1" i="0">
+              <a:solidFill>
+                <a:srgbClr val="D7DEEA"/>
+              </a:solidFill>
+              <a:latin typeface="微软雅黑"/>
+            </a:endParaRPr>
           </a:p>
         </p:txBody>
       </p:sp>
@@ -3814,7 +3865,7 @@
           <a:noFill/>
         </p:spPr>
         <p:txBody>
-          <a:bodyPr wrap="square" lIns="0" rIns="0" tIns="0" bIns="0" anchor="t">
+          <a:bodyPr wrap="square" lIns="0" tIns="0" rIns="0" bIns="0" anchor="t">
             <a:spAutoFit/>
           </a:bodyPr>
           <a:lstStyle/>
@@ -3829,10 +3880,16 @@
                 <a:solidFill>
                   <a:srgbClr val="9FB0C7"/>
                 </a:solidFill>
-                <a:latin typeface="Microsoft YaHei"/>
+                <a:latin typeface="微软雅黑"/>
               </a:rPr>
               <a:t>web / worker / postgres / redis</a:t>
             </a:r>
+            <a:endParaRPr sz="1050" b="0" i="0">
+              <a:solidFill>
+                <a:srgbClr val="9FB0C7"/>
+              </a:solidFill>
+              <a:latin typeface="微软雅黑"/>
+            </a:endParaRPr>
           </a:p>
         </p:txBody>
       </p:sp>
@@ -3900,7 +3957,7 @@
           <a:noFill/>
         </p:spPr>
         <p:txBody>
-          <a:bodyPr wrap="square" lIns="0" rIns="0" tIns="0" bIns="0" anchor="t">
+          <a:bodyPr wrap="square" lIns="0" tIns="0" rIns="0" bIns="0" anchor="t">
             <a:spAutoFit/>
           </a:bodyPr>
           <a:lstStyle/>
@@ -3915,10 +3972,16 @@
                 <a:solidFill>
                   <a:srgbClr val="D9E5F5"/>
                 </a:solidFill>
-                <a:latin typeface="Microsoft YaHei"/>
+                <a:latin typeface="微软雅黑"/>
               </a:rPr>
               <a:t>赛道：软件应用与开发｜Web 应用与开发</a:t>
             </a:r>
+            <a:endParaRPr sz="1100" b="1" i="0">
+              <a:solidFill>
+                <a:srgbClr val="D9E5F5"/>
+              </a:solidFill>
+              <a:latin typeface="微软雅黑"/>
+            </a:endParaRPr>
           </a:p>
         </p:txBody>
       </p:sp>
@@ -3986,7 +4049,7 @@
           <a:noFill/>
         </p:spPr>
         <p:txBody>
-          <a:bodyPr wrap="square" lIns="0" rIns="0" tIns="0" bIns="0" anchor="t">
+          <a:bodyPr wrap="square" lIns="0" tIns="0" rIns="0" bIns="0" anchor="t">
             <a:spAutoFit/>
           </a:bodyPr>
           <a:lstStyle/>
@@ -4001,10 +4064,16 @@
                 <a:solidFill>
                   <a:srgbClr val="D9E5F5"/>
                 </a:solidFill>
-                <a:latin typeface="Microsoft YaHei"/>
+                <a:latin typeface="微软雅黑"/>
               </a:rPr>
               <a:t>正式访问：https://saksk.top</a:t>
             </a:r>
+            <a:endParaRPr sz="1100" b="1" i="0">
+              <a:solidFill>
+                <a:srgbClr val="D9E5F5"/>
+              </a:solidFill>
+              <a:latin typeface="微软雅黑"/>
+            </a:endParaRPr>
           </a:p>
         </p:txBody>
       </p:sp>
@@ -4025,7 +4094,7 @@
           <a:noFill/>
         </p:spPr>
         <p:txBody>
-          <a:bodyPr wrap="square" lIns="0" rIns="0" tIns="0" bIns="0" anchor="t">
+          <a:bodyPr wrap="square" lIns="0" tIns="0" rIns="0" bIns="0" anchor="t">
             <a:spAutoFit/>
           </a:bodyPr>
           <a:lstStyle/>
@@ -4040,16 +4109,181 @@
                 <a:solidFill>
                   <a:srgbClr val="D9E5F5"/>
                 </a:solidFill>
-                <a:latin typeface="Microsoft YaHei"/>
+                <a:latin typeface="微软雅黑"/>
               </a:rPr>
               <a:t>首页工作台</a:t>
             </a:r>
+            <a:endParaRPr sz="1150" b="1" i="0">
+              <a:solidFill>
+                <a:srgbClr val="D9E5F5"/>
+              </a:solidFill>
+              <a:latin typeface="微软雅黑"/>
+            </a:endParaRPr>
+          </a:p>
+        </p:txBody>
+      </p:sp>
+      <p:sp>
+        <p:nvSpPr>
+          <p:cNvPr id="25" name="TextBox 24"/>
+          <p:cNvSpPr txBox="1"/>
+          <p:nvPr/>
+        </p:nvSpPr>
+        <p:spPr>
+          <a:xfrm>
+            <a:off x="6510782" y="3928237"/>
+            <a:ext cx="3337560" cy="182880"/>
+          </a:xfrm>
+          <a:prstGeom prst="rect">
+            <a:avLst/>
+          </a:prstGeom>
+          <a:noFill/>
+        </p:spPr>
+        <p:txBody>
+          <a:bodyPr wrap="square" lIns="0" tIns="0" rIns="0" bIns="0" anchor="t">
+            <a:spAutoFit/>
+          </a:bodyPr>
+          <a:lstStyle/>
+          <a:p>
+            <a:pPr algn="l">
+              <a:lnSpc>
+                <a:spcPct val="115000"/>
+              </a:lnSpc>
+            </a:pPr>
+            <a:r>
+              <a:rPr sz="1150" b="1" i="0">
+                <a:solidFill>
+                  <a:srgbClr val="D9E5F5"/>
+                </a:solidFill>
+                <a:latin typeface="微软雅黑"/>
+              </a:rPr>
+              <a:t>数据中心</a:t>
+            </a:r>
+            <a:endParaRPr sz="1150" b="1" i="0">
+              <a:solidFill>
+                <a:srgbClr val="D9E5F5"/>
+              </a:solidFill>
+              <a:latin typeface="微软雅黑"/>
+            </a:endParaRPr>
           </a:p>
         </p:txBody>
       </p:sp>
       <p:pic>
         <p:nvPicPr>
-          <p:cNvPr id="24" name="Picture 23" descr="首页工作台-831x471.png"/>
+          <p:cNvPr id="26" name="Picture 25" descr="数据中心-548x357.png"/>
+          <p:cNvPicPr>
+            <a:picLocks noChangeAspect="1"/>
+          </p:cNvPicPr>
+          <p:nvPr/>
+        </p:nvPicPr>
+        <p:blipFill>
+          <a:blip r:embed="rId2"/>
+          <a:stretch>
+            <a:fillRect/>
+          </a:stretch>
+        </p:blipFill>
+        <p:spPr>
+          <a:xfrm>
+            <a:off x="6510655" y="4110990"/>
+            <a:ext cx="3858260" cy="2515870"/>
+          </a:xfrm>
+          <a:prstGeom prst="rect">
+            <a:avLst/>
+          </a:prstGeom>
+        </p:spPr>
+      </p:pic>
+      <p:sp>
+        <p:nvSpPr>
+          <p:cNvPr id="28" name="TextBox 27"/>
+          <p:cNvSpPr txBox="1"/>
+          <p:nvPr/>
+        </p:nvSpPr>
+        <p:spPr>
+          <a:xfrm>
+            <a:off x="658368" y="6473952"/>
+            <a:ext cx="2926080" cy="182880"/>
+          </a:xfrm>
+          <a:prstGeom prst="rect">
+            <a:avLst/>
+          </a:prstGeom>
+          <a:noFill/>
+        </p:spPr>
+        <p:txBody>
+          <a:bodyPr wrap="square" lIns="0" tIns="0" rIns="0" bIns="0" anchor="t">
+            <a:spAutoFit/>
+          </a:bodyPr>
+          <a:lstStyle/>
+          <a:p>
+            <a:pPr algn="l">
+              <a:lnSpc>
+                <a:spcPct val="115000"/>
+              </a:lnSpc>
+            </a:pPr>
+            <a:r>
+              <a:rPr sz="950" b="0" i="0">
+                <a:solidFill>
+                  <a:srgbClr val="D6DFEC"/>
+                </a:solidFill>
+                <a:latin typeface="Aptos"/>
+              </a:rPr>
+              <a:t>Sak-AI答题助手｜答辩演示</a:t>
+            </a:r>
+            <a:endParaRPr sz="950" b="0" i="0">
+              <a:solidFill>
+                <a:srgbClr val="D6DFEC"/>
+              </a:solidFill>
+              <a:latin typeface="Aptos"/>
+            </a:endParaRPr>
+          </a:p>
+        </p:txBody>
+      </p:sp>
+      <p:sp>
+        <p:nvSpPr>
+          <p:cNvPr id="29" name="TextBox 28"/>
+          <p:cNvSpPr txBox="1"/>
+          <p:nvPr/>
+        </p:nvSpPr>
+        <p:spPr>
+          <a:xfrm>
+            <a:off x="11384280" y="6400800"/>
+            <a:ext cx="347472" cy="219456"/>
+          </a:xfrm>
+          <a:prstGeom prst="rect">
+            <a:avLst/>
+          </a:prstGeom>
+          <a:noFill/>
+        </p:spPr>
+        <p:txBody>
+          <a:bodyPr wrap="square" lIns="0" tIns="0" rIns="0" bIns="0" anchor="t">
+            <a:spAutoFit/>
+          </a:bodyPr>
+          <a:lstStyle/>
+          <a:p>
+            <a:pPr algn="r">
+              <a:lnSpc>
+                <a:spcPct val="115000"/>
+              </a:lnSpc>
+            </a:pPr>
+            <a:r>
+              <a:rPr sz="1100" b="1" i="0">
+                <a:solidFill>
+                  <a:srgbClr val="F8FAFC"/>
+                </a:solidFill>
+                <a:latin typeface="Aptos"/>
+              </a:rPr>
+              <a:t>01</a:t>
+            </a:r>
+            <a:endParaRPr sz="1100" b="1" i="0">
+              <a:solidFill>
+                <a:srgbClr val="F8FAFC"/>
+              </a:solidFill>
+              <a:latin typeface="Aptos"/>
+            </a:endParaRPr>
+          </a:p>
+        </p:txBody>
+      </p:sp>
+      <p:pic>
+        <p:nvPicPr>
+          <p:cNvPr id="30" name="图片 29"/>
           <p:cNvPicPr>
             <a:picLocks noChangeAspect="1"/>
           </p:cNvPicPr>
@@ -4063,179 +4297,14 @@
         </p:blipFill>
         <p:spPr>
           <a:xfrm>
-            <a:off x="6510528" y="896112"/>
-            <a:ext cx="5065776" cy="2871216"/>
+            <a:off x="6510655" y="914400"/>
+            <a:ext cx="3858260" cy="2971800"/>
           </a:xfrm>
           <a:prstGeom prst="rect">
             <a:avLst/>
           </a:prstGeom>
         </p:spPr>
       </p:pic>
-      <p:sp>
-        <p:nvSpPr>
-          <p:cNvPr id="25" name="TextBox 24"/>
-          <p:cNvSpPr txBox="1"/>
-          <p:nvPr/>
-        </p:nvSpPr>
-        <p:spPr>
-          <a:xfrm>
-            <a:off x="6931152" y="3639312"/>
-            <a:ext cx="3337560" cy="182880"/>
-          </a:xfrm>
-          <a:prstGeom prst="rect">
-            <a:avLst/>
-          </a:prstGeom>
-          <a:noFill/>
-        </p:spPr>
-        <p:txBody>
-          <a:bodyPr wrap="square" lIns="0" rIns="0" tIns="0" bIns="0" anchor="t">
-            <a:spAutoFit/>
-          </a:bodyPr>
-          <a:lstStyle/>
-          <a:p>
-            <a:pPr algn="l">
-              <a:lnSpc>
-                <a:spcPct val="115000"/>
-              </a:lnSpc>
-            </a:pPr>
-            <a:r>
-              <a:rPr sz="1150" b="1" i="0">
-                <a:solidFill>
-                  <a:srgbClr val="D9E5F5"/>
-                </a:solidFill>
-                <a:latin typeface="Microsoft YaHei"/>
-              </a:rPr>
-              <a:t>数据中心</a:t>
-            </a:r>
-          </a:p>
-        </p:txBody>
-      </p:sp>
-      <p:pic>
-        <p:nvPicPr>
-          <p:cNvPr id="26" name="Picture 25" descr="数据中心-548x357.png"/>
-          <p:cNvPicPr>
-            <a:picLocks noChangeAspect="1"/>
-          </p:cNvPicPr>
-          <p:nvPr/>
-        </p:nvPicPr>
-        <p:blipFill>
-          <a:blip r:embed="rId4"/>
-          <a:stretch>
-            <a:fillRect/>
-          </a:stretch>
-        </p:blipFill>
-        <p:spPr>
-          <a:xfrm>
-            <a:off x="6931152" y="3895344"/>
-            <a:ext cx="3337560" cy="2176272"/>
-          </a:xfrm>
-          <a:prstGeom prst="rect">
-            <a:avLst/>
-          </a:prstGeom>
-        </p:spPr>
-      </p:pic>
-      <p:pic>
-        <p:nvPicPr>
-          <p:cNvPr id="27" name="Picture 26" descr="phone_243x423.png"/>
-          <p:cNvPicPr>
-            <a:picLocks noChangeAspect="1"/>
-          </p:cNvPicPr>
-          <p:nvPr/>
-        </p:nvPicPr>
-        <p:blipFill>
-          <a:blip r:embed="rId5"/>
-          <a:stretch>
-            <a:fillRect/>
-          </a:stretch>
-        </p:blipFill>
-        <p:spPr>
-          <a:xfrm>
-            <a:off x="10369296" y="3493008"/>
-            <a:ext cx="1481328" cy="2578608"/>
-          </a:xfrm>
-          <a:prstGeom prst="rect">
-            <a:avLst/>
-          </a:prstGeom>
-        </p:spPr>
-      </p:pic>
-      <p:sp>
-        <p:nvSpPr>
-          <p:cNvPr id="28" name="TextBox 27"/>
-          <p:cNvSpPr txBox="1"/>
-          <p:nvPr/>
-        </p:nvSpPr>
-        <p:spPr>
-          <a:xfrm>
-            <a:off x="658368" y="6473952"/>
-            <a:ext cx="2926080" cy="182880"/>
-          </a:xfrm>
-          <a:prstGeom prst="rect">
-            <a:avLst/>
-          </a:prstGeom>
-          <a:noFill/>
-        </p:spPr>
-        <p:txBody>
-          <a:bodyPr wrap="square" lIns="0" rIns="0" tIns="0" bIns="0" anchor="t">
-            <a:spAutoFit/>
-          </a:bodyPr>
-          <a:lstStyle/>
-          <a:p>
-            <a:pPr algn="l">
-              <a:lnSpc>
-                <a:spcPct val="115000"/>
-              </a:lnSpc>
-            </a:pPr>
-            <a:r>
-              <a:rPr sz="950" b="0" i="0">
-                <a:solidFill>
-                  <a:srgbClr val="D6DFEC"/>
-                </a:solidFill>
-                <a:latin typeface="Aptos"/>
-              </a:rPr>
-              <a:t>Sak-AI答题助手｜答辩演示</a:t>
-            </a:r>
-          </a:p>
-        </p:txBody>
-      </p:sp>
-      <p:sp>
-        <p:nvSpPr>
-          <p:cNvPr id="29" name="TextBox 28"/>
-          <p:cNvSpPr txBox="1"/>
-          <p:nvPr/>
-        </p:nvSpPr>
-        <p:spPr>
-          <a:xfrm>
-            <a:off x="11384280" y="6400800"/>
-            <a:ext cx="347472" cy="219456"/>
-          </a:xfrm>
-          <a:prstGeom prst="rect">
-            <a:avLst/>
-          </a:prstGeom>
-          <a:noFill/>
-        </p:spPr>
-        <p:txBody>
-          <a:bodyPr wrap="square" lIns="0" rIns="0" tIns="0" bIns="0" anchor="t">
-            <a:spAutoFit/>
-          </a:bodyPr>
-          <a:lstStyle/>
-          <a:p>
-            <a:pPr algn="r">
-              <a:lnSpc>
-                <a:spcPct val="115000"/>
-              </a:lnSpc>
-            </a:pPr>
-            <a:r>
-              <a:rPr sz="1100" b="1" i="0">
-                <a:solidFill>
-                  <a:srgbClr val="F8FAFC"/>
-                </a:solidFill>
-                <a:latin typeface="Aptos"/>
-              </a:rPr>
-              <a:t>01</a:t>
-            </a:r>
-          </a:p>
-        </p:txBody>
-      </p:sp>
     </p:spTree>
   </p:cSld>
   <p:clrMapOvr>
@@ -4245,7 +4314,7 @@
 </file>
 
 <file path=ppt/slides/slide10.xml><?xml version="1.0" encoding="utf-8"?>
-<p:sld xmlns:a="http://schemas.openxmlformats.org/drawingml/2006/main" xmlns:p="http://schemas.openxmlformats.org/presentationml/2006/main" xmlns:r="http://schemas.openxmlformats.org/officeDocument/2006/relationships">
+<p:sld xmlns:a="http://schemas.openxmlformats.org/drawingml/2006/main" xmlns:r="http://schemas.openxmlformats.org/officeDocument/2006/relationships" xmlns:p="http://schemas.openxmlformats.org/presentationml/2006/main">
   <p:cSld>
     <p:spTree>
       <p:nvGrpSpPr>
@@ -4263,7 +4332,7 @@
           <p:nvPr/>
         </p:nvPicPr>
         <p:blipFill>
-          <a:blip r:embed="rId2"/>
+          <a:blip r:embed="rId1"/>
           <a:stretch>
             <a:fillRect/>
           </a:stretch>
@@ -4295,7 +4364,7 @@
           <a:noFill/>
         </p:spPr>
         <p:txBody>
-          <a:bodyPr wrap="square" lIns="0" rIns="0" tIns="0" bIns="0" anchor="t">
+          <a:bodyPr wrap="square" lIns="0" tIns="0" rIns="0" bIns="0" anchor="t">
             <a:spAutoFit/>
           </a:bodyPr>
           <a:lstStyle/>
@@ -4314,6 +4383,12 @@
               </a:rPr>
               <a:t>AI GRADING</a:t>
             </a:r>
+            <a:endParaRPr sz="1200" b="1" i="0">
+              <a:solidFill>
+                <a:srgbClr val="4F6EF7"/>
+              </a:solidFill>
+              <a:latin typeface="Aptos"/>
+            </a:endParaRPr>
           </a:p>
         </p:txBody>
       </p:sp>
@@ -4368,16 +4443,16 @@
         </p:nvSpPr>
         <p:spPr>
           <a:xfrm>
-            <a:off x="658368" y="914400"/>
-            <a:ext cx="6217920" cy="530352"/>
-          </a:xfrm>
-          <a:prstGeom prst="rect">
-            <a:avLst/>
-          </a:prstGeom>
-          <a:noFill/>
-        </p:spPr>
-        <p:txBody>
-          <a:bodyPr wrap="square" lIns="0" rIns="0" tIns="0" bIns="0" anchor="t">
+            <a:off x="658495" y="914400"/>
+            <a:ext cx="8427720" cy="494665"/>
+          </a:xfrm>
+          <a:prstGeom prst="rect">
+            <a:avLst/>
+          </a:prstGeom>
+          <a:noFill/>
+        </p:spPr>
+        <p:txBody>
+          <a:bodyPr wrap="square" lIns="0" tIns="0" rIns="0" bIns="0" anchor="t">
             <a:spAutoFit/>
           </a:bodyPr>
           <a:lstStyle/>
@@ -4392,49 +4467,16 @@
                 <a:solidFill>
                   <a:srgbClr val="102A43"/>
                 </a:solidFill>
-                <a:latin typeface="Microsoft YaHei"/>
+                <a:latin typeface="微软雅黑"/>
               </a:rPr>
               <a:t>主观题判分：有答即对、AI 判分、自评模式</a:t>
             </a:r>
-          </a:p>
-        </p:txBody>
-      </p:sp>
-      <p:sp>
-        <p:nvSpPr>
-          <p:cNvPr id="6" name="TextBox 5"/>
-          <p:cNvSpPr txBox="1"/>
-          <p:nvPr/>
-        </p:nvSpPr>
-        <p:spPr>
-          <a:xfrm>
-            <a:off x="658368" y="1426464"/>
-            <a:ext cx="7132320" cy="384048"/>
-          </a:xfrm>
-          <a:prstGeom prst="rect">
-            <a:avLst/>
-          </a:prstGeom>
-          <a:noFill/>
-        </p:spPr>
-        <p:txBody>
-          <a:bodyPr wrap="square" lIns="0" rIns="0" tIns="0" bIns="0" anchor="t">
-            <a:spAutoFit/>
-          </a:bodyPr>
-          <a:lstStyle/>
-          <a:p>
-            <a:pPr algn="l">
-              <a:lnSpc>
-                <a:spcPct val="115000"/>
-              </a:lnSpc>
-            </a:pPr>
-            <a:r>
-              <a:rPr sz="1350" b="0" i="0">
-                <a:solidFill>
-                  <a:srgbClr val="62748A"/>
-                </a:solidFill>
-                <a:latin typeface="Microsoft YaHei"/>
-              </a:rPr>
-              <a:t>通过更大截图展示设置面板，避免模式项过小看不清。</a:t>
-            </a:r>
+            <a:endParaRPr sz="2800" b="1" i="0">
+              <a:solidFill>
+                <a:srgbClr val="102A43"/>
+              </a:solidFill>
+              <a:latin typeface="微软雅黑"/>
+            </a:endParaRPr>
           </a:p>
         </p:txBody>
       </p:sp>
@@ -4455,7 +4497,7 @@
           <a:noFill/>
         </p:spPr>
         <p:txBody>
-          <a:bodyPr wrap="square" lIns="0" rIns="0" tIns="0" bIns="0" anchor="t">
+          <a:bodyPr wrap="square" lIns="0" tIns="0" rIns="0" bIns="0" anchor="t">
             <a:spAutoFit/>
           </a:bodyPr>
           <a:lstStyle/>
@@ -4470,10 +4512,16 @@
                 <a:solidFill>
                   <a:srgbClr val="17324D"/>
                 </a:solidFill>
-                <a:latin typeface="Microsoft YaHei"/>
+                <a:latin typeface="微软雅黑"/>
               </a:rPr>
               <a:t>主观题判分设置</a:t>
             </a:r>
+            <a:endParaRPr sz="1150" b="1" i="0">
+              <a:solidFill>
+                <a:srgbClr val="17324D"/>
+              </a:solidFill>
+              <a:latin typeface="微软雅黑"/>
+            </a:endParaRPr>
           </a:p>
         </p:txBody>
       </p:sp>
@@ -4486,7 +4534,7 @@
           <p:nvPr/>
         </p:nvPicPr>
         <p:blipFill>
-          <a:blip r:embed="rId3"/>
+          <a:blip r:embed="rId2"/>
           <a:stretch>
             <a:fillRect/>
           </a:stretch>
@@ -4655,7 +4703,7 @@
           <a:noFill/>
         </p:spPr>
         <p:txBody>
-          <a:bodyPr wrap="square" lIns="0" rIns="0" tIns="0" bIns="0" anchor="t">
+          <a:bodyPr wrap="square" lIns="0" tIns="0" rIns="0" bIns="0" anchor="t">
             <a:spAutoFit/>
           </a:bodyPr>
           <a:lstStyle/>
@@ -4674,6 +4722,12 @@
               </a:rPr>
               <a:t>1</a:t>
             </a:r>
+            <a:endParaRPr sz="1200" b="1" i="0">
+              <a:solidFill>
+                <a:srgbClr val="FFFFFF"/>
+              </a:solidFill>
+              <a:latin typeface="Aptos"/>
+            </a:endParaRPr>
           </a:p>
         </p:txBody>
       </p:sp>
@@ -4694,7 +4748,7 @@
           <a:noFill/>
         </p:spPr>
         <p:txBody>
-          <a:bodyPr wrap="square" lIns="0" rIns="0" tIns="0" bIns="0" anchor="t">
+          <a:bodyPr wrap="square" lIns="0" tIns="0" rIns="0" bIns="0" anchor="t">
             <a:spAutoFit/>
           </a:bodyPr>
           <a:lstStyle/>
@@ -4709,10 +4763,16 @@
                 <a:solidFill>
                   <a:srgbClr val="102A43"/>
                 </a:solidFill>
-                <a:latin typeface="Microsoft YaHei"/>
+                <a:latin typeface="微软雅黑"/>
               </a:rPr>
               <a:t>有答即对</a:t>
             </a:r>
+            <a:endParaRPr sz="1400" b="1" i="0">
+              <a:solidFill>
+                <a:srgbClr val="102A43"/>
+              </a:solidFill>
+              <a:latin typeface="微软雅黑"/>
+            </a:endParaRPr>
           </a:p>
         </p:txBody>
       </p:sp>
@@ -4733,7 +4793,7 @@
           <a:noFill/>
         </p:spPr>
         <p:txBody>
-          <a:bodyPr wrap="square" lIns="0" rIns="0" tIns="0" bIns="0" anchor="t">
+          <a:bodyPr wrap="square" lIns="0" tIns="0" rIns="0" bIns="0" anchor="t">
             <a:spAutoFit/>
           </a:bodyPr>
           <a:lstStyle/>
@@ -4748,10 +4808,16 @@
                 <a:solidFill>
                   <a:srgbClr val="62748A"/>
                 </a:solidFill>
-                <a:latin typeface="Microsoft YaHei"/>
+                <a:latin typeface="微软雅黑"/>
               </a:rPr>
               <a:t>适合快速刷题场景，主观题填写后即可继续推进流程。</a:t>
             </a:r>
+            <a:endParaRPr sz="1120" b="0" i="0">
+              <a:solidFill>
+                <a:srgbClr val="62748A"/>
+              </a:solidFill>
+              <a:latin typeface="微软雅黑"/>
+            </a:endParaRPr>
           </a:p>
         </p:txBody>
       </p:sp>
@@ -4862,7 +4928,7 @@
           <a:noFill/>
         </p:spPr>
         <p:txBody>
-          <a:bodyPr wrap="square" lIns="0" rIns="0" tIns="0" bIns="0" anchor="t">
+          <a:bodyPr wrap="square" lIns="0" tIns="0" rIns="0" bIns="0" anchor="t">
             <a:spAutoFit/>
           </a:bodyPr>
           <a:lstStyle/>
@@ -4881,6 +4947,12 @@
               </a:rPr>
               <a:t>2</a:t>
             </a:r>
+            <a:endParaRPr sz="1200" b="1" i="0">
+              <a:solidFill>
+                <a:srgbClr val="FFFFFF"/>
+              </a:solidFill>
+              <a:latin typeface="Aptos"/>
+            </a:endParaRPr>
           </a:p>
         </p:txBody>
       </p:sp>
@@ -4901,7 +4973,7 @@
           <a:noFill/>
         </p:spPr>
         <p:txBody>
-          <a:bodyPr wrap="square" lIns="0" rIns="0" tIns="0" bIns="0" anchor="t">
+          <a:bodyPr wrap="square" lIns="0" tIns="0" rIns="0" bIns="0" anchor="t">
             <a:spAutoFit/>
           </a:bodyPr>
           <a:lstStyle/>
@@ -4916,10 +4988,16 @@
                 <a:solidFill>
                   <a:srgbClr val="102A43"/>
                 </a:solidFill>
-                <a:latin typeface="Microsoft YaHei"/>
+                <a:latin typeface="微软雅黑"/>
               </a:rPr>
               <a:t>AI 判分</a:t>
             </a:r>
+            <a:endParaRPr sz="1400" b="1" i="0">
+              <a:solidFill>
+                <a:srgbClr val="102A43"/>
+              </a:solidFill>
+              <a:latin typeface="微软雅黑"/>
+            </a:endParaRPr>
           </a:p>
         </p:txBody>
       </p:sp>
@@ -4940,7 +5018,7 @@
           <a:noFill/>
         </p:spPr>
         <p:txBody>
-          <a:bodyPr wrap="square" lIns="0" rIns="0" tIns="0" bIns="0" anchor="t">
+          <a:bodyPr wrap="square" lIns="0" tIns="0" rIns="0" bIns="0" anchor="t">
             <a:spAutoFit/>
           </a:bodyPr>
           <a:lstStyle/>
@@ -4955,10 +5033,16 @@
                 <a:solidFill>
                   <a:srgbClr val="62748A"/>
                 </a:solidFill>
-                <a:latin typeface="Microsoft YaHei"/>
+                <a:latin typeface="微软雅黑"/>
               </a:rPr>
               <a:t>调用 AI 对主观题作答进行智能评判，并与后台 AI 配置形成呼应。</a:t>
             </a:r>
+            <a:endParaRPr sz="1120" b="0" i="0">
+              <a:solidFill>
+                <a:srgbClr val="62748A"/>
+              </a:solidFill>
+              <a:latin typeface="微软雅黑"/>
+            </a:endParaRPr>
           </a:p>
         </p:txBody>
       </p:sp>
@@ -5069,7 +5153,7 @@
           <a:noFill/>
         </p:spPr>
         <p:txBody>
-          <a:bodyPr wrap="square" lIns="0" rIns="0" tIns="0" bIns="0" anchor="t">
+          <a:bodyPr wrap="square" lIns="0" tIns="0" rIns="0" bIns="0" anchor="t">
             <a:spAutoFit/>
           </a:bodyPr>
           <a:lstStyle/>
@@ -5088,6 +5172,12 @@
               </a:rPr>
               <a:t>3</a:t>
             </a:r>
+            <a:endParaRPr sz="1200" b="1" i="0">
+              <a:solidFill>
+                <a:srgbClr val="FFFFFF"/>
+              </a:solidFill>
+              <a:latin typeface="Aptos"/>
+            </a:endParaRPr>
           </a:p>
         </p:txBody>
       </p:sp>
@@ -5108,7 +5198,7 @@
           <a:noFill/>
         </p:spPr>
         <p:txBody>
-          <a:bodyPr wrap="square" lIns="0" rIns="0" tIns="0" bIns="0" anchor="t">
+          <a:bodyPr wrap="square" lIns="0" tIns="0" rIns="0" bIns="0" anchor="t">
             <a:spAutoFit/>
           </a:bodyPr>
           <a:lstStyle/>
@@ -5123,10 +5213,16 @@
                 <a:solidFill>
                   <a:srgbClr val="102A43"/>
                 </a:solidFill>
-                <a:latin typeface="Microsoft YaHei"/>
+                <a:latin typeface="微软雅黑"/>
               </a:rPr>
               <a:t>自评模式</a:t>
             </a:r>
+            <a:endParaRPr sz="1400" b="1" i="0">
+              <a:solidFill>
+                <a:srgbClr val="102A43"/>
+              </a:solidFill>
+              <a:latin typeface="微软雅黑"/>
+            </a:endParaRPr>
           </a:p>
         </p:txBody>
       </p:sp>
@@ -5147,7 +5243,7 @@
           <a:noFill/>
         </p:spPr>
         <p:txBody>
-          <a:bodyPr wrap="square" lIns="0" rIns="0" tIns="0" bIns="0" anchor="t">
+          <a:bodyPr wrap="square" lIns="0" tIns="0" rIns="0" bIns="0" anchor="t">
             <a:spAutoFit/>
           </a:bodyPr>
           <a:lstStyle/>
@@ -5162,10 +5258,16 @@
                 <a:solidFill>
                   <a:srgbClr val="62748A"/>
                 </a:solidFill>
-                <a:latin typeface="Microsoft YaHei"/>
+                <a:latin typeface="微软雅黑"/>
               </a:rPr>
               <a:t>展示参考答案后由学习者自评，更适合开放题与复盘型训练。</a:t>
             </a:r>
+            <a:endParaRPr sz="1120" b="0" i="0">
+              <a:solidFill>
+                <a:srgbClr val="62748A"/>
+              </a:solidFill>
+              <a:latin typeface="微软雅黑"/>
+            </a:endParaRPr>
           </a:p>
         </p:txBody>
       </p:sp>
@@ -5186,7 +5288,7 @@
           <a:noFill/>
         </p:spPr>
         <p:txBody>
-          <a:bodyPr wrap="square" lIns="0" rIns="0" tIns="0" bIns="0" anchor="t">
+          <a:bodyPr wrap="square" lIns="0" tIns="0" rIns="0" bIns="0" anchor="t">
             <a:spAutoFit/>
           </a:bodyPr>
           <a:lstStyle/>
@@ -5205,6 +5307,12 @@
               </a:rPr>
               <a:t>Sak-AI答题助手｜答辩演示</a:t>
             </a:r>
+            <a:endParaRPr sz="950" b="0" i="0">
+              <a:solidFill>
+                <a:srgbClr val="94A3B8"/>
+              </a:solidFill>
+              <a:latin typeface="Aptos"/>
+            </a:endParaRPr>
           </a:p>
         </p:txBody>
       </p:sp>
@@ -5225,7 +5333,7 @@
           <a:noFill/>
         </p:spPr>
         <p:txBody>
-          <a:bodyPr wrap="square" lIns="0" rIns="0" tIns="0" bIns="0" anchor="t">
+          <a:bodyPr wrap="square" lIns="0" tIns="0" rIns="0" bIns="0" anchor="t">
             <a:spAutoFit/>
           </a:bodyPr>
           <a:lstStyle/>
@@ -5244,6 +5352,12 @@
               </a:rPr>
               <a:t>10</a:t>
             </a:r>
+            <a:endParaRPr sz="1100" b="1" i="0">
+              <a:solidFill>
+                <a:srgbClr val="17324D"/>
+              </a:solidFill>
+              <a:latin typeface="Aptos"/>
+            </a:endParaRPr>
           </a:p>
         </p:txBody>
       </p:sp>
@@ -5256,7 +5370,7 @@
 </file>
 
 <file path=ppt/slides/slide11.xml><?xml version="1.0" encoding="utf-8"?>
-<p:sld xmlns:a="http://schemas.openxmlformats.org/drawingml/2006/main" xmlns:p="http://schemas.openxmlformats.org/presentationml/2006/main" xmlns:r="http://schemas.openxmlformats.org/officeDocument/2006/relationships">
+<p:sld xmlns:a="http://schemas.openxmlformats.org/drawingml/2006/main" xmlns:r="http://schemas.openxmlformats.org/officeDocument/2006/relationships" xmlns:p="http://schemas.openxmlformats.org/presentationml/2006/main">
   <p:cSld>
     <p:spTree>
       <p:nvGrpSpPr>
@@ -5274,7 +5388,7 @@
           <p:nvPr/>
         </p:nvPicPr>
         <p:blipFill>
-          <a:blip r:embed="rId2"/>
+          <a:blip r:embed="rId1"/>
           <a:stretch>
             <a:fillRect/>
           </a:stretch>
@@ -5306,7 +5420,7 @@
           <a:noFill/>
         </p:spPr>
         <p:txBody>
-          <a:bodyPr wrap="square" lIns="0" rIns="0" tIns="0" bIns="0" anchor="t">
+          <a:bodyPr wrap="square" lIns="0" tIns="0" rIns="0" bIns="0" anchor="t">
             <a:spAutoFit/>
           </a:bodyPr>
           <a:lstStyle/>
@@ -5325,6 +5439,12 @@
               </a:rPr>
               <a:t>FORUM</a:t>
             </a:r>
+            <a:endParaRPr sz="1200" b="1" i="0">
+              <a:solidFill>
+                <a:srgbClr val="4F6EF7"/>
+              </a:solidFill>
+              <a:latin typeface="Aptos"/>
+            </a:endParaRPr>
           </a:p>
         </p:txBody>
       </p:sp>
@@ -5388,7 +5508,7 @@
           <a:noFill/>
         </p:spPr>
         <p:txBody>
-          <a:bodyPr wrap="square" lIns="0" rIns="0" tIns="0" bIns="0" anchor="t">
+          <a:bodyPr wrap="square" lIns="0" tIns="0" rIns="0" bIns="0" anchor="t">
             <a:spAutoFit/>
           </a:bodyPr>
           <a:lstStyle/>
@@ -5403,10 +5523,16 @@
                 <a:solidFill>
                   <a:srgbClr val="102A43"/>
                 </a:solidFill>
-                <a:latin typeface="Microsoft YaHei"/>
+                <a:latin typeface="微软雅黑"/>
               </a:rPr>
               <a:t>论坛模块：社区首页到帖子详情</a:t>
             </a:r>
+            <a:endParaRPr sz="2800" b="1" i="0">
+              <a:solidFill>
+                <a:srgbClr val="102A43"/>
+              </a:solidFill>
+              <a:latin typeface="微软雅黑"/>
+            </a:endParaRPr>
           </a:p>
         </p:txBody>
       </p:sp>
@@ -5427,7 +5553,7 @@
           <a:noFill/>
         </p:spPr>
         <p:txBody>
-          <a:bodyPr wrap="square" lIns="0" rIns="0" tIns="0" bIns="0" anchor="t">
+          <a:bodyPr wrap="square" lIns="0" tIns="0" rIns="0" bIns="0" anchor="t">
             <a:spAutoFit/>
           </a:bodyPr>
           <a:lstStyle/>
@@ -5442,10 +5568,16 @@
                 <a:solidFill>
                   <a:srgbClr val="62748A"/>
                 </a:solidFill>
-                <a:latin typeface="Microsoft YaHei"/>
+                <a:latin typeface="微软雅黑"/>
               </a:rPr>
               <a:t>帖子列表与帖子阅读都使用更大的图片面积，便于看清结构与信息层次。</a:t>
             </a:r>
+            <a:endParaRPr sz="1350" b="0" i="0">
+              <a:solidFill>
+                <a:srgbClr val="62748A"/>
+              </a:solidFill>
+              <a:latin typeface="微软雅黑"/>
+            </a:endParaRPr>
           </a:p>
         </p:txBody>
       </p:sp>
@@ -5466,7 +5598,7 @@
           <a:noFill/>
         </p:spPr>
         <p:txBody>
-          <a:bodyPr wrap="square" lIns="0" rIns="0" tIns="0" bIns="0" anchor="t">
+          <a:bodyPr wrap="square" lIns="0" tIns="0" rIns="0" bIns="0" anchor="t">
             <a:spAutoFit/>
           </a:bodyPr>
           <a:lstStyle/>
@@ -5481,10 +5613,16 @@
                 <a:solidFill>
                   <a:srgbClr val="17324D"/>
                 </a:solidFill>
-                <a:latin typeface="Microsoft YaHei"/>
+                <a:latin typeface="微软雅黑"/>
               </a:rPr>
               <a:t>论坛首页</a:t>
             </a:r>
+            <a:endParaRPr sz="1150" b="1" i="0">
+              <a:solidFill>
+                <a:srgbClr val="17324D"/>
+              </a:solidFill>
+              <a:latin typeface="微软雅黑"/>
+            </a:endParaRPr>
           </a:p>
         </p:txBody>
       </p:sp>
@@ -5497,7 +5635,7 @@
           <p:nvPr/>
         </p:nvPicPr>
         <p:blipFill>
-          <a:blip r:embed="rId3"/>
+          <a:blip r:embed="rId2"/>
           <a:stretch>
             <a:fillRect/>
           </a:stretch>
@@ -5529,7 +5667,7 @@
           <a:noFill/>
         </p:spPr>
         <p:txBody>
-          <a:bodyPr wrap="square" lIns="0" rIns="0" tIns="0" bIns="0" anchor="t">
+          <a:bodyPr wrap="square" lIns="0" tIns="0" rIns="0" bIns="0" anchor="t">
             <a:spAutoFit/>
           </a:bodyPr>
           <a:lstStyle/>
@@ -5544,10 +5682,16 @@
                 <a:solidFill>
                   <a:srgbClr val="17324D"/>
                 </a:solidFill>
-                <a:latin typeface="Microsoft YaHei"/>
+                <a:latin typeface="微软雅黑"/>
               </a:rPr>
               <a:t>论坛帖子详情</a:t>
             </a:r>
+            <a:endParaRPr sz="1150" b="1" i="0">
+              <a:solidFill>
+                <a:srgbClr val="17324D"/>
+              </a:solidFill>
+              <a:latin typeface="微软雅黑"/>
+            </a:endParaRPr>
           </a:p>
         </p:txBody>
       </p:sp>
@@ -5560,15 +5704,16 @@
           <p:nvPr/>
         </p:nvPicPr>
         <p:blipFill>
-          <a:blip r:embed="rId4"/>
+          <a:blip r:embed="rId3"/>
+          <a:srcRect t="12697" r="-12" b="11652"/>
           <a:stretch>
             <a:fillRect/>
           </a:stretch>
         </p:blipFill>
         <p:spPr>
           <a:xfrm>
-            <a:off x="6272784" y="1828800"/>
-            <a:ext cx="5285232" cy="4315968"/>
+            <a:off x="6272530" y="2376805"/>
+            <a:ext cx="5285740" cy="3265170"/>
           </a:xfrm>
           <a:prstGeom prst="rect">
             <a:avLst/>
@@ -5592,7 +5737,7 @@
           <a:noFill/>
         </p:spPr>
         <p:txBody>
-          <a:bodyPr wrap="square" lIns="0" rIns="0" tIns="0" bIns="0" anchor="t">
+          <a:bodyPr wrap="square" lIns="0" tIns="0" rIns="0" bIns="0" anchor="t">
             <a:spAutoFit/>
           </a:bodyPr>
           <a:lstStyle/>
@@ -5611,6 +5756,12 @@
               </a:rPr>
               <a:t>Sak-AI答题助手｜答辩演示</a:t>
             </a:r>
+            <a:endParaRPr sz="950" b="0" i="0">
+              <a:solidFill>
+                <a:srgbClr val="94A3B8"/>
+              </a:solidFill>
+              <a:latin typeface="Aptos"/>
+            </a:endParaRPr>
           </a:p>
         </p:txBody>
       </p:sp>
@@ -5631,7 +5782,7 @@
           <a:noFill/>
         </p:spPr>
         <p:txBody>
-          <a:bodyPr wrap="square" lIns="0" rIns="0" tIns="0" bIns="0" anchor="t">
+          <a:bodyPr wrap="square" lIns="0" tIns="0" rIns="0" bIns="0" anchor="t">
             <a:spAutoFit/>
           </a:bodyPr>
           <a:lstStyle/>
@@ -5650,6 +5801,12 @@
               </a:rPr>
               <a:t>11</a:t>
             </a:r>
+            <a:endParaRPr sz="1100" b="1" i="0">
+              <a:solidFill>
+                <a:srgbClr val="17324D"/>
+              </a:solidFill>
+              <a:latin typeface="Aptos"/>
+            </a:endParaRPr>
           </a:p>
         </p:txBody>
       </p:sp>
@@ -5662,7 +5819,7 @@
 </file>
 
 <file path=ppt/slides/slide12.xml><?xml version="1.0" encoding="utf-8"?>
-<p:sld xmlns:a="http://schemas.openxmlformats.org/drawingml/2006/main" xmlns:p="http://schemas.openxmlformats.org/presentationml/2006/main" xmlns:r="http://schemas.openxmlformats.org/officeDocument/2006/relationships">
+<p:sld xmlns:a="http://schemas.openxmlformats.org/drawingml/2006/main" xmlns:r="http://schemas.openxmlformats.org/officeDocument/2006/relationships" xmlns:p="http://schemas.openxmlformats.org/presentationml/2006/main">
   <p:cSld>
     <p:spTree>
       <p:nvGrpSpPr>
@@ -5680,7 +5837,7 @@
           <p:nvPr/>
         </p:nvPicPr>
         <p:blipFill>
-          <a:blip r:embed="rId2"/>
+          <a:blip r:embed="rId1"/>
           <a:stretch>
             <a:fillRect/>
           </a:stretch>
@@ -5712,7 +5869,7 @@
           <a:noFill/>
         </p:spPr>
         <p:txBody>
-          <a:bodyPr wrap="square" lIns="0" rIns="0" tIns="0" bIns="0" anchor="t">
+          <a:bodyPr wrap="square" lIns="0" tIns="0" rIns="0" bIns="0" anchor="t">
             <a:spAutoFit/>
           </a:bodyPr>
           <a:lstStyle/>
@@ -5731,6 +5888,12 @@
               </a:rPr>
               <a:t>CHAT</a:t>
             </a:r>
+            <a:endParaRPr sz="1200" b="1" i="0">
+              <a:solidFill>
+                <a:srgbClr val="C7D2FE"/>
+              </a:solidFill>
+              <a:latin typeface="Aptos"/>
+            </a:endParaRPr>
           </a:p>
         </p:txBody>
       </p:sp>
@@ -5794,7 +5957,7 @@
           <a:noFill/>
         </p:spPr>
         <p:txBody>
-          <a:bodyPr wrap="square" lIns="0" rIns="0" tIns="0" bIns="0" anchor="t">
+          <a:bodyPr wrap="square" lIns="0" tIns="0" rIns="0" bIns="0" anchor="t">
             <a:spAutoFit/>
           </a:bodyPr>
           <a:lstStyle/>
@@ -5809,49 +5972,16 @@
                 <a:solidFill>
                   <a:srgbClr val="FFFFFF"/>
                 </a:solidFill>
-                <a:latin typeface="Microsoft YaHei"/>
+                <a:latin typeface="微软雅黑"/>
               </a:rPr>
               <a:t>聊天模块：会话、搜索与互动内容承接</a:t>
             </a:r>
-          </a:p>
-        </p:txBody>
-      </p:sp>
-      <p:sp>
-        <p:nvSpPr>
-          <p:cNvPr id="6" name="TextBox 5"/>
-          <p:cNvSpPr txBox="1"/>
-          <p:nvPr/>
-        </p:nvSpPr>
-        <p:spPr>
-          <a:xfrm>
-            <a:off x="658368" y="1426464"/>
-            <a:ext cx="7132320" cy="384048"/>
-          </a:xfrm>
-          <a:prstGeom prst="rect">
-            <a:avLst/>
-          </a:prstGeom>
-          <a:noFill/>
-        </p:spPr>
-        <p:txBody>
-          <a:bodyPr wrap="square" lIns="0" rIns="0" tIns="0" bIns="0" anchor="t">
-            <a:spAutoFit/>
-          </a:bodyPr>
-          <a:lstStyle/>
-          <a:p>
-            <a:pPr algn="l">
-              <a:lnSpc>
-                <a:spcPct val="115000"/>
-              </a:lnSpc>
-            </a:pPr>
-            <a:r>
-              <a:rPr sz="1350" b="0" i="0">
-                <a:solidFill>
-                  <a:srgbClr val="D9E5F5"/>
-                </a:solidFill>
-                <a:latin typeface="Microsoft YaHei"/>
-              </a:rPr>
-              <a:t>支持从资料页或系统入口进入聊天，会话中可承接题目、图片、语音与帖子转发。</a:t>
-            </a:r>
+            <a:endParaRPr sz="2800" b="1" i="0">
+              <a:solidFill>
+                <a:srgbClr val="FFFFFF"/>
+              </a:solidFill>
+              <a:latin typeface="微软雅黑"/>
+            </a:endParaRPr>
           </a:p>
         </p:txBody>
       </p:sp>
@@ -5872,7 +6002,7 @@
           <a:noFill/>
         </p:spPr>
         <p:txBody>
-          <a:bodyPr wrap="square" lIns="0" rIns="0" tIns="0" bIns="0" anchor="t">
+          <a:bodyPr wrap="square" lIns="0" tIns="0" rIns="0" bIns="0" anchor="t">
             <a:spAutoFit/>
           </a:bodyPr>
           <a:lstStyle/>
@@ -5887,10 +6017,16 @@
                 <a:solidFill>
                   <a:srgbClr val="D9E5F5"/>
                 </a:solidFill>
-                <a:latin typeface="Microsoft YaHei"/>
+                <a:latin typeface="微软雅黑"/>
               </a:rPr>
               <a:t>聊天界面</a:t>
             </a:r>
+            <a:endParaRPr sz="1150" b="1" i="0">
+              <a:solidFill>
+                <a:srgbClr val="D9E5F5"/>
+              </a:solidFill>
+              <a:latin typeface="微软雅黑"/>
+            </a:endParaRPr>
           </a:p>
         </p:txBody>
       </p:sp>
@@ -5903,14 +6039,14 @@
           <p:nvPr/>
         </p:nvPicPr>
         <p:blipFill>
-          <a:blip r:embed="rId3"/>
+          <a:blip r:embed="rId2"/>
           <a:stretch>
             <a:fillRect/>
           </a:stretch>
         </p:blipFill>
         <p:spPr>
           <a:xfrm>
-            <a:off x="658368" y="1810512"/>
+            <a:off x="658368" y="1838452"/>
             <a:ext cx="6766560" cy="4407408"/>
           </a:xfrm>
           <a:prstGeom prst="rect">
@@ -6029,7 +6165,7 @@
           <a:noFill/>
         </p:spPr>
         <p:txBody>
-          <a:bodyPr wrap="square" lIns="0" rIns="0" tIns="0" bIns="0" anchor="t">
+          <a:bodyPr wrap="square" lIns="0" tIns="0" rIns="0" bIns="0" anchor="t">
             <a:spAutoFit/>
           </a:bodyPr>
           <a:lstStyle/>
@@ -6044,10 +6180,16 @@
                 <a:solidFill>
                   <a:srgbClr val="D9E5F5"/>
                 </a:solidFill>
-                <a:latin typeface="Microsoft YaHei"/>
+                <a:latin typeface="微软雅黑"/>
               </a:rPr>
               <a:t>交互能力</a:t>
             </a:r>
+            <a:endParaRPr sz="1250" b="1" i="0">
+              <a:solidFill>
+                <a:srgbClr val="D9E5F5"/>
+              </a:solidFill>
+              <a:latin typeface="微软雅黑"/>
+            </a:endParaRPr>
           </a:p>
         </p:txBody>
       </p:sp>
@@ -6068,7 +6210,7 @@
           <a:noFill/>
         </p:spPr>
         <p:txBody>
-          <a:bodyPr wrap="square" lIns="0" rIns="0" tIns="0" bIns="0" anchor="t">
+          <a:bodyPr wrap="square" lIns="0" tIns="0" rIns="0" bIns="0" anchor="t">
             <a:spAutoFit/>
           </a:bodyPr>
           <a:lstStyle/>
@@ -6089,10 +6231,16 @@
                 <a:solidFill>
                   <a:srgbClr val="EAF1FF"/>
                 </a:solidFill>
-                <a:latin typeface="Microsoft YaHei"/>
+                <a:latin typeface="微软雅黑"/>
               </a:rPr>
               <a:t>搜索用户后可直接发起讨论。</a:t>
             </a:r>
+            <a:endParaRPr sz="1300" b="1" i="0">
+              <a:solidFill>
+                <a:srgbClr val="EAF1FF"/>
+              </a:solidFill>
+              <a:latin typeface="微软雅黑"/>
+            </a:endParaRPr>
           </a:p>
           <a:p>
             <a:pPr algn="l">
@@ -6111,10 +6259,16 @@
                 <a:solidFill>
                   <a:srgbClr val="D9E5F5"/>
                 </a:solidFill>
-                <a:latin typeface="Microsoft YaHei"/>
+                <a:latin typeface="微软雅黑"/>
               </a:rPr>
               <a:t>• 会话列表区分消息与互动。</a:t>
             </a:r>
+            <a:endParaRPr sz="1240" b="0" i="0">
+              <a:solidFill>
+                <a:srgbClr val="D9E5F5"/>
+              </a:solidFill>
+              <a:latin typeface="微软雅黑"/>
+            </a:endParaRPr>
           </a:p>
           <a:p>
             <a:pPr algn="l">
@@ -6133,10 +6287,16 @@
                 <a:solidFill>
                   <a:srgbClr val="D9E5F5"/>
                 </a:solidFill>
-                <a:latin typeface="Microsoft YaHei"/>
+                <a:latin typeface="微软雅黑"/>
               </a:rPr>
               <a:t>• 消息类型覆盖图片、语音、题目与帖子转发。</a:t>
             </a:r>
+            <a:endParaRPr sz="1240" b="0" i="0">
+              <a:solidFill>
+                <a:srgbClr val="D9E5F5"/>
+              </a:solidFill>
+              <a:latin typeface="微软雅黑"/>
+            </a:endParaRPr>
           </a:p>
           <a:p>
             <a:pPr algn="l">
@@ -6155,10 +6315,16 @@
                 <a:solidFill>
                   <a:srgbClr val="D9E5F5"/>
                 </a:solidFill>
-                <a:latin typeface="Microsoft YaHei"/>
+                <a:latin typeface="微软雅黑"/>
               </a:rPr>
               <a:t>• 与论坛、个人资料等模块形成联动。</a:t>
             </a:r>
+            <a:endParaRPr sz="1240" b="0" i="0">
+              <a:solidFill>
+                <a:srgbClr val="D9E5F5"/>
+              </a:solidFill>
+              <a:latin typeface="微软雅黑"/>
+            </a:endParaRPr>
           </a:p>
         </p:txBody>
       </p:sp>
@@ -6170,7 +6336,7 @@
         </p:nvSpPr>
         <p:spPr>
           <a:xfrm>
-            <a:off x="7955279" y="5285232"/>
+            <a:off x="7955279" y="4928997"/>
             <a:ext cx="1572768" cy="822960"/>
           </a:xfrm>
           <a:prstGeom prst="roundRect">
@@ -6217,7 +6383,7 @@
         </p:nvSpPr>
         <p:spPr>
           <a:xfrm>
-            <a:off x="8183879" y="5422392"/>
+            <a:off x="8183879" y="5066157"/>
             <a:ext cx="1115568" cy="438912"/>
           </a:xfrm>
           <a:prstGeom prst="rect">
@@ -6226,7 +6392,7 @@
           <a:noFill/>
         </p:spPr>
         <p:txBody>
-          <a:bodyPr wrap="square" lIns="0" rIns="0" tIns="0" bIns="0" anchor="t">
+          <a:bodyPr wrap="square" lIns="0" tIns="0" rIns="0" bIns="0" anchor="t">
             <a:spAutoFit/>
           </a:bodyPr>
           <a:lstStyle/>
@@ -6245,6 +6411,12 @@
               </a:rPr>
               <a:t>IM</a:t>
             </a:r>
+            <a:endParaRPr sz="2400" b="1" i="0">
+              <a:solidFill>
+                <a:srgbClr val="FFFFFF"/>
+              </a:solidFill>
+              <a:latin typeface="Aptos"/>
+            </a:endParaRPr>
           </a:p>
         </p:txBody>
       </p:sp>
@@ -6256,7 +6428,7 @@
         </p:nvSpPr>
         <p:spPr>
           <a:xfrm>
-            <a:off x="8183879" y="5852160"/>
+            <a:off x="8183879" y="5495925"/>
             <a:ext cx="1115568" cy="310896"/>
           </a:xfrm>
           <a:prstGeom prst="rect">
@@ -6265,7 +6437,7 @@
           <a:noFill/>
         </p:spPr>
         <p:txBody>
-          <a:bodyPr wrap="square" lIns="0" rIns="0" tIns="0" bIns="0" anchor="t">
+          <a:bodyPr wrap="square" lIns="0" tIns="0" rIns="0" bIns="0" anchor="t">
             <a:spAutoFit/>
           </a:bodyPr>
           <a:lstStyle/>
@@ -6280,10 +6452,16 @@
                 <a:solidFill>
                   <a:srgbClr val="D7DEEA"/>
                 </a:solidFill>
-                <a:latin typeface="Microsoft YaHei"/>
+                <a:latin typeface="微软雅黑"/>
               </a:rPr>
               <a:t>消息流</a:t>
             </a:r>
+            <a:endParaRPr sz="1250" b="1" i="0">
+              <a:solidFill>
+                <a:srgbClr val="D7DEEA"/>
+              </a:solidFill>
+              <a:latin typeface="微软雅黑"/>
+            </a:endParaRPr>
           </a:p>
         </p:txBody>
       </p:sp>
@@ -6295,7 +6473,7 @@
         </p:nvSpPr>
         <p:spPr>
           <a:xfrm>
-            <a:off x="8183879" y="6153912"/>
+            <a:off x="8183879" y="5797677"/>
             <a:ext cx="1115568" cy="256032"/>
           </a:xfrm>
           <a:prstGeom prst="rect">
@@ -6304,7 +6482,7 @@
           <a:noFill/>
         </p:spPr>
         <p:txBody>
-          <a:bodyPr wrap="square" lIns="0" rIns="0" tIns="0" bIns="0" anchor="t">
+          <a:bodyPr wrap="square" lIns="0" tIns="0" rIns="0" bIns="0" anchor="t">
             <a:spAutoFit/>
           </a:bodyPr>
           <a:lstStyle/>
@@ -6319,10 +6497,16 @@
                 <a:solidFill>
                   <a:srgbClr val="9FB0C7"/>
                 </a:solidFill>
-                <a:latin typeface="Microsoft YaHei"/>
+                <a:latin typeface="微软雅黑"/>
               </a:rPr>
               <a:t>会话 / 搜索 / 发送</a:t>
             </a:r>
+            <a:endParaRPr sz="1050" b="0" i="0">
+              <a:solidFill>
+                <a:srgbClr val="9FB0C7"/>
+              </a:solidFill>
+              <a:latin typeface="微软雅黑"/>
+            </a:endParaRPr>
           </a:p>
         </p:txBody>
       </p:sp>
@@ -6334,7 +6518,7 @@
         </p:nvSpPr>
         <p:spPr>
           <a:xfrm>
-            <a:off x="9656064" y="5285232"/>
+            <a:off x="9656064" y="4928997"/>
             <a:ext cx="1572768" cy="822960"/>
           </a:xfrm>
           <a:prstGeom prst="roundRect">
@@ -6381,7 +6565,7 @@
         </p:nvSpPr>
         <p:spPr>
           <a:xfrm>
-            <a:off x="9884664" y="5422392"/>
+            <a:off x="9884664" y="5066157"/>
             <a:ext cx="1115568" cy="438912"/>
           </a:xfrm>
           <a:prstGeom prst="rect">
@@ -6390,7 +6574,7 @@
           <a:noFill/>
         </p:spPr>
         <p:txBody>
-          <a:bodyPr wrap="square" lIns="0" rIns="0" tIns="0" bIns="0" anchor="t">
+          <a:bodyPr wrap="square" lIns="0" tIns="0" rIns="0" bIns="0" anchor="t">
             <a:spAutoFit/>
           </a:bodyPr>
           <a:lstStyle/>
@@ -6409,6 +6593,12 @@
               </a:rPr>
               <a:t>Link</a:t>
             </a:r>
+            <a:endParaRPr sz="2400" b="1" i="0">
+              <a:solidFill>
+                <a:srgbClr val="FFFFFF"/>
+              </a:solidFill>
+              <a:latin typeface="Aptos"/>
+            </a:endParaRPr>
           </a:p>
         </p:txBody>
       </p:sp>
@@ -6420,7 +6610,7 @@
         </p:nvSpPr>
         <p:spPr>
           <a:xfrm>
-            <a:off x="9884664" y="5852160"/>
+            <a:off x="9884664" y="5495925"/>
             <a:ext cx="1115568" cy="310896"/>
           </a:xfrm>
           <a:prstGeom prst="rect">
@@ -6429,7 +6619,7 @@
           <a:noFill/>
         </p:spPr>
         <p:txBody>
-          <a:bodyPr wrap="square" lIns="0" rIns="0" tIns="0" bIns="0" anchor="t">
+          <a:bodyPr wrap="square" lIns="0" tIns="0" rIns="0" bIns="0" anchor="t">
             <a:spAutoFit/>
           </a:bodyPr>
           <a:lstStyle/>
@@ -6444,10 +6634,16 @@
                 <a:solidFill>
                   <a:srgbClr val="D7DEEA"/>
                 </a:solidFill>
-                <a:latin typeface="Microsoft YaHei"/>
+                <a:latin typeface="微软雅黑"/>
               </a:rPr>
               <a:t>内容互通</a:t>
             </a:r>
+            <a:endParaRPr sz="1250" b="1" i="0">
+              <a:solidFill>
+                <a:srgbClr val="D7DEEA"/>
+              </a:solidFill>
+              <a:latin typeface="微软雅黑"/>
+            </a:endParaRPr>
           </a:p>
         </p:txBody>
       </p:sp>
@@ -6459,7 +6655,7 @@
         </p:nvSpPr>
         <p:spPr>
           <a:xfrm>
-            <a:off x="9884664" y="6153912"/>
+            <a:off x="9884664" y="5797677"/>
             <a:ext cx="1115568" cy="256032"/>
           </a:xfrm>
           <a:prstGeom prst="rect">
@@ -6468,7 +6664,7 @@
           <a:noFill/>
         </p:spPr>
         <p:txBody>
-          <a:bodyPr wrap="square" lIns="0" rIns="0" tIns="0" bIns="0" anchor="t">
+          <a:bodyPr wrap="square" lIns="0" tIns="0" rIns="0" bIns="0" anchor="t">
             <a:spAutoFit/>
           </a:bodyPr>
           <a:lstStyle/>
@@ -6483,10 +6679,16 @@
                 <a:solidFill>
                   <a:srgbClr val="9FB0C7"/>
                 </a:solidFill>
-                <a:latin typeface="Microsoft YaHei"/>
+                <a:latin typeface="微软雅黑"/>
               </a:rPr>
               <a:t>题目 / 帖子 / 图片</a:t>
             </a:r>
+            <a:endParaRPr sz="1050" b="0" i="0">
+              <a:solidFill>
+                <a:srgbClr val="9FB0C7"/>
+              </a:solidFill>
+              <a:latin typeface="微软雅黑"/>
+            </a:endParaRPr>
           </a:p>
         </p:txBody>
       </p:sp>
@@ -6507,7 +6709,7 @@
           <a:noFill/>
         </p:spPr>
         <p:txBody>
-          <a:bodyPr wrap="square" lIns="0" rIns="0" tIns="0" bIns="0" anchor="t">
+          <a:bodyPr wrap="square" lIns="0" tIns="0" rIns="0" bIns="0" anchor="t">
             <a:spAutoFit/>
           </a:bodyPr>
           <a:lstStyle/>
@@ -6526,6 +6728,12 @@
               </a:rPr>
               <a:t>Sak-AI答题助手｜答辩演示</a:t>
             </a:r>
+            <a:endParaRPr sz="950" b="0" i="0">
+              <a:solidFill>
+                <a:srgbClr val="D6DFEC"/>
+              </a:solidFill>
+              <a:latin typeface="Aptos"/>
+            </a:endParaRPr>
           </a:p>
         </p:txBody>
       </p:sp>
@@ -6546,7 +6754,7 @@
           <a:noFill/>
         </p:spPr>
         <p:txBody>
-          <a:bodyPr wrap="square" lIns="0" rIns="0" tIns="0" bIns="0" anchor="t">
+          <a:bodyPr wrap="square" lIns="0" tIns="0" rIns="0" bIns="0" anchor="t">
             <a:spAutoFit/>
           </a:bodyPr>
           <a:lstStyle/>
@@ -6565,6 +6773,12 @@
               </a:rPr>
               <a:t>12</a:t>
             </a:r>
+            <a:endParaRPr sz="1100" b="1" i="0">
+              <a:solidFill>
+                <a:srgbClr val="F8FAFC"/>
+              </a:solidFill>
+              <a:latin typeface="Aptos"/>
+            </a:endParaRPr>
           </a:p>
         </p:txBody>
       </p:sp>
@@ -6577,7 +6791,7 @@
 </file>
 
 <file path=ppt/slides/slide13.xml><?xml version="1.0" encoding="utf-8"?>
-<p:sld xmlns:a="http://schemas.openxmlformats.org/drawingml/2006/main" xmlns:p="http://schemas.openxmlformats.org/presentationml/2006/main" xmlns:r="http://schemas.openxmlformats.org/officeDocument/2006/relationships">
+<p:sld xmlns:a="http://schemas.openxmlformats.org/drawingml/2006/main" xmlns:r="http://schemas.openxmlformats.org/officeDocument/2006/relationships" xmlns:p="http://schemas.openxmlformats.org/presentationml/2006/main">
   <p:cSld>
     <p:spTree>
       <p:nvGrpSpPr>
@@ -6595,7 +6809,7 @@
           <p:nvPr/>
         </p:nvPicPr>
         <p:blipFill>
-          <a:blip r:embed="rId2"/>
+          <a:blip r:embed="rId1"/>
           <a:stretch>
             <a:fillRect/>
           </a:stretch>
@@ -6627,7 +6841,7 @@
           <a:noFill/>
         </p:spPr>
         <p:txBody>
-          <a:bodyPr wrap="square" lIns="0" rIns="0" tIns="0" bIns="0" anchor="t">
+          <a:bodyPr wrap="square" lIns="0" tIns="0" rIns="0" bIns="0" anchor="t">
             <a:spAutoFit/>
           </a:bodyPr>
           <a:lstStyle/>
@@ -6646,6 +6860,12 @@
               </a:rPr>
               <a:t>IMPORT</a:t>
             </a:r>
+            <a:endParaRPr sz="1200" b="1" i="0">
+              <a:solidFill>
+                <a:srgbClr val="4F6EF7"/>
+              </a:solidFill>
+              <a:latin typeface="Aptos"/>
+            </a:endParaRPr>
           </a:p>
         </p:txBody>
       </p:sp>
@@ -6700,16 +6920,16 @@
         </p:nvSpPr>
         <p:spPr>
           <a:xfrm>
-            <a:off x="658368" y="914400"/>
-            <a:ext cx="6217920" cy="530352"/>
-          </a:xfrm>
-          <a:prstGeom prst="rect">
-            <a:avLst/>
-          </a:prstGeom>
-          <a:noFill/>
-        </p:spPr>
-        <p:txBody>
-          <a:bodyPr wrap="square" lIns="0" rIns="0" tIns="0" bIns="0" anchor="t">
+            <a:off x="658495" y="914400"/>
+            <a:ext cx="8593455" cy="494665"/>
+          </a:xfrm>
+          <a:prstGeom prst="rect">
+            <a:avLst/>
+          </a:prstGeom>
+          <a:noFill/>
+        </p:spPr>
+        <p:txBody>
+          <a:bodyPr wrap="square" lIns="0" tIns="0" rIns="0" bIns="0" anchor="t">
             <a:spAutoFit/>
           </a:bodyPr>
           <a:lstStyle/>
@@ -6724,10 +6944,16 @@
                 <a:solidFill>
                   <a:srgbClr val="102A43"/>
                 </a:solidFill>
-                <a:latin typeface="Microsoft YaHei"/>
+                <a:latin typeface="微软雅黑"/>
               </a:rPr>
               <a:t>个人题目导入：题目管理 + Word 工作区</a:t>
             </a:r>
+            <a:endParaRPr sz="2800" b="1" i="0">
+              <a:solidFill>
+                <a:srgbClr val="102A43"/>
+              </a:solidFill>
+              <a:latin typeface="微软雅黑"/>
+            </a:endParaRPr>
           </a:p>
         </p:txBody>
       </p:sp>
@@ -6748,7 +6974,7 @@
           <a:noFill/>
         </p:spPr>
         <p:txBody>
-          <a:bodyPr wrap="square" lIns="0" rIns="0" tIns="0" bIns="0" anchor="t">
+          <a:bodyPr wrap="square" lIns="0" tIns="0" rIns="0" bIns="0" anchor="t">
             <a:spAutoFit/>
           </a:bodyPr>
           <a:lstStyle/>
@@ -6763,10 +6989,16 @@
                 <a:solidFill>
                   <a:srgbClr val="62748A"/>
                 </a:solidFill>
-                <a:latin typeface="Microsoft YaHei"/>
+                <a:latin typeface="微软雅黑"/>
               </a:rPr>
               <a:t>个人题库不只是存储入口，还提供完整的题目导入与维护流程。</a:t>
             </a:r>
+            <a:endParaRPr sz="1350" b="0" i="0">
+              <a:solidFill>
+                <a:srgbClr val="62748A"/>
+              </a:solidFill>
+              <a:latin typeface="微软雅黑"/>
+            </a:endParaRPr>
           </a:p>
         </p:txBody>
       </p:sp>
@@ -6778,7 +7010,7 @@
         </p:nvSpPr>
         <p:spPr>
           <a:xfrm>
-            <a:off x="658368" y="1572768"/>
+            <a:off x="658368" y="2003298"/>
             <a:ext cx="5468112" cy="182880"/>
           </a:xfrm>
           <a:prstGeom prst="rect">
@@ -6787,7 +7019,7 @@
           <a:noFill/>
         </p:spPr>
         <p:txBody>
-          <a:bodyPr wrap="square" lIns="0" rIns="0" tIns="0" bIns="0" anchor="t">
+          <a:bodyPr wrap="square" lIns="0" tIns="0" rIns="0" bIns="0" anchor="t">
             <a:spAutoFit/>
           </a:bodyPr>
           <a:lstStyle/>
@@ -6802,10 +7034,16 @@
                 <a:solidFill>
                   <a:srgbClr val="17324D"/>
                 </a:solidFill>
-                <a:latin typeface="Microsoft YaHei"/>
+                <a:latin typeface="微软雅黑"/>
               </a:rPr>
               <a:t>个人题目管理</a:t>
             </a:r>
+            <a:endParaRPr sz="1150" b="1" i="0">
+              <a:solidFill>
+                <a:srgbClr val="17324D"/>
+              </a:solidFill>
+              <a:latin typeface="微软雅黑"/>
+            </a:endParaRPr>
           </a:p>
         </p:txBody>
       </p:sp>
@@ -6818,15 +7056,16 @@
           <p:nvPr/>
         </p:nvPicPr>
         <p:blipFill>
-          <a:blip r:embed="rId3"/>
+          <a:blip r:embed="rId2"/>
+          <a:srcRect t="9975" r="-1126" b="10975"/>
           <a:stretch>
             <a:fillRect/>
           </a:stretch>
         </p:blipFill>
         <p:spPr>
           <a:xfrm>
-            <a:off x="658368" y="1828800"/>
-            <a:ext cx="5468112" cy="4315968"/>
+            <a:off x="658495" y="2259330"/>
+            <a:ext cx="5529580" cy="3411855"/>
           </a:xfrm>
           <a:prstGeom prst="rect">
             <a:avLst/>
@@ -6841,7 +7080,7 @@
         </p:nvSpPr>
         <p:spPr>
           <a:xfrm>
-            <a:off x="6345936" y="1572768"/>
+            <a:off x="6416421" y="2008378"/>
             <a:ext cx="5212080" cy="182880"/>
           </a:xfrm>
           <a:prstGeom prst="rect">
@@ -6850,7 +7089,7 @@
           <a:noFill/>
         </p:spPr>
         <p:txBody>
-          <a:bodyPr wrap="square" lIns="0" rIns="0" tIns="0" bIns="0" anchor="t">
+          <a:bodyPr wrap="square" lIns="0" tIns="0" rIns="0" bIns="0" anchor="t">
             <a:spAutoFit/>
           </a:bodyPr>
           <a:lstStyle/>
@@ -6865,10 +7104,16 @@
                 <a:solidFill>
                   <a:srgbClr val="17324D"/>
                 </a:solidFill>
-                <a:latin typeface="Microsoft YaHei"/>
+                <a:latin typeface="微软雅黑"/>
               </a:rPr>
               <a:t>Word 导入工作区</a:t>
             </a:r>
+            <a:endParaRPr sz="1150" b="1" i="0">
+              <a:solidFill>
+                <a:srgbClr val="17324D"/>
+              </a:solidFill>
+              <a:latin typeface="微软雅黑"/>
+            </a:endParaRPr>
           </a:p>
         </p:txBody>
       </p:sp>
@@ -6881,15 +7126,16 @@
           <p:nvPr/>
         </p:nvPicPr>
         <p:blipFill>
-          <a:blip r:embed="rId4"/>
+          <a:blip r:embed="rId3"/>
+          <a:srcRect t="12697" r="-1352" b="12344"/>
           <a:stretch>
             <a:fillRect/>
           </a:stretch>
         </p:blipFill>
         <p:spPr>
           <a:xfrm>
-            <a:off x="6345936" y="1828800"/>
-            <a:ext cx="5212080" cy="4315968"/>
+            <a:off x="6346190" y="2259330"/>
+            <a:ext cx="5282565" cy="3235325"/>
           </a:xfrm>
           <a:prstGeom prst="rect">
             <a:avLst/>
@@ -6913,7 +7159,7 @@
           <a:noFill/>
         </p:spPr>
         <p:txBody>
-          <a:bodyPr wrap="square" lIns="0" rIns="0" tIns="0" bIns="0" anchor="t">
+          <a:bodyPr wrap="square" lIns="0" tIns="0" rIns="0" bIns="0" anchor="t">
             <a:spAutoFit/>
           </a:bodyPr>
           <a:lstStyle/>
@@ -6932,6 +7178,12 @@
               </a:rPr>
               <a:t>Sak-AI答题助手｜答辩演示</a:t>
             </a:r>
+            <a:endParaRPr sz="950" b="0" i="0">
+              <a:solidFill>
+                <a:srgbClr val="94A3B8"/>
+              </a:solidFill>
+              <a:latin typeface="Aptos"/>
+            </a:endParaRPr>
           </a:p>
         </p:txBody>
       </p:sp>
@@ -6952,7 +7204,7 @@
           <a:noFill/>
         </p:spPr>
         <p:txBody>
-          <a:bodyPr wrap="square" lIns="0" rIns="0" tIns="0" bIns="0" anchor="t">
+          <a:bodyPr wrap="square" lIns="0" tIns="0" rIns="0" bIns="0" anchor="t">
             <a:spAutoFit/>
           </a:bodyPr>
           <a:lstStyle/>
@@ -6971,6 +7223,12 @@
               </a:rPr>
               <a:t>13</a:t>
             </a:r>
+            <a:endParaRPr sz="1100" b="1" i="0">
+              <a:solidFill>
+                <a:srgbClr val="17324D"/>
+              </a:solidFill>
+              <a:latin typeface="Aptos"/>
+            </a:endParaRPr>
           </a:p>
         </p:txBody>
       </p:sp>
@@ -6983,7 +7241,7 @@
 </file>
 
 <file path=ppt/slides/slide14.xml><?xml version="1.0" encoding="utf-8"?>
-<p:sld xmlns:a="http://schemas.openxmlformats.org/drawingml/2006/main" xmlns:p="http://schemas.openxmlformats.org/presentationml/2006/main" xmlns:r="http://schemas.openxmlformats.org/officeDocument/2006/relationships">
+<p:sld xmlns:a="http://schemas.openxmlformats.org/drawingml/2006/main" xmlns:r="http://schemas.openxmlformats.org/officeDocument/2006/relationships" xmlns:p="http://schemas.openxmlformats.org/presentationml/2006/main">
   <p:cSld>
     <p:spTree>
       <p:nvGrpSpPr>
@@ -7001,7 +7259,7 @@
           <p:nvPr/>
         </p:nvPicPr>
         <p:blipFill>
-          <a:blip r:embed="rId2"/>
+          <a:blip r:embed="rId1"/>
           <a:stretch>
             <a:fillRect/>
           </a:stretch>
@@ -7033,7 +7291,7 @@
           <a:noFill/>
         </p:spPr>
         <p:txBody>
-          <a:bodyPr wrap="square" lIns="0" rIns="0" tIns="0" bIns="0" anchor="t">
+          <a:bodyPr wrap="square" lIns="0" tIns="0" rIns="0" bIns="0" anchor="t">
             <a:spAutoFit/>
           </a:bodyPr>
           <a:lstStyle/>
@@ -7052,6 +7310,12 @@
               </a:rPr>
               <a:t>ADMIN A</a:t>
             </a:r>
+            <a:endParaRPr sz="1200" b="1" i="0">
+              <a:solidFill>
+                <a:srgbClr val="4F6EF7"/>
+              </a:solidFill>
+              <a:latin typeface="Aptos"/>
+            </a:endParaRPr>
           </a:p>
         </p:txBody>
       </p:sp>
@@ -7115,7 +7379,7 @@
           <a:noFill/>
         </p:spPr>
         <p:txBody>
-          <a:bodyPr wrap="square" lIns="0" rIns="0" tIns="0" bIns="0" anchor="t">
+          <a:bodyPr wrap="square" lIns="0" tIns="0" rIns="0" bIns="0" anchor="t">
             <a:spAutoFit/>
           </a:bodyPr>
           <a:lstStyle/>
@@ -7130,10 +7394,16 @@
                 <a:solidFill>
                   <a:srgbClr val="102A43"/>
                 </a:solidFill>
-                <a:latin typeface="Microsoft YaHei"/>
+                <a:latin typeface="微软雅黑"/>
               </a:rPr>
               <a:t>后台管理：仪表盘与题目管理</a:t>
             </a:r>
+            <a:endParaRPr sz="2800" b="1" i="0">
+              <a:solidFill>
+                <a:srgbClr val="102A43"/>
+              </a:solidFill>
+              <a:latin typeface="微软雅黑"/>
+            </a:endParaRPr>
           </a:p>
         </p:txBody>
       </p:sp>
@@ -7154,7 +7424,7 @@
           <a:noFill/>
         </p:spPr>
         <p:txBody>
-          <a:bodyPr wrap="square" lIns="0" rIns="0" tIns="0" bIns="0" anchor="t">
+          <a:bodyPr wrap="square" lIns="0" tIns="0" rIns="0" bIns="0" anchor="t">
             <a:spAutoFit/>
           </a:bodyPr>
           <a:lstStyle/>
@@ -7169,10 +7439,16 @@
                 <a:solidFill>
                   <a:srgbClr val="62748A"/>
                 </a:solidFill>
-                <a:latin typeface="Microsoft YaHei"/>
+                <a:latin typeface="微软雅黑"/>
               </a:rPr>
               <a:t>后台页面同样改为大图展示，避免关键信息读不清。</a:t>
             </a:r>
+            <a:endParaRPr sz="1350" b="0" i="0">
+              <a:solidFill>
+                <a:srgbClr val="62748A"/>
+              </a:solidFill>
+              <a:latin typeface="微软雅黑"/>
+            </a:endParaRPr>
           </a:p>
         </p:txBody>
       </p:sp>
@@ -7193,7 +7469,7 @@
           <a:noFill/>
         </p:spPr>
         <p:txBody>
-          <a:bodyPr wrap="square" lIns="0" rIns="0" tIns="0" bIns="0" anchor="t">
+          <a:bodyPr wrap="square" lIns="0" tIns="0" rIns="0" bIns="0" anchor="t">
             <a:spAutoFit/>
           </a:bodyPr>
           <a:lstStyle/>
@@ -7208,16 +7484,91 @@
                 <a:solidFill>
                   <a:srgbClr val="17324D"/>
                 </a:solidFill>
-                <a:latin typeface="Microsoft YaHei"/>
+                <a:latin typeface="微软雅黑"/>
               </a:rPr>
               <a:t>后台仪表盘</a:t>
             </a:r>
+            <a:endParaRPr sz="1150" b="1" i="0">
+              <a:solidFill>
+                <a:srgbClr val="17324D"/>
+              </a:solidFill>
+              <a:latin typeface="微软雅黑"/>
+            </a:endParaRPr>
           </a:p>
         </p:txBody>
       </p:sp>
       <p:pic>
         <p:nvPicPr>
           <p:cNvPr id="8" name="Picture 7" descr="后台仪表盘-892x708.png"/>
+          <p:cNvPicPr>
+            <a:picLocks noChangeAspect="1"/>
+          </p:cNvPicPr>
+          <p:nvPr/>
+        </p:nvPicPr>
+        <p:blipFill>
+          <a:blip r:embed="rId2"/>
+          <a:stretch>
+            <a:fillRect/>
+          </a:stretch>
+        </p:blipFill>
+        <p:spPr>
+          <a:xfrm>
+            <a:off x="658368" y="1828800"/>
+            <a:ext cx="5440680" cy="4315968"/>
+          </a:xfrm>
+          <a:prstGeom prst="rect">
+            <a:avLst/>
+          </a:prstGeom>
+        </p:spPr>
+      </p:pic>
+      <p:sp>
+        <p:nvSpPr>
+          <p:cNvPr id="9" name="TextBox 8"/>
+          <p:cNvSpPr txBox="1"/>
+          <p:nvPr/>
+        </p:nvSpPr>
+        <p:spPr>
+          <a:xfrm>
+            <a:off x="6355080" y="1572768"/>
+            <a:ext cx="5175504" cy="182880"/>
+          </a:xfrm>
+          <a:prstGeom prst="rect">
+            <a:avLst/>
+          </a:prstGeom>
+          <a:noFill/>
+        </p:spPr>
+        <p:txBody>
+          <a:bodyPr wrap="square" lIns="0" tIns="0" rIns="0" bIns="0" anchor="t">
+            <a:spAutoFit/>
+          </a:bodyPr>
+          <a:lstStyle/>
+          <a:p>
+            <a:pPr algn="l">
+              <a:lnSpc>
+                <a:spcPct val="115000"/>
+              </a:lnSpc>
+            </a:pPr>
+            <a:r>
+              <a:rPr sz="1150" b="1" i="0">
+                <a:solidFill>
+                  <a:srgbClr val="17324D"/>
+                </a:solidFill>
+                <a:latin typeface="微软雅黑"/>
+              </a:rPr>
+              <a:t>后台题目管理</a:t>
+            </a:r>
+            <a:endParaRPr sz="1150" b="1" i="0">
+              <a:solidFill>
+                <a:srgbClr val="17324D"/>
+              </a:solidFill>
+              <a:latin typeface="微软雅黑"/>
+            </a:endParaRPr>
+          </a:p>
+        </p:txBody>
+      </p:sp>
+      <p:pic>
+        <p:nvPicPr>
+          <p:cNvPr id="10" name="Picture 9" descr="后台题目管理-849x708.png"/>
           <p:cNvPicPr>
             <a:picLocks noChangeAspect="1"/>
           </p:cNvPicPr>
@@ -7231,69 +7582,6 @@
         </p:blipFill>
         <p:spPr>
           <a:xfrm>
-            <a:off x="658368" y="1828800"/>
-            <a:ext cx="5440680" cy="4315968"/>
-          </a:xfrm>
-          <a:prstGeom prst="rect">
-            <a:avLst/>
-          </a:prstGeom>
-        </p:spPr>
-      </p:pic>
-      <p:sp>
-        <p:nvSpPr>
-          <p:cNvPr id="9" name="TextBox 8"/>
-          <p:cNvSpPr txBox="1"/>
-          <p:nvPr/>
-        </p:nvSpPr>
-        <p:spPr>
-          <a:xfrm>
-            <a:off x="6355080" y="1572768"/>
-            <a:ext cx="5175504" cy="182880"/>
-          </a:xfrm>
-          <a:prstGeom prst="rect">
-            <a:avLst/>
-          </a:prstGeom>
-          <a:noFill/>
-        </p:spPr>
-        <p:txBody>
-          <a:bodyPr wrap="square" lIns="0" rIns="0" tIns="0" bIns="0" anchor="t">
-            <a:spAutoFit/>
-          </a:bodyPr>
-          <a:lstStyle/>
-          <a:p>
-            <a:pPr algn="l">
-              <a:lnSpc>
-                <a:spcPct val="115000"/>
-              </a:lnSpc>
-            </a:pPr>
-            <a:r>
-              <a:rPr sz="1150" b="1" i="0">
-                <a:solidFill>
-                  <a:srgbClr val="17324D"/>
-                </a:solidFill>
-                <a:latin typeface="Microsoft YaHei"/>
-              </a:rPr>
-              <a:t>后台题目管理</a:t>
-            </a:r>
-          </a:p>
-        </p:txBody>
-      </p:sp>
-      <p:pic>
-        <p:nvPicPr>
-          <p:cNvPr id="10" name="Picture 9" descr="后台题目管理-849x708.png"/>
-          <p:cNvPicPr>
-            <a:picLocks noChangeAspect="1"/>
-          </p:cNvPicPr>
-          <p:nvPr/>
-        </p:nvPicPr>
-        <p:blipFill>
-          <a:blip r:embed="rId4"/>
-          <a:stretch>
-            <a:fillRect/>
-          </a:stretch>
-        </p:blipFill>
-        <p:spPr>
-          <a:xfrm>
             <a:off x="6355080" y="1828800"/>
             <a:ext cx="5175504" cy="4315968"/>
           </a:xfrm>
@@ -7319,7 +7607,7 @@
           <a:noFill/>
         </p:spPr>
         <p:txBody>
-          <a:bodyPr wrap="square" lIns="0" rIns="0" tIns="0" bIns="0" anchor="t">
+          <a:bodyPr wrap="square" lIns="0" tIns="0" rIns="0" bIns="0" anchor="t">
             <a:spAutoFit/>
           </a:bodyPr>
           <a:lstStyle/>
@@ -7338,6 +7626,12 @@
               </a:rPr>
               <a:t>Sak-AI答题助手｜答辩演示</a:t>
             </a:r>
+            <a:endParaRPr sz="950" b="0" i="0">
+              <a:solidFill>
+                <a:srgbClr val="94A3B8"/>
+              </a:solidFill>
+              <a:latin typeface="Aptos"/>
+            </a:endParaRPr>
           </a:p>
         </p:txBody>
       </p:sp>
@@ -7358,7 +7652,7 @@
           <a:noFill/>
         </p:spPr>
         <p:txBody>
-          <a:bodyPr wrap="square" lIns="0" rIns="0" tIns="0" bIns="0" anchor="t">
+          <a:bodyPr wrap="square" lIns="0" tIns="0" rIns="0" bIns="0" anchor="t">
             <a:spAutoFit/>
           </a:bodyPr>
           <a:lstStyle/>
@@ -7377,6 +7671,12 @@
               </a:rPr>
               <a:t>14</a:t>
             </a:r>
+            <a:endParaRPr sz="1100" b="1" i="0">
+              <a:solidFill>
+                <a:srgbClr val="17324D"/>
+              </a:solidFill>
+              <a:latin typeface="Aptos"/>
+            </a:endParaRPr>
           </a:p>
         </p:txBody>
       </p:sp>
@@ -7389,7 +7689,7 @@
 </file>
 
 <file path=ppt/slides/slide15.xml><?xml version="1.0" encoding="utf-8"?>
-<p:sld xmlns:a="http://schemas.openxmlformats.org/drawingml/2006/main" xmlns:p="http://schemas.openxmlformats.org/presentationml/2006/main" xmlns:r="http://schemas.openxmlformats.org/officeDocument/2006/relationships">
+<p:sld xmlns:a="http://schemas.openxmlformats.org/drawingml/2006/main" xmlns:r="http://schemas.openxmlformats.org/officeDocument/2006/relationships" xmlns:p="http://schemas.openxmlformats.org/presentationml/2006/main">
   <p:cSld>
     <p:spTree>
       <p:nvGrpSpPr>
@@ -7407,7 +7707,7 @@
           <p:nvPr/>
         </p:nvPicPr>
         <p:blipFill>
-          <a:blip r:embed="rId2"/>
+          <a:blip r:embed="rId1"/>
           <a:stretch>
             <a:fillRect/>
           </a:stretch>
@@ -7439,7 +7739,7 @@
           <a:noFill/>
         </p:spPr>
         <p:txBody>
-          <a:bodyPr wrap="square" lIns="0" rIns="0" tIns="0" bIns="0" anchor="t">
+          <a:bodyPr wrap="square" lIns="0" tIns="0" rIns="0" bIns="0" anchor="t">
             <a:spAutoFit/>
           </a:bodyPr>
           <a:lstStyle/>
@@ -7458,6 +7758,12 @@
               </a:rPr>
               <a:t>ADMIN B</a:t>
             </a:r>
+            <a:endParaRPr sz="1200" b="1" i="0">
+              <a:solidFill>
+                <a:srgbClr val="4F6EF7"/>
+              </a:solidFill>
+              <a:latin typeface="Aptos"/>
+            </a:endParaRPr>
           </a:p>
         </p:txBody>
       </p:sp>
@@ -7521,7 +7827,7 @@
           <a:noFill/>
         </p:spPr>
         <p:txBody>
-          <a:bodyPr wrap="square" lIns="0" rIns="0" tIns="0" bIns="0" anchor="t">
+          <a:bodyPr wrap="square" lIns="0" tIns="0" rIns="0" bIns="0" anchor="t">
             <a:spAutoFit/>
           </a:bodyPr>
           <a:lstStyle/>
@@ -7536,10 +7842,16 @@
                 <a:solidFill>
                   <a:srgbClr val="102A43"/>
                 </a:solidFill>
-                <a:latin typeface="Microsoft YaHei"/>
+                <a:latin typeface="微软雅黑"/>
               </a:rPr>
               <a:t>后台管理：论坛治理与 AI 配置</a:t>
             </a:r>
+            <a:endParaRPr sz="2800" b="1" i="0">
+              <a:solidFill>
+                <a:srgbClr val="102A43"/>
+              </a:solidFill>
+              <a:latin typeface="微软雅黑"/>
+            </a:endParaRPr>
           </a:p>
         </p:txBody>
       </p:sp>
@@ -7560,7 +7872,7 @@
           <a:noFill/>
         </p:spPr>
         <p:txBody>
-          <a:bodyPr wrap="square" lIns="0" rIns="0" tIns="0" bIns="0" anchor="t">
+          <a:bodyPr wrap="square" lIns="0" tIns="0" rIns="0" bIns="0" anchor="t">
             <a:spAutoFit/>
           </a:bodyPr>
           <a:lstStyle/>
@@ -7575,10 +7887,16 @@
                 <a:solidFill>
                   <a:srgbClr val="62748A"/>
                 </a:solidFill>
-                <a:latin typeface="Microsoft YaHei"/>
+                <a:latin typeface="微软雅黑"/>
               </a:rPr>
               <a:t>进一步展示内容治理与系统配置层能力。</a:t>
             </a:r>
+            <a:endParaRPr sz="1350" b="0" i="0">
+              <a:solidFill>
+                <a:srgbClr val="62748A"/>
+              </a:solidFill>
+              <a:latin typeface="微软雅黑"/>
+            </a:endParaRPr>
           </a:p>
         </p:txBody>
       </p:sp>
@@ -7599,7 +7917,7 @@
           <a:noFill/>
         </p:spPr>
         <p:txBody>
-          <a:bodyPr wrap="square" lIns="0" rIns="0" tIns="0" bIns="0" anchor="t">
+          <a:bodyPr wrap="square" lIns="0" tIns="0" rIns="0" bIns="0" anchor="t">
             <a:spAutoFit/>
           </a:bodyPr>
           <a:lstStyle/>
@@ -7614,16 +7932,91 @@
                 <a:solidFill>
                   <a:srgbClr val="D9E5F5"/>
                 </a:solidFill>
-                <a:latin typeface="Microsoft YaHei"/>
+                <a:latin typeface="微软雅黑"/>
               </a:rPr>
               <a:t>后台论坛管理</a:t>
             </a:r>
+            <a:endParaRPr sz="1150" b="1" i="0">
+              <a:solidFill>
+                <a:srgbClr val="D9E5F5"/>
+              </a:solidFill>
+              <a:latin typeface="微软雅黑"/>
+            </a:endParaRPr>
           </a:p>
         </p:txBody>
       </p:sp>
       <p:pic>
         <p:nvPicPr>
           <p:cNvPr id="8" name="Picture 7" descr="后台论坛管理-892x708.png"/>
+          <p:cNvPicPr>
+            <a:picLocks noChangeAspect="1"/>
+          </p:cNvPicPr>
+          <p:nvPr/>
+        </p:nvPicPr>
+        <p:blipFill>
+          <a:blip r:embed="rId2"/>
+          <a:stretch>
+            <a:fillRect/>
+          </a:stretch>
+        </p:blipFill>
+        <p:spPr>
+          <a:xfrm>
+            <a:off x="658368" y="1828800"/>
+            <a:ext cx="5440680" cy="4315968"/>
+          </a:xfrm>
+          <a:prstGeom prst="rect">
+            <a:avLst/>
+          </a:prstGeom>
+        </p:spPr>
+      </p:pic>
+      <p:sp>
+        <p:nvSpPr>
+          <p:cNvPr id="9" name="TextBox 8"/>
+          <p:cNvSpPr txBox="1"/>
+          <p:nvPr/>
+        </p:nvSpPr>
+        <p:spPr>
+          <a:xfrm>
+            <a:off x="6355080" y="1572768"/>
+            <a:ext cx="5175504" cy="182880"/>
+          </a:xfrm>
+          <a:prstGeom prst="rect">
+            <a:avLst/>
+          </a:prstGeom>
+          <a:noFill/>
+        </p:spPr>
+        <p:txBody>
+          <a:bodyPr wrap="square" lIns="0" tIns="0" rIns="0" bIns="0" anchor="t">
+            <a:spAutoFit/>
+          </a:bodyPr>
+          <a:lstStyle/>
+          <a:p>
+            <a:pPr algn="l">
+              <a:lnSpc>
+                <a:spcPct val="115000"/>
+              </a:lnSpc>
+            </a:pPr>
+            <a:r>
+              <a:rPr sz="1150" b="1" i="0">
+                <a:solidFill>
+                  <a:srgbClr val="17324D"/>
+                </a:solidFill>
+                <a:latin typeface="微软雅黑"/>
+              </a:rPr>
+              <a:t>后台 AI 配置</a:t>
+            </a:r>
+            <a:endParaRPr sz="1150" b="1" i="0">
+              <a:solidFill>
+                <a:srgbClr val="17324D"/>
+              </a:solidFill>
+              <a:latin typeface="微软雅黑"/>
+            </a:endParaRPr>
+          </a:p>
+        </p:txBody>
+      </p:sp>
+      <p:pic>
+        <p:nvPicPr>
+          <p:cNvPr id="10" name="Picture 9" descr="后台_AI_配置-849x708.png"/>
           <p:cNvPicPr>
             <a:picLocks noChangeAspect="1"/>
           </p:cNvPicPr>
@@ -7637,69 +8030,6 @@
         </p:blipFill>
         <p:spPr>
           <a:xfrm>
-            <a:off x="658368" y="1828800"/>
-            <a:ext cx="5440680" cy="4315968"/>
-          </a:xfrm>
-          <a:prstGeom prst="rect">
-            <a:avLst/>
-          </a:prstGeom>
-        </p:spPr>
-      </p:pic>
-      <p:sp>
-        <p:nvSpPr>
-          <p:cNvPr id="9" name="TextBox 8"/>
-          <p:cNvSpPr txBox="1"/>
-          <p:nvPr/>
-        </p:nvSpPr>
-        <p:spPr>
-          <a:xfrm>
-            <a:off x="6355080" y="1572768"/>
-            <a:ext cx="5175504" cy="182880"/>
-          </a:xfrm>
-          <a:prstGeom prst="rect">
-            <a:avLst/>
-          </a:prstGeom>
-          <a:noFill/>
-        </p:spPr>
-        <p:txBody>
-          <a:bodyPr wrap="square" lIns="0" rIns="0" tIns="0" bIns="0" anchor="t">
-            <a:spAutoFit/>
-          </a:bodyPr>
-          <a:lstStyle/>
-          <a:p>
-            <a:pPr algn="l">
-              <a:lnSpc>
-                <a:spcPct val="115000"/>
-              </a:lnSpc>
-            </a:pPr>
-            <a:r>
-              <a:rPr sz="1150" b="1" i="0">
-                <a:solidFill>
-                  <a:srgbClr val="17324D"/>
-                </a:solidFill>
-                <a:latin typeface="Microsoft YaHei"/>
-              </a:rPr>
-              <a:t>后台 AI 配置</a:t>
-            </a:r>
-          </a:p>
-        </p:txBody>
-      </p:sp>
-      <p:pic>
-        <p:nvPicPr>
-          <p:cNvPr id="10" name="Picture 9" descr="后台_AI_配置-849x708.png"/>
-          <p:cNvPicPr>
-            <a:picLocks noChangeAspect="1"/>
-          </p:cNvPicPr>
-          <p:nvPr/>
-        </p:nvPicPr>
-        <p:blipFill>
-          <a:blip r:embed="rId4"/>
-          <a:stretch>
-            <a:fillRect/>
-          </a:stretch>
-        </p:blipFill>
-        <p:spPr>
-          <a:xfrm>
             <a:off x="6355080" y="1828800"/>
             <a:ext cx="5175504" cy="4315968"/>
           </a:xfrm>
@@ -7725,7 +8055,7 @@
           <a:noFill/>
         </p:spPr>
         <p:txBody>
-          <a:bodyPr wrap="square" lIns="0" rIns="0" tIns="0" bIns="0" anchor="t">
+          <a:bodyPr wrap="square" lIns="0" tIns="0" rIns="0" bIns="0" anchor="t">
             <a:spAutoFit/>
           </a:bodyPr>
           <a:lstStyle/>
@@ -7744,6 +8074,12 @@
               </a:rPr>
               <a:t>Sak-AI答题助手｜答辩演示</a:t>
             </a:r>
+            <a:endParaRPr sz="950" b="0" i="0">
+              <a:solidFill>
+                <a:srgbClr val="94A3B8"/>
+              </a:solidFill>
+              <a:latin typeface="Aptos"/>
+            </a:endParaRPr>
           </a:p>
         </p:txBody>
       </p:sp>
@@ -7764,7 +8100,7 @@
           <a:noFill/>
         </p:spPr>
         <p:txBody>
-          <a:bodyPr wrap="square" lIns="0" rIns="0" tIns="0" bIns="0" anchor="t">
+          <a:bodyPr wrap="square" lIns="0" tIns="0" rIns="0" bIns="0" anchor="t">
             <a:spAutoFit/>
           </a:bodyPr>
           <a:lstStyle/>
@@ -7783,6 +8119,12 @@
               </a:rPr>
               <a:t>15</a:t>
             </a:r>
+            <a:endParaRPr sz="1100" b="1" i="0">
+              <a:solidFill>
+                <a:srgbClr val="17324D"/>
+              </a:solidFill>
+              <a:latin typeface="Aptos"/>
+            </a:endParaRPr>
           </a:p>
         </p:txBody>
       </p:sp>
@@ -7795,7 +8137,7 @@
 </file>
 
 <file path=ppt/slides/slide16.xml><?xml version="1.0" encoding="utf-8"?>
-<p:sld xmlns:a="http://schemas.openxmlformats.org/drawingml/2006/main" xmlns:p="http://schemas.openxmlformats.org/presentationml/2006/main" xmlns:r="http://schemas.openxmlformats.org/officeDocument/2006/relationships">
+<p:sld xmlns:a="http://schemas.openxmlformats.org/drawingml/2006/main" xmlns:r="http://schemas.openxmlformats.org/officeDocument/2006/relationships" xmlns:p="http://schemas.openxmlformats.org/presentationml/2006/main">
   <p:cSld>
     <p:spTree>
       <p:nvGrpSpPr>
@@ -7813,7 +8155,7 @@
           <p:nvPr/>
         </p:nvPicPr>
         <p:blipFill>
-          <a:blip r:embed="rId2"/>
+          <a:blip r:embed="rId1"/>
           <a:stretch>
             <a:fillRect/>
           </a:stretch>
@@ -7845,7 +8187,7 @@
           <a:noFill/>
         </p:spPr>
         <p:txBody>
-          <a:bodyPr wrap="square" lIns="0" rIns="0" tIns="0" bIns="0" anchor="t">
+          <a:bodyPr wrap="square" lIns="0" tIns="0" rIns="0" bIns="0" anchor="t">
             <a:spAutoFit/>
           </a:bodyPr>
           <a:lstStyle/>
@@ -7864,6 +8206,12 @@
               </a:rPr>
               <a:t>CROSS-END</a:t>
             </a:r>
+            <a:endParaRPr sz="1200" b="1" i="0">
+              <a:solidFill>
+                <a:srgbClr val="C7D2FE"/>
+              </a:solidFill>
+              <a:latin typeface="Aptos"/>
+            </a:endParaRPr>
           </a:p>
         </p:txBody>
       </p:sp>
@@ -7927,7 +8275,7 @@
           <a:noFill/>
         </p:spPr>
         <p:txBody>
-          <a:bodyPr wrap="square" lIns="0" rIns="0" tIns="0" bIns="0" anchor="t">
+          <a:bodyPr wrap="square" lIns="0" tIns="0" rIns="0" bIns="0" anchor="t">
             <a:spAutoFit/>
           </a:bodyPr>
           <a:lstStyle/>
@@ -7942,10 +8290,16 @@
                 <a:solidFill>
                   <a:srgbClr val="FFFFFF"/>
                 </a:solidFill>
-                <a:latin typeface="Microsoft YaHei"/>
+                <a:latin typeface="微软雅黑"/>
               </a:rPr>
               <a:t>双端协同：Web 主体 + 小程序延展</a:t>
             </a:r>
+            <a:endParaRPr sz="2800" b="1" i="0">
+              <a:solidFill>
+                <a:srgbClr val="FFFFFF"/>
+              </a:solidFill>
+              <a:latin typeface="微软雅黑"/>
+            </a:endParaRPr>
           </a:p>
         </p:txBody>
       </p:sp>
@@ -7966,7 +8320,7 @@
           <a:noFill/>
         </p:spPr>
         <p:txBody>
-          <a:bodyPr wrap="square" lIns="0" rIns="0" tIns="0" bIns="0" anchor="t">
+          <a:bodyPr wrap="square" lIns="0" tIns="0" rIns="0" bIns="0" anchor="t">
             <a:spAutoFit/>
           </a:bodyPr>
           <a:lstStyle/>
@@ -7981,10 +8335,16 @@
                 <a:solidFill>
                   <a:srgbClr val="D9E5F5"/>
                 </a:solidFill>
-                <a:latin typeface="Microsoft YaHei"/>
+                <a:latin typeface="微软雅黑"/>
               </a:rPr>
               <a:t>展示主体是 Web；移动端延展同样复用同一套后端与数据语义。</a:t>
             </a:r>
+            <a:endParaRPr sz="1350" b="0" i="0">
+              <a:solidFill>
+                <a:srgbClr val="D9E5F5"/>
+              </a:solidFill>
+              <a:latin typeface="微软雅黑"/>
+            </a:endParaRPr>
           </a:p>
         </p:txBody>
       </p:sp>
@@ -7997,7 +8357,7 @@
           <p:nvPr/>
         </p:nvPicPr>
         <p:blipFill>
-          <a:blip r:embed="rId3"/>
+          <a:blip r:embed="rId2"/>
           <a:stretch>
             <a:fillRect/>
           </a:stretch>
@@ -8029,7 +8389,7 @@
           <a:noFill/>
         </p:spPr>
         <p:txBody>
-          <a:bodyPr wrap="square" lIns="0" rIns="0" tIns="0" bIns="0" anchor="t">
+          <a:bodyPr wrap="square" lIns="0" tIns="0" rIns="0" bIns="0" anchor="t">
             <a:spAutoFit/>
           </a:bodyPr>
           <a:lstStyle/>
@@ -8044,10 +8404,16 @@
                 <a:solidFill>
                   <a:srgbClr val="D9E5F5"/>
                 </a:solidFill>
-                <a:latin typeface="Microsoft YaHei"/>
+                <a:latin typeface="微软雅黑"/>
               </a:rPr>
               <a:t>Web 首页（响应式壳层）</a:t>
             </a:r>
+            <a:endParaRPr sz="1150" b="1" i="0">
+              <a:solidFill>
+                <a:srgbClr val="D9E5F5"/>
+              </a:solidFill>
+              <a:latin typeface="微软雅黑"/>
+            </a:endParaRPr>
           </a:p>
         </p:txBody>
       </p:sp>
@@ -8060,7 +8426,7 @@
           <p:nvPr/>
         </p:nvPicPr>
         <p:blipFill>
-          <a:blip r:embed="rId4"/>
+          <a:blip r:embed="rId3"/>
           <a:stretch>
             <a:fillRect/>
           </a:stretch>
@@ -8186,7 +8552,7 @@
           <a:noFill/>
         </p:spPr>
         <p:txBody>
-          <a:bodyPr wrap="square" lIns="0" rIns="0" tIns="0" bIns="0" anchor="t">
+          <a:bodyPr wrap="square" lIns="0" tIns="0" rIns="0" bIns="0" anchor="t">
             <a:spAutoFit/>
           </a:bodyPr>
           <a:lstStyle/>
@@ -8201,10 +8567,16 @@
                 <a:solidFill>
                   <a:srgbClr val="D9E5F5"/>
                 </a:solidFill>
-                <a:latin typeface="Microsoft YaHei"/>
+                <a:latin typeface="微软雅黑"/>
               </a:rPr>
               <a:t>共享关键语义</a:t>
             </a:r>
+            <a:endParaRPr sz="1250" b="1" i="0">
+              <a:solidFill>
+                <a:srgbClr val="D9E5F5"/>
+              </a:solidFill>
+              <a:latin typeface="微软雅黑"/>
+            </a:endParaRPr>
           </a:p>
         </p:txBody>
       </p:sp>
@@ -8225,7 +8597,7 @@
           <a:noFill/>
         </p:spPr>
         <p:txBody>
-          <a:bodyPr wrap="square" lIns="0" rIns="0" tIns="0" bIns="0" anchor="t">
+          <a:bodyPr wrap="square" lIns="0" tIns="0" rIns="0" bIns="0" anchor="t">
             <a:spAutoFit/>
           </a:bodyPr>
           <a:lstStyle/>
@@ -8246,10 +8618,16 @@
                 <a:solidFill>
                   <a:srgbClr val="FFFFFF"/>
                 </a:solidFill>
-                <a:latin typeface="Microsoft YaHei"/>
+                <a:latin typeface="微软雅黑"/>
               </a:rPr>
               <a:t>收藏 / 错题 / 用户答案 / 用户进度 / 模拟考试</a:t>
             </a:r>
+            <a:endParaRPr sz="1600" b="1" i="0">
+              <a:solidFill>
+                <a:srgbClr val="FFFFFF"/>
+              </a:solidFill>
+              <a:latin typeface="微软雅黑"/>
+            </a:endParaRPr>
           </a:p>
           <a:p>
             <a:pPr algn="l">
@@ -8268,10 +8646,16 @@
                 <a:solidFill>
                   <a:srgbClr val="D9E5F5"/>
                 </a:solidFill>
-                <a:latin typeface="Microsoft YaHei"/>
+                <a:latin typeface="微软雅黑"/>
               </a:rPr>
               <a:t>• Web 端承担主要交互与展示，是参赛主体。</a:t>
             </a:r>
+            <a:endParaRPr sz="1280" b="0" i="0">
+              <a:solidFill>
+                <a:srgbClr val="D9E5F5"/>
+              </a:solidFill>
+              <a:latin typeface="微软雅黑"/>
+            </a:endParaRPr>
           </a:p>
           <a:p>
             <a:pPr algn="l">
@@ -8290,10 +8674,16 @@
                 <a:solidFill>
                   <a:srgbClr val="D9E5F5"/>
                 </a:solidFill>
-                <a:latin typeface="Microsoft YaHei"/>
+                <a:latin typeface="微软雅黑"/>
               </a:rPr>
               <a:t>• 小程序按高频移动学习场景延展，减少语义割裂。</a:t>
             </a:r>
+            <a:endParaRPr sz="1280" b="0" i="0">
+              <a:solidFill>
+                <a:srgbClr val="D9E5F5"/>
+              </a:solidFill>
+              <a:latin typeface="微软雅黑"/>
+            </a:endParaRPr>
           </a:p>
           <a:p>
             <a:pPr algn="l">
@@ -8312,10 +8702,16 @@
                 <a:solidFill>
                   <a:srgbClr val="D9E5F5"/>
                 </a:solidFill>
-                <a:latin typeface="Microsoft YaHei"/>
+                <a:latin typeface="微软雅黑"/>
               </a:rPr>
               <a:t>• 统一经过后端与接口封装，降低维护与演示成本。</a:t>
             </a:r>
+            <a:endParaRPr sz="1280" b="0" i="0">
+              <a:solidFill>
+                <a:srgbClr val="D9E5F5"/>
+              </a:solidFill>
+              <a:latin typeface="微软雅黑"/>
+            </a:endParaRPr>
           </a:p>
         </p:txBody>
       </p:sp>
@@ -8383,7 +8779,7 @@
           <a:noFill/>
         </p:spPr>
         <p:txBody>
-          <a:bodyPr wrap="square" lIns="0" rIns="0" tIns="0" bIns="0" anchor="t">
+          <a:bodyPr wrap="square" lIns="0" tIns="0" rIns="0" bIns="0" anchor="t">
             <a:spAutoFit/>
           </a:bodyPr>
           <a:lstStyle/>
@@ -8402,6 +8798,12 @@
               </a:rPr>
               <a:t>SSR</a:t>
             </a:r>
+            <a:endParaRPr sz="2400" b="1" i="0">
+              <a:solidFill>
+                <a:srgbClr val="FFFFFF"/>
+              </a:solidFill>
+              <a:latin typeface="Aptos"/>
+            </a:endParaRPr>
           </a:p>
         </p:txBody>
       </p:sp>
@@ -8422,7 +8824,7 @@
           <a:noFill/>
         </p:spPr>
         <p:txBody>
-          <a:bodyPr wrap="square" lIns="0" rIns="0" tIns="0" bIns="0" anchor="t">
+          <a:bodyPr wrap="square" lIns="0" tIns="0" rIns="0" bIns="0" anchor="t">
             <a:spAutoFit/>
           </a:bodyPr>
           <a:lstStyle/>
@@ -8437,10 +8839,16 @@
                 <a:solidFill>
                   <a:srgbClr val="D7DEEA"/>
                 </a:solidFill>
-                <a:latin typeface="Microsoft YaHei"/>
+                <a:latin typeface="微软雅黑"/>
               </a:rPr>
               <a:t>Web 形态</a:t>
             </a:r>
+            <a:endParaRPr sz="1250" b="1" i="0">
+              <a:solidFill>
+                <a:srgbClr val="D7DEEA"/>
+              </a:solidFill>
+              <a:latin typeface="微软雅黑"/>
+            </a:endParaRPr>
           </a:p>
         </p:txBody>
       </p:sp>
@@ -8461,7 +8869,7 @@
           <a:noFill/>
         </p:spPr>
         <p:txBody>
-          <a:bodyPr wrap="square" lIns="0" rIns="0" tIns="0" bIns="0" anchor="t">
+          <a:bodyPr wrap="square" lIns="0" tIns="0" rIns="0" bIns="0" anchor="t">
             <a:spAutoFit/>
           </a:bodyPr>
           <a:lstStyle/>
@@ -8476,10 +8884,16 @@
                 <a:solidFill>
                   <a:srgbClr val="9FB0C7"/>
                 </a:solidFill>
-                <a:latin typeface="Microsoft YaHei"/>
+                <a:latin typeface="微软雅黑"/>
               </a:rPr>
               <a:t>Flask + Jinja</a:t>
             </a:r>
+            <a:endParaRPr sz="1050" b="0" i="0">
+              <a:solidFill>
+                <a:srgbClr val="9FB0C7"/>
+              </a:solidFill>
+              <a:latin typeface="微软雅黑"/>
+            </a:endParaRPr>
           </a:p>
         </p:txBody>
       </p:sp>
@@ -8547,7 +8961,7 @@
           <a:noFill/>
         </p:spPr>
         <p:txBody>
-          <a:bodyPr wrap="square" lIns="0" rIns="0" tIns="0" bIns="0" anchor="t">
+          <a:bodyPr wrap="square" lIns="0" tIns="0" rIns="0" bIns="0" anchor="t">
             <a:spAutoFit/>
           </a:bodyPr>
           <a:lstStyle/>
@@ -8566,6 +8980,12 @@
               </a:rPr>
               <a:t>JWT</a:t>
             </a:r>
+            <a:endParaRPr sz="2400" b="1" i="0">
+              <a:solidFill>
+                <a:srgbClr val="FFFFFF"/>
+              </a:solidFill>
+              <a:latin typeface="Aptos"/>
+            </a:endParaRPr>
           </a:p>
         </p:txBody>
       </p:sp>
@@ -8586,7 +9006,7 @@
           <a:noFill/>
         </p:spPr>
         <p:txBody>
-          <a:bodyPr wrap="square" lIns="0" rIns="0" tIns="0" bIns="0" anchor="t">
+          <a:bodyPr wrap="square" lIns="0" tIns="0" rIns="0" bIns="0" anchor="t">
             <a:spAutoFit/>
           </a:bodyPr>
           <a:lstStyle/>
@@ -8601,10 +9021,16 @@
                 <a:solidFill>
                   <a:srgbClr val="D7DEEA"/>
                 </a:solidFill>
-                <a:latin typeface="Microsoft YaHei"/>
+                <a:latin typeface="微软雅黑"/>
               </a:rPr>
               <a:t>API / 小程序</a:t>
             </a:r>
+            <a:endParaRPr sz="1250" b="1" i="0">
+              <a:solidFill>
+                <a:srgbClr val="D7DEEA"/>
+              </a:solidFill>
+              <a:latin typeface="微软雅黑"/>
+            </a:endParaRPr>
           </a:p>
         </p:txBody>
       </p:sp>
@@ -8625,7 +9051,7 @@
           <a:noFill/>
         </p:spPr>
         <p:txBody>
-          <a:bodyPr wrap="square" lIns="0" rIns="0" tIns="0" bIns="0" anchor="t">
+          <a:bodyPr wrap="square" lIns="0" tIns="0" rIns="0" bIns="0" anchor="t">
             <a:spAutoFit/>
           </a:bodyPr>
           <a:lstStyle/>
@@ -8640,10 +9066,16 @@
                 <a:solidFill>
                   <a:srgbClr val="9FB0C7"/>
                 </a:solidFill>
-                <a:latin typeface="Microsoft YaHei"/>
+                <a:latin typeface="微软雅黑"/>
               </a:rPr>
               <a:t>Bearer Token</a:t>
             </a:r>
+            <a:endParaRPr sz="1050" b="0" i="0">
+              <a:solidFill>
+                <a:srgbClr val="9FB0C7"/>
+              </a:solidFill>
+              <a:latin typeface="微软雅黑"/>
+            </a:endParaRPr>
           </a:p>
         </p:txBody>
       </p:sp>
@@ -8664,7 +9096,7 @@
           <a:noFill/>
         </p:spPr>
         <p:txBody>
-          <a:bodyPr wrap="square" lIns="0" rIns="0" tIns="0" bIns="0" anchor="t">
+          <a:bodyPr wrap="square" lIns="0" tIns="0" rIns="0" bIns="0" anchor="t">
             <a:spAutoFit/>
           </a:bodyPr>
           <a:lstStyle/>
@@ -8683,6 +9115,12 @@
               </a:rPr>
               <a:t>Sak-AI答题助手｜答辩演示</a:t>
             </a:r>
+            <a:endParaRPr sz="950" b="0" i="0">
+              <a:solidFill>
+                <a:srgbClr val="D6DFEC"/>
+              </a:solidFill>
+              <a:latin typeface="Aptos"/>
+            </a:endParaRPr>
           </a:p>
         </p:txBody>
       </p:sp>
@@ -8703,7 +9141,7 @@
           <a:noFill/>
         </p:spPr>
         <p:txBody>
-          <a:bodyPr wrap="square" lIns="0" rIns="0" tIns="0" bIns="0" anchor="t">
+          <a:bodyPr wrap="square" lIns="0" tIns="0" rIns="0" bIns="0" anchor="t">
             <a:spAutoFit/>
           </a:bodyPr>
           <a:lstStyle/>
@@ -8722,6 +9160,12 @@
               </a:rPr>
               <a:t>16</a:t>
             </a:r>
+            <a:endParaRPr sz="1100" b="1" i="0">
+              <a:solidFill>
+                <a:srgbClr val="F8FAFC"/>
+              </a:solidFill>
+              <a:latin typeface="Aptos"/>
+            </a:endParaRPr>
           </a:p>
         </p:txBody>
       </p:sp>
@@ -8734,7 +9178,7 @@
 </file>
 
 <file path=ppt/slides/slide17.xml><?xml version="1.0" encoding="utf-8"?>
-<p:sld xmlns:a="http://schemas.openxmlformats.org/drawingml/2006/main" xmlns:p="http://schemas.openxmlformats.org/presentationml/2006/main" xmlns:r="http://schemas.openxmlformats.org/officeDocument/2006/relationships">
+<p:sld xmlns:a="http://schemas.openxmlformats.org/drawingml/2006/main" xmlns:r="http://schemas.openxmlformats.org/officeDocument/2006/relationships" xmlns:p="http://schemas.openxmlformats.org/presentationml/2006/main">
   <p:cSld>
     <p:spTree>
       <p:nvGrpSpPr>
@@ -8752,7 +9196,7 @@
           <p:nvPr/>
         </p:nvPicPr>
         <p:blipFill>
-          <a:blip r:embed="rId2"/>
+          <a:blip r:embed="rId1"/>
           <a:stretch>
             <a:fillRect/>
           </a:stretch>
@@ -8784,7 +9228,7 @@
           <a:noFill/>
         </p:spPr>
         <p:txBody>
-          <a:bodyPr wrap="square" lIns="0" rIns="0" tIns="0" bIns="0" anchor="t">
+          <a:bodyPr wrap="square" lIns="0" tIns="0" rIns="0" bIns="0" anchor="t">
             <a:spAutoFit/>
           </a:bodyPr>
           <a:lstStyle/>
@@ -8803,6 +9247,12 @@
               </a:rPr>
               <a:t>INNOVATION</a:t>
             </a:r>
+            <a:endParaRPr sz="1200" b="1" i="0">
+              <a:solidFill>
+                <a:srgbClr val="4F6EF7"/>
+              </a:solidFill>
+              <a:latin typeface="Aptos"/>
+            </a:endParaRPr>
           </a:p>
         </p:txBody>
       </p:sp>
@@ -8866,7 +9316,7 @@
           <a:noFill/>
         </p:spPr>
         <p:txBody>
-          <a:bodyPr wrap="square" lIns="0" rIns="0" tIns="0" bIns="0" anchor="t">
+          <a:bodyPr wrap="square" lIns="0" tIns="0" rIns="0" bIns="0" anchor="t">
             <a:spAutoFit/>
           </a:bodyPr>
           <a:lstStyle/>
@@ -8881,10 +9331,16 @@
                 <a:solidFill>
                   <a:srgbClr val="102A43"/>
                 </a:solidFill>
-                <a:latin typeface="Microsoft YaHei"/>
+                <a:latin typeface="微软雅黑"/>
               </a:rPr>
               <a:t>关键亮点：工程化表达与应用价值并重</a:t>
             </a:r>
+            <a:endParaRPr sz="2800" b="1" i="0">
+              <a:solidFill>
+                <a:srgbClr val="102A43"/>
+              </a:solidFill>
+              <a:latin typeface="微软雅黑"/>
+            </a:endParaRPr>
           </a:p>
         </p:txBody>
       </p:sp>
@@ -8905,7 +9361,7 @@
           <a:noFill/>
         </p:spPr>
         <p:txBody>
-          <a:bodyPr wrap="square" lIns="0" rIns="0" tIns="0" bIns="0" anchor="t">
+          <a:bodyPr wrap="square" lIns="0" tIns="0" rIns="0" bIns="0" anchor="t">
             <a:spAutoFit/>
           </a:bodyPr>
           <a:lstStyle/>
@@ -8920,10 +9376,16 @@
                 <a:solidFill>
                   <a:srgbClr val="62748A"/>
                 </a:solidFill>
-                <a:latin typeface="Microsoft YaHei"/>
+                <a:latin typeface="微软雅黑"/>
               </a:rPr>
               <a:t>在题库系统常见能力之外，重点强化共享语义、可复现交付与学习辅助增强。</a:t>
             </a:r>
+            <a:endParaRPr sz="1350" b="0" i="0">
+              <a:solidFill>
+                <a:srgbClr val="62748A"/>
+              </a:solidFill>
+              <a:latin typeface="微软雅黑"/>
+            </a:endParaRPr>
           </a:p>
         </p:txBody>
       </p:sp>
@@ -9034,7 +9496,7 @@
           <a:noFill/>
         </p:spPr>
         <p:txBody>
-          <a:bodyPr wrap="square" lIns="0" rIns="0" tIns="0" bIns="0" anchor="t">
+          <a:bodyPr wrap="square" lIns="0" tIns="0" rIns="0" bIns="0" anchor="t">
             <a:spAutoFit/>
           </a:bodyPr>
           <a:lstStyle/>
@@ -9053,6 +9515,12 @@
               </a:rPr>
               <a:t>1</a:t>
             </a:r>
+            <a:endParaRPr sz="1200" b="1" i="0">
+              <a:solidFill>
+                <a:srgbClr val="FFFFFF"/>
+              </a:solidFill>
+              <a:latin typeface="Aptos"/>
+            </a:endParaRPr>
           </a:p>
         </p:txBody>
       </p:sp>
@@ -9073,7 +9541,7 @@
           <a:noFill/>
         </p:spPr>
         <p:txBody>
-          <a:bodyPr wrap="square" lIns="0" rIns="0" tIns="0" bIns="0" anchor="t">
+          <a:bodyPr wrap="square" lIns="0" tIns="0" rIns="0" bIns="0" anchor="t">
             <a:spAutoFit/>
           </a:bodyPr>
           <a:lstStyle/>
@@ -9088,10 +9556,16 @@
                 <a:solidFill>
                   <a:srgbClr val="102A43"/>
                 </a:solidFill>
-                <a:latin typeface="Microsoft YaHei"/>
+                <a:latin typeface="微软雅黑"/>
               </a:rPr>
               <a:t>共享数据语义</a:t>
             </a:r>
+            <a:endParaRPr sz="1400" b="1" i="0">
+              <a:solidFill>
+                <a:srgbClr val="102A43"/>
+              </a:solidFill>
+              <a:latin typeface="微软雅黑"/>
+            </a:endParaRPr>
           </a:p>
         </p:txBody>
       </p:sp>
@@ -9112,7 +9586,7 @@
           <a:noFill/>
         </p:spPr>
         <p:txBody>
-          <a:bodyPr wrap="square" lIns="0" rIns="0" tIns="0" bIns="0" anchor="t">
+          <a:bodyPr wrap="square" lIns="0" tIns="0" rIns="0" bIns="0" anchor="t">
             <a:spAutoFit/>
           </a:bodyPr>
           <a:lstStyle/>
@@ -9127,10 +9601,16 @@
                 <a:solidFill>
                   <a:srgbClr val="62748A"/>
                 </a:solidFill>
-                <a:latin typeface="Microsoft YaHei"/>
+                <a:latin typeface="微软雅黑"/>
               </a:rPr>
               <a:t>公共题库、个人题库、题目、收藏、错题、答案、进度、考试等能力在 Web 与小程序两端保持同一套后端语义，降低维护复杂度，也让学习记录真正可连续。</a:t>
             </a:r>
+            <a:endParaRPr sz="1120" b="0" i="0">
+              <a:solidFill>
+                <a:srgbClr val="62748A"/>
+              </a:solidFill>
+              <a:latin typeface="微软雅黑"/>
+            </a:endParaRPr>
           </a:p>
         </p:txBody>
       </p:sp>
@@ -9241,7 +9721,7 @@
           <a:noFill/>
         </p:spPr>
         <p:txBody>
-          <a:bodyPr wrap="square" lIns="0" rIns="0" tIns="0" bIns="0" anchor="t">
+          <a:bodyPr wrap="square" lIns="0" tIns="0" rIns="0" bIns="0" anchor="t">
             <a:spAutoFit/>
           </a:bodyPr>
           <a:lstStyle/>
@@ -9260,6 +9740,12 @@
               </a:rPr>
               <a:t>2</a:t>
             </a:r>
+            <a:endParaRPr sz="1200" b="1" i="0">
+              <a:solidFill>
+                <a:srgbClr val="FFFFFF"/>
+              </a:solidFill>
+              <a:latin typeface="Aptos"/>
+            </a:endParaRPr>
           </a:p>
         </p:txBody>
       </p:sp>
@@ -9280,7 +9766,7 @@
           <a:noFill/>
         </p:spPr>
         <p:txBody>
-          <a:bodyPr wrap="square" lIns="0" rIns="0" tIns="0" bIns="0" anchor="t">
+          <a:bodyPr wrap="square" lIns="0" tIns="0" rIns="0" bIns="0" anchor="t">
             <a:spAutoFit/>
           </a:bodyPr>
           <a:lstStyle/>
@@ -9295,10 +9781,16 @@
                 <a:solidFill>
                   <a:srgbClr val="102A43"/>
                 </a:solidFill>
-                <a:latin typeface="Microsoft YaHei"/>
+                <a:latin typeface="微软雅黑"/>
               </a:rPr>
               <a:t>Docker 化可复现</a:t>
             </a:r>
+            <a:endParaRPr sz="1400" b="1" i="0">
+              <a:solidFill>
+                <a:srgbClr val="102A43"/>
+              </a:solidFill>
+              <a:latin typeface="微软雅黑"/>
+            </a:endParaRPr>
           </a:p>
         </p:txBody>
       </p:sp>
@@ -9319,7 +9811,7 @@
           <a:noFill/>
         </p:spPr>
         <p:txBody>
-          <a:bodyPr wrap="square" lIns="0" rIns="0" tIns="0" bIns="0" anchor="t">
+          <a:bodyPr wrap="square" lIns="0" tIns="0" rIns="0" bIns="0" anchor="t">
             <a:spAutoFit/>
           </a:bodyPr>
           <a:lstStyle/>
@@ -9334,10 +9826,16 @@
                 <a:solidFill>
                   <a:srgbClr val="62748A"/>
                 </a:solidFill>
-                <a:latin typeface="Microsoft YaHei"/>
+                <a:latin typeface="微软雅黑"/>
               </a:rPr>
               <a:t>开发环境默认通过 compose.dev.yml 统一拉起 web、worker、postgres、redis、backup。无论课堂演示、现场答辩还是后续交付，都能更稳定地复现运行环境。</a:t>
             </a:r>
+            <a:endParaRPr sz="1120" b="0" i="0">
+              <a:solidFill>
+                <a:srgbClr val="62748A"/>
+              </a:solidFill>
+              <a:latin typeface="微软雅黑"/>
+            </a:endParaRPr>
           </a:p>
         </p:txBody>
       </p:sp>
@@ -9448,7 +9946,7 @@
           <a:noFill/>
         </p:spPr>
         <p:txBody>
-          <a:bodyPr wrap="square" lIns="0" rIns="0" tIns="0" bIns="0" anchor="t">
+          <a:bodyPr wrap="square" lIns="0" tIns="0" rIns="0" bIns="0" anchor="t">
             <a:spAutoFit/>
           </a:bodyPr>
           <a:lstStyle/>
@@ -9467,6 +9965,12 @@
               </a:rPr>
               <a:t>3</a:t>
             </a:r>
+            <a:endParaRPr sz="1200" b="1" i="0">
+              <a:solidFill>
+                <a:srgbClr val="FFFFFF"/>
+              </a:solidFill>
+              <a:latin typeface="Aptos"/>
+            </a:endParaRPr>
           </a:p>
         </p:txBody>
       </p:sp>
@@ -9487,7 +9991,7 @@
           <a:noFill/>
         </p:spPr>
         <p:txBody>
-          <a:bodyPr wrap="square" lIns="0" rIns="0" tIns="0" bIns="0" anchor="t">
+          <a:bodyPr wrap="square" lIns="0" tIns="0" rIns="0" bIns="0" anchor="t">
             <a:spAutoFit/>
           </a:bodyPr>
           <a:lstStyle/>
@@ -9502,10 +10006,16 @@
                 <a:solidFill>
                   <a:srgbClr val="102A43"/>
                 </a:solidFill>
-                <a:latin typeface="Microsoft YaHei"/>
+                <a:latin typeface="微软雅黑"/>
               </a:rPr>
               <a:t>AI 学习辅助增强</a:t>
             </a:r>
+            <a:endParaRPr sz="1400" b="1" i="0">
+              <a:solidFill>
+                <a:srgbClr val="102A43"/>
+              </a:solidFill>
+              <a:latin typeface="微软雅黑"/>
+            </a:endParaRPr>
           </a:p>
         </p:txBody>
       </p:sp>
@@ -9526,7 +10036,7 @@
           <a:noFill/>
         </p:spPr>
         <p:txBody>
-          <a:bodyPr wrap="square" lIns="0" rIns="0" tIns="0" bIns="0" anchor="t">
+          <a:bodyPr wrap="square" lIns="0" tIns="0" rIns="0" bIns="0" anchor="t">
             <a:spAutoFit/>
           </a:bodyPr>
           <a:lstStyle/>
@@ -9541,10 +10051,16 @@
                 <a:solidFill>
                   <a:srgbClr val="62748A"/>
                 </a:solidFill>
-                <a:latin typeface="Microsoft YaHei"/>
+                <a:latin typeface="微软雅黑"/>
               </a:rPr>
               <a:t>围绕刷题流程补充 AI 解析、主观题判分与后台 AI 配置能力，让系统更贴近教学、练习与复盘的真实场景。</a:t>
             </a:r>
+            <a:endParaRPr sz="1120" b="0" i="0">
+              <a:solidFill>
+                <a:srgbClr val="62748A"/>
+              </a:solidFill>
+              <a:latin typeface="微软雅黑"/>
+            </a:endParaRPr>
           </a:p>
         </p:txBody>
       </p:sp>
@@ -9565,7 +10081,7 @@
           <a:noFill/>
         </p:spPr>
         <p:txBody>
-          <a:bodyPr wrap="square" lIns="0" rIns="0" tIns="0" bIns="0" anchor="t">
+          <a:bodyPr wrap="square" lIns="0" tIns="0" rIns="0" bIns="0" anchor="t">
             <a:spAutoFit/>
           </a:bodyPr>
           <a:lstStyle/>
@@ -9584,6 +10100,12 @@
               </a:rPr>
               <a:t>Sak-AI答题助手｜答辩演示</a:t>
             </a:r>
+            <a:endParaRPr sz="950" b="0" i="0">
+              <a:solidFill>
+                <a:srgbClr val="94A3B8"/>
+              </a:solidFill>
+              <a:latin typeface="Aptos"/>
+            </a:endParaRPr>
           </a:p>
         </p:txBody>
       </p:sp>
@@ -9604,7 +10126,7 @@
           <a:noFill/>
         </p:spPr>
         <p:txBody>
-          <a:bodyPr wrap="square" lIns="0" rIns="0" tIns="0" bIns="0" anchor="t">
+          <a:bodyPr wrap="square" lIns="0" tIns="0" rIns="0" bIns="0" anchor="t">
             <a:spAutoFit/>
           </a:bodyPr>
           <a:lstStyle/>
@@ -9623,6 +10145,12 @@
               </a:rPr>
               <a:t>17</a:t>
             </a:r>
+            <a:endParaRPr sz="1100" b="1" i="0">
+              <a:solidFill>
+                <a:srgbClr val="17324D"/>
+              </a:solidFill>
+              <a:latin typeface="Aptos"/>
+            </a:endParaRPr>
           </a:p>
         </p:txBody>
       </p:sp>
@@ -9635,7 +10163,7 @@
 </file>
 
 <file path=ppt/slides/slide18.xml><?xml version="1.0" encoding="utf-8"?>
-<p:sld xmlns:a="http://schemas.openxmlformats.org/drawingml/2006/main" xmlns:p="http://schemas.openxmlformats.org/presentationml/2006/main" xmlns:r="http://schemas.openxmlformats.org/officeDocument/2006/relationships">
+<p:sld xmlns:a="http://schemas.openxmlformats.org/drawingml/2006/main" xmlns:r="http://schemas.openxmlformats.org/officeDocument/2006/relationships" xmlns:p="http://schemas.openxmlformats.org/presentationml/2006/main">
   <p:cSld>
     <p:spTree>
       <p:nvGrpSpPr>
@@ -9653,7 +10181,7 @@
           <p:nvPr/>
         </p:nvPicPr>
         <p:blipFill>
-          <a:blip r:embed="rId2"/>
+          <a:blip r:embed="rId1"/>
           <a:stretch>
             <a:fillRect/>
           </a:stretch>
@@ -9685,7 +10213,7 @@
           <a:noFill/>
         </p:spPr>
         <p:txBody>
-          <a:bodyPr wrap="square" lIns="0" rIns="0" tIns="0" bIns="0" anchor="t">
+          <a:bodyPr wrap="square" lIns="0" tIns="0" rIns="0" bIns="0" anchor="t">
             <a:spAutoFit/>
           </a:bodyPr>
           <a:lstStyle/>
@@ -9704,6 +10232,12 @@
               </a:rPr>
               <a:t>VALIDATION</a:t>
             </a:r>
+            <a:endParaRPr sz="1200" b="1" i="0">
+              <a:solidFill>
+                <a:srgbClr val="4F6EF7"/>
+              </a:solidFill>
+              <a:latin typeface="Aptos"/>
+            </a:endParaRPr>
           </a:p>
         </p:txBody>
       </p:sp>
@@ -9767,7 +10301,7 @@
           <a:noFill/>
         </p:spPr>
         <p:txBody>
-          <a:bodyPr wrap="square" lIns="0" rIns="0" tIns="0" bIns="0" anchor="t">
+          <a:bodyPr wrap="square" lIns="0" tIns="0" rIns="0" bIns="0" anchor="t">
             <a:spAutoFit/>
           </a:bodyPr>
           <a:lstStyle/>
@@ -9782,10 +10316,16 @@
                 <a:solidFill>
                   <a:srgbClr val="102A43"/>
                 </a:solidFill>
-                <a:latin typeface="Microsoft YaHei"/>
+                <a:latin typeface="微软雅黑"/>
               </a:rPr>
               <a:t>工程验证与答辩可演示性</a:t>
             </a:r>
+            <a:endParaRPr sz="2800" b="1" i="0">
+              <a:solidFill>
+                <a:srgbClr val="102A43"/>
+              </a:solidFill>
+              <a:latin typeface="微软雅黑"/>
+            </a:endParaRPr>
           </a:p>
         </p:txBody>
       </p:sp>
@@ -9806,7 +10346,7 @@
           <a:noFill/>
         </p:spPr>
         <p:txBody>
-          <a:bodyPr wrap="square" lIns="0" rIns="0" tIns="0" bIns="0" anchor="t">
+          <a:bodyPr wrap="square" lIns="0" tIns="0" rIns="0" bIns="0" anchor="t">
             <a:spAutoFit/>
           </a:bodyPr>
           <a:lstStyle/>
@@ -9821,10 +10361,16 @@
                 <a:solidFill>
                   <a:srgbClr val="62748A"/>
                 </a:solidFill>
-                <a:latin typeface="Microsoft YaHei"/>
+                <a:latin typeface="微软雅黑"/>
               </a:rPr>
               <a:t>答辩现场不仅要讲清功能，还要展示项目具备稳定运行与工程交付能力。</a:t>
             </a:r>
+            <a:endParaRPr sz="1350" b="0" i="0">
+              <a:solidFill>
+                <a:srgbClr val="62748A"/>
+              </a:solidFill>
+              <a:latin typeface="微软雅黑"/>
+            </a:endParaRPr>
           </a:p>
         </p:txBody>
       </p:sp>
@@ -9892,7 +10438,7 @@
           <a:noFill/>
         </p:spPr>
         <p:txBody>
-          <a:bodyPr wrap="square" lIns="0" rIns="0" tIns="0" bIns="0" anchor="t">
+          <a:bodyPr wrap="square" lIns="0" tIns="0" rIns="0" bIns="0" anchor="t">
             <a:spAutoFit/>
           </a:bodyPr>
           <a:lstStyle/>
@@ -9911,6 +10457,12 @@
               </a:rPr>
               <a:t>8000</a:t>
             </a:r>
+            <a:endParaRPr sz="2400" b="1" i="0">
+              <a:solidFill>
+                <a:srgbClr val="4F6EF7"/>
+              </a:solidFill>
+              <a:latin typeface="Aptos"/>
+            </a:endParaRPr>
           </a:p>
         </p:txBody>
       </p:sp>
@@ -9931,7 +10483,7 @@
           <a:noFill/>
         </p:spPr>
         <p:txBody>
-          <a:bodyPr wrap="square" lIns="0" rIns="0" tIns="0" bIns="0" anchor="t">
+          <a:bodyPr wrap="square" lIns="0" tIns="0" rIns="0" bIns="0" anchor="t">
             <a:spAutoFit/>
           </a:bodyPr>
           <a:lstStyle/>
@@ -9946,10 +10498,16 @@
                 <a:solidFill>
                   <a:srgbClr val="17324D"/>
                 </a:solidFill>
-                <a:latin typeface="Microsoft YaHei"/>
+                <a:latin typeface="微软雅黑"/>
               </a:rPr>
               <a:t>Web 暴露端口</a:t>
             </a:r>
+            <a:endParaRPr sz="1250" b="1" i="0">
+              <a:solidFill>
+                <a:srgbClr val="17324D"/>
+              </a:solidFill>
+              <a:latin typeface="微软雅黑"/>
+            </a:endParaRPr>
           </a:p>
         </p:txBody>
       </p:sp>
@@ -9970,7 +10528,7 @@
           <a:noFill/>
         </p:spPr>
         <p:txBody>
-          <a:bodyPr wrap="square" lIns="0" rIns="0" tIns="0" bIns="0" anchor="t">
+          <a:bodyPr wrap="square" lIns="0" tIns="0" rIns="0" bIns="0" anchor="t">
             <a:spAutoFit/>
           </a:bodyPr>
           <a:lstStyle/>
@@ -9985,10 +10543,16 @@
                 <a:solidFill>
                   <a:srgbClr val="62748A"/>
                 </a:solidFill>
-                <a:latin typeface="Microsoft YaHei"/>
+                <a:latin typeface="微软雅黑"/>
               </a:rPr>
               <a:t>compose.dev.yml：flask run --reload</a:t>
             </a:r>
+            <a:endParaRPr sz="1050" b="0" i="0">
+              <a:solidFill>
+                <a:srgbClr val="62748A"/>
+              </a:solidFill>
+              <a:latin typeface="微软雅黑"/>
+            </a:endParaRPr>
           </a:p>
         </p:txBody>
       </p:sp>
@@ -10056,7 +10620,7 @@
           <a:noFill/>
         </p:spPr>
         <p:txBody>
-          <a:bodyPr wrap="square" lIns="0" rIns="0" tIns="0" bIns="0" anchor="t">
+          <a:bodyPr wrap="square" lIns="0" tIns="0" rIns="0" bIns="0" anchor="t">
             <a:spAutoFit/>
           </a:bodyPr>
           <a:lstStyle/>
@@ -10075,6 +10639,12 @@
               </a:rPr>
               <a:t>/api/ping</a:t>
             </a:r>
+            <a:endParaRPr sz="2400" b="1" i="0">
+              <a:solidFill>
+                <a:srgbClr val="5BC0BE"/>
+              </a:solidFill>
+              <a:latin typeface="Aptos"/>
+            </a:endParaRPr>
           </a:p>
         </p:txBody>
       </p:sp>
@@ -10095,7 +10665,7 @@
           <a:noFill/>
         </p:spPr>
         <p:txBody>
-          <a:bodyPr wrap="square" lIns="0" rIns="0" tIns="0" bIns="0" anchor="t">
+          <a:bodyPr wrap="square" lIns="0" tIns="0" rIns="0" bIns="0" anchor="t">
             <a:spAutoFit/>
           </a:bodyPr>
           <a:lstStyle/>
@@ -10110,10 +10680,16 @@
                 <a:solidFill>
                   <a:srgbClr val="17324D"/>
                 </a:solidFill>
-                <a:latin typeface="Microsoft YaHei"/>
+                <a:latin typeface="微软雅黑"/>
               </a:rPr>
               <a:t>健康检查</a:t>
             </a:r>
+            <a:endParaRPr sz="1250" b="1" i="0">
+              <a:solidFill>
+                <a:srgbClr val="17324D"/>
+              </a:solidFill>
+              <a:latin typeface="微软雅黑"/>
+            </a:endParaRPr>
           </a:p>
         </p:txBody>
       </p:sp>
@@ -10134,7 +10710,7 @@
           <a:noFill/>
         </p:spPr>
         <p:txBody>
-          <a:bodyPr wrap="square" lIns="0" rIns="0" tIns="0" bIns="0" anchor="t">
+          <a:bodyPr wrap="square" lIns="0" tIns="0" rIns="0" bIns="0" anchor="t">
             <a:spAutoFit/>
           </a:bodyPr>
           <a:lstStyle/>
@@ -10149,10 +10725,16 @@
                 <a:solidFill>
                   <a:srgbClr val="62748A"/>
                 </a:solidFill>
-                <a:latin typeface="Microsoft YaHei"/>
+                <a:latin typeface="微软雅黑"/>
               </a:rPr>
               <a:t>支持基础与 deep=1 检查</a:t>
             </a:r>
+            <a:endParaRPr sz="1050" b="0" i="0">
+              <a:solidFill>
+                <a:srgbClr val="62748A"/>
+              </a:solidFill>
+              <a:latin typeface="微软雅黑"/>
+            </a:endParaRPr>
           </a:p>
         </p:txBody>
       </p:sp>
@@ -10220,7 +10802,7 @@
           <a:noFill/>
         </p:spPr>
         <p:txBody>
-          <a:bodyPr wrap="square" lIns="0" rIns="0" tIns="0" bIns="0" anchor="t">
+          <a:bodyPr wrap="square" lIns="0" tIns="0" rIns="0" bIns="0" anchor="t">
             <a:spAutoFit/>
           </a:bodyPr>
           <a:lstStyle/>
@@ -10239,6 +10821,12 @@
               </a:rPr>
               <a:t>PostgreSQL 16</a:t>
             </a:r>
+            <a:endParaRPr sz="2400" b="1" i="0">
+              <a:solidFill>
+                <a:srgbClr val="D6B36A"/>
+              </a:solidFill>
+              <a:latin typeface="Aptos"/>
+            </a:endParaRPr>
           </a:p>
         </p:txBody>
       </p:sp>
@@ -10259,7 +10847,7 @@
           <a:noFill/>
         </p:spPr>
         <p:txBody>
-          <a:bodyPr wrap="square" lIns="0" rIns="0" tIns="0" bIns="0" anchor="t">
+          <a:bodyPr wrap="square" lIns="0" tIns="0" rIns="0" bIns="0" anchor="t">
             <a:spAutoFit/>
           </a:bodyPr>
           <a:lstStyle/>
@@ -10274,10 +10862,16 @@
                 <a:solidFill>
                   <a:srgbClr val="17324D"/>
                 </a:solidFill>
-                <a:latin typeface="Microsoft YaHei"/>
+                <a:latin typeface="微软雅黑"/>
               </a:rPr>
               <a:t>开发默认数据库</a:t>
             </a:r>
+            <a:endParaRPr sz="1250" b="1" i="0">
+              <a:solidFill>
+                <a:srgbClr val="17324D"/>
+              </a:solidFill>
+              <a:latin typeface="微软雅黑"/>
+            </a:endParaRPr>
           </a:p>
         </p:txBody>
       </p:sp>
@@ -10298,7 +10892,7 @@
           <a:noFill/>
         </p:spPr>
         <p:txBody>
-          <a:bodyPr wrap="square" lIns="0" rIns="0" tIns="0" bIns="0" anchor="t">
+          <a:bodyPr wrap="square" lIns="0" tIns="0" rIns="0" bIns="0" anchor="t">
             <a:spAutoFit/>
           </a:bodyPr>
           <a:lstStyle/>
@@ -10313,10 +10907,16 @@
                 <a:solidFill>
                   <a:srgbClr val="62748A"/>
                 </a:solidFill>
-                <a:latin typeface="Microsoft YaHei"/>
+                <a:latin typeface="微软雅黑"/>
               </a:rPr>
               <a:t>Redis + RQ 协同运行</a:t>
             </a:r>
+            <a:endParaRPr sz="1050" b="0" i="0">
+              <a:solidFill>
+                <a:srgbClr val="62748A"/>
+              </a:solidFill>
+              <a:latin typeface="微软雅黑"/>
+            </a:endParaRPr>
           </a:p>
         </p:txBody>
       </p:sp>
@@ -10384,7 +10984,7 @@
           <a:noFill/>
         </p:spPr>
         <p:txBody>
-          <a:bodyPr wrap="square" lIns="0" rIns="0" tIns="0" bIns="0" anchor="t">
+          <a:bodyPr wrap="square" lIns="0" tIns="0" rIns="0" bIns="0" anchor="t">
             <a:spAutoFit/>
           </a:bodyPr>
           <a:lstStyle/>
@@ -10403,6 +11003,12 @@
               </a:rPr>
               <a:t>5 项服务</a:t>
             </a:r>
+            <a:endParaRPr sz="2400" b="1" i="0">
+              <a:solidFill>
+                <a:srgbClr val="4F6EF7"/>
+              </a:solidFill>
+              <a:latin typeface="Aptos"/>
+            </a:endParaRPr>
           </a:p>
         </p:txBody>
       </p:sp>
@@ -10423,7 +11029,7 @@
           <a:noFill/>
         </p:spPr>
         <p:txBody>
-          <a:bodyPr wrap="square" lIns="0" rIns="0" tIns="0" bIns="0" anchor="t">
+          <a:bodyPr wrap="square" lIns="0" tIns="0" rIns="0" bIns="0" anchor="t">
             <a:spAutoFit/>
           </a:bodyPr>
           <a:lstStyle/>
@@ -10438,10 +11044,16 @@
                 <a:solidFill>
                   <a:srgbClr val="17324D"/>
                 </a:solidFill>
-                <a:latin typeface="Microsoft YaHei"/>
+                <a:latin typeface="微软雅黑"/>
               </a:rPr>
               <a:t>容器编排</a:t>
             </a:r>
+            <a:endParaRPr sz="1250" b="1" i="0">
+              <a:solidFill>
+                <a:srgbClr val="17324D"/>
+              </a:solidFill>
+              <a:latin typeface="微软雅黑"/>
+            </a:endParaRPr>
           </a:p>
         </p:txBody>
       </p:sp>
@@ -10462,7 +11074,7 @@
           <a:noFill/>
         </p:spPr>
         <p:txBody>
-          <a:bodyPr wrap="square" lIns="0" rIns="0" tIns="0" bIns="0" anchor="t">
+          <a:bodyPr wrap="square" lIns="0" tIns="0" rIns="0" bIns="0" anchor="t">
             <a:spAutoFit/>
           </a:bodyPr>
           <a:lstStyle/>
@@ -10477,10 +11089,16 @@
                 <a:solidFill>
                   <a:srgbClr val="62748A"/>
                 </a:solidFill>
-                <a:latin typeface="Microsoft YaHei"/>
+                <a:latin typeface="微软雅黑"/>
               </a:rPr>
               <a:t>web / worker / postgres / redis / backup</a:t>
             </a:r>
+            <a:endParaRPr sz="1050" b="0" i="0">
+              <a:solidFill>
+                <a:srgbClr val="62748A"/>
+              </a:solidFill>
+              <a:latin typeface="微软雅黑"/>
+            </a:endParaRPr>
           </a:p>
         </p:txBody>
       </p:sp>
@@ -10595,7 +11213,7 @@
           <a:noFill/>
         </p:spPr>
         <p:txBody>
-          <a:bodyPr wrap="square" lIns="0" rIns="0" tIns="0" bIns="0" anchor="t">
+          <a:bodyPr wrap="square" lIns="0" tIns="0" rIns="0" bIns="0" anchor="t">
             <a:spAutoFit/>
           </a:bodyPr>
           <a:lstStyle/>
@@ -10610,10 +11228,16 @@
                 <a:solidFill>
                   <a:srgbClr val="4F6EF7"/>
                 </a:solidFill>
-                <a:latin typeface="Microsoft YaHei"/>
+                <a:latin typeface="微软雅黑"/>
               </a:rPr>
               <a:t>推荐演示顺序</a:t>
             </a:r>
+            <a:endParaRPr sz="1250" b="1" i="0">
+              <a:solidFill>
+                <a:srgbClr val="4F6EF7"/>
+              </a:solidFill>
+              <a:latin typeface="微软雅黑"/>
+            </a:endParaRPr>
           </a:p>
         </p:txBody>
       </p:sp>
@@ -10634,7 +11258,7 @@
           <a:noFill/>
         </p:spPr>
         <p:txBody>
-          <a:bodyPr wrap="square" lIns="0" rIns="0" tIns="0" bIns="0" anchor="t">
+          <a:bodyPr wrap="square" lIns="0" tIns="0" rIns="0" bIns="0" anchor="t">
             <a:spAutoFit/>
           </a:bodyPr>
           <a:lstStyle/>
@@ -10655,10 +11279,16 @@
                 <a:solidFill>
                   <a:srgbClr val="102A43"/>
                 </a:solidFill>
-                <a:latin typeface="Microsoft YaHei"/>
+                <a:latin typeface="微软雅黑"/>
               </a:rPr>
               <a:t>首页 → 题库广场 → 题库详情 → 数据/考试 → 刷题AI → 论坛 → 聊天 → 个人导入 → 后台管理</a:t>
             </a:r>
+            <a:endParaRPr sz="1460" b="1" i="0">
+              <a:solidFill>
+                <a:srgbClr val="102A43"/>
+              </a:solidFill>
+              <a:latin typeface="微软雅黑"/>
+            </a:endParaRPr>
           </a:p>
           <a:p>
             <a:pPr algn="l">
@@ -10677,10 +11307,16 @@
                 <a:solidFill>
                   <a:srgbClr val="17324D"/>
                 </a:solidFill>
-                <a:latin typeface="Microsoft YaHei"/>
+                <a:latin typeface="微软雅黑"/>
               </a:rPr>
               <a:t>正式访问地址：https://saksk.top</a:t>
             </a:r>
+            <a:endParaRPr sz="1260" b="0" i="0">
+              <a:solidFill>
+                <a:srgbClr val="17324D"/>
+              </a:solidFill>
+              <a:latin typeface="微软雅黑"/>
+            </a:endParaRPr>
           </a:p>
           <a:p>
             <a:pPr algn="l">
@@ -10699,10 +11335,16 @@
                 <a:solidFill>
                   <a:srgbClr val="17324D"/>
                 </a:solidFill>
-                <a:latin typeface="Microsoft YaHei"/>
+                <a:latin typeface="微软雅黑"/>
               </a:rPr>
               <a:t>本地演示备用：http://127.0.0.1:8000</a:t>
             </a:r>
+            <a:endParaRPr sz="1260" b="0" i="0">
+              <a:solidFill>
+                <a:srgbClr val="17324D"/>
+              </a:solidFill>
+              <a:latin typeface="微软雅黑"/>
+            </a:endParaRPr>
           </a:p>
         </p:txBody>
       </p:sp>
@@ -10817,7 +11459,7 @@
           <a:noFill/>
         </p:spPr>
         <p:txBody>
-          <a:bodyPr wrap="square" lIns="0" rIns="0" tIns="0" bIns="0" anchor="t">
+          <a:bodyPr wrap="square" lIns="0" tIns="0" rIns="0" bIns="0" anchor="t">
             <a:spAutoFit/>
           </a:bodyPr>
           <a:lstStyle/>
@@ -10832,10 +11474,16 @@
                 <a:solidFill>
                   <a:srgbClr val="34A58D"/>
                 </a:solidFill>
-                <a:latin typeface="Microsoft YaHei"/>
+                <a:latin typeface="微软雅黑"/>
               </a:rPr>
               <a:t>工程事实</a:t>
             </a:r>
+            <a:endParaRPr sz="1250" b="1" i="0">
+              <a:solidFill>
+                <a:srgbClr val="34A58D"/>
+              </a:solidFill>
+              <a:latin typeface="微软雅黑"/>
+            </a:endParaRPr>
           </a:p>
         </p:txBody>
       </p:sp>
@@ -10856,7 +11504,7 @@
           <a:noFill/>
         </p:spPr>
         <p:txBody>
-          <a:bodyPr wrap="square" lIns="0" rIns="0" tIns="0" bIns="0" anchor="t">
+          <a:bodyPr wrap="square" lIns="0" tIns="0" rIns="0" bIns="0" anchor="t">
             <a:spAutoFit/>
           </a:bodyPr>
           <a:lstStyle/>
@@ -10877,10 +11525,16 @@
                 <a:solidFill>
                   <a:srgbClr val="17324D"/>
                 </a:solidFill>
-                <a:latin typeface="Microsoft YaHei"/>
+                <a:latin typeface="微软雅黑"/>
               </a:rPr>
               <a:t>• Web 是主体交互端，采用 Flask + Jinja SSR。</a:t>
             </a:r>
+            <a:endParaRPr sz="1300" b="0" i="0">
+              <a:solidFill>
+                <a:srgbClr val="17324D"/>
+              </a:solidFill>
+              <a:latin typeface="微软雅黑"/>
+            </a:endParaRPr>
           </a:p>
           <a:p>
             <a:pPr algn="l">
@@ -10899,10 +11553,16 @@
                 <a:solidFill>
                   <a:srgbClr val="17324D"/>
                 </a:solidFill>
-                <a:latin typeface="Microsoft YaHei"/>
+                <a:latin typeface="微软雅黑"/>
               </a:rPr>
               <a:t>• 小程序为微信原生工程，作为移动场景延展。</a:t>
             </a:r>
+            <a:endParaRPr sz="1300" b="0" i="0">
+              <a:solidFill>
+                <a:srgbClr val="17324D"/>
+              </a:solidFill>
+              <a:latin typeface="微软雅黑"/>
+            </a:endParaRPr>
           </a:p>
           <a:p>
             <a:pPr algn="l">
@@ -10921,10 +11581,16 @@
                 <a:solidFill>
                   <a:srgbClr val="17324D"/>
                 </a:solidFill>
-                <a:latin typeface="Microsoft YaHei"/>
+                <a:latin typeface="微软雅黑"/>
               </a:rPr>
               <a:t>• 应用工厂 + Blueprint 模块化，便于后续扩展。</a:t>
             </a:r>
+            <a:endParaRPr sz="1300" b="0" i="0">
+              <a:solidFill>
+                <a:srgbClr val="17324D"/>
+              </a:solidFill>
+              <a:latin typeface="微软雅黑"/>
+            </a:endParaRPr>
           </a:p>
           <a:p>
             <a:pPr algn="l">
@@ -10943,10 +11609,16 @@
                 <a:solidFill>
                   <a:srgbClr val="17324D"/>
                 </a:solidFill>
-                <a:latin typeface="Microsoft YaHei"/>
+                <a:latin typeface="微软雅黑"/>
               </a:rPr>
               <a:t>• 新接口遵循 status / code / data / message 信封结构。</a:t>
             </a:r>
+            <a:endParaRPr sz="1300" b="0" i="0">
+              <a:solidFill>
+                <a:srgbClr val="17324D"/>
+              </a:solidFill>
+              <a:latin typeface="微软雅黑"/>
+            </a:endParaRPr>
           </a:p>
         </p:txBody>
       </p:sp>
@@ -10967,7 +11639,7 @@
           <a:noFill/>
         </p:spPr>
         <p:txBody>
-          <a:bodyPr wrap="square" lIns="0" rIns="0" tIns="0" bIns="0" anchor="t">
+          <a:bodyPr wrap="square" lIns="0" tIns="0" rIns="0" bIns="0" anchor="t">
             <a:spAutoFit/>
           </a:bodyPr>
           <a:lstStyle/>
@@ -10986,6 +11658,12 @@
               </a:rPr>
               <a:t>Sak-AI答题助手｜答辩演示</a:t>
             </a:r>
+            <a:endParaRPr sz="950" b="0" i="0">
+              <a:solidFill>
+                <a:srgbClr val="94A3B8"/>
+              </a:solidFill>
+              <a:latin typeface="Aptos"/>
+            </a:endParaRPr>
           </a:p>
         </p:txBody>
       </p:sp>
@@ -11006,7 +11684,7 @@
           <a:noFill/>
         </p:spPr>
         <p:txBody>
-          <a:bodyPr wrap="square" lIns="0" rIns="0" tIns="0" bIns="0" anchor="t">
+          <a:bodyPr wrap="square" lIns="0" tIns="0" rIns="0" bIns="0" anchor="t">
             <a:spAutoFit/>
           </a:bodyPr>
           <a:lstStyle/>
@@ -11025,6 +11703,12 @@
               </a:rPr>
               <a:t>18</a:t>
             </a:r>
+            <a:endParaRPr sz="1100" b="1" i="0">
+              <a:solidFill>
+                <a:srgbClr val="17324D"/>
+              </a:solidFill>
+              <a:latin typeface="Aptos"/>
+            </a:endParaRPr>
           </a:p>
         </p:txBody>
       </p:sp>
@@ -11037,7 +11721,7 @@
 </file>
 
 <file path=ppt/slides/slide19.xml><?xml version="1.0" encoding="utf-8"?>
-<p:sld xmlns:a="http://schemas.openxmlformats.org/drawingml/2006/main" xmlns:p="http://schemas.openxmlformats.org/presentationml/2006/main" xmlns:r="http://schemas.openxmlformats.org/officeDocument/2006/relationships">
+<p:sld xmlns:a="http://schemas.openxmlformats.org/drawingml/2006/main" xmlns:r="http://schemas.openxmlformats.org/officeDocument/2006/relationships" xmlns:p="http://schemas.openxmlformats.org/presentationml/2006/main">
   <p:cSld>
     <p:spTree>
       <p:nvGrpSpPr>
@@ -11055,7 +11739,7 @@
           <p:nvPr/>
         </p:nvPicPr>
         <p:blipFill>
-          <a:blip r:embed="rId2"/>
+          <a:blip r:embed="rId1"/>
           <a:stretch>
             <a:fillRect/>
           </a:stretch>
@@ -11134,7 +11818,7 @@
           <a:noFill/>
         </p:spPr>
         <p:txBody>
-          <a:bodyPr wrap="square" lIns="0" rIns="0" tIns="0" bIns="0" anchor="t">
+          <a:bodyPr wrap="square" lIns="0" tIns="0" rIns="0" bIns="0" anchor="t">
             <a:spAutoFit/>
           </a:bodyPr>
           <a:lstStyle/>
@@ -11149,10 +11833,16 @@
                 <a:solidFill>
                   <a:srgbClr val="DDE7FF"/>
                 </a:solidFill>
-                <a:latin typeface="Microsoft YaHei"/>
+                <a:latin typeface="微软雅黑"/>
               </a:rPr>
               <a:t>SUMMARY</a:t>
             </a:r>
+            <a:endParaRPr sz="1150" b="1" i="0">
+              <a:solidFill>
+                <a:srgbClr val="DDE7FF"/>
+              </a:solidFill>
+              <a:latin typeface="微软雅黑"/>
+            </a:endParaRPr>
           </a:p>
         </p:txBody>
       </p:sp>
@@ -11173,7 +11863,7 @@
           <a:noFill/>
         </p:spPr>
         <p:txBody>
-          <a:bodyPr wrap="square" lIns="0" rIns="0" tIns="0" bIns="0" anchor="t">
+          <a:bodyPr wrap="square" lIns="0" tIns="0" rIns="0" bIns="0" anchor="t">
             <a:spAutoFit/>
           </a:bodyPr>
           <a:lstStyle/>
@@ -11194,10 +11884,16 @@
                 <a:solidFill>
                   <a:srgbClr val="FFFFFF"/>
                 </a:solidFill>
-                <a:latin typeface="Microsoft YaHei"/>
+                <a:latin typeface="微软雅黑"/>
               </a:rPr>
               <a:t>Sak-AI答题助手</a:t>
             </a:r>
+            <a:endParaRPr sz="3000" b="1" i="0">
+              <a:solidFill>
+                <a:srgbClr val="FFFFFF"/>
+              </a:solidFill>
+              <a:latin typeface="微软雅黑"/>
+            </a:endParaRPr>
           </a:p>
           <a:p>
             <a:pPr algn="l">
@@ -11216,10 +11912,16 @@
                 <a:solidFill>
                   <a:srgbClr val="DDE7FF"/>
                 </a:solidFill>
-                <a:latin typeface="Microsoft YaHei"/>
+                <a:latin typeface="微软雅黑"/>
               </a:rPr>
               <a:t>让题库沉淀、刷题训练、模拟考试、数据复盘、论坛互动与平台运营在一个系统中完整闭环。</a:t>
             </a:r>
+            <a:endParaRPr sz="1700" b="0" i="0">
+              <a:solidFill>
+                <a:srgbClr val="DDE7FF"/>
+              </a:solidFill>
+              <a:latin typeface="微软雅黑"/>
+            </a:endParaRPr>
           </a:p>
           <a:p>
             <a:pPr algn="l">
@@ -11238,10 +11940,16 @@
                 <a:solidFill>
                   <a:srgbClr val="B8C7DC"/>
                 </a:solidFill>
-                <a:latin typeface="Microsoft YaHei"/>
+                <a:latin typeface="微软雅黑"/>
               </a:rPr>
               <a:t>谢谢各位老师指导</a:t>
             </a:r>
+            <a:endParaRPr sz="1400" b="0" i="0">
+              <a:solidFill>
+                <a:srgbClr val="B8C7DC"/>
+              </a:solidFill>
+              <a:latin typeface="微软雅黑"/>
+            </a:endParaRPr>
           </a:p>
         </p:txBody>
       </p:sp>
@@ -11309,7 +12017,7 @@
           <a:noFill/>
         </p:spPr>
         <p:txBody>
-          <a:bodyPr wrap="square" lIns="0" rIns="0" tIns="0" bIns="0" anchor="t">
+          <a:bodyPr wrap="square" lIns="0" tIns="0" rIns="0" bIns="0" anchor="t">
             <a:spAutoFit/>
           </a:bodyPr>
           <a:lstStyle/>
@@ -11330,10 +12038,16 @@
                 <a:solidFill>
                   <a:srgbClr val="AFC2DD"/>
                 </a:solidFill>
-                <a:latin typeface="Microsoft YaHei"/>
+                <a:latin typeface="微软雅黑"/>
               </a:rPr>
               <a:t>正式访问地址</a:t>
             </a:r>
+            <a:endParaRPr sz="1250" b="0" i="0">
+              <a:solidFill>
+                <a:srgbClr val="AFC2DD"/>
+              </a:solidFill>
+              <a:latin typeface="微软雅黑"/>
+            </a:endParaRPr>
           </a:p>
           <a:p>
             <a:pPr algn="l">
@@ -11356,6 +12070,12 @@
               </a:rPr>
               <a:t>https://saksk.top</a:t>
             </a:r>
+            <a:endParaRPr sz="2000" b="1" i="0">
+              <a:solidFill>
+                <a:srgbClr val="FFFFFF"/>
+              </a:solidFill>
+              <a:latin typeface="Aptos"/>
+            </a:endParaRPr>
           </a:p>
           <a:p>
             <a:pPr algn="l">
@@ -11374,10 +12094,16 @@
                 <a:solidFill>
                   <a:srgbClr val="B8C7DC"/>
                 </a:solidFill>
-                <a:latin typeface="Microsoft YaHei"/>
+                <a:latin typeface="微软雅黑"/>
               </a:rPr>
               <a:t>现场网络受限时可切换本地 Docker 演示环境。</a:t>
             </a:r>
+            <a:endParaRPr sz="1180" b="0" i="0">
+              <a:solidFill>
+                <a:srgbClr val="B8C7DC"/>
+              </a:solidFill>
+              <a:latin typeface="微软雅黑"/>
+            </a:endParaRPr>
           </a:p>
         </p:txBody>
       </p:sp>
@@ -11398,7 +12124,7 @@
           <a:noFill/>
         </p:spPr>
         <p:txBody>
-          <a:bodyPr wrap="square" lIns="0" rIns="0" tIns="0" bIns="0" anchor="t">
+          <a:bodyPr wrap="square" lIns="0" tIns="0" rIns="0" bIns="0" anchor="t">
             <a:spAutoFit/>
           </a:bodyPr>
           <a:lstStyle/>
@@ -11413,16 +12139,92 @@
                 <a:solidFill>
                   <a:srgbClr val="D9E5F5"/>
                 </a:solidFill>
-                <a:latin typeface="Microsoft YaHei"/>
+                <a:latin typeface="微软雅黑"/>
               </a:rPr>
               <a:t>刷题 + AI解析</a:t>
             </a:r>
+            <a:endParaRPr sz="1150" b="1" i="0">
+              <a:solidFill>
+                <a:srgbClr val="D9E5F5"/>
+              </a:solidFill>
+              <a:latin typeface="微软雅黑"/>
+            </a:endParaRPr>
           </a:p>
         </p:txBody>
       </p:sp>
       <p:pic>
         <p:nvPicPr>
           <p:cNvPr id="9" name="Picture 8" descr="刷题___AI解析-834x471.png"/>
+          <p:cNvPicPr>
+            <a:picLocks noChangeAspect="1"/>
+          </p:cNvPicPr>
+          <p:nvPr/>
+        </p:nvPicPr>
+        <p:blipFill>
+          <a:blip r:embed="rId2"/>
+          <a:srcRect l="4434" t="22" r="4671"/>
+          <a:stretch>
+            <a:fillRect/>
+          </a:stretch>
+        </p:blipFill>
+        <p:spPr>
+          <a:xfrm>
+            <a:off x="6537960" y="988060"/>
+            <a:ext cx="4288790" cy="2664460"/>
+          </a:xfrm>
+          <a:prstGeom prst="rect">
+            <a:avLst/>
+          </a:prstGeom>
+        </p:spPr>
+      </p:pic>
+      <p:sp>
+        <p:nvSpPr>
+          <p:cNvPr id="10" name="TextBox 9"/>
+          <p:cNvSpPr txBox="1"/>
+          <p:nvPr/>
+        </p:nvSpPr>
+        <p:spPr>
+          <a:xfrm>
+            <a:off x="6534023" y="3828542"/>
+            <a:ext cx="3127248" cy="182880"/>
+          </a:xfrm>
+          <a:prstGeom prst="rect">
+            <a:avLst/>
+          </a:prstGeom>
+          <a:noFill/>
+        </p:spPr>
+        <p:txBody>
+          <a:bodyPr wrap="square" lIns="0" tIns="0" rIns="0" bIns="0" anchor="t">
+            <a:spAutoFit/>
+          </a:bodyPr>
+          <a:lstStyle/>
+          <a:p>
+            <a:pPr algn="l">
+              <a:lnSpc>
+                <a:spcPct val="115000"/>
+              </a:lnSpc>
+            </a:pPr>
+            <a:r>
+              <a:rPr sz="1150" b="1" i="0">
+                <a:solidFill>
+                  <a:srgbClr val="D9E5F5"/>
+                </a:solidFill>
+                <a:latin typeface="微软雅黑"/>
+              </a:rPr>
+              <a:t>后台论坛管理</a:t>
+            </a:r>
+            <a:endParaRPr sz="1150" b="1" i="0">
+              <a:solidFill>
+                <a:srgbClr val="D9E5F5"/>
+              </a:solidFill>
+              <a:latin typeface="微软雅黑"/>
+            </a:endParaRPr>
+          </a:p>
+        </p:txBody>
+      </p:sp>
+      <p:pic>
+        <p:nvPicPr>
+          <p:cNvPr id="11" name="Picture 10" descr="后台论坛管理-513x318.png"/>
           <p:cNvPicPr>
             <a:picLocks noChangeAspect="1"/>
           </p:cNvPicPr>
@@ -11436,95 +12238,8 @@
         </p:blipFill>
         <p:spPr>
           <a:xfrm>
-            <a:off x="6537960" y="987552"/>
-            <a:ext cx="5084064" cy="2871216"/>
-          </a:xfrm>
-          <a:prstGeom prst="rect">
-            <a:avLst/>
-          </a:prstGeom>
-        </p:spPr>
-      </p:pic>
-      <p:sp>
-        <p:nvSpPr>
-          <p:cNvPr id="10" name="TextBox 9"/>
-          <p:cNvSpPr txBox="1"/>
-          <p:nvPr/>
-        </p:nvSpPr>
-        <p:spPr>
-          <a:xfrm>
-            <a:off x="6876288" y="3730752"/>
-            <a:ext cx="3127248" cy="182880"/>
-          </a:xfrm>
-          <a:prstGeom prst="rect">
-            <a:avLst/>
-          </a:prstGeom>
-          <a:noFill/>
-        </p:spPr>
-        <p:txBody>
-          <a:bodyPr wrap="square" lIns="0" rIns="0" tIns="0" bIns="0" anchor="t">
-            <a:spAutoFit/>
-          </a:bodyPr>
-          <a:lstStyle/>
-          <a:p>
-            <a:pPr algn="l">
-              <a:lnSpc>
-                <a:spcPct val="115000"/>
-              </a:lnSpc>
-            </a:pPr>
-            <a:r>
-              <a:rPr sz="1150" b="1" i="0">
-                <a:solidFill>
-                  <a:srgbClr val="D9E5F5"/>
-                </a:solidFill>
-                <a:latin typeface="Microsoft YaHei"/>
-              </a:rPr>
-              <a:t>后台论坛管理</a:t>
-            </a:r>
-          </a:p>
-        </p:txBody>
-      </p:sp>
-      <p:pic>
-        <p:nvPicPr>
-          <p:cNvPr id="11" name="Picture 10" descr="后台论坛管理-513x318.png"/>
-          <p:cNvPicPr>
-            <a:picLocks noChangeAspect="1"/>
-          </p:cNvPicPr>
-          <p:nvPr/>
-        </p:nvPicPr>
-        <p:blipFill>
-          <a:blip r:embed="rId4"/>
-          <a:stretch>
-            <a:fillRect/>
-          </a:stretch>
-        </p:blipFill>
-        <p:spPr>
-          <a:xfrm>
-            <a:off x="6876288" y="3986784"/>
-            <a:ext cx="3127248" cy="1938528"/>
-          </a:xfrm>
-          <a:prstGeom prst="rect">
-            <a:avLst/>
-          </a:prstGeom>
-        </p:spPr>
-      </p:pic>
-      <p:pic>
-        <p:nvPicPr>
-          <p:cNvPr id="12" name="Picture 11" descr="phone_267x369.png"/>
-          <p:cNvPicPr>
-            <a:picLocks noChangeAspect="1"/>
-          </p:cNvPicPr>
-          <p:nvPr/>
-        </p:nvPicPr>
-        <p:blipFill>
-          <a:blip r:embed="rId5"/>
-          <a:stretch>
-            <a:fillRect/>
-          </a:stretch>
-        </p:blipFill>
-        <p:spPr>
-          <a:xfrm>
-            <a:off x="10094976" y="3675887"/>
-            <a:ext cx="1627632" cy="2249424"/>
+            <a:off x="6534150" y="4084320"/>
+            <a:ext cx="4292600" cy="2660650"/>
           </a:xfrm>
           <a:prstGeom prst="rect">
             <a:avLst/>
@@ -11548,7 +12263,7 @@
           <a:noFill/>
         </p:spPr>
         <p:txBody>
-          <a:bodyPr wrap="square" lIns="0" rIns="0" tIns="0" bIns="0" anchor="t">
+          <a:bodyPr wrap="square" lIns="0" tIns="0" rIns="0" bIns="0" anchor="t">
             <a:spAutoFit/>
           </a:bodyPr>
           <a:lstStyle/>
@@ -11567,6 +12282,12 @@
               </a:rPr>
               <a:t>Sak-AI答题助手｜答辩演示</a:t>
             </a:r>
+            <a:endParaRPr sz="950" b="0" i="0">
+              <a:solidFill>
+                <a:srgbClr val="D6DFEC"/>
+              </a:solidFill>
+              <a:latin typeface="Aptos"/>
+            </a:endParaRPr>
           </a:p>
         </p:txBody>
       </p:sp>
@@ -11587,7 +12308,7 @@
           <a:noFill/>
         </p:spPr>
         <p:txBody>
-          <a:bodyPr wrap="square" lIns="0" rIns="0" tIns="0" bIns="0" anchor="t">
+          <a:bodyPr wrap="square" lIns="0" tIns="0" rIns="0" bIns="0" anchor="t">
             <a:spAutoFit/>
           </a:bodyPr>
           <a:lstStyle/>
@@ -11606,6 +12327,12 @@
               </a:rPr>
               <a:t>19</a:t>
             </a:r>
+            <a:endParaRPr sz="1100" b="1" i="0">
+              <a:solidFill>
+                <a:srgbClr val="F8FAFC"/>
+              </a:solidFill>
+              <a:latin typeface="Aptos"/>
+            </a:endParaRPr>
           </a:p>
         </p:txBody>
       </p:sp>
@@ -11618,7 +12345,7 @@
 </file>
 
 <file path=ppt/slides/slide2.xml><?xml version="1.0" encoding="utf-8"?>
-<p:sld xmlns:a="http://schemas.openxmlformats.org/drawingml/2006/main" xmlns:p="http://schemas.openxmlformats.org/presentationml/2006/main" xmlns:r="http://schemas.openxmlformats.org/officeDocument/2006/relationships">
+<p:sld xmlns:a="http://schemas.openxmlformats.org/drawingml/2006/main" xmlns:r="http://schemas.openxmlformats.org/officeDocument/2006/relationships" xmlns:p="http://schemas.openxmlformats.org/presentationml/2006/main">
   <p:cSld>
     <p:spTree>
       <p:nvGrpSpPr>
@@ -11636,7 +12363,7 @@
           <p:nvPr/>
         </p:nvPicPr>
         <p:blipFill>
-          <a:blip r:embed="rId2"/>
+          <a:blip r:embed="rId1"/>
           <a:stretch>
             <a:fillRect/>
           </a:stretch>
@@ -11668,7 +12395,7 @@
           <a:noFill/>
         </p:spPr>
         <p:txBody>
-          <a:bodyPr wrap="square" lIns="0" rIns="0" tIns="0" bIns="0" anchor="t">
+          <a:bodyPr wrap="square" lIns="0" tIns="0" rIns="0" bIns="0" anchor="t">
             <a:spAutoFit/>
           </a:bodyPr>
           <a:lstStyle/>
@@ -11687,6 +12414,12 @@
               </a:rPr>
               <a:t>PAIN POINTS</a:t>
             </a:r>
+            <a:endParaRPr sz="1200" b="1" i="0">
+              <a:solidFill>
+                <a:srgbClr val="4F6EF7"/>
+              </a:solidFill>
+              <a:latin typeface="Aptos"/>
+            </a:endParaRPr>
           </a:p>
         </p:txBody>
       </p:sp>
@@ -11750,7 +12483,7 @@
           <a:noFill/>
         </p:spPr>
         <p:txBody>
-          <a:bodyPr wrap="square" lIns="0" rIns="0" tIns="0" bIns="0" anchor="t">
+          <a:bodyPr wrap="square" lIns="0" tIns="0" rIns="0" bIns="0" anchor="t">
             <a:spAutoFit/>
           </a:bodyPr>
           <a:lstStyle/>
@@ -11765,10 +12498,16 @@
                 <a:solidFill>
                   <a:srgbClr val="102A43"/>
                 </a:solidFill>
-                <a:latin typeface="Microsoft YaHei"/>
+                <a:latin typeface="微软雅黑"/>
               </a:rPr>
               <a:t>问题背景与需求洞察</a:t>
             </a:r>
+            <a:endParaRPr sz="2800" b="1" i="0">
+              <a:solidFill>
+                <a:srgbClr val="102A43"/>
+              </a:solidFill>
+              <a:latin typeface="微软雅黑"/>
+            </a:endParaRPr>
           </a:p>
         </p:txBody>
       </p:sp>
@@ -11789,7 +12528,7 @@
           <a:noFill/>
         </p:spPr>
         <p:txBody>
-          <a:bodyPr wrap="square" lIns="0" rIns="0" tIns="0" bIns="0" anchor="t">
+          <a:bodyPr wrap="square" lIns="0" tIns="0" rIns="0" bIns="0" anchor="t">
             <a:spAutoFit/>
           </a:bodyPr>
           <a:lstStyle/>
@@ -11804,10 +12543,16 @@
                 <a:solidFill>
                   <a:srgbClr val="62748A"/>
                 </a:solidFill>
-                <a:latin typeface="Microsoft YaHei"/>
+                <a:latin typeface="微软雅黑"/>
               </a:rPr>
               <a:t>从单点刷题工具走向完整学习闭环，是本作品的切入点。</a:t>
             </a:r>
+            <a:endParaRPr sz="1350" b="0" i="0">
+              <a:solidFill>
+                <a:srgbClr val="62748A"/>
+              </a:solidFill>
+              <a:latin typeface="微软雅黑"/>
+            </a:endParaRPr>
           </a:p>
         </p:txBody>
       </p:sp>
@@ -11918,7 +12663,7 @@
           <a:noFill/>
         </p:spPr>
         <p:txBody>
-          <a:bodyPr wrap="square" lIns="0" rIns="0" tIns="0" bIns="0" anchor="t">
+          <a:bodyPr wrap="square" lIns="0" tIns="0" rIns="0" bIns="0" anchor="t">
             <a:spAutoFit/>
           </a:bodyPr>
           <a:lstStyle/>
@@ -11937,6 +12682,12 @@
               </a:rPr>
               <a:t>1</a:t>
             </a:r>
+            <a:endParaRPr sz="1200" b="1" i="0">
+              <a:solidFill>
+                <a:srgbClr val="FFFFFF"/>
+              </a:solidFill>
+              <a:latin typeface="Aptos"/>
+            </a:endParaRPr>
           </a:p>
         </p:txBody>
       </p:sp>
@@ -11957,7 +12708,7 @@
           <a:noFill/>
         </p:spPr>
         <p:txBody>
-          <a:bodyPr wrap="square" lIns="0" rIns="0" tIns="0" bIns="0" anchor="t">
+          <a:bodyPr wrap="square" lIns="0" tIns="0" rIns="0" bIns="0" anchor="t">
             <a:spAutoFit/>
           </a:bodyPr>
           <a:lstStyle/>
@@ -11972,10 +12723,16 @@
                 <a:solidFill>
                   <a:srgbClr val="102A43"/>
                 </a:solidFill>
-                <a:latin typeface="Microsoft YaHei"/>
+                <a:latin typeface="微软雅黑"/>
               </a:rPr>
               <a:t>资源分散</a:t>
             </a:r>
+            <a:endParaRPr sz="1400" b="1" i="0">
+              <a:solidFill>
+                <a:srgbClr val="102A43"/>
+              </a:solidFill>
+              <a:latin typeface="微软雅黑"/>
+            </a:endParaRPr>
           </a:p>
         </p:txBody>
       </p:sp>
@@ -11996,7 +12753,7 @@
           <a:noFill/>
         </p:spPr>
         <p:txBody>
-          <a:bodyPr wrap="square" lIns="0" rIns="0" tIns="0" bIns="0" anchor="t">
+          <a:bodyPr wrap="square" lIns="0" tIns="0" rIns="0" bIns="0" anchor="t">
             <a:spAutoFit/>
           </a:bodyPr>
           <a:lstStyle/>
@@ -12011,10 +12768,16 @@
                 <a:solidFill>
                   <a:srgbClr val="62748A"/>
                 </a:solidFill>
-                <a:latin typeface="Microsoft YaHei"/>
+                <a:latin typeface="微软雅黑"/>
               </a:rPr>
               <a:t>公共题库、个人题库、课程练习常常分散存在，难以沉淀为持续可复用的学习资产。</a:t>
             </a:r>
+            <a:endParaRPr sz="1120" b="0" i="0">
+              <a:solidFill>
+                <a:srgbClr val="62748A"/>
+              </a:solidFill>
+              <a:latin typeface="微软雅黑"/>
+            </a:endParaRPr>
           </a:p>
         </p:txBody>
       </p:sp>
@@ -12125,7 +12888,7 @@
           <a:noFill/>
         </p:spPr>
         <p:txBody>
-          <a:bodyPr wrap="square" lIns="0" rIns="0" tIns="0" bIns="0" anchor="t">
+          <a:bodyPr wrap="square" lIns="0" tIns="0" rIns="0" bIns="0" anchor="t">
             <a:spAutoFit/>
           </a:bodyPr>
           <a:lstStyle/>
@@ -12144,6 +12907,12 @@
               </a:rPr>
               <a:t>2</a:t>
             </a:r>
+            <a:endParaRPr sz="1200" b="1" i="0">
+              <a:solidFill>
+                <a:srgbClr val="FFFFFF"/>
+              </a:solidFill>
+              <a:latin typeface="Aptos"/>
+            </a:endParaRPr>
           </a:p>
         </p:txBody>
       </p:sp>
@@ -12164,7 +12933,7 @@
           <a:noFill/>
         </p:spPr>
         <p:txBody>
-          <a:bodyPr wrap="square" lIns="0" rIns="0" tIns="0" bIns="0" anchor="t">
+          <a:bodyPr wrap="square" lIns="0" tIns="0" rIns="0" bIns="0" anchor="t">
             <a:spAutoFit/>
           </a:bodyPr>
           <a:lstStyle/>
@@ -12179,10 +12948,16 @@
                 <a:solidFill>
                   <a:srgbClr val="102A43"/>
                 </a:solidFill>
-                <a:latin typeface="Microsoft YaHei"/>
+                <a:latin typeface="微软雅黑"/>
               </a:rPr>
               <a:t>训练断层</a:t>
             </a:r>
+            <a:endParaRPr sz="1400" b="1" i="0">
+              <a:solidFill>
+                <a:srgbClr val="102A43"/>
+              </a:solidFill>
+              <a:latin typeface="微软雅黑"/>
+            </a:endParaRPr>
           </a:p>
         </p:txBody>
       </p:sp>
@@ -12203,7 +12978,7 @@
           <a:noFill/>
         </p:spPr>
         <p:txBody>
-          <a:bodyPr wrap="square" lIns="0" rIns="0" tIns="0" bIns="0" anchor="t">
+          <a:bodyPr wrap="square" lIns="0" tIns="0" rIns="0" bIns="0" anchor="t">
             <a:spAutoFit/>
           </a:bodyPr>
           <a:lstStyle/>
@@ -12218,10 +12993,16 @@
                 <a:solidFill>
                   <a:srgbClr val="62748A"/>
                 </a:solidFill>
-                <a:latin typeface="Microsoft YaHei"/>
+                <a:latin typeface="微软雅黑"/>
               </a:rPr>
               <a:t>用户能刷题，但难以把练习、考试、错题复盘和阶段统计串成一条连续的成长链路。</a:t>
             </a:r>
+            <a:endParaRPr sz="1120" b="0" i="0">
+              <a:solidFill>
+                <a:srgbClr val="62748A"/>
+              </a:solidFill>
+              <a:latin typeface="微软雅黑"/>
+            </a:endParaRPr>
           </a:p>
         </p:txBody>
       </p:sp>
@@ -12332,7 +13113,7 @@
           <a:noFill/>
         </p:spPr>
         <p:txBody>
-          <a:bodyPr wrap="square" lIns="0" rIns="0" tIns="0" bIns="0" anchor="t">
+          <a:bodyPr wrap="square" lIns="0" tIns="0" rIns="0" bIns="0" anchor="t">
             <a:spAutoFit/>
           </a:bodyPr>
           <a:lstStyle/>
@@ -12351,6 +13132,12 @@
               </a:rPr>
               <a:t>3</a:t>
             </a:r>
+            <a:endParaRPr sz="1200" b="1" i="0">
+              <a:solidFill>
+                <a:srgbClr val="FFFFFF"/>
+              </a:solidFill>
+              <a:latin typeface="Aptos"/>
+            </a:endParaRPr>
           </a:p>
         </p:txBody>
       </p:sp>
@@ -12371,7 +13158,7 @@
           <a:noFill/>
         </p:spPr>
         <p:txBody>
-          <a:bodyPr wrap="square" lIns="0" rIns="0" tIns="0" bIns="0" anchor="t">
+          <a:bodyPr wrap="square" lIns="0" tIns="0" rIns="0" bIns="0" anchor="t">
             <a:spAutoFit/>
           </a:bodyPr>
           <a:lstStyle/>
@@ -12386,10 +13173,16 @@
                 <a:solidFill>
                   <a:srgbClr val="102A43"/>
                 </a:solidFill>
-                <a:latin typeface="Microsoft YaHei"/>
+                <a:latin typeface="微软雅黑"/>
               </a:rPr>
               <a:t>管理割裂</a:t>
             </a:r>
+            <a:endParaRPr sz="1400" b="1" i="0">
+              <a:solidFill>
+                <a:srgbClr val="102A43"/>
+              </a:solidFill>
+              <a:latin typeface="微软雅黑"/>
+            </a:endParaRPr>
           </a:p>
         </p:txBody>
       </p:sp>
@@ -12410,7 +13203,7 @@
           <a:noFill/>
         </p:spPr>
         <p:txBody>
-          <a:bodyPr wrap="square" lIns="0" rIns="0" tIns="0" bIns="0" anchor="t">
+          <a:bodyPr wrap="square" lIns="0" tIns="0" rIns="0" bIns="0" anchor="t">
             <a:spAutoFit/>
           </a:bodyPr>
           <a:lstStyle/>
@@ -12425,10 +13218,16 @@
                 <a:solidFill>
                   <a:srgbClr val="62748A"/>
                 </a:solidFill>
-                <a:latin typeface="Microsoft YaHei"/>
+                <a:latin typeface="微软雅黑"/>
               </a:rPr>
               <a:t>教师或运营侧需要统一的内容管理、数据反馈与社区支撑，传统工具往往只覆盖学习端。</a:t>
             </a:r>
+            <a:endParaRPr sz="1120" b="0" i="0">
+              <a:solidFill>
+                <a:srgbClr val="62748A"/>
+              </a:solidFill>
+              <a:latin typeface="微软雅黑"/>
+            </a:endParaRPr>
           </a:p>
         </p:txBody>
       </p:sp>
@@ -12543,7 +13342,7 @@
           <a:noFill/>
         </p:spPr>
         <p:txBody>
-          <a:bodyPr wrap="square" lIns="0" rIns="0" tIns="0" bIns="0" anchor="t">
+          <a:bodyPr wrap="square" lIns="0" tIns="0" rIns="0" bIns="0" anchor="t">
             <a:spAutoFit/>
           </a:bodyPr>
           <a:lstStyle/>
@@ -12558,10 +13357,16 @@
                 <a:solidFill>
                   <a:srgbClr val="4F6EF7"/>
                 </a:solidFill>
-                <a:latin typeface="Microsoft YaHei"/>
+                <a:latin typeface="微软雅黑"/>
               </a:rPr>
               <a:t>Sak-AI 的回答</a:t>
             </a:r>
+            <a:endParaRPr sz="1150" b="1" i="0">
+              <a:solidFill>
+                <a:srgbClr val="4F6EF7"/>
+              </a:solidFill>
+              <a:latin typeface="微软雅黑"/>
+            </a:endParaRPr>
           </a:p>
         </p:txBody>
       </p:sp>
@@ -12582,7 +13387,7 @@
           <a:noFill/>
         </p:spPr>
         <p:txBody>
-          <a:bodyPr wrap="square" lIns="0" rIns="0" tIns="0" bIns="0" anchor="t">
+          <a:bodyPr wrap="square" lIns="0" tIns="0" rIns="0" bIns="0" anchor="t">
             <a:spAutoFit/>
           </a:bodyPr>
           <a:lstStyle/>
@@ -12603,10 +13408,16 @@
                 <a:solidFill>
                   <a:srgbClr val="102A43"/>
                 </a:solidFill>
-                <a:latin typeface="Microsoft YaHei"/>
+                <a:latin typeface="微软雅黑"/>
               </a:rPr>
               <a:t>以 Web 应用为核心入口，承载完整业务流程。</a:t>
             </a:r>
+            <a:endParaRPr sz="1800" b="1" i="0">
+              <a:solidFill>
+                <a:srgbClr val="102A43"/>
+              </a:solidFill>
+              <a:latin typeface="微软雅黑"/>
+            </a:endParaRPr>
           </a:p>
           <a:p>
             <a:pPr algn="l">
@@ -12625,10 +13436,16 @@
                 <a:solidFill>
                   <a:srgbClr val="17324D"/>
                 </a:solidFill>
-                <a:latin typeface="Microsoft YaHei"/>
+                <a:latin typeface="微软雅黑"/>
               </a:rPr>
               <a:t>• 统一承接题库广场、个人题库、刷题、考试、数据中心、论坛与后台。</a:t>
             </a:r>
+            <a:endParaRPr sz="1300" b="0" i="0">
+              <a:solidFill>
+                <a:srgbClr val="17324D"/>
+              </a:solidFill>
+              <a:latin typeface="微软雅黑"/>
+            </a:endParaRPr>
           </a:p>
           <a:p>
             <a:pPr algn="l">
@@ -12647,10 +13464,16 @@
                 <a:solidFill>
                   <a:srgbClr val="17324D"/>
                 </a:solidFill>
-                <a:latin typeface="Microsoft YaHei"/>
+                <a:latin typeface="微软雅黑"/>
               </a:rPr>
               <a:t>• 通过单仓全栈架构，让学习端与运营端共用一套后端与数据语义。</a:t>
             </a:r>
+            <a:endParaRPr sz="1300" b="0" i="0">
+              <a:solidFill>
+                <a:srgbClr val="17324D"/>
+              </a:solidFill>
+              <a:latin typeface="微软雅黑"/>
+            </a:endParaRPr>
           </a:p>
           <a:p>
             <a:pPr algn="l">
@@ -12669,10 +13492,16 @@
                 <a:solidFill>
                   <a:srgbClr val="17324D"/>
                 </a:solidFill>
-                <a:latin typeface="Microsoft YaHei"/>
+                <a:latin typeface="微软雅黑"/>
               </a:rPr>
               <a:t>• 以微信原生小程序补足移动高频场景，而不是另起一套割裂系统。</a:t>
             </a:r>
+            <a:endParaRPr sz="1300" b="0" i="0">
+              <a:solidFill>
+                <a:srgbClr val="17324D"/>
+              </a:solidFill>
+              <a:latin typeface="微软雅黑"/>
+            </a:endParaRPr>
           </a:p>
           <a:p>
             <a:pPr algn="l">
@@ -12691,10 +13520,16 @@
                 <a:solidFill>
                   <a:srgbClr val="17324D"/>
                 </a:solidFill>
-                <a:latin typeface="Microsoft YaHei"/>
+                <a:latin typeface="微软雅黑"/>
               </a:rPr>
               <a:t>• 以 AI 题目解析增强讲解与复盘体验，提升持续学习效率。</a:t>
             </a:r>
+            <a:endParaRPr sz="1300" b="0" i="0">
+              <a:solidFill>
+                <a:srgbClr val="17324D"/>
+              </a:solidFill>
+              <a:latin typeface="微软雅黑"/>
+            </a:endParaRPr>
           </a:p>
         </p:txBody>
       </p:sp>
@@ -12706,7 +13541,7 @@
         </p:nvSpPr>
         <p:spPr>
           <a:xfrm>
-            <a:off x="4645152" y="5230368"/>
+            <a:off x="4645152" y="5167503"/>
             <a:ext cx="1874519" cy="841248"/>
           </a:xfrm>
           <a:prstGeom prst="roundRect">
@@ -12753,7 +13588,7 @@
         </p:nvSpPr>
         <p:spPr>
           <a:xfrm>
-            <a:off x="4873752" y="5367528"/>
+            <a:off x="4873752" y="5304663"/>
             <a:ext cx="1417319" cy="438912"/>
           </a:xfrm>
           <a:prstGeom prst="rect">
@@ -12762,7 +13597,7 @@
           <a:noFill/>
         </p:spPr>
         <p:txBody>
-          <a:bodyPr wrap="square" lIns="0" rIns="0" tIns="0" bIns="0" anchor="t">
+          <a:bodyPr wrap="square" lIns="0" tIns="0" rIns="0" bIns="0" anchor="t">
             <a:spAutoFit/>
           </a:bodyPr>
           <a:lstStyle/>
@@ -12781,6 +13616,12 @@
               </a:rPr>
               <a:t>Web</a:t>
             </a:r>
+            <a:endParaRPr sz="2400" b="1" i="0">
+              <a:solidFill>
+                <a:srgbClr val="4F6EF7"/>
+              </a:solidFill>
+              <a:latin typeface="Aptos"/>
+            </a:endParaRPr>
           </a:p>
         </p:txBody>
       </p:sp>
@@ -12792,7 +13633,7 @@
         </p:nvSpPr>
         <p:spPr>
           <a:xfrm>
-            <a:off x="4873752" y="5797296"/>
+            <a:off x="4873752" y="5734431"/>
             <a:ext cx="1417319" cy="310896"/>
           </a:xfrm>
           <a:prstGeom prst="rect">
@@ -12801,7 +13642,7 @@
           <a:noFill/>
         </p:spPr>
         <p:txBody>
-          <a:bodyPr wrap="square" lIns="0" rIns="0" tIns="0" bIns="0" anchor="t">
+          <a:bodyPr wrap="square" lIns="0" tIns="0" rIns="0" bIns="0" anchor="t">
             <a:spAutoFit/>
           </a:bodyPr>
           <a:lstStyle/>
@@ -12816,10 +13657,16 @@
                 <a:solidFill>
                   <a:srgbClr val="17324D"/>
                 </a:solidFill>
-                <a:latin typeface="Microsoft YaHei"/>
+                <a:latin typeface="微软雅黑"/>
               </a:rPr>
               <a:t>主体交互端</a:t>
             </a:r>
+            <a:endParaRPr sz="1250" b="1" i="0">
+              <a:solidFill>
+                <a:srgbClr val="17324D"/>
+              </a:solidFill>
+              <a:latin typeface="微软雅黑"/>
+            </a:endParaRPr>
           </a:p>
         </p:txBody>
       </p:sp>
@@ -12831,7 +13678,7 @@
         </p:nvSpPr>
         <p:spPr>
           <a:xfrm>
-            <a:off x="4873752" y="6099048"/>
+            <a:off x="4873752" y="6036183"/>
             <a:ext cx="1417319" cy="256032"/>
           </a:xfrm>
           <a:prstGeom prst="rect">
@@ -12840,7 +13687,7 @@
           <a:noFill/>
         </p:spPr>
         <p:txBody>
-          <a:bodyPr wrap="square" lIns="0" rIns="0" tIns="0" bIns="0" anchor="t">
+          <a:bodyPr wrap="square" lIns="0" tIns="0" rIns="0" bIns="0" anchor="t">
             <a:spAutoFit/>
           </a:bodyPr>
           <a:lstStyle/>
@@ -12855,10 +13702,16 @@
                 <a:solidFill>
                   <a:srgbClr val="62748A"/>
                 </a:solidFill>
-                <a:latin typeface="Microsoft YaHei"/>
+                <a:latin typeface="微软雅黑"/>
               </a:rPr>
               <a:t>SSR + 原生 JS</a:t>
             </a:r>
+            <a:endParaRPr sz="1050" b="0" i="0">
+              <a:solidFill>
+                <a:srgbClr val="62748A"/>
+              </a:solidFill>
+              <a:latin typeface="微软雅黑"/>
+            </a:endParaRPr>
           </a:p>
         </p:txBody>
       </p:sp>
@@ -12870,7 +13723,7 @@
         </p:nvSpPr>
         <p:spPr>
           <a:xfrm>
-            <a:off x="6684264" y="5230368"/>
+            <a:off x="6684264" y="5167503"/>
             <a:ext cx="1874519" cy="841248"/>
           </a:xfrm>
           <a:prstGeom prst="roundRect">
@@ -12917,7 +13770,7 @@
         </p:nvSpPr>
         <p:spPr>
           <a:xfrm>
-            <a:off x="6912864" y="5367528"/>
+            <a:off x="6912864" y="5304663"/>
             <a:ext cx="1417319" cy="438912"/>
           </a:xfrm>
           <a:prstGeom prst="rect">
@@ -12926,7 +13779,7 @@
           <a:noFill/>
         </p:spPr>
         <p:txBody>
-          <a:bodyPr wrap="square" lIns="0" rIns="0" tIns="0" bIns="0" anchor="t">
+          <a:bodyPr wrap="square" lIns="0" tIns="0" rIns="0" bIns="0" anchor="t">
             <a:spAutoFit/>
           </a:bodyPr>
           <a:lstStyle/>
@@ -12945,6 +13798,12 @@
               </a:rPr>
               <a:t>Mini</a:t>
             </a:r>
+            <a:endParaRPr sz="2400" b="1" i="0">
+              <a:solidFill>
+                <a:srgbClr val="5BC0BE"/>
+              </a:solidFill>
+              <a:latin typeface="Aptos"/>
+            </a:endParaRPr>
           </a:p>
         </p:txBody>
       </p:sp>
@@ -12956,7 +13815,7 @@
         </p:nvSpPr>
         <p:spPr>
           <a:xfrm>
-            <a:off x="6912864" y="5797296"/>
+            <a:off x="6912864" y="5734431"/>
             <a:ext cx="1417319" cy="310896"/>
           </a:xfrm>
           <a:prstGeom prst="rect">
@@ -12965,7 +13824,7 @@
           <a:noFill/>
         </p:spPr>
         <p:txBody>
-          <a:bodyPr wrap="square" lIns="0" rIns="0" tIns="0" bIns="0" anchor="t">
+          <a:bodyPr wrap="square" lIns="0" tIns="0" rIns="0" bIns="0" anchor="t">
             <a:spAutoFit/>
           </a:bodyPr>
           <a:lstStyle/>
@@ -12980,10 +13839,16 @@
                 <a:solidFill>
                   <a:srgbClr val="17324D"/>
                 </a:solidFill>
-                <a:latin typeface="Microsoft YaHei"/>
+                <a:latin typeface="微软雅黑"/>
               </a:rPr>
               <a:t>移动延展端</a:t>
             </a:r>
+            <a:endParaRPr sz="1250" b="1" i="0">
+              <a:solidFill>
+                <a:srgbClr val="17324D"/>
+              </a:solidFill>
+              <a:latin typeface="微软雅黑"/>
+            </a:endParaRPr>
           </a:p>
         </p:txBody>
       </p:sp>
@@ -12995,7 +13860,7 @@
         </p:nvSpPr>
         <p:spPr>
           <a:xfrm>
-            <a:off x="6912864" y="6099048"/>
+            <a:off x="6912864" y="6036183"/>
             <a:ext cx="1417319" cy="256032"/>
           </a:xfrm>
           <a:prstGeom prst="rect">
@@ -13004,7 +13869,7 @@
           <a:noFill/>
         </p:spPr>
         <p:txBody>
-          <a:bodyPr wrap="square" lIns="0" rIns="0" tIns="0" bIns="0" anchor="t">
+          <a:bodyPr wrap="square" lIns="0" tIns="0" rIns="0" bIns="0" anchor="t">
             <a:spAutoFit/>
           </a:bodyPr>
           <a:lstStyle/>
@@ -13019,10 +13884,16 @@
                 <a:solidFill>
                   <a:srgbClr val="62748A"/>
                 </a:solidFill>
-                <a:latin typeface="Microsoft YaHei"/>
+                <a:latin typeface="微软雅黑"/>
               </a:rPr>
               <a:t>微信原生 TS</a:t>
             </a:r>
+            <a:endParaRPr sz="1050" b="0" i="0">
+              <a:solidFill>
+                <a:srgbClr val="62748A"/>
+              </a:solidFill>
+              <a:latin typeface="微软雅黑"/>
+            </a:endParaRPr>
           </a:p>
         </p:txBody>
       </p:sp>
@@ -13034,7 +13905,7 @@
         </p:nvSpPr>
         <p:spPr>
           <a:xfrm>
-            <a:off x="8723376" y="5230368"/>
+            <a:off x="8723376" y="5167503"/>
             <a:ext cx="1874519" cy="841248"/>
           </a:xfrm>
           <a:prstGeom prst="roundRect">
@@ -13081,7 +13952,7 @@
         </p:nvSpPr>
         <p:spPr>
           <a:xfrm>
-            <a:off x="8951976" y="5367528"/>
+            <a:off x="8951976" y="5304663"/>
             <a:ext cx="1417319" cy="438912"/>
           </a:xfrm>
           <a:prstGeom prst="rect">
@@ -13090,7 +13961,7 @@
           <a:noFill/>
         </p:spPr>
         <p:txBody>
-          <a:bodyPr wrap="square" lIns="0" rIns="0" tIns="0" bIns="0" anchor="t">
+          <a:bodyPr wrap="square" lIns="0" tIns="0" rIns="0" bIns="0" anchor="t">
             <a:spAutoFit/>
           </a:bodyPr>
           <a:lstStyle/>
@@ -13109,6 +13980,12 @@
               </a:rPr>
               <a:t>AI</a:t>
             </a:r>
+            <a:endParaRPr sz="2400" b="1" i="0">
+              <a:solidFill>
+                <a:srgbClr val="D6B36A"/>
+              </a:solidFill>
+              <a:latin typeface="Aptos"/>
+            </a:endParaRPr>
           </a:p>
         </p:txBody>
       </p:sp>
@@ -13120,7 +13997,7 @@
         </p:nvSpPr>
         <p:spPr>
           <a:xfrm>
-            <a:off x="8951976" y="5797296"/>
+            <a:off x="8951976" y="5734431"/>
             <a:ext cx="1417319" cy="310896"/>
           </a:xfrm>
           <a:prstGeom prst="rect">
@@ -13129,7 +14006,7 @@
           <a:noFill/>
         </p:spPr>
         <p:txBody>
-          <a:bodyPr wrap="square" lIns="0" rIns="0" tIns="0" bIns="0" anchor="t">
+          <a:bodyPr wrap="square" lIns="0" tIns="0" rIns="0" bIns="0" anchor="t">
             <a:spAutoFit/>
           </a:bodyPr>
           <a:lstStyle/>
@@ -13144,10 +14021,16 @@
                 <a:solidFill>
                   <a:srgbClr val="17324D"/>
                 </a:solidFill>
-                <a:latin typeface="Microsoft YaHei"/>
+                <a:latin typeface="微软雅黑"/>
               </a:rPr>
               <a:t>辅助增强</a:t>
             </a:r>
+            <a:endParaRPr sz="1250" b="1" i="0">
+              <a:solidFill>
+                <a:srgbClr val="17324D"/>
+              </a:solidFill>
+              <a:latin typeface="微软雅黑"/>
+            </a:endParaRPr>
           </a:p>
         </p:txBody>
       </p:sp>
@@ -13159,7 +14042,7 @@
         </p:nvSpPr>
         <p:spPr>
           <a:xfrm>
-            <a:off x="8951976" y="6099048"/>
+            <a:off x="8951976" y="6036183"/>
             <a:ext cx="1417319" cy="256032"/>
           </a:xfrm>
           <a:prstGeom prst="rect">
@@ -13168,7 +14051,7 @@
           <a:noFill/>
         </p:spPr>
         <p:txBody>
-          <a:bodyPr wrap="square" lIns="0" rIns="0" tIns="0" bIns="0" anchor="t">
+          <a:bodyPr wrap="square" lIns="0" tIns="0" rIns="0" bIns="0" anchor="t">
             <a:spAutoFit/>
           </a:bodyPr>
           <a:lstStyle/>
@@ -13183,10 +14066,16 @@
                 <a:solidFill>
                   <a:srgbClr val="62748A"/>
                 </a:solidFill>
-                <a:latin typeface="Microsoft YaHei"/>
+                <a:latin typeface="微软雅黑"/>
               </a:rPr>
               <a:t>题目解析与学习说明</a:t>
             </a:r>
+            <a:endParaRPr sz="1050" b="0" i="0">
+              <a:solidFill>
+                <a:srgbClr val="62748A"/>
+              </a:solidFill>
+              <a:latin typeface="微软雅黑"/>
+            </a:endParaRPr>
           </a:p>
         </p:txBody>
       </p:sp>
@@ -13207,7 +14096,7 @@
           <a:noFill/>
         </p:spPr>
         <p:txBody>
-          <a:bodyPr wrap="square" lIns="0" rIns="0" tIns="0" bIns="0" anchor="t">
+          <a:bodyPr wrap="square" lIns="0" tIns="0" rIns="0" bIns="0" anchor="t">
             <a:spAutoFit/>
           </a:bodyPr>
           <a:lstStyle/>
@@ -13226,6 +14115,12 @@
               </a:rPr>
               <a:t>Sak-AI答题助手｜答辩演示</a:t>
             </a:r>
+            <a:endParaRPr sz="950" b="0" i="0">
+              <a:solidFill>
+                <a:srgbClr val="94A3B8"/>
+              </a:solidFill>
+              <a:latin typeface="Aptos"/>
+            </a:endParaRPr>
           </a:p>
         </p:txBody>
       </p:sp>
@@ -13246,7 +14141,7 @@
           <a:noFill/>
         </p:spPr>
         <p:txBody>
-          <a:bodyPr wrap="square" lIns="0" rIns="0" tIns="0" bIns="0" anchor="t">
+          <a:bodyPr wrap="square" lIns="0" tIns="0" rIns="0" bIns="0" anchor="t">
             <a:spAutoFit/>
           </a:bodyPr>
           <a:lstStyle/>
@@ -13265,6 +14160,12 @@
               </a:rPr>
               <a:t>02</a:t>
             </a:r>
+            <a:endParaRPr sz="1100" b="1" i="0">
+              <a:solidFill>
+                <a:srgbClr val="17324D"/>
+              </a:solidFill>
+              <a:latin typeface="Aptos"/>
+            </a:endParaRPr>
           </a:p>
         </p:txBody>
       </p:sp>
@@ -13277,7 +14178,7 @@
 </file>
 
 <file path=ppt/slides/slide3.xml><?xml version="1.0" encoding="utf-8"?>
-<p:sld xmlns:a="http://schemas.openxmlformats.org/drawingml/2006/main" xmlns:p="http://schemas.openxmlformats.org/presentationml/2006/main" xmlns:r="http://schemas.openxmlformats.org/officeDocument/2006/relationships">
+<p:sld xmlns:a="http://schemas.openxmlformats.org/drawingml/2006/main" xmlns:r="http://schemas.openxmlformats.org/officeDocument/2006/relationships" xmlns:p="http://schemas.openxmlformats.org/presentationml/2006/main">
   <p:cSld>
     <p:spTree>
       <p:nvGrpSpPr>
@@ -13295,7 +14196,7 @@
           <p:nvPr/>
         </p:nvPicPr>
         <p:blipFill>
-          <a:blip r:embed="rId2"/>
+          <a:blip r:embed="rId1"/>
           <a:stretch>
             <a:fillRect/>
           </a:stretch>
@@ -13327,7 +14228,7 @@
           <a:noFill/>
         </p:spPr>
         <p:txBody>
-          <a:bodyPr wrap="square" lIns="0" rIns="0" tIns="0" bIns="0" anchor="t">
+          <a:bodyPr wrap="square" lIns="0" tIns="0" rIns="0" bIns="0" anchor="t">
             <a:spAutoFit/>
           </a:bodyPr>
           <a:lstStyle/>
@@ -13346,6 +14247,12 @@
               </a:rPr>
               <a:t>POSITIONING</a:t>
             </a:r>
+            <a:endParaRPr sz="1200" b="1" i="0">
+              <a:solidFill>
+                <a:srgbClr val="4F6EF7"/>
+              </a:solidFill>
+              <a:latin typeface="Aptos"/>
+            </a:endParaRPr>
           </a:p>
         </p:txBody>
       </p:sp>
@@ -13400,16 +14307,16 @@
         </p:nvSpPr>
         <p:spPr>
           <a:xfrm>
-            <a:off x="658368" y="914400"/>
-            <a:ext cx="6217920" cy="530352"/>
-          </a:xfrm>
-          <a:prstGeom prst="rect">
-            <a:avLst/>
-          </a:prstGeom>
-          <a:noFill/>
-        </p:spPr>
-        <p:txBody>
-          <a:bodyPr wrap="square" lIns="0" rIns="0" tIns="0" bIns="0" anchor="t">
+            <a:off x="658495" y="914400"/>
+            <a:ext cx="8132445" cy="494665"/>
+          </a:xfrm>
+          <a:prstGeom prst="rect">
+            <a:avLst/>
+          </a:prstGeom>
+          <a:noFill/>
+        </p:spPr>
+        <p:txBody>
+          <a:bodyPr wrap="square" lIns="0" tIns="0" rIns="0" bIns="0" anchor="t">
             <a:spAutoFit/>
           </a:bodyPr>
           <a:lstStyle/>
@@ -13424,10 +14331,16 @@
                 <a:solidFill>
                   <a:srgbClr val="102A43"/>
                 </a:solidFill>
-                <a:latin typeface="Microsoft YaHei"/>
+                <a:latin typeface="微软雅黑"/>
               </a:rPr>
               <a:t>作品定位：一套系统，服务学习者与管理者</a:t>
             </a:r>
+            <a:endParaRPr sz="2800" b="1" i="0">
+              <a:solidFill>
+                <a:srgbClr val="102A43"/>
+              </a:solidFill>
+              <a:latin typeface="微软雅黑"/>
+            </a:endParaRPr>
           </a:p>
         </p:txBody>
       </p:sp>
@@ -13448,7 +14361,7 @@
           <a:noFill/>
         </p:spPr>
         <p:txBody>
-          <a:bodyPr wrap="square" lIns="0" rIns="0" tIns="0" bIns="0" anchor="t">
+          <a:bodyPr wrap="square" lIns="0" tIns="0" rIns="0" bIns="0" anchor="t">
             <a:spAutoFit/>
           </a:bodyPr>
           <a:lstStyle/>
@@ -13463,10 +14376,16 @@
                 <a:solidFill>
                   <a:srgbClr val="62748A"/>
                 </a:solidFill>
-                <a:latin typeface="Microsoft YaHei"/>
+                <a:latin typeface="微软雅黑"/>
               </a:rPr>
               <a:t>Web 为主、小程序为辅，共享同一后端语义与学习数据。</a:t>
             </a:r>
+            <a:endParaRPr sz="1350" b="0" i="0">
+              <a:solidFill>
+                <a:srgbClr val="62748A"/>
+              </a:solidFill>
+              <a:latin typeface="微软雅黑"/>
+            </a:endParaRPr>
           </a:p>
         </p:txBody>
       </p:sp>
@@ -13581,7 +14500,7 @@
           <a:noFill/>
         </p:spPr>
         <p:txBody>
-          <a:bodyPr wrap="square" lIns="0" rIns="0" tIns="0" bIns="0" anchor="t">
+          <a:bodyPr wrap="square" lIns="0" tIns="0" rIns="0" bIns="0" anchor="t">
             <a:spAutoFit/>
           </a:bodyPr>
           <a:lstStyle/>
@@ -13596,10 +14515,16 @@
                 <a:solidFill>
                   <a:srgbClr val="4F6EF7"/>
                 </a:solidFill>
-                <a:latin typeface="Microsoft YaHei"/>
+                <a:latin typeface="微软雅黑"/>
               </a:rPr>
               <a:t>学习端</a:t>
             </a:r>
+            <a:endParaRPr sz="1250" b="1" i="0">
+              <a:solidFill>
+                <a:srgbClr val="4F6EF7"/>
+              </a:solidFill>
+              <a:latin typeface="微软雅黑"/>
+            </a:endParaRPr>
           </a:p>
         </p:txBody>
       </p:sp>
@@ -13620,7 +14545,7 @@
           <a:noFill/>
         </p:spPr>
         <p:txBody>
-          <a:bodyPr wrap="square" lIns="0" rIns="0" tIns="0" bIns="0" anchor="t">
+          <a:bodyPr wrap="square" lIns="0" tIns="0" rIns="0" bIns="0" anchor="t">
             <a:spAutoFit/>
           </a:bodyPr>
           <a:lstStyle/>
@@ -13641,10 +14566,16 @@
                 <a:solidFill>
                   <a:srgbClr val="102A43"/>
                 </a:solidFill>
-                <a:latin typeface="Microsoft YaHei"/>
+                <a:latin typeface="微软雅黑"/>
               </a:rPr>
               <a:t>题库浏览与沉淀</a:t>
             </a:r>
+            <a:endParaRPr sz="1700" b="1" i="0">
+              <a:solidFill>
+                <a:srgbClr val="102A43"/>
+              </a:solidFill>
+              <a:latin typeface="微软雅黑"/>
+            </a:endParaRPr>
           </a:p>
           <a:p>
             <a:pPr algn="l">
@@ -13663,10 +14594,16 @@
                 <a:solidFill>
                   <a:srgbClr val="62748A"/>
                 </a:solidFill>
-                <a:latin typeface="Microsoft YaHei"/>
+                <a:latin typeface="微软雅黑"/>
               </a:rPr>
               <a:t>公共题库 + 个人题库双线并行，支持加入、整理与长期复用。</a:t>
             </a:r>
+            <a:endParaRPr sz="1260" b="0" i="0">
+              <a:solidFill>
+                <a:srgbClr val="62748A"/>
+              </a:solidFill>
+              <a:latin typeface="微软雅黑"/>
+            </a:endParaRPr>
           </a:p>
           <a:p>
             <a:pPr algn="l">
@@ -13685,10 +14622,16 @@
                 <a:solidFill>
                   <a:srgbClr val="102A43"/>
                 </a:solidFill>
-                <a:latin typeface="Microsoft YaHei"/>
+                <a:latin typeface="微软雅黑"/>
               </a:rPr>
               <a:t>练习与考试闭环</a:t>
             </a:r>
+            <a:endParaRPr sz="1700" b="1" i="0">
+              <a:solidFill>
+                <a:srgbClr val="102A43"/>
+              </a:solidFill>
+              <a:latin typeface="微软雅黑"/>
+            </a:endParaRPr>
           </a:p>
           <a:p>
             <a:pPr algn="l">
@@ -13707,10 +14650,16 @@
                 <a:solidFill>
                   <a:srgbClr val="62748A"/>
                 </a:solidFill>
-                <a:latin typeface="Microsoft YaHei"/>
+                <a:latin typeface="微软雅黑"/>
               </a:rPr>
               <a:t>错题、收藏、用户答案、考试记录与学习进度持续沉淀。</a:t>
             </a:r>
+            <a:endParaRPr sz="1260" b="0" i="0">
+              <a:solidFill>
+                <a:srgbClr val="62748A"/>
+              </a:solidFill>
+              <a:latin typeface="微软雅黑"/>
+            </a:endParaRPr>
           </a:p>
           <a:p>
             <a:pPr algn="l">
@@ -13729,10 +14678,16 @@
                 <a:solidFill>
                   <a:srgbClr val="102A43"/>
                 </a:solidFill>
-                <a:latin typeface="Microsoft YaHei"/>
+                <a:latin typeface="微软雅黑"/>
               </a:rPr>
               <a:t>可视化复盘</a:t>
             </a:r>
+            <a:endParaRPr sz="1700" b="1" i="0">
+              <a:solidFill>
+                <a:srgbClr val="102A43"/>
+              </a:solidFill>
+              <a:latin typeface="微软雅黑"/>
+            </a:endParaRPr>
           </a:p>
           <a:p>
             <a:pPr algn="l">
@@ -13751,10 +14706,16 @@
                 <a:solidFill>
                   <a:srgbClr val="62748A"/>
                 </a:solidFill>
-                <a:latin typeface="Microsoft YaHei"/>
+                <a:latin typeface="微软雅黑"/>
               </a:rPr>
               <a:t>数据中心用趋势图、热力图与能力画像，让反馈可见。</a:t>
             </a:r>
+            <a:endParaRPr sz="1260" b="0" i="0">
+              <a:solidFill>
+                <a:srgbClr val="62748A"/>
+              </a:solidFill>
+              <a:latin typeface="微软雅黑"/>
+            </a:endParaRPr>
           </a:p>
         </p:txBody>
       </p:sp>
@@ -13869,7 +14830,7 @@
           <a:noFill/>
         </p:spPr>
         <p:txBody>
-          <a:bodyPr wrap="square" lIns="0" rIns="0" tIns="0" bIns="0" anchor="t">
+          <a:bodyPr wrap="square" lIns="0" tIns="0" rIns="0" bIns="0" anchor="t">
             <a:spAutoFit/>
           </a:bodyPr>
           <a:lstStyle/>
@@ -13884,10 +14845,16 @@
                 <a:solidFill>
                   <a:srgbClr val="4F6EF7"/>
                 </a:solidFill>
-                <a:latin typeface="Microsoft YaHei"/>
+                <a:latin typeface="微软雅黑"/>
               </a:rPr>
               <a:t>共享语义核心</a:t>
             </a:r>
+            <a:endParaRPr sz="1250" b="1" i="0">
+              <a:solidFill>
+                <a:srgbClr val="4F6EF7"/>
+              </a:solidFill>
+              <a:latin typeface="微软雅黑"/>
+            </a:endParaRPr>
           </a:p>
         </p:txBody>
       </p:sp>
@@ -13953,7 +14920,7 @@
           <a:noFill/>
         </p:spPr>
         <p:txBody>
-          <a:bodyPr wrap="square" lIns="0" rIns="0" tIns="0" bIns="0" anchor="t">
+          <a:bodyPr wrap="square" lIns="0" tIns="0" rIns="0" bIns="0" anchor="t">
             <a:spAutoFit/>
           </a:bodyPr>
           <a:lstStyle/>
@@ -13972,6 +14939,12 @@
               </a:rPr>
               <a:t>01</a:t>
             </a:r>
+            <a:endParaRPr sz="1300" b="1" i="0">
+              <a:solidFill>
+                <a:srgbClr val="FFFFFF"/>
+              </a:solidFill>
+              <a:latin typeface="Aptos"/>
+            </a:endParaRPr>
           </a:p>
         </p:txBody>
       </p:sp>
@@ -13992,7 +14965,7 @@
           <a:noFill/>
         </p:spPr>
         <p:txBody>
-          <a:bodyPr wrap="square" lIns="0" rIns="0" tIns="0" bIns="0" anchor="t">
+          <a:bodyPr wrap="square" lIns="0" tIns="0" rIns="0" bIns="0" anchor="t">
             <a:spAutoFit/>
           </a:bodyPr>
           <a:lstStyle/>
@@ -14007,10 +14980,16 @@
                 <a:solidFill>
                   <a:srgbClr val="102A43"/>
                 </a:solidFill>
-                <a:latin typeface="Microsoft YaHei"/>
+                <a:latin typeface="微软雅黑"/>
               </a:rPr>
               <a:t>题库资源</a:t>
             </a:r>
+            <a:endParaRPr sz="1320" b="1" i="0">
+              <a:solidFill>
+                <a:srgbClr val="102A43"/>
+              </a:solidFill>
+              <a:latin typeface="微软雅黑"/>
+            </a:endParaRPr>
           </a:p>
         </p:txBody>
       </p:sp>
@@ -14031,7 +15010,7 @@
           <a:noFill/>
         </p:spPr>
         <p:txBody>
-          <a:bodyPr wrap="square" lIns="0" rIns="0" tIns="0" bIns="0" anchor="t">
+          <a:bodyPr wrap="square" lIns="0" tIns="0" rIns="0" bIns="0" anchor="t">
             <a:spAutoFit/>
           </a:bodyPr>
           <a:lstStyle/>
@@ -14046,10 +15025,16 @@
                 <a:solidFill>
                   <a:srgbClr val="62748A"/>
                 </a:solidFill>
-                <a:latin typeface="Microsoft YaHei"/>
+                <a:latin typeface="微软雅黑"/>
               </a:rPr>
               <a:t>公共题库 / 个人题库</a:t>
             </a:r>
+            <a:endParaRPr sz="1060" b="0" i="0">
+              <a:solidFill>
+                <a:srgbClr val="62748A"/>
+              </a:solidFill>
+              <a:latin typeface="微软雅黑"/>
+            </a:endParaRPr>
           </a:p>
         </p:txBody>
       </p:sp>
@@ -14158,7 +15143,7 @@
           <a:noFill/>
         </p:spPr>
         <p:txBody>
-          <a:bodyPr wrap="square" lIns="0" rIns="0" tIns="0" bIns="0" anchor="t">
+          <a:bodyPr wrap="square" lIns="0" tIns="0" rIns="0" bIns="0" anchor="t">
             <a:spAutoFit/>
           </a:bodyPr>
           <a:lstStyle/>
@@ -14177,6 +15162,12 @@
               </a:rPr>
               <a:t>02</a:t>
             </a:r>
+            <a:endParaRPr sz="1300" b="1" i="0">
+              <a:solidFill>
+                <a:srgbClr val="FFFFFF"/>
+              </a:solidFill>
+              <a:latin typeface="Aptos"/>
+            </a:endParaRPr>
           </a:p>
         </p:txBody>
       </p:sp>
@@ -14197,7 +15188,7 @@
           <a:noFill/>
         </p:spPr>
         <p:txBody>
-          <a:bodyPr wrap="square" lIns="0" rIns="0" tIns="0" bIns="0" anchor="t">
+          <a:bodyPr wrap="square" lIns="0" tIns="0" rIns="0" bIns="0" anchor="t">
             <a:spAutoFit/>
           </a:bodyPr>
           <a:lstStyle/>
@@ -14212,10 +15203,16 @@
                 <a:solidFill>
                   <a:srgbClr val="102A43"/>
                 </a:solidFill>
-                <a:latin typeface="Microsoft YaHei"/>
+                <a:latin typeface="微软雅黑"/>
               </a:rPr>
               <a:t>刷题训练</a:t>
             </a:r>
+            <a:endParaRPr sz="1320" b="1" i="0">
+              <a:solidFill>
+                <a:srgbClr val="102A43"/>
+              </a:solidFill>
+              <a:latin typeface="微软雅黑"/>
+            </a:endParaRPr>
           </a:p>
         </p:txBody>
       </p:sp>
@@ -14236,7 +15233,7 @@
           <a:noFill/>
         </p:spPr>
         <p:txBody>
-          <a:bodyPr wrap="square" lIns="0" rIns="0" tIns="0" bIns="0" anchor="t">
+          <a:bodyPr wrap="square" lIns="0" tIns="0" rIns="0" bIns="0" anchor="t">
             <a:spAutoFit/>
           </a:bodyPr>
           <a:lstStyle/>
@@ -14251,10 +15248,16 @@
                 <a:solidFill>
                   <a:srgbClr val="62748A"/>
                 </a:solidFill>
-                <a:latin typeface="Microsoft YaHei"/>
+                <a:latin typeface="微软雅黑"/>
               </a:rPr>
               <a:t>答案、收藏、错题、进度</a:t>
             </a:r>
+            <a:endParaRPr sz="1060" b="0" i="0">
+              <a:solidFill>
+                <a:srgbClr val="62748A"/>
+              </a:solidFill>
+              <a:latin typeface="微软雅黑"/>
+            </a:endParaRPr>
           </a:p>
         </p:txBody>
       </p:sp>
@@ -14363,7 +15366,7 @@
           <a:noFill/>
         </p:spPr>
         <p:txBody>
-          <a:bodyPr wrap="square" lIns="0" rIns="0" tIns="0" bIns="0" anchor="t">
+          <a:bodyPr wrap="square" lIns="0" tIns="0" rIns="0" bIns="0" anchor="t">
             <a:spAutoFit/>
           </a:bodyPr>
           <a:lstStyle/>
@@ -14382,6 +15385,12 @@
               </a:rPr>
               <a:t>03</a:t>
             </a:r>
+            <a:endParaRPr sz="1300" b="1" i="0">
+              <a:solidFill>
+                <a:srgbClr val="FFFFFF"/>
+              </a:solidFill>
+              <a:latin typeface="Aptos"/>
+            </a:endParaRPr>
           </a:p>
         </p:txBody>
       </p:sp>
@@ -14402,7 +15411,7 @@
           <a:noFill/>
         </p:spPr>
         <p:txBody>
-          <a:bodyPr wrap="square" lIns="0" rIns="0" tIns="0" bIns="0" anchor="t">
+          <a:bodyPr wrap="square" lIns="0" tIns="0" rIns="0" bIns="0" anchor="t">
             <a:spAutoFit/>
           </a:bodyPr>
           <a:lstStyle/>
@@ -14417,10 +15426,16 @@
                 <a:solidFill>
                   <a:srgbClr val="102A43"/>
                 </a:solidFill>
-                <a:latin typeface="Microsoft YaHei"/>
+                <a:latin typeface="微软雅黑"/>
               </a:rPr>
               <a:t>考试评估</a:t>
             </a:r>
+            <a:endParaRPr sz="1320" b="1" i="0">
+              <a:solidFill>
+                <a:srgbClr val="102A43"/>
+              </a:solidFill>
+              <a:latin typeface="微软雅黑"/>
+            </a:endParaRPr>
           </a:p>
         </p:txBody>
       </p:sp>
@@ -14441,7 +15456,7 @@
           <a:noFill/>
         </p:spPr>
         <p:txBody>
-          <a:bodyPr wrap="square" lIns="0" rIns="0" tIns="0" bIns="0" anchor="t">
+          <a:bodyPr wrap="square" lIns="0" tIns="0" rIns="0" bIns="0" anchor="t">
             <a:spAutoFit/>
           </a:bodyPr>
           <a:lstStyle/>
@@ -14456,10 +15471,16 @@
                 <a:solidFill>
                   <a:srgbClr val="62748A"/>
                 </a:solidFill>
-                <a:latin typeface="Microsoft YaHei"/>
+                <a:latin typeface="微软雅黑"/>
               </a:rPr>
               <a:t>模拟考试与结果沉淀</a:t>
             </a:r>
+            <a:endParaRPr sz="1060" b="0" i="0">
+              <a:solidFill>
+                <a:srgbClr val="62748A"/>
+              </a:solidFill>
+              <a:latin typeface="微软雅黑"/>
+            </a:endParaRPr>
           </a:p>
         </p:txBody>
       </p:sp>
@@ -14568,7 +15589,7 @@
           <a:noFill/>
         </p:spPr>
         <p:txBody>
-          <a:bodyPr wrap="square" lIns="0" rIns="0" tIns="0" bIns="0" anchor="t">
+          <a:bodyPr wrap="square" lIns="0" tIns="0" rIns="0" bIns="0" anchor="t">
             <a:spAutoFit/>
           </a:bodyPr>
           <a:lstStyle/>
@@ -14587,6 +15608,12 @@
               </a:rPr>
               <a:t>04</a:t>
             </a:r>
+            <a:endParaRPr sz="1300" b="1" i="0">
+              <a:solidFill>
+                <a:srgbClr val="FFFFFF"/>
+              </a:solidFill>
+              <a:latin typeface="Aptos"/>
+            </a:endParaRPr>
           </a:p>
         </p:txBody>
       </p:sp>
@@ -14607,7 +15634,7 @@
           <a:noFill/>
         </p:spPr>
         <p:txBody>
-          <a:bodyPr wrap="square" lIns="0" rIns="0" tIns="0" bIns="0" anchor="t">
+          <a:bodyPr wrap="square" lIns="0" tIns="0" rIns="0" bIns="0" anchor="t">
             <a:spAutoFit/>
           </a:bodyPr>
           <a:lstStyle/>
@@ -14622,10 +15649,16 @@
                 <a:solidFill>
                   <a:srgbClr val="102A43"/>
                 </a:solidFill>
-                <a:latin typeface="Microsoft YaHei"/>
+                <a:latin typeface="微软雅黑"/>
               </a:rPr>
               <a:t>数据复盘</a:t>
             </a:r>
+            <a:endParaRPr sz="1320" b="1" i="0">
+              <a:solidFill>
+                <a:srgbClr val="102A43"/>
+              </a:solidFill>
+              <a:latin typeface="微软雅黑"/>
+            </a:endParaRPr>
           </a:p>
         </p:txBody>
       </p:sp>
@@ -14646,7 +15679,7 @@
           <a:noFill/>
         </p:spPr>
         <p:txBody>
-          <a:bodyPr wrap="square" lIns="0" rIns="0" tIns="0" bIns="0" anchor="t">
+          <a:bodyPr wrap="square" lIns="0" tIns="0" rIns="0" bIns="0" anchor="t">
             <a:spAutoFit/>
           </a:bodyPr>
           <a:lstStyle/>
@@ -14661,10 +15694,16 @@
                 <a:solidFill>
                   <a:srgbClr val="62748A"/>
                 </a:solidFill>
-                <a:latin typeface="Microsoft YaHei"/>
+                <a:latin typeface="微软雅黑"/>
               </a:rPr>
               <a:t>趋势、热力图、能力画像</a:t>
             </a:r>
+            <a:endParaRPr sz="1060" b="0" i="0">
+              <a:solidFill>
+                <a:srgbClr val="62748A"/>
+              </a:solidFill>
+              <a:latin typeface="微软雅黑"/>
+            </a:endParaRPr>
           </a:p>
         </p:txBody>
       </p:sp>
@@ -14779,7 +15818,7 @@
           <a:noFill/>
         </p:spPr>
         <p:txBody>
-          <a:bodyPr wrap="square" lIns="0" rIns="0" tIns="0" bIns="0" anchor="t">
+          <a:bodyPr wrap="square" lIns="0" tIns="0" rIns="0" bIns="0" anchor="t">
             <a:spAutoFit/>
           </a:bodyPr>
           <a:lstStyle/>
@@ -14794,10 +15833,16 @@
                 <a:solidFill>
                   <a:srgbClr val="34A58D"/>
                 </a:solidFill>
-                <a:latin typeface="Microsoft YaHei"/>
+                <a:latin typeface="微软雅黑"/>
               </a:rPr>
               <a:t>运营端</a:t>
             </a:r>
+            <a:endParaRPr sz="1250" b="1" i="0">
+              <a:solidFill>
+                <a:srgbClr val="34A58D"/>
+              </a:solidFill>
+              <a:latin typeface="微软雅黑"/>
+            </a:endParaRPr>
           </a:p>
         </p:txBody>
       </p:sp>
@@ -14818,7 +15863,7 @@
           <a:noFill/>
         </p:spPr>
         <p:txBody>
-          <a:bodyPr wrap="square" lIns="0" rIns="0" tIns="0" bIns="0" anchor="t">
+          <a:bodyPr wrap="square" lIns="0" tIns="0" rIns="0" bIns="0" anchor="t">
             <a:spAutoFit/>
           </a:bodyPr>
           <a:lstStyle/>
@@ -14839,10 +15884,16 @@
                 <a:solidFill>
                   <a:srgbClr val="102A43"/>
                 </a:solidFill>
-                <a:latin typeface="Microsoft YaHei"/>
+                <a:latin typeface="微软雅黑"/>
               </a:rPr>
               <a:t>论坛互动</a:t>
             </a:r>
+            <a:endParaRPr sz="1700" b="1" i="0">
+              <a:solidFill>
+                <a:srgbClr val="102A43"/>
+              </a:solidFill>
+              <a:latin typeface="微软雅黑"/>
+            </a:endParaRPr>
           </a:p>
           <a:p>
             <a:pPr algn="l">
@@ -14861,10 +15912,16 @@
                 <a:solidFill>
                   <a:srgbClr val="62748A"/>
                 </a:solidFill>
-                <a:latin typeface="Microsoft YaHei"/>
+                <a:latin typeface="微软雅黑"/>
               </a:rPr>
               <a:t>支持帖子浏览、交流讨论与学习社区沉淀。</a:t>
             </a:r>
+            <a:endParaRPr sz="1240" b="0" i="0">
+              <a:solidFill>
+                <a:srgbClr val="62748A"/>
+              </a:solidFill>
+              <a:latin typeface="微软雅黑"/>
+            </a:endParaRPr>
           </a:p>
           <a:p>
             <a:pPr algn="l">
@@ -14883,10 +15940,16 @@
                 <a:solidFill>
                   <a:srgbClr val="102A43"/>
                 </a:solidFill>
-                <a:latin typeface="Microsoft YaHei"/>
+                <a:latin typeface="微软雅黑"/>
               </a:rPr>
               <a:t>后台管理</a:t>
             </a:r>
+            <a:endParaRPr sz="1700" b="1" i="0">
+              <a:solidFill>
+                <a:srgbClr val="102A43"/>
+              </a:solidFill>
+              <a:latin typeface="微软雅黑"/>
+            </a:endParaRPr>
           </a:p>
           <a:p>
             <a:pPr algn="l">
@@ -14905,10 +15968,16 @@
                 <a:solidFill>
                   <a:srgbClr val="62748A"/>
                 </a:solidFill>
-                <a:latin typeface="Microsoft YaHei"/>
+                <a:latin typeface="微软雅黑"/>
               </a:rPr>
               <a:t>题目、科目、用户与系统数据可统一查看与管理。</a:t>
             </a:r>
+            <a:endParaRPr sz="1240" b="0" i="0">
+              <a:solidFill>
+                <a:srgbClr val="62748A"/>
+              </a:solidFill>
+              <a:latin typeface="微软雅黑"/>
+            </a:endParaRPr>
           </a:p>
           <a:p>
             <a:pPr algn="l">
@@ -14927,10 +15996,16 @@
                 <a:solidFill>
                   <a:srgbClr val="102A43"/>
                 </a:solidFill>
-                <a:latin typeface="Microsoft YaHei"/>
+                <a:latin typeface="微软雅黑"/>
               </a:rPr>
               <a:t>移动延展</a:t>
             </a:r>
+            <a:endParaRPr sz="1700" b="1" i="0">
+              <a:solidFill>
+                <a:srgbClr val="102A43"/>
+              </a:solidFill>
+              <a:latin typeface="微软雅黑"/>
+            </a:endParaRPr>
           </a:p>
           <a:p>
             <a:pPr algn="l">
@@ -14949,10 +16024,16 @@
                 <a:solidFill>
                   <a:srgbClr val="62748A"/>
                 </a:solidFill>
-                <a:latin typeface="Microsoft YaHei"/>
+                <a:latin typeface="微软雅黑"/>
               </a:rPr>
               <a:t>微信小程序基于同一后端语义，承接随时随地学习场景。</a:t>
             </a:r>
+            <a:endParaRPr sz="1240" b="0" i="0">
+              <a:solidFill>
+                <a:srgbClr val="62748A"/>
+              </a:solidFill>
+              <a:latin typeface="微软雅黑"/>
+            </a:endParaRPr>
           </a:p>
         </p:txBody>
       </p:sp>
@@ -14973,7 +16054,7 @@
           <a:noFill/>
         </p:spPr>
         <p:txBody>
-          <a:bodyPr wrap="square" lIns="0" rIns="0" tIns="0" bIns="0" anchor="t">
+          <a:bodyPr wrap="square" lIns="0" tIns="0" rIns="0" bIns="0" anchor="t">
             <a:spAutoFit/>
           </a:bodyPr>
           <a:lstStyle/>
@@ -14992,6 +16073,12 @@
               </a:rPr>
               <a:t>Sak-AI答题助手｜答辩演示</a:t>
             </a:r>
+            <a:endParaRPr sz="950" b="0" i="0">
+              <a:solidFill>
+                <a:srgbClr val="94A3B8"/>
+              </a:solidFill>
+              <a:latin typeface="Aptos"/>
+            </a:endParaRPr>
           </a:p>
         </p:txBody>
       </p:sp>
@@ -15012,7 +16099,7 @@
           <a:noFill/>
         </p:spPr>
         <p:txBody>
-          <a:bodyPr wrap="square" lIns="0" rIns="0" tIns="0" bIns="0" anchor="t">
+          <a:bodyPr wrap="square" lIns="0" tIns="0" rIns="0" bIns="0" anchor="t">
             <a:spAutoFit/>
           </a:bodyPr>
           <a:lstStyle/>
@@ -15031,6 +16118,12 @@
               </a:rPr>
               <a:t>03</a:t>
             </a:r>
+            <a:endParaRPr sz="1100" b="1" i="0">
+              <a:solidFill>
+                <a:srgbClr val="17324D"/>
+              </a:solidFill>
+              <a:latin typeface="Aptos"/>
+            </a:endParaRPr>
           </a:p>
         </p:txBody>
       </p:sp>
@@ -15043,7 +16136,7 @@
 </file>
 
 <file path=ppt/slides/slide4.xml><?xml version="1.0" encoding="utf-8"?>
-<p:sld xmlns:a="http://schemas.openxmlformats.org/drawingml/2006/main" xmlns:p="http://schemas.openxmlformats.org/presentationml/2006/main" xmlns:r="http://schemas.openxmlformats.org/officeDocument/2006/relationships">
+<p:sld xmlns:a="http://schemas.openxmlformats.org/drawingml/2006/main" xmlns:r="http://schemas.openxmlformats.org/officeDocument/2006/relationships" xmlns:p="http://schemas.openxmlformats.org/presentationml/2006/main">
   <p:cSld>
     <p:spTree>
       <p:nvGrpSpPr>
@@ -15061,7 +16154,7 @@
           <p:nvPr/>
         </p:nvPicPr>
         <p:blipFill>
-          <a:blip r:embed="rId2"/>
+          <a:blip r:embed="rId1"/>
           <a:stretch>
             <a:fillRect/>
           </a:stretch>
@@ -15093,7 +16186,7 @@
           <a:noFill/>
         </p:spPr>
         <p:txBody>
-          <a:bodyPr wrap="square" lIns="0" rIns="0" tIns="0" bIns="0" anchor="t">
+          <a:bodyPr wrap="square" lIns="0" tIns="0" rIns="0" bIns="0" anchor="t">
             <a:spAutoFit/>
           </a:bodyPr>
           <a:lstStyle/>
@@ -15112,6 +16205,12 @@
               </a:rPr>
               <a:t>ARCHITECTURE</a:t>
             </a:r>
+            <a:endParaRPr sz="1200" b="1" i="0">
+              <a:solidFill>
+                <a:srgbClr val="C7D2FE"/>
+              </a:solidFill>
+              <a:latin typeface="Aptos"/>
+            </a:endParaRPr>
           </a:p>
         </p:txBody>
       </p:sp>
@@ -15166,16 +16265,16 @@
         </p:nvSpPr>
         <p:spPr>
           <a:xfrm>
-            <a:off x="658368" y="914400"/>
-            <a:ext cx="6217920" cy="530352"/>
-          </a:xfrm>
-          <a:prstGeom prst="rect">
-            <a:avLst/>
-          </a:prstGeom>
-          <a:noFill/>
-        </p:spPr>
-        <p:txBody>
-          <a:bodyPr wrap="square" lIns="0" rIns="0" tIns="0" bIns="0" anchor="t">
+            <a:off x="658495" y="914400"/>
+            <a:ext cx="8275320" cy="494665"/>
+          </a:xfrm>
+          <a:prstGeom prst="rect">
+            <a:avLst/>
+          </a:prstGeom>
+          <a:noFill/>
+        </p:spPr>
+        <p:txBody>
+          <a:bodyPr wrap="square" lIns="0" tIns="0" rIns="0" bIns="0" anchor="t">
             <a:spAutoFit/>
           </a:bodyPr>
           <a:lstStyle/>
@@ -15190,10 +16289,16 @@
                 <a:solidFill>
                   <a:srgbClr val="FFFFFF"/>
                 </a:solidFill>
-                <a:latin typeface="Microsoft YaHei"/>
+                <a:latin typeface="微软雅黑"/>
               </a:rPr>
               <a:t>系统架构：单仓全栈、双端共享、容器化可复现</a:t>
             </a:r>
+            <a:endParaRPr sz="2800" b="1" i="0">
+              <a:solidFill>
+                <a:srgbClr val="FFFFFF"/>
+              </a:solidFill>
+              <a:latin typeface="微软雅黑"/>
+            </a:endParaRPr>
           </a:p>
         </p:txBody>
       </p:sp>
@@ -15214,7 +16319,7 @@
           <a:noFill/>
         </p:spPr>
         <p:txBody>
-          <a:bodyPr wrap="square" lIns="0" rIns="0" tIns="0" bIns="0" anchor="t">
+          <a:bodyPr wrap="square" lIns="0" tIns="0" rIns="0" bIns="0" anchor="t">
             <a:spAutoFit/>
           </a:bodyPr>
           <a:lstStyle/>
@@ -15229,10 +16334,16 @@
                 <a:solidFill>
                   <a:srgbClr val="D9E5F5"/>
                 </a:solidFill>
-                <a:latin typeface="Microsoft YaHei"/>
+                <a:latin typeface="微软雅黑"/>
               </a:rPr>
               <a:t>不是前后端分离多仓拼装，而是一套围绕业务模块组织的工程系统。</a:t>
             </a:r>
+            <a:endParaRPr sz="1350" b="0" i="0">
+              <a:solidFill>
+                <a:srgbClr val="D9E5F5"/>
+              </a:solidFill>
+              <a:latin typeface="微软雅黑"/>
+            </a:endParaRPr>
           </a:p>
         </p:txBody>
       </p:sp>
@@ -15253,7 +16364,7 @@
           <a:noFill/>
         </p:spPr>
         <p:txBody>
-          <a:bodyPr wrap="square" lIns="0" rIns="0" tIns="0" bIns="0" anchor="t">
+          <a:bodyPr wrap="square" lIns="0" tIns="0" rIns="0" bIns="0" anchor="t">
             <a:spAutoFit/>
           </a:bodyPr>
           <a:lstStyle/>
@@ -15268,16 +16379,91 @@
                 <a:solidFill>
                   <a:srgbClr val="D9E5F5"/>
                 </a:solidFill>
-                <a:latin typeface="Microsoft YaHei"/>
+                <a:latin typeface="微软雅黑"/>
               </a:rPr>
               <a:t>系统架构图</a:t>
             </a:r>
+            <a:endParaRPr sz="1150" b="1" i="0">
+              <a:solidFill>
+                <a:srgbClr val="D9E5F5"/>
+              </a:solidFill>
+              <a:latin typeface="微软雅黑"/>
+            </a:endParaRPr>
           </a:p>
         </p:txBody>
       </p:sp>
       <p:pic>
         <p:nvPicPr>
           <p:cNvPr id="8" name="Picture 7" descr="系统架构图-810x483.png"/>
+          <p:cNvPicPr>
+            <a:picLocks noChangeAspect="1"/>
+          </p:cNvPicPr>
+          <p:nvPr/>
+        </p:nvPicPr>
+        <p:blipFill>
+          <a:blip r:embed="rId2"/>
+          <a:stretch>
+            <a:fillRect/>
+          </a:stretch>
+        </p:blipFill>
+        <p:spPr>
+          <a:xfrm>
+            <a:off x="6656832" y="1792224"/>
+            <a:ext cx="4937760" cy="2944368"/>
+          </a:xfrm>
+          <a:prstGeom prst="rect">
+            <a:avLst/>
+          </a:prstGeom>
+        </p:spPr>
+      </p:pic>
+      <p:sp>
+        <p:nvSpPr>
+          <p:cNvPr id="9" name="TextBox 8"/>
+          <p:cNvSpPr txBox="1"/>
+          <p:nvPr/>
+        </p:nvSpPr>
+        <p:spPr>
+          <a:xfrm>
+            <a:off x="6656832" y="4718685"/>
+            <a:ext cx="4937760" cy="182880"/>
+          </a:xfrm>
+          <a:prstGeom prst="rect">
+            <a:avLst/>
+          </a:prstGeom>
+          <a:noFill/>
+        </p:spPr>
+        <p:txBody>
+          <a:bodyPr wrap="square" lIns="0" tIns="0" rIns="0" bIns="0" anchor="t">
+            <a:spAutoFit/>
+          </a:bodyPr>
+          <a:lstStyle/>
+          <a:p>
+            <a:pPr algn="l">
+              <a:lnSpc>
+                <a:spcPct val="115000"/>
+              </a:lnSpc>
+            </a:pPr>
+            <a:r>
+              <a:rPr sz="1150" b="1" i="0">
+                <a:solidFill>
+                  <a:srgbClr val="D9E5F5"/>
+                </a:solidFill>
+                <a:latin typeface="微软雅黑"/>
+              </a:rPr>
+              <a:t>核心用户流程</a:t>
+            </a:r>
+            <a:endParaRPr sz="1150" b="1" i="0">
+              <a:solidFill>
+                <a:srgbClr val="D9E5F5"/>
+              </a:solidFill>
+              <a:latin typeface="微软雅黑"/>
+            </a:endParaRPr>
+          </a:p>
+        </p:txBody>
+      </p:sp>
+      <p:pic>
+        <p:nvPicPr>
+          <p:cNvPr id="10" name="Picture 9" descr="核心用户流程-810x213.png"/>
           <p:cNvPicPr>
             <a:picLocks noChangeAspect="1"/>
           </p:cNvPicPr>
@@ -15291,70 +16477,7 @@
         </p:blipFill>
         <p:spPr>
           <a:xfrm>
-            <a:off x="6656832" y="1792224"/>
-            <a:ext cx="4937760" cy="2944368"/>
-          </a:xfrm>
-          <a:prstGeom prst="rect">
-            <a:avLst/>
-          </a:prstGeom>
-        </p:spPr>
-      </p:pic>
-      <p:sp>
-        <p:nvSpPr>
-          <p:cNvPr id="9" name="TextBox 8"/>
-          <p:cNvSpPr txBox="1"/>
-          <p:nvPr/>
-        </p:nvSpPr>
-        <p:spPr>
-          <a:xfrm>
-            <a:off x="6656832" y="4572000"/>
-            <a:ext cx="4937760" cy="182880"/>
-          </a:xfrm>
-          <a:prstGeom prst="rect">
-            <a:avLst/>
-          </a:prstGeom>
-          <a:noFill/>
-        </p:spPr>
-        <p:txBody>
-          <a:bodyPr wrap="square" lIns="0" rIns="0" tIns="0" bIns="0" anchor="t">
-            <a:spAutoFit/>
-          </a:bodyPr>
-          <a:lstStyle/>
-          <a:p>
-            <a:pPr algn="l">
-              <a:lnSpc>
-                <a:spcPct val="115000"/>
-              </a:lnSpc>
-            </a:pPr>
-            <a:r>
-              <a:rPr sz="1150" b="1" i="0">
-                <a:solidFill>
-                  <a:srgbClr val="D9E5F5"/>
-                </a:solidFill>
-                <a:latin typeface="Microsoft YaHei"/>
-              </a:rPr>
-              <a:t>核心用户流程</a:t>
-            </a:r>
-          </a:p>
-        </p:txBody>
-      </p:sp>
-      <p:pic>
-        <p:nvPicPr>
-          <p:cNvPr id="10" name="Picture 9" descr="核心用户流程-810x213.png"/>
-          <p:cNvPicPr>
-            <a:picLocks noChangeAspect="1"/>
-          </p:cNvPicPr>
-          <p:nvPr/>
-        </p:nvPicPr>
-        <p:blipFill>
-          <a:blip r:embed="rId4"/>
-          <a:stretch>
-            <a:fillRect/>
-          </a:stretch>
-        </p:blipFill>
-        <p:spPr>
-          <a:xfrm>
-            <a:off x="6656832" y="4828032"/>
+            <a:off x="6656832" y="4974717"/>
             <a:ext cx="4937760" cy="1298448"/>
           </a:xfrm>
           <a:prstGeom prst="rect">
@@ -15469,7 +16592,7 @@
           <a:noFill/>
         </p:spPr>
         <p:txBody>
-          <a:bodyPr wrap="square" lIns="0" rIns="0" tIns="0" bIns="0" anchor="t">
+          <a:bodyPr wrap="square" lIns="0" tIns="0" rIns="0" bIns="0" anchor="t">
             <a:spAutoFit/>
           </a:bodyPr>
           <a:lstStyle/>
@@ -15488,6 +16611,12 @@
               </a:rPr>
               <a:t>1</a:t>
             </a:r>
+            <a:endParaRPr sz="1200" b="1" i="0">
+              <a:solidFill>
+                <a:srgbClr val="FFFFFF"/>
+              </a:solidFill>
+              <a:latin typeface="Aptos"/>
+            </a:endParaRPr>
           </a:p>
         </p:txBody>
       </p:sp>
@@ -15508,7 +16637,7 @@
           <a:noFill/>
         </p:spPr>
         <p:txBody>
-          <a:bodyPr wrap="square" lIns="0" rIns="0" tIns="0" bIns="0" anchor="t">
+          <a:bodyPr wrap="square" lIns="0" tIns="0" rIns="0" bIns="0" anchor="t">
             <a:spAutoFit/>
           </a:bodyPr>
           <a:lstStyle/>
@@ -15523,10 +16652,16 @@
                 <a:solidFill>
                   <a:srgbClr val="102A43"/>
                 </a:solidFill>
-                <a:latin typeface="Microsoft YaHei"/>
+                <a:latin typeface="微软雅黑"/>
               </a:rPr>
               <a:t>应用层：Web + 微信原生小程序</a:t>
             </a:r>
+            <a:endParaRPr sz="1400" b="1" i="0">
+              <a:solidFill>
+                <a:srgbClr val="102A43"/>
+              </a:solidFill>
+              <a:latin typeface="微软雅黑"/>
+            </a:endParaRPr>
           </a:p>
         </p:txBody>
       </p:sp>
@@ -15547,7 +16682,7 @@
           <a:noFill/>
         </p:spPr>
         <p:txBody>
-          <a:bodyPr wrap="square" lIns="0" rIns="0" tIns="0" bIns="0" anchor="t">
+          <a:bodyPr wrap="square" lIns="0" tIns="0" rIns="0" bIns="0" anchor="t">
             <a:spAutoFit/>
           </a:bodyPr>
           <a:lstStyle/>
@@ -15562,10 +16697,16 @@
                 <a:solidFill>
                   <a:srgbClr val="62748A"/>
                 </a:solidFill>
-                <a:latin typeface="Microsoft YaHei"/>
+                <a:latin typeface="微软雅黑"/>
               </a:rPr>
               <a:t>Web 采用 Flask + Jinja 服务端渲染，小程序采用微信原生 TS，两个端共享同一后端语义。</a:t>
             </a:r>
+            <a:endParaRPr sz="1120" b="0" i="0">
+              <a:solidFill>
+                <a:srgbClr val="62748A"/>
+              </a:solidFill>
+              <a:latin typeface="微软雅黑"/>
+            </a:endParaRPr>
           </a:p>
         </p:txBody>
       </p:sp>
@@ -15676,7 +16817,7 @@
           <a:noFill/>
         </p:spPr>
         <p:txBody>
-          <a:bodyPr wrap="square" lIns="0" rIns="0" tIns="0" bIns="0" anchor="t">
+          <a:bodyPr wrap="square" lIns="0" tIns="0" rIns="0" bIns="0" anchor="t">
             <a:spAutoFit/>
           </a:bodyPr>
           <a:lstStyle/>
@@ -15695,6 +16836,12 @@
               </a:rPr>
               <a:t>2</a:t>
             </a:r>
+            <a:endParaRPr sz="1200" b="1" i="0">
+              <a:solidFill>
+                <a:srgbClr val="FFFFFF"/>
+              </a:solidFill>
+              <a:latin typeface="Aptos"/>
+            </a:endParaRPr>
           </a:p>
         </p:txBody>
       </p:sp>
@@ -15715,7 +16862,7 @@
           <a:noFill/>
         </p:spPr>
         <p:txBody>
-          <a:bodyPr wrap="square" lIns="0" rIns="0" tIns="0" bIns="0" anchor="t">
+          <a:bodyPr wrap="square" lIns="0" tIns="0" rIns="0" bIns="0" anchor="t">
             <a:spAutoFit/>
           </a:bodyPr>
           <a:lstStyle/>
@@ -15730,10 +16877,16 @@
                 <a:solidFill>
                   <a:srgbClr val="102A43"/>
                 </a:solidFill>
-                <a:latin typeface="Microsoft YaHei"/>
+                <a:latin typeface="微软雅黑"/>
               </a:rPr>
               <a:t>服务层：Flask 应用工厂 + Blueprint 模块化</a:t>
             </a:r>
+            <a:endParaRPr sz="1400" b="1" i="0">
+              <a:solidFill>
+                <a:srgbClr val="102A43"/>
+              </a:solidFill>
+              <a:latin typeface="微软雅黑"/>
+            </a:endParaRPr>
           </a:p>
         </p:txBody>
       </p:sp>
@@ -15754,7 +16907,7 @@
           <a:noFill/>
         </p:spPr>
         <p:txBody>
-          <a:bodyPr wrap="square" lIns="0" rIns="0" tIns="0" bIns="0" anchor="t">
+          <a:bodyPr wrap="square" lIns="0" tIns="0" rIns="0" bIns="0" anchor="t">
             <a:spAutoFit/>
           </a:bodyPr>
           <a:lstStyle/>
@@ -15769,10 +16922,16 @@
                 <a:solidFill>
                   <a:srgbClr val="62748A"/>
                 </a:solidFill>
-                <a:latin typeface="Microsoft YaHei"/>
+                <a:latin typeface="微软雅黑"/>
               </a:rPr>
               <a:t>已注册 auth、main、quiz、exam、user、chat、notifications、popups、coding、user_bank、forum、admin 等 12 个模块。</a:t>
             </a:r>
+            <a:endParaRPr sz="1120" b="0" i="0">
+              <a:solidFill>
+                <a:srgbClr val="62748A"/>
+              </a:solidFill>
+              <a:latin typeface="微软雅黑"/>
+            </a:endParaRPr>
           </a:p>
         </p:txBody>
       </p:sp>
@@ -15883,7 +17042,7 @@
           <a:noFill/>
         </p:spPr>
         <p:txBody>
-          <a:bodyPr wrap="square" lIns="0" rIns="0" tIns="0" bIns="0" anchor="t">
+          <a:bodyPr wrap="square" lIns="0" tIns="0" rIns="0" bIns="0" anchor="t">
             <a:spAutoFit/>
           </a:bodyPr>
           <a:lstStyle/>
@@ -15902,6 +17061,12 @@
               </a:rPr>
               <a:t>3</a:t>
             </a:r>
+            <a:endParaRPr sz="1200" b="1" i="0">
+              <a:solidFill>
+                <a:srgbClr val="FFFFFF"/>
+              </a:solidFill>
+              <a:latin typeface="Aptos"/>
+            </a:endParaRPr>
           </a:p>
         </p:txBody>
       </p:sp>
@@ -15922,7 +17087,7 @@
           <a:noFill/>
         </p:spPr>
         <p:txBody>
-          <a:bodyPr wrap="square" lIns="0" rIns="0" tIns="0" bIns="0" anchor="t">
+          <a:bodyPr wrap="square" lIns="0" tIns="0" rIns="0" bIns="0" anchor="t">
             <a:spAutoFit/>
           </a:bodyPr>
           <a:lstStyle/>
@@ -15937,10 +17102,16 @@
                 <a:solidFill>
                   <a:srgbClr val="102A43"/>
                 </a:solidFill>
-                <a:latin typeface="Microsoft YaHei"/>
+                <a:latin typeface="微软雅黑"/>
               </a:rPr>
               <a:t>数据层：PostgreSQL + Redis + RQ</a:t>
             </a:r>
+            <a:endParaRPr sz="1400" b="1" i="0">
+              <a:solidFill>
+                <a:srgbClr val="102A43"/>
+              </a:solidFill>
+              <a:latin typeface="微软雅黑"/>
+            </a:endParaRPr>
           </a:p>
         </p:txBody>
       </p:sp>
@@ -15961,7 +17132,7 @@
           <a:noFill/>
         </p:spPr>
         <p:txBody>
-          <a:bodyPr wrap="square" lIns="0" rIns="0" tIns="0" bIns="0" anchor="t">
+          <a:bodyPr wrap="square" lIns="0" tIns="0" rIns="0" bIns="0" anchor="t">
             <a:spAutoFit/>
           </a:bodyPr>
           <a:lstStyle/>
@@ -15976,10 +17147,16 @@
                 <a:solidFill>
                   <a:srgbClr val="62748A"/>
                 </a:solidFill>
-                <a:latin typeface="Microsoft YaHei"/>
+                <a:latin typeface="微软雅黑"/>
               </a:rPr>
               <a:t>PostgreSQL 存储题库与学习数据，Redis 承担缓存/限流/队列，RQ Worker 处理后台任务。</a:t>
             </a:r>
+            <a:endParaRPr sz="1120" b="0" i="0">
+              <a:solidFill>
+                <a:srgbClr val="62748A"/>
+              </a:solidFill>
+              <a:latin typeface="微软雅黑"/>
+            </a:endParaRPr>
           </a:p>
         </p:txBody>
       </p:sp>
@@ -16090,7 +17267,7 @@
           <a:noFill/>
         </p:spPr>
         <p:txBody>
-          <a:bodyPr wrap="square" lIns="0" rIns="0" tIns="0" bIns="0" anchor="t">
+          <a:bodyPr wrap="square" lIns="0" tIns="0" rIns="0" bIns="0" anchor="t">
             <a:spAutoFit/>
           </a:bodyPr>
           <a:lstStyle/>
@@ -16109,6 +17286,12 @@
               </a:rPr>
               <a:t>4</a:t>
             </a:r>
+            <a:endParaRPr sz="1200" b="1" i="0">
+              <a:solidFill>
+                <a:srgbClr val="FFFFFF"/>
+              </a:solidFill>
+              <a:latin typeface="Aptos"/>
+            </a:endParaRPr>
           </a:p>
         </p:txBody>
       </p:sp>
@@ -16129,7 +17312,7 @@
           <a:noFill/>
         </p:spPr>
         <p:txBody>
-          <a:bodyPr wrap="square" lIns="0" rIns="0" tIns="0" bIns="0" anchor="t">
+          <a:bodyPr wrap="square" lIns="0" tIns="0" rIns="0" bIns="0" anchor="t">
             <a:spAutoFit/>
           </a:bodyPr>
           <a:lstStyle/>
@@ -16144,10 +17327,16 @@
                 <a:solidFill>
                   <a:srgbClr val="102A43"/>
                 </a:solidFill>
-                <a:latin typeface="Microsoft YaHei"/>
+                <a:latin typeface="微软雅黑"/>
               </a:rPr>
               <a:t>交付层：Docker Compose 开发编排</a:t>
             </a:r>
+            <a:endParaRPr sz="1400" b="1" i="0">
+              <a:solidFill>
+                <a:srgbClr val="102A43"/>
+              </a:solidFill>
+              <a:latin typeface="微软雅黑"/>
+            </a:endParaRPr>
           </a:p>
         </p:txBody>
       </p:sp>
@@ -16168,7 +17357,7 @@
           <a:noFill/>
         </p:spPr>
         <p:txBody>
-          <a:bodyPr wrap="square" lIns="0" rIns="0" tIns="0" bIns="0" anchor="t">
+          <a:bodyPr wrap="square" lIns="0" tIns="0" rIns="0" bIns="0" anchor="t">
             <a:spAutoFit/>
           </a:bodyPr>
           <a:lstStyle/>
@@ -16183,10 +17372,16 @@
                 <a:solidFill>
                   <a:srgbClr val="62748A"/>
                 </a:solidFill>
-                <a:latin typeface="Microsoft YaHei"/>
+                <a:latin typeface="微软雅黑"/>
               </a:rPr>
               <a:t>compose.dev.yml 统一拉起 web、worker、postgres、redis、backup，便于演示、复现与现场切换。</a:t>
             </a:r>
+            <a:endParaRPr sz="1120" b="0" i="0">
+              <a:solidFill>
+                <a:srgbClr val="62748A"/>
+              </a:solidFill>
+              <a:latin typeface="微软雅黑"/>
+            </a:endParaRPr>
           </a:p>
         </p:txBody>
       </p:sp>
@@ -16207,7 +17402,7 @@
           <a:noFill/>
         </p:spPr>
         <p:txBody>
-          <a:bodyPr wrap="square" lIns="0" rIns="0" tIns="0" bIns="0" anchor="t">
+          <a:bodyPr wrap="square" lIns="0" tIns="0" rIns="0" bIns="0" anchor="t">
             <a:spAutoFit/>
           </a:bodyPr>
           <a:lstStyle/>
@@ -16226,6 +17421,12 @@
               </a:rPr>
               <a:t>Sak-AI答题助手｜答辩演示</a:t>
             </a:r>
+            <a:endParaRPr sz="950" b="0" i="0">
+              <a:solidFill>
+                <a:srgbClr val="D6DFEC"/>
+              </a:solidFill>
+              <a:latin typeface="Aptos"/>
+            </a:endParaRPr>
           </a:p>
         </p:txBody>
       </p:sp>
@@ -16246,7 +17447,7 @@
           <a:noFill/>
         </p:spPr>
         <p:txBody>
-          <a:bodyPr wrap="square" lIns="0" rIns="0" tIns="0" bIns="0" anchor="t">
+          <a:bodyPr wrap="square" lIns="0" tIns="0" rIns="0" bIns="0" anchor="t">
             <a:spAutoFit/>
           </a:bodyPr>
           <a:lstStyle/>
@@ -16265,6 +17466,12 @@
               </a:rPr>
               <a:t>04</a:t>
             </a:r>
+            <a:endParaRPr sz="1100" b="1" i="0">
+              <a:solidFill>
+                <a:srgbClr val="F8FAFC"/>
+              </a:solidFill>
+              <a:latin typeface="Aptos"/>
+            </a:endParaRPr>
           </a:p>
         </p:txBody>
       </p:sp>
@@ -16277,7 +17484,7 @@
 </file>
 
 <file path=ppt/slides/slide5.xml><?xml version="1.0" encoding="utf-8"?>
-<p:sld xmlns:a="http://schemas.openxmlformats.org/drawingml/2006/main" xmlns:p="http://schemas.openxmlformats.org/presentationml/2006/main" xmlns:r="http://schemas.openxmlformats.org/officeDocument/2006/relationships">
+<p:sld xmlns:a="http://schemas.openxmlformats.org/drawingml/2006/main" xmlns:r="http://schemas.openxmlformats.org/officeDocument/2006/relationships" xmlns:p="http://schemas.openxmlformats.org/presentationml/2006/main">
   <p:cSld>
     <p:spTree>
       <p:nvGrpSpPr>
@@ -16295,7 +17502,7 @@
           <p:nvPr/>
         </p:nvPicPr>
         <p:blipFill>
-          <a:blip r:embed="rId2"/>
+          <a:blip r:embed="rId1"/>
           <a:stretch>
             <a:fillRect/>
           </a:stretch>
@@ -16327,7 +17534,7 @@
           <a:noFill/>
         </p:spPr>
         <p:txBody>
-          <a:bodyPr wrap="square" lIns="0" rIns="0" tIns="0" bIns="0" anchor="t">
+          <a:bodyPr wrap="square" lIns="0" tIns="0" rIns="0" bIns="0" anchor="t">
             <a:spAutoFit/>
           </a:bodyPr>
           <a:lstStyle/>
@@ -16346,6 +17553,12 @@
               </a:rPr>
               <a:t>CAPABILITIES</a:t>
             </a:r>
+            <a:endParaRPr sz="1200" b="1" i="0">
+              <a:solidFill>
+                <a:srgbClr val="4F6EF7"/>
+              </a:solidFill>
+              <a:latin typeface="Aptos"/>
+            </a:endParaRPr>
           </a:p>
         </p:txBody>
       </p:sp>
@@ -16409,7 +17622,7 @@
           <a:noFill/>
         </p:spPr>
         <p:txBody>
-          <a:bodyPr wrap="square" lIns="0" rIns="0" tIns="0" bIns="0" anchor="t">
+          <a:bodyPr wrap="square" lIns="0" tIns="0" rIns="0" bIns="0" anchor="t">
             <a:spAutoFit/>
           </a:bodyPr>
           <a:lstStyle/>
@@ -16424,10 +17637,16 @@
                 <a:solidFill>
                   <a:srgbClr val="102A43"/>
                 </a:solidFill>
-                <a:latin typeface="Microsoft YaHei"/>
+                <a:latin typeface="微软雅黑"/>
               </a:rPr>
               <a:t>核心功能闭环：从题库沉淀到数据复盘</a:t>
             </a:r>
+            <a:endParaRPr sz="2800" b="1" i="0">
+              <a:solidFill>
+                <a:srgbClr val="102A43"/>
+              </a:solidFill>
+              <a:latin typeface="微软雅黑"/>
+            </a:endParaRPr>
           </a:p>
         </p:txBody>
       </p:sp>
@@ -16448,7 +17667,7 @@
           <a:noFill/>
         </p:spPr>
         <p:txBody>
-          <a:bodyPr wrap="square" lIns="0" rIns="0" tIns="0" bIns="0" anchor="t">
+          <a:bodyPr wrap="square" lIns="0" tIns="0" rIns="0" bIns="0" anchor="t">
             <a:spAutoFit/>
           </a:bodyPr>
           <a:lstStyle/>
@@ -16463,10 +17682,16 @@
                 <a:solidFill>
                   <a:srgbClr val="62748A"/>
                 </a:solidFill>
-                <a:latin typeface="Microsoft YaHei"/>
+                <a:latin typeface="微软雅黑"/>
               </a:rPr>
               <a:t>围绕学习者与运营者共同构建完整业务流程。</a:t>
             </a:r>
+            <a:endParaRPr sz="1350" b="0" i="0">
+              <a:solidFill>
+                <a:srgbClr val="62748A"/>
+              </a:solidFill>
+              <a:latin typeface="微软雅黑"/>
+            </a:endParaRPr>
           </a:p>
         </p:txBody>
       </p:sp>
@@ -16577,7 +17802,7 @@
           <a:noFill/>
         </p:spPr>
         <p:txBody>
-          <a:bodyPr wrap="square" lIns="0" rIns="0" tIns="0" bIns="0" anchor="t">
+          <a:bodyPr wrap="square" lIns="0" tIns="0" rIns="0" bIns="0" anchor="t">
             <a:spAutoFit/>
           </a:bodyPr>
           <a:lstStyle/>
@@ -16596,6 +17821,12 @@
               </a:rPr>
               <a:t>01</a:t>
             </a:r>
+            <a:endParaRPr sz="1150" b="1" i="0">
+              <a:solidFill>
+                <a:srgbClr val="4F6EF7"/>
+              </a:solidFill>
+              <a:latin typeface="Aptos"/>
+            </a:endParaRPr>
           </a:p>
         </p:txBody>
       </p:sp>
@@ -16616,7 +17847,7 @@
           <a:noFill/>
         </p:spPr>
         <p:txBody>
-          <a:bodyPr wrap="square" lIns="0" rIns="0" tIns="0" bIns="0" anchor="t">
+          <a:bodyPr wrap="square" lIns="0" tIns="0" rIns="0" bIns="0" anchor="t">
             <a:spAutoFit/>
           </a:bodyPr>
           <a:lstStyle/>
@@ -16631,10 +17862,16 @@
                 <a:solidFill>
                   <a:srgbClr val="102A43"/>
                 </a:solidFill>
-                <a:latin typeface="Microsoft YaHei"/>
+                <a:latin typeface="微软雅黑"/>
               </a:rPr>
               <a:t>题库广场</a:t>
             </a:r>
+            <a:endParaRPr sz="1400" b="1" i="0">
+              <a:solidFill>
+                <a:srgbClr val="102A43"/>
+              </a:solidFill>
+              <a:latin typeface="微软雅黑"/>
+            </a:endParaRPr>
           </a:p>
         </p:txBody>
       </p:sp>
@@ -16655,7 +17892,7 @@
           <a:noFill/>
         </p:spPr>
         <p:txBody>
-          <a:bodyPr wrap="square" lIns="0" rIns="0" tIns="0" bIns="0" anchor="t">
+          <a:bodyPr wrap="square" lIns="0" tIns="0" rIns="0" bIns="0" anchor="t">
             <a:spAutoFit/>
           </a:bodyPr>
           <a:lstStyle/>
@@ -16670,10 +17907,16 @@
                 <a:solidFill>
                   <a:srgbClr val="62748A"/>
                 </a:solidFill>
-                <a:latin typeface="Microsoft YaHei"/>
+                <a:latin typeface="微软雅黑"/>
               </a:rPr>
               <a:t>浏览系统题库与公开题库，快速进入学习入口。</a:t>
             </a:r>
+            <a:endParaRPr sz="1080" b="0" i="0">
+              <a:solidFill>
+                <a:srgbClr val="62748A"/>
+              </a:solidFill>
+              <a:latin typeface="微软雅黑"/>
+            </a:endParaRPr>
           </a:p>
         </p:txBody>
       </p:sp>
@@ -16827,7 +18070,7 @@
           <a:noFill/>
         </p:spPr>
         <p:txBody>
-          <a:bodyPr wrap="square" lIns="0" rIns="0" tIns="0" bIns="0" anchor="t">
+          <a:bodyPr wrap="square" lIns="0" tIns="0" rIns="0" bIns="0" anchor="t">
             <a:spAutoFit/>
           </a:bodyPr>
           <a:lstStyle/>
@@ -16846,6 +18089,12 @@
               </a:rPr>
               <a:t>02</a:t>
             </a:r>
+            <a:endParaRPr sz="1150" b="1" i="0">
+              <a:solidFill>
+                <a:srgbClr val="5BC0BE"/>
+              </a:solidFill>
+              <a:latin typeface="Aptos"/>
+            </a:endParaRPr>
           </a:p>
         </p:txBody>
       </p:sp>
@@ -16866,7 +18115,7 @@
           <a:noFill/>
         </p:spPr>
         <p:txBody>
-          <a:bodyPr wrap="square" lIns="0" rIns="0" tIns="0" bIns="0" anchor="t">
+          <a:bodyPr wrap="square" lIns="0" tIns="0" rIns="0" bIns="0" anchor="t">
             <a:spAutoFit/>
           </a:bodyPr>
           <a:lstStyle/>
@@ -16881,10 +18130,16 @@
                 <a:solidFill>
                   <a:srgbClr val="102A43"/>
                 </a:solidFill>
-                <a:latin typeface="Microsoft YaHei"/>
+                <a:latin typeface="微软雅黑"/>
               </a:rPr>
               <a:t>个人题库</a:t>
             </a:r>
+            <a:endParaRPr sz="1400" b="1" i="0">
+              <a:solidFill>
+                <a:srgbClr val="102A43"/>
+              </a:solidFill>
+              <a:latin typeface="微软雅黑"/>
+            </a:endParaRPr>
           </a:p>
         </p:txBody>
       </p:sp>
@@ -16905,7 +18160,7 @@
           <a:noFill/>
         </p:spPr>
         <p:txBody>
-          <a:bodyPr wrap="square" lIns="0" rIns="0" tIns="0" bIns="0" anchor="t">
+          <a:bodyPr wrap="square" lIns="0" tIns="0" rIns="0" bIns="0" anchor="t">
             <a:spAutoFit/>
           </a:bodyPr>
           <a:lstStyle/>
@@ -16920,10 +18175,16 @@
                 <a:solidFill>
                   <a:srgbClr val="62748A"/>
                 </a:solidFill>
-                <a:latin typeface="Microsoft YaHei"/>
+                <a:latin typeface="微软雅黑"/>
               </a:rPr>
               <a:t>沉淀自建/已加入题库，形成个人长期资源库。</a:t>
             </a:r>
+            <a:endParaRPr sz="1080" b="0" i="0">
+              <a:solidFill>
+                <a:srgbClr val="62748A"/>
+              </a:solidFill>
+              <a:latin typeface="微软雅黑"/>
+            </a:endParaRPr>
           </a:p>
         </p:txBody>
       </p:sp>
@@ -17077,7 +18338,7 @@
           <a:noFill/>
         </p:spPr>
         <p:txBody>
-          <a:bodyPr wrap="square" lIns="0" rIns="0" tIns="0" bIns="0" anchor="t">
+          <a:bodyPr wrap="square" lIns="0" tIns="0" rIns="0" bIns="0" anchor="t">
             <a:spAutoFit/>
           </a:bodyPr>
           <a:lstStyle/>
@@ -17096,6 +18357,12 @@
               </a:rPr>
               <a:t>03</a:t>
             </a:r>
+            <a:endParaRPr sz="1150" b="1" i="0">
+              <a:solidFill>
+                <a:srgbClr val="D6B36A"/>
+              </a:solidFill>
+              <a:latin typeface="Aptos"/>
+            </a:endParaRPr>
           </a:p>
         </p:txBody>
       </p:sp>
@@ -17116,7 +18383,7 @@
           <a:noFill/>
         </p:spPr>
         <p:txBody>
-          <a:bodyPr wrap="square" lIns="0" rIns="0" tIns="0" bIns="0" anchor="t">
+          <a:bodyPr wrap="square" lIns="0" tIns="0" rIns="0" bIns="0" anchor="t">
             <a:spAutoFit/>
           </a:bodyPr>
           <a:lstStyle/>
@@ -17131,10 +18398,16 @@
                 <a:solidFill>
                   <a:srgbClr val="102A43"/>
                 </a:solidFill>
-                <a:latin typeface="Microsoft YaHei"/>
+                <a:latin typeface="微软雅黑"/>
               </a:rPr>
               <a:t>刷题训练</a:t>
             </a:r>
+            <a:endParaRPr sz="1400" b="1" i="0">
+              <a:solidFill>
+                <a:srgbClr val="102A43"/>
+              </a:solidFill>
+              <a:latin typeface="微软雅黑"/>
+            </a:endParaRPr>
           </a:p>
         </p:txBody>
       </p:sp>
@@ -17155,7 +18428,7 @@
           <a:noFill/>
         </p:spPr>
         <p:txBody>
-          <a:bodyPr wrap="square" lIns="0" rIns="0" tIns="0" bIns="0" anchor="t">
+          <a:bodyPr wrap="square" lIns="0" tIns="0" rIns="0" bIns="0" anchor="t">
             <a:spAutoFit/>
           </a:bodyPr>
           <a:lstStyle/>
@@ -17170,10 +18443,16 @@
                 <a:solidFill>
                   <a:srgbClr val="62748A"/>
                 </a:solidFill>
-                <a:latin typeface="Microsoft YaHei"/>
+                <a:latin typeface="微软雅黑"/>
               </a:rPr>
               <a:t>支持题目练习、收藏、错题与答案记录。</a:t>
             </a:r>
+            <a:endParaRPr sz="1080" b="0" i="0">
+              <a:solidFill>
+                <a:srgbClr val="62748A"/>
+              </a:solidFill>
+              <a:latin typeface="微软雅黑"/>
+            </a:endParaRPr>
           </a:p>
         </p:txBody>
       </p:sp>
@@ -17327,7 +18606,7 @@
           <a:noFill/>
         </p:spPr>
         <p:txBody>
-          <a:bodyPr wrap="square" lIns="0" rIns="0" tIns="0" bIns="0" anchor="t">
+          <a:bodyPr wrap="square" lIns="0" tIns="0" rIns="0" bIns="0" anchor="t">
             <a:spAutoFit/>
           </a:bodyPr>
           <a:lstStyle/>
@@ -17346,6 +18625,12 @@
               </a:rPr>
               <a:t>04</a:t>
             </a:r>
+            <a:endParaRPr sz="1150" b="1" i="0">
+              <a:solidFill>
+                <a:srgbClr val="4F6EF7"/>
+              </a:solidFill>
+              <a:latin typeface="Aptos"/>
+            </a:endParaRPr>
           </a:p>
         </p:txBody>
       </p:sp>
@@ -17366,7 +18651,7 @@
           <a:noFill/>
         </p:spPr>
         <p:txBody>
-          <a:bodyPr wrap="square" lIns="0" rIns="0" tIns="0" bIns="0" anchor="t">
+          <a:bodyPr wrap="square" lIns="0" tIns="0" rIns="0" bIns="0" anchor="t">
             <a:spAutoFit/>
           </a:bodyPr>
           <a:lstStyle/>
@@ -17381,10 +18666,16 @@
                 <a:solidFill>
                   <a:srgbClr val="102A43"/>
                 </a:solidFill>
-                <a:latin typeface="Microsoft YaHei"/>
+                <a:latin typeface="微软雅黑"/>
               </a:rPr>
               <a:t>模拟考试</a:t>
             </a:r>
+            <a:endParaRPr sz="1400" b="1" i="0">
+              <a:solidFill>
+                <a:srgbClr val="102A43"/>
+              </a:solidFill>
+              <a:latin typeface="微软雅黑"/>
+            </a:endParaRPr>
           </a:p>
         </p:txBody>
       </p:sp>
@@ -17405,7 +18696,7 @@
           <a:noFill/>
         </p:spPr>
         <p:txBody>
-          <a:bodyPr wrap="square" lIns="0" rIns="0" tIns="0" bIns="0" anchor="t">
+          <a:bodyPr wrap="square" lIns="0" tIns="0" rIns="0" bIns="0" anchor="t">
             <a:spAutoFit/>
           </a:bodyPr>
           <a:lstStyle/>
@@ -17420,10 +18711,16 @@
                 <a:solidFill>
                   <a:srgbClr val="62748A"/>
                 </a:solidFill>
-                <a:latin typeface="Microsoft YaHei"/>
+                <a:latin typeface="微软雅黑"/>
               </a:rPr>
               <a:t>按公共题库或个人题库发起考试训练。</a:t>
             </a:r>
+            <a:endParaRPr sz="1080" b="0" i="0">
+              <a:solidFill>
+                <a:srgbClr val="62748A"/>
+              </a:solidFill>
+              <a:latin typeface="微软雅黑"/>
+            </a:endParaRPr>
           </a:p>
         </p:txBody>
       </p:sp>
@@ -17577,7 +18874,7 @@
           <a:noFill/>
         </p:spPr>
         <p:txBody>
-          <a:bodyPr wrap="square" lIns="0" rIns="0" tIns="0" bIns="0" anchor="t">
+          <a:bodyPr wrap="square" lIns="0" tIns="0" rIns="0" bIns="0" anchor="t">
             <a:spAutoFit/>
           </a:bodyPr>
           <a:lstStyle/>
@@ -17596,6 +18893,12 @@
               </a:rPr>
               <a:t>05</a:t>
             </a:r>
+            <a:endParaRPr sz="1150" b="1" i="0">
+              <a:solidFill>
+                <a:srgbClr val="5BC0BE"/>
+              </a:solidFill>
+              <a:latin typeface="Aptos"/>
+            </a:endParaRPr>
           </a:p>
         </p:txBody>
       </p:sp>
@@ -17616,7 +18919,7 @@
           <a:noFill/>
         </p:spPr>
         <p:txBody>
-          <a:bodyPr wrap="square" lIns="0" rIns="0" tIns="0" bIns="0" anchor="t">
+          <a:bodyPr wrap="square" lIns="0" tIns="0" rIns="0" bIns="0" anchor="t">
             <a:spAutoFit/>
           </a:bodyPr>
           <a:lstStyle/>
@@ -17631,10 +18934,16 @@
                 <a:solidFill>
                   <a:srgbClr val="102A43"/>
                 </a:solidFill>
-                <a:latin typeface="Microsoft YaHei"/>
+                <a:latin typeface="微软雅黑"/>
               </a:rPr>
               <a:t>数据中心</a:t>
             </a:r>
+            <a:endParaRPr sz="1400" b="1" i="0">
+              <a:solidFill>
+                <a:srgbClr val="102A43"/>
+              </a:solidFill>
+              <a:latin typeface="微软雅黑"/>
+            </a:endParaRPr>
           </a:p>
         </p:txBody>
       </p:sp>
@@ -17655,7 +18964,7 @@
           <a:noFill/>
         </p:spPr>
         <p:txBody>
-          <a:bodyPr wrap="square" lIns="0" rIns="0" tIns="0" bIns="0" anchor="t">
+          <a:bodyPr wrap="square" lIns="0" tIns="0" rIns="0" bIns="0" anchor="t">
             <a:spAutoFit/>
           </a:bodyPr>
           <a:lstStyle/>
@@ -17670,10 +18979,16 @@
                 <a:solidFill>
                   <a:srgbClr val="62748A"/>
                 </a:solidFill>
-                <a:latin typeface="Microsoft YaHei"/>
+                <a:latin typeface="微软雅黑"/>
               </a:rPr>
               <a:t>趋势图、热力图、能力画像帮助用户复盘。</a:t>
             </a:r>
+            <a:endParaRPr sz="1080" b="0" i="0">
+              <a:solidFill>
+                <a:srgbClr val="62748A"/>
+              </a:solidFill>
+              <a:latin typeface="微软雅黑"/>
+            </a:endParaRPr>
           </a:p>
         </p:txBody>
       </p:sp>
@@ -17827,7 +19142,7 @@
           <a:noFill/>
         </p:spPr>
         <p:txBody>
-          <a:bodyPr wrap="square" lIns="0" rIns="0" tIns="0" bIns="0" anchor="t">
+          <a:bodyPr wrap="square" lIns="0" tIns="0" rIns="0" bIns="0" anchor="t">
             <a:spAutoFit/>
           </a:bodyPr>
           <a:lstStyle/>
@@ -17846,6 +19161,12 @@
               </a:rPr>
               <a:t>06</a:t>
             </a:r>
+            <a:endParaRPr sz="1150" b="1" i="0">
+              <a:solidFill>
+                <a:srgbClr val="D6B36A"/>
+              </a:solidFill>
+              <a:latin typeface="Aptos"/>
+            </a:endParaRPr>
           </a:p>
         </p:txBody>
       </p:sp>
@@ -17866,7 +19187,7 @@
           <a:noFill/>
         </p:spPr>
         <p:txBody>
-          <a:bodyPr wrap="square" lIns="0" rIns="0" tIns="0" bIns="0" anchor="t">
+          <a:bodyPr wrap="square" lIns="0" tIns="0" rIns="0" bIns="0" anchor="t">
             <a:spAutoFit/>
           </a:bodyPr>
           <a:lstStyle/>
@@ -17881,10 +19202,16 @@
                 <a:solidFill>
                   <a:srgbClr val="102A43"/>
                 </a:solidFill>
-                <a:latin typeface="Microsoft YaHei"/>
+                <a:latin typeface="微软雅黑"/>
               </a:rPr>
               <a:t>论坛 / 后台</a:t>
             </a:r>
+            <a:endParaRPr sz="1400" b="1" i="0">
+              <a:solidFill>
+                <a:srgbClr val="102A43"/>
+              </a:solidFill>
+              <a:latin typeface="微软雅黑"/>
+            </a:endParaRPr>
           </a:p>
         </p:txBody>
       </p:sp>
@@ -17905,7 +19232,7 @@
           <a:noFill/>
         </p:spPr>
         <p:txBody>
-          <a:bodyPr wrap="square" lIns="0" rIns="0" tIns="0" bIns="0" anchor="t">
+          <a:bodyPr wrap="square" lIns="0" tIns="0" rIns="0" bIns="0" anchor="t">
             <a:spAutoFit/>
           </a:bodyPr>
           <a:lstStyle/>
@@ -17920,10 +19247,16 @@
                 <a:solidFill>
                   <a:srgbClr val="62748A"/>
                 </a:solidFill>
-                <a:latin typeface="Microsoft YaHei"/>
+                <a:latin typeface="微软雅黑"/>
               </a:rPr>
               <a:t>支持交流互动与系统运营管理，形成支撑面。</a:t>
             </a:r>
+            <a:endParaRPr sz="1080" b="0" i="0">
+              <a:solidFill>
+                <a:srgbClr val="62748A"/>
+              </a:solidFill>
+              <a:latin typeface="微软雅黑"/>
+            </a:endParaRPr>
           </a:p>
         </p:txBody>
       </p:sp>
@@ -17991,7 +19324,7 @@
           <a:noFill/>
         </p:spPr>
         <p:txBody>
-          <a:bodyPr wrap="square" lIns="0" rIns="0" tIns="0" bIns="0" anchor="t">
+          <a:bodyPr wrap="square" lIns="0" tIns="0" rIns="0" bIns="0" anchor="t">
             <a:spAutoFit/>
           </a:bodyPr>
           <a:lstStyle/>
@@ -18006,10 +19339,16 @@
                 <a:solidFill>
                   <a:srgbClr val="102A43"/>
                 </a:solidFill>
-                <a:latin typeface="Microsoft YaHei"/>
+                <a:latin typeface="微软雅黑"/>
               </a:rPr>
               <a:t>闭环价值：让“资源组织 → 高频训练 → 阶段评估 → 可视化复盘 → 社区互动 / 运营支撑”在同一系统中连续发生。</a:t>
             </a:r>
+            <a:endParaRPr sz="1550" b="1" i="0">
+              <a:solidFill>
+                <a:srgbClr val="102A43"/>
+              </a:solidFill>
+              <a:latin typeface="微软雅黑"/>
+            </a:endParaRPr>
           </a:p>
         </p:txBody>
       </p:sp>
@@ -18030,7 +19369,7 @@
           <a:noFill/>
         </p:spPr>
         <p:txBody>
-          <a:bodyPr wrap="square" lIns="0" rIns="0" tIns="0" bIns="0" anchor="t">
+          <a:bodyPr wrap="square" lIns="0" tIns="0" rIns="0" bIns="0" anchor="t">
             <a:spAutoFit/>
           </a:bodyPr>
           <a:lstStyle/>
@@ -18049,6 +19388,12 @@
               </a:rPr>
               <a:t>Sak-AI答题助手｜答辩演示</a:t>
             </a:r>
+            <a:endParaRPr sz="950" b="0" i="0">
+              <a:solidFill>
+                <a:srgbClr val="94A3B8"/>
+              </a:solidFill>
+              <a:latin typeface="Aptos"/>
+            </a:endParaRPr>
           </a:p>
         </p:txBody>
       </p:sp>
@@ -18069,7 +19414,7 @@
           <a:noFill/>
         </p:spPr>
         <p:txBody>
-          <a:bodyPr wrap="square" lIns="0" rIns="0" tIns="0" bIns="0" anchor="t">
+          <a:bodyPr wrap="square" lIns="0" tIns="0" rIns="0" bIns="0" anchor="t">
             <a:spAutoFit/>
           </a:bodyPr>
           <a:lstStyle/>
@@ -18088,6 +19433,12 @@
               </a:rPr>
               <a:t>05</a:t>
             </a:r>
+            <a:endParaRPr sz="1100" b="1" i="0">
+              <a:solidFill>
+                <a:srgbClr val="17324D"/>
+              </a:solidFill>
+              <a:latin typeface="Aptos"/>
+            </a:endParaRPr>
           </a:p>
         </p:txBody>
       </p:sp>
@@ -18100,7 +19451,7 @@
 </file>
 
 <file path=ppt/slides/slide6.xml><?xml version="1.0" encoding="utf-8"?>
-<p:sld xmlns:a="http://schemas.openxmlformats.org/drawingml/2006/main" xmlns:p="http://schemas.openxmlformats.org/presentationml/2006/main" xmlns:r="http://schemas.openxmlformats.org/officeDocument/2006/relationships">
+<p:sld xmlns:a="http://schemas.openxmlformats.org/drawingml/2006/main" xmlns:r="http://schemas.openxmlformats.org/officeDocument/2006/relationships" xmlns:p="http://schemas.openxmlformats.org/presentationml/2006/main">
   <p:cSld>
     <p:spTree>
       <p:nvGrpSpPr>
@@ -18118,7 +19469,7 @@
           <p:nvPr/>
         </p:nvPicPr>
         <p:blipFill>
-          <a:blip r:embed="rId2"/>
+          <a:blip r:embed="rId1"/>
           <a:stretch>
             <a:fillRect/>
           </a:stretch>
@@ -18150,7 +19501,7 @@
           <a:noFill/>
         </p:spPr>
         <p:txBody>
-          <a:bodyPr wrap="square" lIns="0" rIns="0" tIns="0" bIns="0" anchor="t">
+          <a:bodyPr wrap="square" lIns="0" tIns="0" rIns="0" bIns="0" anchor="t">
             <a:spAutoFit/>
           </a:bodyPr>
           <a:lstStyle/>
@@ -18169,6 +19520,12 @@
               </a:rPr>
               <a:t>SHOWCASE A1</a:t>
             </a:r>
+            <a:endParaRPr sz="1200" b="1" i="0">
+              <a:solidFill>
+                <a:srgbClr val="4F6EF7"/>
+              </a:solidFill>
+              <a:latin typeface="Aptos"/>
+            </a:endParaRPr>
           </a:p>
         </p:txBody>
       </p:sp>
@@ -18232,7 +19589,7 @@
           <a:noFill/>
         </p:spPr>
         <p:txBody>
-          <a:bodyPr wrap="square" lIns="0" rIns="0" tIns="0" bIns="0" anchor="t">
+          <a:bodyPr wrap="square" lIns="0" tIns="0" rIns="0" bIns="0" anchor="t">
             <a:spAutoFit/>
           </a:bodyPr>
           <a:lstStyle/>
@@ -18247,49 +19604,16 @@
                 <a:solidFill>
                   <a:srgbClr val="102A43"/>
                 </a:solidFill>
-                <a:latin typeface="Microsoft YaHei"/>
+                <a:latin typeface="微软雅黑"/>
               </a:rPr>
               <a:t>真实界面展示：首页工作台与题库广场</a:t>
             </a:r>
-          </a:p>
-        </p:txBody>
-      </p:sp>
-      <p:sp>
-        <p:nvSpPr>
-          <p:cNvPr id="6" name="TextBox 5"/>
-          <p:cNvSpPr txBox="1"/>
-          <p:nvPr/>
-        </p:nvSpPr>
-        <p:spPr>
-          <a:xfrm>
-            <a:off x="658368" y="1426464"/>
-            <a:ext cx="7132320" cy="384048"/>
-          </a:xfrm>
-          <a:prstGeom prst="rect">
-            <a:avLst/>
-          </a:prstGeom>
-          <a:noFill/>
-        </p:spPr>
-        <p:txBody>
-          <a:bodyPr wrap="square" lIns="0" rIns="0" tIns="0" bIns="0" anchor="t">
-            <a:spAutoFit/>
-          </a:bodyPr>
-          <a:lstStyle/>
-          <a:p>
-            <a:pPr algn="l">
-              <a:lnSpc>
-                <a:spcPct val="115000"/>
-              </a:lnSpc>
-            </a:pPr>
-            <a:r>
-              <a:rPr sz="1350" b="0" i="0">
-                <a:solidFill>
-                  <a:srgbClr val="62748A"/>
-                </a:solidFill>
-                <a:latin typeface="Microsoft YaHei"/>
-              </a:rPr>
-              <a:t>每页控制为 1~2 张大图，让评委能直接看清真实页面细节。</a:t>
-            </a:r>
+            <a:endParaRPr sz="2800" b="1" i="0">
+              <a:solidFill>
+                <a:srgbClr val="102A43"/>
+              </a:solidFill>
+              <a:latin typeface="微软雅黑"/>
+            </a:endParaRPr>
           </a:p>
         </p:txBody>
       </p:sp>
@@ -18310,7 +19634,7 @@
           <a:noFill/>
         </p:spPr>
         <p:txBody>
-          <a:bodyPr wrap="square" lIns="0" rIns="0" tIns="0" bIns="0" anchor="t">
+          <a:bodyPr wrap="square" lIns="0" tIns="0" rIns="0" bIns="0" anchor="t">
             <a:spAutoFit/>
           </a:bodyPr>
           <a:lstStyle/>
@@ -18325,16 +19649,91 @@
                 <a:solidFill>
                   <a:srgbClr val="17324D"/>
                 </a:solidFill>
-                <a:latin typeface="Microsoft YaHei"/>
+                <a:latin typeface="微软雅黑"/>
               </a:rPr>
               <a:t>首页工作台</a:t>
             </a:r>
+            <a:endParaRPr sz="1150" b="1" i="0">
+              <a:solidFill>
+                <a:srgbClr val="17324D"/>
+              </a:solidFill>
+              <a:latin typeface="微软雅黑"/>
+            </a:endParaRPr>
           </a:p>
         </p:txBody>
       </p:sp>
       <p:pic>
         <p:nvPicPr>
           <p:cNvPr id="8" name="Picture 7" descr="首页工作台-892x708.png"/>
+          <p:cNvPicPr>
+            <a:picLocks noChangeAspect="1"/>
+          </p:cNvPicPr>
+          <p:nvPr/>
+        </p:nvPicPr>
+        <p:blipFill>
+          <a:blip r:embed="rId2"/>
+          <a:stretch>
+            <a:fillRect/>
+          </a:stretch>
+        </p:blipFill>
+        <p:spPr>
+          <a:xfrm>
+            <a:off x="658368" y="1828800"/>
+            <a:ext cx="5440680" cy="4315968"/>
+          </a:xfrm>
+          <a:prstGeom prst="rect">
+            <a:avLst/>
+          </a:prstGeom>
+        </p:spPr>
+      </p:pic>
+      <p:sp>
+        <p:nvSpPr>
+          <p:cNvPr id="9" name="TextBox 8"/>
+          <p:cNvSpPr txBox="1"/>
+          <p:nvPr/>
+        </p:nvSpPr>
+        <p:spPr>
+          <a:xfrm>
+            <a:off x="6355080" y="1572768"/>
+            <a:ext cx="5175504" cy="182880"/>
+          </a:xfrm>
+          <a:prstGeom prst="rect">
+            <a:avLst/>
+          </a:prstGeom>
+          <a:noFill/>
+        </p:spPr>
+        <p:txBody>
+          <a:bodyPr wrap="square" lIns="0" tIns="0" rIns="0" bIns="0" anchor="t">
+            <a:spAutoFit/>
+          </a:bodyPr>
+          <a:lstStyle/>
+          <a:p>
+            <a:pPr algn="l">
+              <a:lnSpc>
+                <a:spcPct val="115000"/>
+              </a:lnSpc>
+            </a:pPr>
+            <a:r>
+              <a:rPr sz="1150" b="1" i="0">
+                <a:solidFill>
+                  <a:srgbClr val="17324D"/>
+                </a:solidFill>
+                <a:latin typeface="微软雅黑"/>
+              </a:rPr>
+              <a:t>题库广场</a:t>
+            </a:r>
+            <a:endParaRPr sz="1150" b="1" i="0">
+              <a:solidFill>
+                <a:srgbClr val="17324D"/>
+              </a:solidFill>
+              <a:latin typeface="微软雅黑"/>
+            </a:endParaRPr>
+          </a:p>
+        </p:txBody>
+      </p:sp>
+      <p:pic>
+        <p:nvPicPr>
+          <p:cNvPr id="10" name="Picture 9" descr="题库广场-849x708.png"/>
           <p:cNvPicPr>
             <a:picLocks noChangeAspect="1"/>
           </p:cNvPicPr>
@@ -18348,69 +19747,6 @@
         </p:blipFill>
         <p:spPr>
           <a:xfrm>
-            <a:off x="658368" y="1828800"/>
-            <a:ext cx="5440680" cy="4315968"/>
-          </a:xfrm>
-          <a:prstGeom prst="rect">
-            <a:avLst/>
-          </a:prstGeom>
-        </p:spPr>
-      </p:pic>
-      <p:sp>
-        <p:nvSpPr>
-          <p:cNvPr id="9" name="TextBox 8"/>
-          <p:cNvSpPr txBox="1"/>
-          <p:nvPr/>
-        </p:nvSpPr>
-        <p:spPr>
-          <a:xfrm>
-            <a:off x="6355080" y="1572768"/>
-            <a:ext cx="5175504" cy="182880"/>
-          </a:xfrm>
-          <a:prstGeom prst="rect">
-            <a:avLst/>
-          </a:prstGeom>
-          <a:noFill/>
-        </p:spPr>
-        <p:txBody>
-          <a:bodyPr wrap="square" lIns="0" rIns="0" tIns="0" bIns="0" anchor="t">
-            <a:spAutoFit/>
-          </a:bodyPr>
-          <a:lstStyle/>
-          <a:p>
-            <a:pPr algn="l">
-              <a:lnSpc>
-                <a:spcPct val="115000"/>
-              </a:lnSpc>
-            </a:pPr>
-            <a:r>
-              <a:rPr sz="1150" b="1" i="0">
-                <a:solidFill>
-                  <a:srgbClr val="17324D"/>
-                </a:solidFill>
-                <a:latin typeface="Microsoft YaHei"/>
-              </a:rPr>
-              <a:t>题库广场</a:t>
-            </a:r>
-          </a:p>
-        </p:txBody>
-      </p:sp>
-      <p:pic>
-        <p:nvPicPr>
-          <p:cNvPr id="10" name="Picture 9" descr="题库广场-849x708.png"/>
-          <p:cNvPicPr>
-            <a:picLocks noChangeAspect="1"/>
-          </p:cNvPicPr>
-          <p:nvPr/>
-        </p:nvPicPr>
-        <p:blipFill>
-          <a:blip r:embed="rId4"/>
-          <a:stretch>
-            <a:fillRect/>
-          </a:stretch>
-        </p:blipFill>
-        <p:spPr>
-          <a:xfrm>
             <a:off x="6355080" y="1828800"/>
             <a:ext cx="5175504" cy="4315968"/>
           </a:xfrm>
@@ -18436,7 +19772,7 @@
           <a:noFill/>
         </p:spPr>
         <p:txBody>
-          <a:bodyPr wrap="square" lIns="0" rIns="0" tIns="0" bIns="0" anchor="t">
+          <a:bodyPr wrap="square" lIns="0" tIns="0" rIns="0" bIns="0" anchor="t">
             <a:spAutoFit/>
           </a:bodyPr>
           <a:lstStyle/>
@@ -18455,6 +19791,12 @@
               </a:rPr>
               <a:t>Sak-AI答题助手｜答辩演示</a:t>
             </a:r>
+            <a:endParaRPr sz="950" b="0" i="0">
+              <a:solidFill>
+                <a:srgbClr val="94A3B8"/>
+              </a:solidFill>
+              <a:latin typeface="Aptos"/>
+            </a:endParaRPr>
           </a:p>
         </p:txBody>
       </p:sp>
@@ -18475,7 +19817,7 @@
           <a:noFill/>
         </p:spPr>
         <p:txBody>
-          <a:bodyPr wrap="square" lIns="0" rIns="0" tIns="0" bIns="0" anchor="t">
+          <a:bodyPr wrap="square" lIns="0" tIns="0" rIns="0" bIns="0" anchor="t">
             <a:spAutoFit/>
           </a:bodyPr>
           <a:lstStyle/>
@@ -18494,6 +19836,12 @@
               </a:rPr>
               <a:t>06</a:t>
             </a:r>
+            <a:endParaRPr sz="1100" b="1" i="0">
+              <a:solidFill>
+                <a:srgbClr val="17324D"/>
+              </a:solidFill>
+              <a:latin typeface="Aptos"/>
+            </a:endParaRPr>
           </a:p>
         </p:txBody>
       </p:sp>
@@ -18506,7 +19854,7 @@
 </file>
 
 <file path=ppt/slides/slide7.xml><?xml version="1.0" encoding="utf-8"?>
-<p:sld xmlns:a="http://schemas.openxmlformats.org/drawingml/2006/main" xmlns:p="http://schemas.openxmlformats.org/presentationml/2006/main" xmlns:r="http://schemas.openxmlformats.org/officeDocument/2006/relationships">
+<p:sld xmlns:a="http://schemas.openxmlformats.org/drawingml/2006/main" xmlns:r="http://schemas.openxmlformats.org/officeDocument/2006/relationships" xmlns:p="http://schemas.openxmlformats.org/presentationml/2006/main">
   <p:cSld>
     <p:spTree>
       <p:nvGrpSpPr>
@@ -18524,7 +19872,7 @@
           <p:nvPr/>
         </p:nvPicPr>
         <p:blipFill>
-          <a:blip r:embed="rId2"/>
+          <a:blip r:embed="rId1"/>
           <a:stretch>
             <a:fillRect/>
           </a:stretch>
@@ -18556,7 +19904,7 @@
           <a:noFill/>
         </p:spPr>
         <p:txBody>
-          <a:bodyPr wrap="square" lIns="0" rIns="0" tIns="0" bIns="0" anchor="t">
+          <a:bodyPr wrap="square" lIns="0" tIns="0" rIns="0" bIns="0" anchor="t">
             <a:spAutoFit/>
           </a:bodyPr>
           <a:lstStyle/>
@@ -18575,6 +19923,12 @@
               </a:rPr>
               <a:t>SHOWCASE A2</a:t>
             </a:r>
+            <a:endParaRPr sz="1200" b="1" i="0">
+              <a:solidFill>
+                <a:srgbClr val="4F6EF7"/>
+              </a:solidFill>
+              <a:latin typeface="Aptos"/>
+            </a:endParaRPr>
           </a:p>
         </p:txBody>
       </p:sp>
@@ -18638,7 +19992,7 @@
           <a:noFill/>
         </p:spPr>
         <p:txBody>
-          <a:bodyPr wrap="square" lIns="0" rIns="0" tIns="0" bIns="0" anchor="t">
+          <a:bodyPr wrap="square" lIns="0" tIns="0" rIns="0" bIns="0" anchor="t">
             <a:spAutoFit/>
           </a:bodyPr>
           <a:lstStyle/>
@@ -18653,10 +20007,16 @@
                 <a:solidFill>
                   <a:srgbClr val="102A43"/>
                 </a:solidFill>
-                <a:latin typeface="Microsoft YaHei"/>
+                <a:latin typeface="微软雅黑"/>
               </a:rPr>
               <a:t>真实界面展示：题库详情与我的题库</a:t>
             </a:r>
+            <a:endParaRPr sz="2800" b="1" i="0">
+              <a:solidFill>
+                <a:srgbClr val="102A43"/>
+              </a:solidFill>
+              <a:latin typeface="微软雅黑"/>
+            </a:endParaRPr>
           </a:p>
         </p:txBody>
       </p:sp>
@@ -18677,7 +20037,7 @@
           <a:noFill/>
         </p:spPr>
         <p:txBody>
-          <a:bodyPr wrap="square" lIns="0" rIns="0" tIns="0" bIns="0" anchor="t">
+          <a:bodyPr wrap="square" lIns="0" tIns="0" rIns="0" bIns="0" anchor="t">
             <a:spAutoFit/>
           </a:bodyPr>
           <a:lstStyle/>
@@ -18692,10 +20052,16 @@
                 <a:solidFill>
                   <a:srgbClr val="62748A"/>
                 </a:solidFill>
-                <a:latin typeface="Microsoft YaHei"/>
+                <a:latin typeface="微软雅黑"/>
               </a:rPr>
               <a:t>分别对应公共题库详情入口与个人题库资源沉淀入口。</a:t>
             </a:r>
+            <a:endParaRPr sz="1350" b="0" i="0">
+              <a:solidFill>
+                <a:srgbClr val="62748A"/>
+              </a:solidFill>
+              <a:latin typeface="微软雅黑"/>
+            </a:endParaRPr>
           </a:p>
         </p:txBody>
       </p:sp>
@@ -18716,7 +20082,7 @@
           <a:noFill/>
         </p:spPr>
         <p:txBody>
-          <a:bodyPr wrap="square" lIns="0" rIns="0" tIns="0" bIns="0" anchor="t">
+          <a:bodyPr wrap="square" lIns="0" tIns="0" rIns="0" bIns="0" anchor="t">
             <a:spAutoFit/>
           </a:bodyPr>
           <a:lstStyle/>
@@ -18731,16 +20097,91 @@
                 <a:solidFill>
                   <a:srgbClr val="17324D"/>
                 </a:solidFill>
-                <a:latin typeface="Microsoft YaHei"/>
+                <a:latin typeface="微软雅黑"/>
               </a:rPr>
               <a:t>题库详情（名片页）</a:t>
             </a:r>
+            <a:endParaRPr sz="1150" b="1" i="0">
+              <a:solidFill>
+                <a:srgbClr val="17324D"/>
+              </a:solidFill>
+              <a:latin typeface="微软雅黑"/>
+            </a:endParaRPr>
           </a:p>
         </p:txBody>
       </p:sp>
       <p:pic>
         <p:nvPicPr>
           <p:cNvPr id="8" name="Picture 7" descr="题库详情_名片页-892x708.png"/>
+          <p:cNvPicPr>
+            <a:picLocks noChangeAspect="1"/>
+          </p:cNvPicPr>
+          <p:nvPr/>
+        </p:nvPicPr>
+        <p:blipFill>
+          <a:blip r:embed="rId2"/>
+          <a:stretch>
+            <a:fillRect/>
+          </a:stretch>
+        </p:blipFill>
+        <p:spPr>
+          <a:xfrm>
+            <a:off x="658368" y="1828800"/>
+            <a:ext cx="5440680" cy="4315968"/>
+          </a:xfrm>
+          <a:prstGeom prst="rect">
+            <a:avLst/>
+          </a:prstGeom>
+        </p:spPr>
+      </p:pic>
+      <p:sp>
+        <p:nvSpPr>
+          <p:cNvPr id="9" name="TextBox 8"/>
+          <p:cNvSpPr txBox="1"/>
+          <p:nvPr/>
+        </p:nvSpPr>
+        <p:spPr>
+          <a:xfrm>
+            <a:off x="6355080" y="1572768"/>
+            <a:ext cx="5175504" cy="182880"/>
+          </a:xfrm>
+          <a:prstGeom prst="rect">
+            <a:avLst/>
+          </a:prstGeom>
+          <a:noFill/>
+        </p:spPr>
+        <p:txBody>
+          <a:bodyPr wrap="square" lIns="0" tIns="0" rIns="0" bIns="0" anchor="t">
+            <a:spAutoFit/>
+          </a:bodyPr>
+          <a:lstStyle/>
+          <a:p>
+            <a:pPr algn="l">
+              <a:lnSpc>
+                <a:spcPct val="115000"/>
+              </a:lnSpc>
+            </a:pPr>
+            <a:r>
+              <a:rPr sz="1150" b="1" i="0">
+                <a:solidFill>
+                  <a:srgbClr val="17324D"/>
+                </a:solidFill>
+                <a:latin typeface="微软雅黑"/>
+              </a:rPr>
+              <a:t>我的题库</a:t>
+            </a:r>
+            <a:endParaRPr sz="1150" b="1" i="0">
+              <a:solidFill>
+                <a:srgbClr val="17324D"/>
+              </a:solidFill>
+              <a:latin typeface="微软雅黑"/>
+            </a:endParaRPr>
+          </a:p>
+        </p:txBody>
+      </p:sp>
+      <p:pic>
+        <p:nvPicPr>
+          <p:cNvPr id="10" name="Picture 9" descr="我的题库-849x708.png"/>
           <p:cNvPicPr>
             <a:picLocks noChangeAspect="1"/>
           </p:cNvPicPr>
@@ -18754,69 +20195,6 @@
         </p:blipFill>
         <p:spPr>
           <a:xfrm>
-            <a:off x="658368" y="1828800"/>
-            <a:ext cx="5440680" cy="4315968"/>
-          </a:xfrm>
-          <a:prstGeom prst="rect">
-            <a:avLst/>
-          </a:prstGeom>
-        </p:spPr>
-      </p:pic>
-      <p:sp>
-        <p:nvSpPr>
-          <p:cNvPr id="9" name="TextBox 8"/>
-          <p:cNvSpPr txBox="1"/>
-          <p:nvPr/>
-        </p:nvSpPr>
-        <p:spPr>
-          <a:xfrm>
-            <a:off x="6355080" y="1572768"/>
-            <a:ext cx="5175504" cy="182880"/>
-          </a:xfrm>
-          <a:prstGeom prst="rect">
-            <a:avLst/>
-          </a:prstGeom>
-          <a:noFill/>
-        </p:spPr>
-        <p:txBody>
-          <a:bodyPr wrap="square" lIns="0" rIns="0" tIns="0" bIns="0" anchor="t">
-            <a:spAutoFit/>
-          </a:bodyPr>
-          <a:lstStyle/>
-          <a:p>
-            <a:pPr algn="l">
-              <a:lnSpc>
-                <a:spcPct val="115000"/>
-              </a:lnSpc>
-            </a:pPr>
-            <a:r>
-              <a:rPr sz="1150" b="1" i="0">
-                <a:solidFill>
-                  <a:srgbClr val="17324D"/>
-                </a:solidFill>
-                <a:latin typeface="Microsoft YaHei"/>
-              </a:rPr>
-              <a:t>我的题库</a:t>
-            </a:r>
-          </a:p>
-        </p:txBody>
-      </p:sp>
-      <p:pic>
-        <p:nvPicPr>
-          <p:cNvPr id="10" name="Picture 9" descr="我的题库-849x708.png"/>
-          <p:cNvPicPr>
-            <a:picLocks noChangeAspect="1"/>
-          </p:cNvPicPr>
-          <p:nvPr/>
-        </p:nvPicPr>
-        <p:blipFill>
-          <a:blip r:embed="rId4"/>
-          <a:stretch>
-            <a:fillRect/>
-          </a:stretch>
-        </p:blipFill>
-        <p:spPr>
-          <a:xfrm>
             <a:off x="6355080" y="1828800"/>
             <a:ext cx="5175504" cy="4315968"/>
           </a:xfrm>
@@ -18842,7 +20220,7 @@
           <a:noFill/>
         </p:spPr>
         <p:txBody>
-          <a:bodyPr wrap="square" lIns="0" rIns="0" tIns="0" bIns="0" anchor="t">
+          <a:bodyPr wrap="square" lIns="0" tIns="0" rIns="0" bIns="0" anchor="t">
             <a:spAutoFit/>
           </a:bodyPr>
           <a:lstStyle/>
@@ -18861,6 +20239,12 @@
               </a:rPr>
               <a:t>Sak-AI答题助手｜答辩演示</a:t>
             </a:r>
+            <a:endParaRPr sz="950" b="0" i="0">
+              <a:solidFill>
+                <a:srgbClr val="94A3B8"/>
+              </a:solidFill>
+              <a:latin typeface="Aptos"/>
+            </a:endParaRPr>
           </a:p>
         </p:txBody>
       </p:sp>
@@ -18881,7 +20265,7 @@
           <a:noFill/>
         </p:spPr>
         <p:txBody>
-          <a:bodyPr wrap="square" lIns="0" rIns="0" tIns="0" bIns="0" anchor="t">
+          <a:bodyPr wrap="square" lIns="0" tIns="0" rIns="0" bIns="0" anchor="t">
             <a:spAutoFit/>
           </a:bodyPr>
           <a:lstStyle/>
@@ -18900,6 +20284,12 @@
               </a:rPr>
               <a:t>07</a:t>
             </a:r>
+            <a:endParaRPr sz="1100" b="1" i="0">
+              <a:solidFill>
+                <a:srgbClr val="17324D"/>
+              </a:solidFill>
+              <a:latin typeface="Aptos"/>
+            </a:endParaRPr>
           </a:p>
         </p:txBody>
       </p:sp>
@@ -18912,7 +20302,7 @@
 </file>
 
 <file path=ppt/slides/slide8.xml><?xml version="1.0" encoding="utf-8"?>
-<p:sld xmlns:a="http://schemas.openxmlformats.org/drawingml/2006/main" xmlns:p="http://schemas.openxmlformats.org/presentationml/2006/main" xmlns:r="http://schemas.openxmlformats.org/officeDocument/2006/relationships">
+<p:sld xmlns:a="http://schemas.openxmlformats.org/drawingml/2006/main" xmlns:r="http://schemas.openxmlformats.org/officeDocument/2006/relationships" xmlns:p="http://schemas.openxmlformats.org/presentationml/2006/main">
   <p:cSld>
     <p:spTree>
       <p:nvGrpSpPr>
@@ -18930,7 +20320,7 @@
           <p:nvPr/>
         </p:nvPicPr>
         <p:blipFill>
-          <a:blip r:embed="rId2"/>
+          <a:blip r:embed="rId1"/>
           <a:stretch>
             <a:fillRect/>
           </a:stretch>
@@ -18962,7 +20352,7 @@
           <a:noFill/>
         </p:spPr>
         <p:txBody>
-          <a:bodyPr wrap="square" lIns="0" rIns="0" tIns="0" bIns="0" anchor="t">
+          <a:bodyPr wrap="square" lIns="0" tIns="0" rIns="0" bIns="0" anchor="t">
             <a:spAutoFit/>
           </a:bodyPr>
           <a:lstStyle/>
@@ -18981,6 +20371,12 @@
               </a:rPr>
               <a:t>SHOWCASE B</a:t>
             </a:r>
+            <a:endParaRPr sz="1200" b="1" i="0">
+              <a:solidFill>
+                <a:srgbClr val="4F6EF7"/>
+              </a:solidFill>
+              <a:latin typeface="Aptos"/>
+            </a:endParaRPr>
           </a:p>
         </p:txBody>
       </p:sp>
@@ -19044,7 +20440,7 @@
           <a:noFill/>
         </p:spPr>
         <p:txBody>
-          <a:bodyPr wrap="square" lIns="0" rIns="0" tIns="0" bIns="0" anchor="t">
+          <a:bodyPr wrap="square" lIns="0" tIns="0" rIns="0" bIns="0" anchor="t">
             <a:spAutoFit/>
           </a:bodyPr>
           <a:lstStyle/>
@@ -19059,10 +20455,16 @@
                 <a:solidFill>
                   <a:srgbClr val="102A43"/>
                 </a:solidFill>
-                <a:latin typeface="Microsoft YaHei"/>
+                <a:latin typeface="微软雅黑"/>
               </a:rPr>
               <a:t>真实界面展示：数据中心与考试中心</a:t>
             </a:r>
+            <a:endParaRPr sz="2800" b="1" i="0">
+              <a:solidFill>
+                <a:srgbClr val="102A43"/>
+              </a:solidFill>
+              <a:latin typeface="微软雅黑"/>
+            </a:endParaRPr>
           </a:p>
         </p:txBody>
       </p:sp>
@@ -19083,7 +20485,7 @@
           <a:noFill/>
         </p:spPr>
         <p:txBody>
-          <a:bodyPr wrap="square" lIns="0" rIns="0" tIns="0" bIns="0" anchor="t">
+          <a:bodyPr wrap="square" lIns="0" tIns="0" rIns="0" bIns="0" anchor="t">
             <a:spAutoFit/>
           </a:bodyPr>
           <a:lstStyle/>
@@ -19098,10 +20500,16 @@
                 <a:solidFill>
                   <a:srgbClr val="62748A"/>
                 </a:solidFill>
-                <a:latin typeface="Microsoft YaHei"/>
+                <a:latin typeface="微软雅黑"/>
               </a:rPr>
               <a:t>用更大的页面面积呈现复盘分析与考试入口。</a:t>
             </a:r>
+            <a:endParaRPr sz="1350" b="0" i="0">
+              <a:solidFill>
+                <a:srgbClr val="62748A"/>
+              </a:solidFill>
+              <a:latin typeface="微软雅黑"/>
+            </a:endParaRPr>
           </a:p>
         </p:txBody>
       </p:sp>
@@ -19122,7 +20530,7 @@
           <a:noFill/>
         </p:spPr>
         <p:txBody>
-          <a:bodyPr wrap="square" lIns="0" rIns="0" tIns="0" bIns="0" anchor="t">
+          <a:bodyPr wrap="square" lIns="0" tIns="0" rIns="0" bIns="0" anchor="t">
             <a:spAutoFit/>
           </a:bodyPr>
           <a:lstStyle/>
@@ -19137,16 +20545,91 @@
                 <a:solidFill>
                   <a:srgbClr val="17324D"/>
                 </a:solidFill>
-                <a:latin typeface="Microsoft YaHei"/>
+                <a:latin typeface="微软雅黑"/>
               </a:rPr>
               <a:t>数据中心</a:t>
             </a:r>
+            <a:endParaRPr sz="1150" b="1" i="0">
+              <a:solidFill>
+                <a:srgbClr val="17324D"/>
+              </a:solidFill>
+              <a:latin typeface="微软雅黑"/>
+            </a:endParaRPr>
           </a:p>
         </p:txBody>
       </p:sp>
       <p:pic>
         <p:nvPicPr>
           <p:cNvPr id="8" name="Picture 7" descr="数据中心-903x708.png"/>
+          <p:cNvPicPr>
+            <a:picLocks noChangeAspect="1"/>
+          </p:cNvPicPr>
+          <p:nvPr/>
+        </p:nvPicPr>
+        <p:blipFill>
+          <a:blip r:embed="rId2"/>
+          <a:stretch>
+            <a:fillRect/>
+          </a:stretch>
+        </p:blipFill>
+        <p:spPr>
+          <a:xfrm>
+            <a:off x="658368" y="1828800"/>
+            <a:ext cx="5504688" cy="4315968"/>
+          </a:xfrm>
+          <a:prstGeom prst="rect">
+            <a:avLst/>
+          </a:prstGeom>
+        </p:spPr>
+      </p:pic>
+      <p:sp>
+        <p:nvSpPr>
+          <p:cNvPr id="9" name="TextBox 8"/>
+          <p:cNvSpPr txBox="1"/>
+          <p:nvPr/>
+        </p:nvSpPr>
+        <p:spPr>
+          <a:xfrm>
+            <a:off x="6327648" y="1572768"/>
+            <a:ext cx="5202936" cy="182880"/>
+          </a:xfrm>
+          <a:prstGeom prst="rect">
+            <a:avLst/>
+          </a:prstGeom>
+          <a:noFill/>
+        </p:spPr>
+        <p:txBody>
+          <a:bodyPr wrap="square" lIns="0" tIns="0" rIns="0" bIns="0" anchor="t">
+            <a:spAutoFit/>
+          </a:bodyPr>
+          <a:lstStyle/>
+          <a:p>
+            <a:pPr algn="l">
+              <a:lnSpc>
+                <a:spcPct val="115000"/>
+              </a:lnSpc>
+            </a:pPr>
+            <a:r>
+              <a:rPr sz="1150" b="1" i="0">
+                <a:solidFill>
+                  <a:srgbClr val="17324D"/>
+                </a:solidFill>
+                <a:latin typeface="微软雅黑"/>
+              </a:rPr>
+              <a:t>考试中心</a:t>
+            </a:r>
+            <a:endParaRPr sz="1150" b="1" i="0">
+              <a:solidFill>
+                <a:srgbClr val="17324D"/>
+              </a:solidFill>
+              <a:latin typeface="微软雅黑"/>
+            </a:endParaRPr>
+          </a:p>
+        </p:txBody>
+      </p:sp>
+      <p:pic>
+        <p:nvPicPr>
+          <p:cNvPr id="10" name="Picture 9" descr="考试中心-854x708.png"/>
           <p:cNvPicPr>
             <a:picLocks noChangeAspect="1"/>
           </p:cNvPicPr>
@@ -19160,69 +20643,6 @@
         </p:blipFill>
         <p:spPr>
           <a:xfrm>
-            <a:off x="658368" y="1828800"/>
-            <a:ext cx="5504688" cy="4315968"/>
-          </a:xfrm>
-          <a:prstGeom prst="rect">
-            <a:avLst/>
-          </a:prstGeom>
-        </p:spPr>
-      </p:pic>
-      <p:sp>
-        <p:nvSpPr>
-          <p:cNvPr id="9" name="TextBox 8"/>
-          <p:cNvSpPr txBox="1"/>
-          <p:nvPr/>
-        </p:nvSpPr>
-        <p:spPr>
-          <a:xfrm>
-            <a:off x="6327648" y="1572768"/>
-            <a:ext cx="5202936" cy="182880"/>
-          </a:xfrm>
-          <a:prstGeom prst="rect">
-            <a:avLst/>
-          </a:prstGeom>
-          <a:noFill/>
-        </p:spPr>
-        <p:txBody>
-          <a:bodyPr wrap="square" lIns="0" rIns="0" tIns="0" bIns="0" anchor="t">
-            <a:spAutoFit/>
-          </a:bodyPr>
-          <a:lstStyle/>
-          <a:p>
-            <a:pPr algn="l">
-              <a:lnSpc>
-                <a:spcPct val="115000"/>
-              </a:lnSpc>
-            </a:pPr>
-            <a:r>
-              <a:rPr sz="1150" b="1" i="0">
-                <a:solidFill>
-                  <a:srgbClr val="17324D"/>
-                </a:solidFill>
-                <a:latin typeface="Microsoft YaHei"/>
-              </a:rPr>
-              <a:t>考试中心</a:t>
-            </a:r>
-          </a:p>
-        </p:txBody>
-      </p:sp>
-      <p:pic>
-        <p:nvPicPr>
-          <p:cNvPr id="10" name="Picture 9" descr="考试中心-854x708.png"/>
-          <p:cNvPicPr>
-            <a:picLocks noChangeAspect="1"/>
-          </p:cNvPicPr>
-          <p:nvPr/>
-        </p:nvPicPr>
-        <p:blipFill>
-          <a:blip r:embed="rId4"/>
-          <a:stretch>
-            <a:fillRect/>
-          </a:stretch>
-        </p:blipFill>
-        <p:spPr>
-          <a:xfrm>
             <a:off x="6327648" y="1828800"/>
             <a:ext cx="5202936" cy="4315968"/>
           </a:xfrm>
@@ -19248,7 +20668,7 @@
           <a:noFill/>
         </p:spPr>
         <p:txBody>
-          <a:bodyPr wrap="square" lIns="0" rIns="0" tIns="0" bIns="0" anchor="t">
+          <a:bodyPr wrap="square" lIns="0" tIns="0" rIns="0" bIns="0" anchor="t">
             <a:spAutoFit/>
           </a:bodyPr>
           <a:lstStyle/>
@@ -19267,6 +20687,12 @@
               </a:rPr>
               <a:t>Sak-AI答题助手｜答辩演示</a:t>
             </a:r>
+            <a:endParaRPr sz="950" b="0" i="0">
+              <a:solidFill>
+                <a:srgbClr val="94A3B8"/>
+              </a:solidFill>
+              <a:latin typeface="Aptos"/>
+            </a:endParaRPr>
           </a:p>
         </p:txBody>
       </p:sp>
@@ -19287,7 +20713,7 @@
           <a:noFill/>
         </p:spPr>
         <p:txBody>
-          <a:bodyPr wrap="square" lIns="0" rIns="0" tIns="0" bIns="0" anchor="t">
+          <a:bodyPr wrap="square" lIns="0" tIns="0" rIns="0" bIns="0" anchor="t">
             <a:spAutoFit/>
           </a:bodyPr>
           <a:lstStyle/>
@@ -19306,6 +20732,12 @@
               </a:rPr>
               <a:t>08</a:t>
             </a:r>
+            <a:endParaRPr sz="1100" b="1" i="0">
+              <a:solidFill>
+                <a:srgbClr val="17324D"/>
+              </a:solidFill>
+              <a:latin typeface="Aptos"/>
+            </a:endParaRPr>
           </a:p>
         </p:txBody>
       </p:sp>
@@ -19318,7 +20750,7 @@
 </file>
 
 <file path=ppt/slides/slide9.xml><?xml version="1.0" encoding="utf-8"?>
-<p:sld xmlns:a="http://schemas.openxmlformats.org/drawingml/2006/main" xmlns:p="http://schemas.openxmlformats.org/presentationml/2006/main" xmlns:r="http://schemas.openxmlformats.org/officeDocument/2006/relationships">
+<p:sld xmlns:a="http://schemas.openxmlformats.org/drawingml/2006/main" xmlns:r="http://schemas.openxmlformats.org/officeDocument/2006/relationships" xmlns:p="http://schemas.openxmlformats.org/presentationml/2006/main">
   <p:cSld>
     <p:spTree>
       <p:nvGrpSpPr>
@@ -19336,7 +20768,7 @@
           <p:nvPr/>
         </p:nvPicPr>
         <p:blipFill>
-          <a:blip r:embed="rId2"/>
+          <a:blip r:embed="rId1"/>
           <a:stretch>
             <a:fillRect/>
           </a:stretch>
@@ -19368,7 +20800,7 @@
           <a:noFill/>
         </p:spPr>
         <p:txBody>
-          <a:bodyPr wrap="square" lIns="0" rIns="0" tIns="0" bIns="0" anchor="t">
+          <a:bodyPr wrap="square" lIns="0" tIns="0" rIns="0" bIns="0" anchor="t">
             <a:spAutoFit/>
           </a:bodyPr>
           <a:lstStyle/>
@@ -19387,6 +20819,12 @@
               </a:rPr>
               <a:t>QUIZ + AI</a:t>
             </a:r>
+            <a:endParaRPr sz="1200" b="1" i="0">
+              <a:solidFill>
+                <a:srgbClr val="4F6EF7"/>
+              </a:solidFill>
+              <a:latin typeface="Aptos"/>
+            </a:endParaRPr>
           </a:p>
         </p:txBody>
       </p:sp>
@@ -19450,7 +20888,7 @@
           <a:noFill/>
         </p:spPr>
         <p:txBody>
-          <a:bodyPr wrap="square" lIns="0" rIns="0" tIns="0" bIns="0" anchor="t">
+          <a:bodyPr wrap="square" lIns="0" tIns="0" rIns="0" bIns="0" anchor="t">
             <a:spAutoFit/>
           </a:bodyPr>
           <a:lstStyle/>
@@ -19465,10 +20903,16 @@
                 <a:solidFill>
                   <a:srgbClr val="102A43"/>
                 </a:solidFill>
-                <a:latin typeface="Microsoft YaHei"/>
+                <a:latin typeface="微软雅黑"/>
               </a:rPr>
               <a:t>刷题模块：答题工作台与 AI 解析</a:t>
             </a:r>
+            <a:endParaRPr sz="2800" b="1" i="0">
+              <a:solidFill>
+                <a:srgbClr val="102A43"/>
+              </a:solidFill>
+              <a:latin typeface="微软雅黑"/>
+            </a:endParaRPr>
           </a:p>
         </p:txBody>
       </p:sp>
@@ -19489,7 +20933,7 @@
           <a:noFill/>
         </p:spPr>
         <p:txBody>
-          <a:bodyPr wrap="square" lIns="0" rIns="0" tIns="0" bIns="0" anchor="t">
+          <a:bodyPr wrap="square" lIns="0" tIns="0" rIns="0" bIns="0" anchor="t">
             <a:spAutoFit/>
           </a:bodyPr>
           <a:lstStyle/>
@@ -19504,10 +20948,16 @@
                 <a:solidFill>
                   <a:srgbClr val="62748A"/>
                 </a:solidFill>
-                <a:latin typeface="Microsoft YaHei"/>
+                <a:latin typeface="微软雅黑"/>
               </a:rPr>
               <a:t>重点展示评委最关心的刷题界面、题目卡片与即时 AI 解析能力。</a:t>
             </a:r>
+            <a:endParaRPr sz="1350" b="0" i="0">
+              <a:solidFill>
+                <a:srgbClr val="62748A"/>
+              </a:solidFill>
+              <a:latin typeface="微软雅黑"/>
+            </a:endParaRPr>
           </a:p>
         </p:txBody>
       </p:sp>
@@ -19528,7 +20978,7 @@
           <a:noFill/>
         </p:spPr>
         <p:txBody>
-          <a:bodyPr wrap="square" lIns="0" rIns="0" tIns="0" bIns="0" anchor="t">
+          <a:bodyPr wrap="square" lIns="0" tIns="0" rIns="0" bIns="0" anchor="t">
             <a:spAutoFit/>
           </a:bodyPr>
           <a:lstStyle/>
@@ -19543,10 +20993,16 @@
                 <a:solidFill>
                   <a:srgbClr val="17324D"/>
                 </a:solidFill>
-                <a:latin typeface="Microsoft YaHei"/>
+                <a:latin typeface="微软雅黑"/>
               </a:rPr>
               <a:t>刷题工作台 + AI解析</a:t>
             </a:r>
+            <a:endParaRPr sz="1150" b="1" i="0">
+              <a:solidFill>
+                <a:srgbClr val="17324D"/>
+              </a:solidFill>
+              <a:latin typeface="微软雅黑"/>
+            </a:endParaRPr>
           </a:p>
         </p:txBody>
       </p:sp>
@@ -19559,7 +21015,7 @@
           <p:nvPr/>
         </p:nvPicPr>
         <p:blipFill>
-          <a:blip r:embed="rId3"/>
+          <a:blip r:embed="rId2"/>
           <a:stretch>
             <a:fillRect/>
           </a:stretch>
@@ -19685,7 +21141,7 @@
           <a:noFill/>
         </p:spPr>
         <p:txBody>
-          <a:bodyPr wrap="square" lIns="0" rIns="0" tIns="0" bIns="0" anchor="t">
+          <a:bodyPr wrap="square" lIns="0" tIns="0" rIns="0" bIns="0" anchor="t">
             <a:spAutoFit/>
           </a:bodyPr>
           <a:lstStyle/>
@@ -19700,10 +21156,16 @@
                 <a:solidFill>
                   <a:srgbClr val="4F6EF7"/>
                 </a:solidFill>
-                <a:latin typeface="Microsoft YaHei"/>
+                <a:latin typeface="微软雅黑"/>
               </a:rPr>
               <a:t>答题体验</a:t>
             </a:r>
+            <a:endParaRPr sz="1250" b="1" i="0">
+              <a:solidFill>
+                <a:srgbClr val="4F6EF7"/>
+              </a:solidFill>
+              <a:latin typeface="微软雅黑"/>
+            </a:endParaRPr>
           </a:p>
         </p:txBody>
       </p:sp>
@@ -19724,7 +21186,7 @@
           <a:noFill/>
         </p:spPr>
         <p:txBody>
-          <a:bodyPr wrap="square" lIns="0" rIns="0" tIns="0" bIns="0" anchor="t">
+          <a:bodyPr wrap="square" lIns="0" tIns="0" rIns="0" bIns="0" anchor="t">
             <a:spAutoFit/>
           </a:bodyPr>
           <a:lstStyle/>
@@ -19745,10 +21207,16 @@
                 <a:solidFill>
                   <a:srgbClr val="17324D"/>
                 </a:solidFill>
-                <a:latin typeface="Microsoft YaHei"/>
+                <a:latin typeface="微软雅黑"/>
               </a:rPr>
               <a:t>• 支持题目列表、答题卡片、前后切题与收藏。</a:t>
             </a:r>
+            <a:endParaRPr sz="1280" b="0" i="0">
+              <a:solidFill>
+                <a:srgbClr val="17324D"/>
+              </a:solidFill>
+              <a:latin typeface="微软雅黑"/>
+            </a:endParaRPr>
           </a:p>
           <a:p>
             <a:pPr algn="l">
@@ -19767,10 +21235,16 @@
                 <a:solidFill>
                   <a:srgbClr val="17324D"/>
                 </a:solidFill>
-                <a:latin typeface="Microsoft YaHei"/>
+                <a:latin typeface="微软雅黑"/>
               </a:rPr>
               <a:t>• AI 解析按题触发，直接嵌入答题工作流。</a:t>
             </a:r>
+            <a:endParaRPr sz="1280" b="0" i="0">
+              <a:solidFill>
+                <a:srgbClr val="17324D"/>
+              </a:solidFill>
+              <a:latin typeface="微软雅黑"/>
+            </a:endParaRPr>
           </a:p>
           <a:p>
             <a:pPr algn="l">
@@ -19789,10 +21263,16 @@
                 <a:solidFill>
                   <a:srgbClr val="17324D"/>
                 </a:solidFill>
-                <a:latin typeface="Microsoft YaHei"/>
+                <a:latin typeface="微软雅黑"/>
               </a:rPr>
               <a:t>• 页面采用独立答题布局，便于沉浸式练习。</a:t>
             </a:r>
+            <a:endParaRPr sz="1280" b="0" i="0">
+              <a:solidFill>
+                <a:srgbClr val="17324D"/>
+              </a:solidFill>
+              <a:latin typeface="微软雅黑"/>
+            </a:endParaRPr>
           </a:p>
           <a:p>
             <a:pPr algn="l">
@@ -19811,10 +21291,16 @@
                 <a:solidFill>
                   <a:srgbClr val="17324D"/>
                 </a:solidFill>
-                <a:latin typeface="Microsoft YaHei"/>
+                <a:latin typeface="微软雅黑"/>
               </a:rPr>
               <a:t>• 对评委而言，这一页能直接证明系统不是静态展示页，而是真实可交互的练习系统。</a:t>
             </a:r>
+            <a:endParaRPr sz="1280" b="0" i="0">
+              <a:solidFill>
+                <a:srgbClr val="17324D"/>
+              </a:solidFill>
+              <a:latin typeface="微软雅黑"/>
+            </a:endParaRPr>
           </a:p>
         </p:txBody>
       </p:sp>
@@ -19826,7 +21312,7 @@
         </p:nvSpPr>
         <p:spPr>
           <a:xfrm>
-            <a:off x="7936992" y="5321808"/>
+            <a:off x="7936992" y="5014468"/>
             <a:ext cx="1481328" cy="804672"/>
           </a:xfrm>
           <a:prstGeom prst="roundRect">
@@ -19873,7 +21359,7 @@
         </p:nvSpPr>
         <p:spPr>
           <a:xfrm>
-            <a:off x="8165592" y="5458968"/>
+            <a:off x="8165592" y="5151628"/>
             <a:ext cx="1024128" cy="438912"/>
           </a:xfrm>
           <a:prstGeom prst="rect">
@@ -19882,7 +21368,7 @@
           <a:noFill/>
         </p:spPr>
         <p:txBody>
-          <a:bodyPr wrap="square" lIns="0" rIns="0" tIns="0" bIns="0" anchor="t">
+          <a:bodyPr wrap="square" lIns="0" tIns="0" rIns="0" bIns="0" anchor="t">
             <a:spAutoFit/>
           </a:bodyPr>
           <a:lstStyle/>
@@ -19901,6 +21387,12 @@
               </a:rPr>
               <a:t>AI</a:t>
             </a:r>
+            <a:endParaRPr sz="2400" b="1" i="0">
+              <a:solidFill>
+                <a:srgbClr val="4F6EF7"/>
+              </a:solidFill>
+              <a:latin typeface="Aptos"/>
+            </a:endParaRPr>
           </a:p>
         </p:txBody>
       </p:sp>
@@ -19912,7 +21404,7 @@
         </p:nvSpPr>
         <p:spPr>
           <a:xfrm>
-            <a:off x="8165592" y="5888736"/>
+            <a:off x="8165592" y="5581396"/>
             <a:ext cx="1024128" cy="310896"/>
           </a:xfrm>
           <a:prstGeom prst="rect">
@@ -19921,7 +21413,7 @@
           <a:noFill/>
         </p:spPr>
         <p:txBody>
-          <a:bodyPr wrap="square" lIns="0" rIns="0" tIns="0" bIns="0" anchor="t">
+          <a:bodyPr wrap="square" lIns="0" tIns="0" rIns="0" bIns="0" anchor="t">
             <a:spAutoFit/>
           </a:bodyPr>
           <a:lstStyle/>
@@ -19936,10 +21428,16 @@
                 <a:solidFill>
                   <a:srgbClr val="17324D"/>
                 </a:solidFill>
-                <a:latin typeface="Microsoft YaHei"/>
+                <a:latin typeface="微软雅黑"/>
               </a:rPr>
               <a:t>即时解析</a:t>
             </a:r>
+            <a:endParaRPr sz="1250" b="1" i="0">
+              <a:solidFill>
+                <a:srgbClr val="17324D"/>
+              </a:solidFill>
+              <a:latin typeface="微软雅黑"/>
+            </a:endParaRPr>
           </a:p>
         </p:txBody>
       </p:sp>
@@ -19951,7 +21449,7 @@
         </p:nvSpPr>
         <p:spPr>
           <a:xfrm>
-            <a:off x="8165592" y="6190488"/>
+            <a:off x="8165592" y="5883148"/>
             <a:ext cx="1024128" cy="256032"/>
           </a:xfrm>
           <a:prstGeom prst="rect">
@@ -19960,7 +21458,7 @@
           <a:noFill/>
         </p:spPr>
         <p:txBody>
-          <a:bodyPr wrap="square" lIns="0" rIns="0" tIns="0" bIns="0" anchor="t">
+          <a:bodyPr wrap="square" lIns="0" tIns="0" rIns="0" bIns="0" anchor="t">
             <a:spAutoFit/>
           </a:bodyPr>
           <a:lstStyle/>
@@ -19975,10 +21473,16 @@
                 <a:solidFill>
                   <a:srgbClr val="62748A"/>
                 </a:solidFill>
-                <a:latin typeface="Microsoft YaHei"/>
+                <a:latin typeface="微软雅黑"/>
               </a:rPr>
               <a:t>按题触发</a:t>
             </a:r>
+            <a:endParaRPr sz="1050" b="0" i="0">
+              <a:solidFill>
+                <a:srgbClr val="62748A"/>
+              </a:solidFill>
+              <a:latin typeface="微软雅黑"/>
+            </a:endParaRPr>
           </a:p>
         </p:txBody>
       </p:sp>
@@ -19990,7 +21494,7 @@
         </p:nvSpPr>
         <p:spPr>
           <a:xfrm>
-            <a:off x="9555480" y="5321808"/>
+            <a:off x="9555480" y="5014468"/>
             <a:ext cx="1481328" cy="804672"/>
           </a:xfrm>
           <a:prstGeom prst="roundRect">
@@ -20037,7 +21541,7 @@
         </p:nvSpPr>
         <p:spPr>
           <a:xfrm>
-            <a:off x="9784080" y="5458968"/>
+            <a:off x="9784080" y="5151628"/>
             <a:ext cx="1024128" cy="438912"/>
           </a:xfrm>
           <a:prstGeom prst="rect">
@@ -20046,7 +21550,7 @@
           <a:noFill/>
         </p:spPr>
         <p:txBody>
-          <a:bodyPr wrap="square" lIns="0" rIns="0" tIns="0" bIns="0" anchor="t">
+          <a:bodyPr wrap="square" lIns="0" tIns="0" rIns="0" bIns="0" anchor="t">
             <a:spAutoFit/>
           </a:bodyPr>
           <a:lstStyle/>
@@ -20065,6 +21569,12 @@
               </a:rPr>
               <a:t>Flow</a:t>
             </a:r>
+            <a:endParaRPr sz="2400" b="1" i="0">
+              <a:solidFill>
+                <a:srgbClr val="5BC0BE"/>
+              </a:solidFill>
+              <a:latin typeface="Aptos"/>
+            </a:endParaRPr>
           </a:p>
         </p:txBody>
       </p:sp>
@@ -20076,7 +21586,7 @@
         </p:nvSpPr>
         <p:spPr>
           <a:xfrm>
-            <a:off x="9784080" y="5888736"/>
+            <a:off x="9784080" y="5581396"/>
             <a:ext cx="1024128" cy="310896"/>
           </a:xfrm>
           <a:prstGeom prst="rect">
@@ -20085,7 +21595,7 @@
           <a:noFill/>
         </p:spPr>
         <p:txBody>
-          <a:bodyPr wrap="square" lIns="0" rIns="0" tIns="0" bIns="0" anchor="t">
+          <a:bodyPr wrap="square" lIns="0" tIns="0" rIns="0" bIns="0" anchor="t">
             <a:spAutoFit/>
           </a:bodyPr>
           <a:lstStyle/>
@@ -20100,10 +21610,16 @@
                 <a:solidFill>
                   <a:srgbClr val="17324D"/>
                 </a:solidFill>
-                <a:latin typeface="Microsoft YaHei"/>
+                <a:latin typeface="微软雅黑"/>
               </a:rPr>
               <a:t>连续练习</a:t>
             </a:r>
+            <a:endParaRPr sz="1250" b="1" i="0">
+              <a:solidFill>
+                <a:srgbClr val="17324D"/>
+              </a:solidFill>
+              <a:latin typeface="微软雅黑"/>
+            </a:endParaRPr>
           </a:p>
         </p:txBody>
       </p:sp>
@@ -20115,16 +21631,16 @@
         </p:nvSpPr>
         <p:spPr>
           <a:xfrm>
-            <a:off x="9784080" y="6190488"/>
-            <a:ext cx="1024128" cy="256032"/>
-          </a:xfrm>
-          <a:prstGeom prst="rect">
-            <a:avLst/>
-          </a:prstGeom>
-          <a:noFill/>
-        </p:spPr>
-        <p:txBody>
-          <a:bodyPr wrap="square" lIns="0" rIns="0" tIns="0" bIns="0" anchor="t">
+            <a:off x="9784080" y="5883275"/>
+            <a:ext cx="1481455" cy="184785"/>
+          </a:xfrm>
+          <a:prstGeom prst="rect">
+            <a:avLst/>
+          </a:prstGeom>
+          <a:noFill/>
+        </p:spPr>
+        <p:txBody>
+          <a:bodyPr wrap="square" lIns="0" tIns="0" rIns="0" bIns="0" anchor="t">
             <a:spAutoFit/>
           </a:bodyPr>
           <a:lstStyle/>
@@ -20139,10 +21655,16 @@
                 <a:solidFill>
                   <a:srgbClr val="62748A"/>
                 </a:solidFill>
-                <a:latin typeface="Microsoft YaHei"/>
+                <a:latin typeface="微软雅黑"/>
               </a:rPr>
               <a:t>列表 / 卡片 / 解析</a:t>
             </a:r>
+            <a:endParaRPr sz="1050" b="0" i="0">
+              <a:solidFill>
+                <a:srgbClr val="62748A"/>
+              </a:solidFill>
+              <a:latin typeface="微软雅黑"/>
+            </a:endParaRPr>
           </a:p>
         </p:txBody>
       </p:sp>
@@ -20163,7 +21685,7 @@
           <a:noFill/>
         </p:spPr>
         <p:txBody>
-          <a:bodyPr wrap="square" lIns="0" rIns="0" tIns="0" bIns="0" anchor="t">
+          <a:bodyPr wrap="square" lIns="0" tIns="0" rIns="0" bIns="0" anchor="t">
             <a:spAutoFit/>
           </a:bodyPr>
           <a:lstStyle/>
@@ -20182,6 +21704,12 @@
               </a:rPr>
               <a:t>Sak-AI答题助手｜答辩演示</a:t>
             </a:r>
+            <a:endParaRPr sz="950" b="0" i="0">
+              <a:solidFill>
+                <a:srgbClr val="94A3B8"/>
+              </a:solidFill>
+              <a:latin typeface="Aptos"/>
+            </a:endParaRPr>
           </a:p>
         </p:txBody>
       </p:sp>
@@ -20202,7 +21730,7 @@
           <a:noFill/>
         </p:spPr>
         <p:txBody>
-          <a:bodyPr wrap="square" lIns="0" rIns="0" tIns="0" bIns="0" anchor="t">
+          <a:bodyPr wrap="square" lIns="0" tIns="0" rIns="0" bIns="0" anchor="t">
             <a:spAutoFit/>
           </a:bodyPr>
           <a:lstStyle/>
@@ -20221,6 +21749,12 @@
               </a:rPr>
               <a:t>09</a:t>
             </a:r>
+            <a:endParaRPr sz="1100" b="1" i="0">
+              <a:solidFill>
+                <a:srgbClr val="17324D"/>
+              </a:solidFill>
+              <a:latin typeface="Aptos"/>
+            </a:endParaRPr>
           </a:p>
         </p:txBody>
       </p:sp>
@@ -20548,6 +22082,10 @@
       </a:style>
     </a:lnDef>
   </a:objectDefaults>
-  <a:extraClrSchemeLst/>
+  <a:extLst>
+    <a:ext uri="{05A4C25C-085E-4340-85A3-A5531E510DB2}">
+      <thm15:themeFamily xmlns:thm15="http://schemas.microsoft.com/office/thememl/2012/main" name="Office Theme" id="{62F939B6-93AF-4DB8-9C6B-D6C7DFDC589F}" vid="{4A3C46E8-61CC-4603-A589-7422A47A8E4A}"/>
+    </a:ext>
+  </a:extLst>
 </a:theme>
 </file>